--- a/hermes_docs/exadata-x9m-to-exacc-x11m-transition.pptx
+++ b/hermes_docs/exadata-x9m-to-exacc-x11m-transition.pptx
@@ -860,7 +860,7 @@
           <a:p>
             <a:r>
               <a:rPr lang="en-US" dirty="0"/>
-              <a:t>Migration method selection depends on source DB version, endian, downtime, data size and license options.,Avoid dual-write divergence after cutover. X9M is retained as a synchronized/read-only or stopped rollback target according to the approved backout runbook.,No destructive retirement of X9M until business acceptance, backup restore test and rollback window close.</a:t>
+              <a:t>Baseline assumes ZDM Physical Online with Data Guard. Confirm source configuration and ZDM support before implementation.,Approved runbook must define write-stop authority, Data Guard role, reverse replication or restore path, RPO/RTO, DNS TTL, connection-pool draining, validation queries and rehearsal evidence.,No X9M retirement until acceptance, backup restore test and failback window closure.</a:t>
             </a:r>
             <a:endParaRPr lang="en-US" dirty="0"/>
           </a:p>
@@ -948,7 +948,7 @@
           <a:p>
             <a:r>
               <a:rPr lang="en-US" dirty="0"/>
-              <a:t>Published maximum performance is not a sizing promise. Maintain business-approved headroom and test representative workload.,For Base, external client/backup 100 Gb adapters are not listed; Standard/L/XL support optional 100 Gb. Validate customer network design.</a:t>
+              <a:t>Do not convert the published maxima into a GO threshold. A business-approved design limit must be lower and supported by representative workload test evidence.,The Standard column is one HC-with-XRMEM example, not an assertion that HC and EF have the same capacity.,For Base, external client/backup 100 Gb adapters are not listed; validate customer network design.</a:t>
             </a:r>
             <a:endParaRPr lang="en-US" dirty="0"/>
           </a:p>
@@ -1036,7 +1036,7 @@
           <a:p>
             <a:r>
               <a:rPr lang="en-US" dirty="0"/>
-              <a:t>This deck is a decision architecture, not an implementation approval.,Before deployment, validate current Oracle support notes and OCI Console options because cloud service capabilities change.</a:t>
+              <a:t>[1] 첨부: exadata-cloud-infrastructure-x9m.pdf (v1.11, 2024),[2] 첨부: Exadata-X11M-DS-FINAL_ko_KR.pdf (DB Machine v1.2, 2025),[3] https://www.oracle.com/a/ocom/docs/engineered-systems/exadata/exadb-cc-x11m-ds.pdf,[4] https://docs.oracle.com/en/engineered-systems/exadata-cloud-at-customer/ecccm/ecc-manage-vm-clusters.html,Before deployment, validate current Oracle support notes and OCI Console options because cloud service capabilities change.</a:t>
             </a:r>
             <a:endParaRPr lang="en-US" dirty="0"/>
           </a:p>
@@ -1706,7 +1706,7 @@
             <a:r>
               <a:rPr lang="en-US" sz="1050" dirty="0">
                 <a:solidFill>
-                  <a:srgbClr val="C4CDD9"/>
+                  <a:srgbClr val="D9E1EC"/>
                 </a:solidFill>
                 <a:latin typeface="Noto Sans KR" pitchFamily="34" charset="0"/>
                 <a:ea typeface="Noto Sans KR" pitchFamily="34" charset="-122"/>
@@ -1931,7 +1931,7 @@
             <a:r>
               <a:rPr lang="en-US" sz="1000" dirty="0">
                 <a:solidFill>
-                  <a:srgbClr val="C4CDD9"/>
+                  <a:srgbClr val="D9E1EC"/>
                 </a:solidFill>
                 <a:latin typeface="Noto Sans KR" pitchFamily="34" charset="0"/>
                 <a:ea typeface="Noto Sans KR" pitchFamily="34" charset="-122"/>
@@ -2129,7 +2129,7 @@
             <a:r>
               <a:rPr lang="en-US" sz="920" dirty="0">
                 <a:solidFill>
-                  <a:srgbClr val="C4CDD9"/>
+                  <a:srgbClr val="D9E1EC"/>
                 </a:solidFill>
                 <a:latin typeface="Noto Sans KR" pitchFamily="34" charset="0"/>
                 <a:ea typeface="Noto Sans KR" pitchFamily="34" charset="-122"/>
@@ -2327,7 +2327,7 @@
             <a:r>
               <a:rPr lang="en-US" sz="920" dirty="0">
                 <a:solidFill>
-                  <a:srgbClr val="C4CDD9"/>
+                  <a:srgbClr val="D9E1EC"/>
                 </a:solidFill>
                 <a:latin typeface="Noto Sans KR" pitchFamily="34" charset="0"/>
                 <a:ea typeface="Noto Sans KR" pitchFamily="34" charset="-122"/>
@@ -2490,7 +2490,7 @@
                 <a:ea typeface="Noto Sans KR" pitchFamily="34" charset="-122"/>
                 <a:cs typeface="Noto Sans KR" pitchFamily="34" charset="-120"/>
               </a:rPr>
-              <a:t>분리 VM Cluster 권장</a:t>
+              <a:t>서로 다른 VM Cluster</a:t>
             </a:r>
             <a:endParaRPr lang="en-US" sz="1150" dirty="0"/>
           </a:p>
@@ -2525,7 +2525,7 @@
             <a:r>
               <a:rPr lang="en-US" sz="920" dirty="0">
                 <a:solidFill>
-                  <a:srgbClr val="C4CDD9"/>
+                  <a:srgbClr val="D9E1EC"/>
                 </a:solidFill>
                 <a:latin typeface="Noto Sans KR" pitchFamily="34" charset="0"/>
                 <a:ea typeface="Noto Sans KR" pitchFamily="34" charset="-122"/>
@@ -3216,7 +3216,7 @@
             <a:r>
               <a:rPr lang="en-US" sz="700" dirty="0">
                 <a:solidFill>
-                  <a:srgbClr val="8290A3"/>
+                  <a:srgbClr val="A8B4C5"/>
                 </a:solidFill>
                 <a:latin typeface="Noto Sans KR" pitchFamily="34" charset="0"/>
                 <a:ea typeface="Noto Sans KR" pitchFamily="34" charset="-122"/>
@@ -3257,13 +3257,13 @@
             <a:r>
               <a:rPr lang="en-US" sz="680" dirty="0">
                 <a:solidFill>
-                  <a:srgbClr val="8290A3"/>
-                </a:solidFill>
-                <a:latin typeface="Noto Sans KR" pitchFamily="34" charset="0"/>
-                <a:ea typeface="Noto Sans KR" pitchFamily="34" charset="-122"/>
-                <a:cs typeface="Noto Sans KR" pitchFamily="34" charset="-120"/>
-              </a:rPr>
-              <a:t>Sources: 첨부 Exadata Cloud Infrastructure X9M DS v1.11 (2024); ExaCC X11M DS v1.5 (2026)</a:t>
+                  <a:srgbClr val="A8B4C5"/>
+                </a:solidFill>
+                <a:latin typeface="Noto Sans KR" pitchFamily="34" charset="0"/>
+                <a:ea typeface="Noto Sans KR" pitchFamily="34" charset="-122"/>
+                <a:cs typeface="Noto Sans KR" pitchFamily="34" charset="-120"/>
+              </a:rPr>
+              <a:t>Sources: 첨부 X9M Cloud Infrastructure DS v1.11 · ExaCC X11M DS v1.5</a:t>
             </a:r>
             <a:endParaRPr lang="en-US" sz="680" dirty="0"/>
           </a:p>
@@ -3418,7 +3418,7 @@
                 <a:ea typeface="Noto Sans KR" pitchFamily="34" charset="-122"/>
                 <a:cs typeface="Noto Sans KR" pitchFamily="34" charset="-120"/>
               </a:rPr>
-              <a:t>같은 2+3 노드라도, ExaCC Base는 X9M Quarter보다 작은 envelope</a:t>
+              <a:t>노드 수만 2+3으로 동일 — ExaCC Base의 자원 envelope는 더 작다</a:t>
             </a:r>
             <a:endParaRPr lang="en-US" sz="2500" dirty="0"/>
           </a:p>
@@ -3453,13 +3453,13 @@
             <a:r>
               <a:rPr lang="en-US" sz="1050" dirty="0">
                 <a:solidFill>
-                  <a:srgbClr val="C4CDD9"/>
-                </a:solidFill>
-                <a:latin typeface="Noto Sans KR" pitchFamily="34" charset="0"/>
-                <a:ea typeface="Noto Sans KR" pitchFamily="34" charset="-122"/>
-                <a:cs typeface="Noto Sans KR" pitchFamily="34" charset="-120"/>
-              </a:rPr>
-              <a:t>첨부 X9M Cloud Infrastructure v1.11과 ExaCC X11M v1.5의 published metric을 같은 단위끼리 비교</a:t>
+                  <a:srgbClr val="D9E1EC"/>
+                </a:solidFill>
+                <a:latin typeface="Noto Sans KR" pitchFamily="34" charset="0"/>
+                <a:ea typeface="Noto Sans KR" pitchFamily="34" charset="-122"/>
+                <a:cs typeface="Noto Sans KR" pitchFamily="34" charset="-120"/>
+              </a:rPr>
+              <a:t>HC 구성 기준 비교 · 코어 과금 단위는 세대가 달라 usable core와 실측 workload 중심으로 판단</a:t>
             </a:r>
             <a:endParaRPr lang="en-US" sz="1050" dirty="0"/>
           </a:p>
@@ -3517,7 +3517,7 @@
               <a:buNone/>
             </a:pPr>
             <a:r>
-              <a:rPr lang="en-US" sz="920" b="1" dirty="0">
+              <a:rPr lang="en-US" sz="940" b="1" dirty="0">
                 <a:solidFill>
                   <a:srgbClr val="F7F9FC"/>
                 </a:solidFill>
@@ -3527,7 +3527,7 @@
               </a:rPr>
               <a:t>비교 항목</a:t>
             </a:r>
-            <a:endParaRPr lang="en-US" sz="920" dirty="0"/>
+            <a:endParaRPr lang="en-US" sz="940" dirty="0"/>
           </a:p>
         </p:txBody>
       </p:sp>
@@ -3583,7 +3583,7 @@
               <a:buNone/>
             </a:pPr>
             <a:r>
-              <a:rPr lang="en-US" sz="920" b="1" dirty="0">
+              <a:rPr lang="en-US" sz="940" b="1" dirty="0">
                 <a:solidFill>
                   <a:srgbClr val="F7F9FC"/>
                 </a:solidFill>
@@ -3593,7 +3593,7 @@
               </a:rPr>
               <a:t>X9M Cloud Infra Quarter</a:t>
             </a:r>
-            <a:endParaRPr lang="en-US" sz="920" dirty="0"/>
+            <a:endParaRPr lang="en-US" sz="940" dirty="0"/>
           </a:p>
         </p:txBody>
       </p:sp>
@@ -3649,7 +3649,7 @@
               <a:buNone/>
             </a:pPr>
             <a:r>
-              <a:rPr lang="en-US" sz="920" b="1" dirty="0">
+              <a:rPr lang="en-US" sz="940" b="1" dirty="0">
                 <a:solidFill>
                   <a:srgbClr val="2DD4BF"/>
                 </a:solidFill>
@@ -3659,7 +3659,7 @@
               </a:rPr>
               <a:t>ExaCC X11M Base System</a:t>
             </a:r>
-            <a:endParaRPr lang="en-US" sz="920" dirty="0"/>
+            <a:endParaRPr lang="en-US" sz="940" dirty="0"/>
           </a:p>
         </p:txBody>
       </p:sp>
@@ -3715,7 +3715,7 @@
               <a:buNone/>
             </a:pPr>
             <a:r>
-              <a:rPr lang="en-US" sz="920" b="1" dirty="0">
+              <a:rPr lang="en-US" sz="940" b="1" dirty="0">
                 <a:solidFill>
                   <a:srgbClr val="F7F9FC"/>
                 </a:solidFill>
@@ -3725,7 +3725,7 @@
               </a:rPr>
               <a:t>판단</a:t>
             </a:r>
-            <a:endParaRPr lang="en-US" sz="920" dirty="0"/>
+            <a:endParaRPr lang="en-US" sz="940" dirty="0"/>
           </a:p>
         </p:txBody>
       </p:sp>
@@ -3746,9 +3746,9 @@
           <a:solidFill>
             <a:srgbClr val="101925"/>
           </a:solidFill>
-          <a:ln w="6985">
+          <a:ln w="8255">
             <a:solidFill>
-              <a:srgbClr val="263448"/>
+              <a:srgbClr val="33445B"/>
             </a:solidFill>
             <a:prstDash val="solid"/>
           </a:ln>
@@ -3762,8 +3762,8 @@
         </p:nvSpPr>
         <p:spPr>
           <a:xfrm>
-            <a:off x="612648" y="1947672"/>
-            <a:ext cx="2121408" cy="420624"/>
+            <a:off x="612648" y="1938528"/>
+            <a:ext cx="2121408" cy="438912"/>
           </a:xfrm>
           <a:prstGeom prst="rect">
             <a:avLst/>
@@ -3781,7 +3781,7 @@
               <a:buNone/>
             </a:pPr>
             <a:r>
-              <a:rPr lang="en-US" sz="880" b="1" dirty="0">
+              <a:rPr lang="en-US" sz="960" b="1" dirty="0">
                 <a:solidFill>
                   <a:srgbClr val="F7F9FC"/>
                 </a:solidFill>
@@ -3791,7 +3791,7 @@
               </a:rPr>
               <a:t>물리 구성</a:t>
             </a:r>
-            <a:endParaRPr lang="en-US" sz="880" dirty="0"/>
+            <a:endParaRPr lang="en-US" sz="960" dirty="0"/>
           </a:p>
         </p:txBody>
       </p:sp>
@@ -3812,9 +3812,9 @@
           <a:solidFill>
             <a:srgbClr val="101925"/>
           </a:solidFill>
-          <a:ln w="6985">
+          <a:ln w="8255">
             <a:solidFill>
-              <a:srgbClr val="263448"/>
+              <a:srgbClr val="33445B"/>
             </a:solidFill>
             <a:prstDash val="solid"/>
           </a:ln>
@@ -3828,8 +3828,8 @@
         </p:nvSpPr>
         <p:spPr>
           <a:xfrm>
-            <a:off x="2935224" y="1947672"/>
-            <a:ext cx="3502152" cy="420624"/>
+            <a:off x="2935224" y="1938528"/>
+            <a:ext cx="3502152" cy="438912"/>
           </a:xfrm>
           <a:prstGeom prst="rect">
             <a:avLst/>
@@ -3847,9 +3847,9 @@
               <a:buNone/>
             </a:pPr>
             <a:r>
-              <a:rPr lang="en-US" sz="880" dirty="0">
-                <a:solidFill>
-                  <a:srgbClr val="C4CDD9"/>
+              <a:rPr lang="en-US" sz="960" dirty="0">
+                <a:solidFill>
+                  <a:srgbClr val="D9E1EC"/>
                 </a:solidFill>
                 <a:latin typeface="Noto Sans KR" pitchFamily="34" charset="0"/>
                 <a:ea typeface="Noto Sans KR" pitchFamily="34" charset="-122"/>
@@ -3857,7 +3857,7 @@
               </a:rPr>
               <a:t>2 DB + 3 HC/EF Storage</a:t>
             </a:r>
-            <a:endParaRPr lang="en-US" sz="880" dirty="0"/>
+            <a:endParaRPr lang="en-US" sz="960" dirty="0"/>
           </a:p>
         </p:txBody>
       </p:sp>
@@ -3878,9 +3878,9 @@
           <a:solidFill>
             <a:srgbClr val="101925"/>
           </a:solidFill>
-          <a:ln w="6985">
+          <a:ln w="8255">
             <a:solidFill>
-              <a:srgbClr val="263448"/>
+              <a:srgbClr val="33445B"/>
             </a:solidFill>
             <a:prstDash val="solid"/>
           </a:ln>
@@ -3894,8 +3894,8 @@
         </p:nvSpPr>
         <p:spPr>
           <a:xfrm>
-            <a:off x="6638544" y="1947672"/>
-            <a:ext cx="3502152" cy="420624"/>
+            <a:off x="6638544" y="1938528"/>
+            <a:ext cx="3502152" cy="438912"/>
           </a:xfrm>
           <a:prstGeom prst="rect">
             <a:avLst/>
@@ -3913,9 +3913,9 @@
               <a:buNone/>
             </a:pPr>
             <a:r>
-              <a:rPr lang="en-US" sz="880" dirty="0">
-                <a:solidFill>
-                  <a:srgbClr val="C4CDD9"/>
+              <a:rPr lang="en-US" sz="960" dirty="0">
+                <a:solidFill>
+                  <a:srgbClr val="D9E1EC"/>
                 </a:solidFill>
                 <a:latin typeface="Noto Sans KR" pitchFamily="34" charset="0"/>
                 <a:ea typeface="Noto Sans KR" pitchFamily="34" charset="-122"/>
@@ -3923,7 +3923,7 @@
               </a:rPr>
               <a:t>2 Base DB + 3 Base Storage</a:t>
             </a:r>
-            <a:endParaRPr lang="en-US" sz="880" dirty="0"/>
+            <a:endParaRPr lang="en-US" sz="960" dirty="0"/>
           </a:p>
         </p:txBody>
       </p:sp>
@@ -3944,9 +3944,9 @@
           <a:solidFill>
             <a:srgbClr val="101925"/>
           </a:solidFill>
-          <a:ln w="6985">
+          <a:ln w="8255">
             <a:solidFill>
-              <a:srgbClr val="263448"/>
+              <a:srgbClr val="33445B"/>
             </a:solidFill>
             <a:prstDash val="solid"/>
           </a:ln>
@@ -3960,8 +3960,8 @@
         </p:nvSpPr>
         <p:spPr>
           <a:xfrm>
-            <a:off x="10341864" y="1947672"/>
-            <a:ext cx="1060704" cy="420624"/>
+            <a:off x="10341864" y="1938528"/>
+            <a:ext cx="1060704" cy="438912"/>
           </a:xfrm>
           <a:prstGeom prst="rect">
             <a:avLst/>
@@ -3979,7 +3979,7 @@
               <a:buNone/>
             </a:pPr>
             <a:r>
-              <a:rPr lang="en-US" sz="850" b="1" dirty="0">
+              <a:rPr lang="en-US" sz="920" b="1" dirty="0">
                 <a:solidFill>
                   <a:srgbClr val="2DD4BF"/>
                 </a:solidFill>
@@ -3989,7 +3989,7 @@
               </a:rPr>
               <a:t>동일</a:t>
             </a:r>
-            <a:endParaRPr lang="en-US" sz="850" dirty="0"/>
+            <a:endParaRPr lang="en-US" sz="920" dirty="0"/>
           </a:p>
         </p:txBody>
       </p:sp>
@@ -4010,9 +4010,9 @@
           <a:solidFill>
             <a:srgbClr val="0D1621"/>
           </a:solidFill>
-          <a:ln w="6985">
+          <a:ln w="8255">
             <a:solidFill>
-              <a:srgbClr val="263448"/>
+              <a:srgbClr val="33445B"/>
             </a:solidFill>
             <a:prstDash val="solid"/>
           </a:ln>
@@ -4026,8 +4026,8 @@
         </p:nvSpPr>
         <p:spPr>
           <a:xfrm>
-            <a:off x="612648" y="2487168"/>
-            <a:ext cx="2121408" cy="420624"/>
+            <a:off x="612648" y="2478024"/>
+            <a:ext cx="2121408" cy="438912"/>
           </a:xfrm>
           <a:prstGeom prst="rect">
             <a:avLst/>
@@ -4045,7 +4045,7 @@
               <a:buNone/>
             </a:pPr>
             <a:r>
-              <a:rPr lang="en-US" sz="880" b="1" dirty="0">
+              <a:rPr lang="en-US" sz="960" b="1" dirty="0">
                 <a:solidFill>
                   <a:srgbClr val="F7F9FC"/>
                 </a:solidFill>
@@ -4055,7 +4055,7 @@
               </a:rPr>
               <a:t>DB compute</a:t>
             </a:r>
-            <a:endParaRPr lang="en-US" sz="880" dirty="0"/>
+            <a:endParaRPr lang="en-US" sz="960" dirty="0"/>
           </a:p>
         </p:txBody>
       </p:sp>
@@ -4076,9 +4076,9 @@
           <a:solidFill>
             <a:srgbClr val="0D1621"/>
           </a:solidFill>
-          <a:ln w="6985">
+          <a:ln w="8255">
             <a:solidFill>
-              <a:srgbClr val="263448"/>
+              <a:srgbClr val="33445B"/>
             </a:solidFill>
             <a:prstDash val="solid"/>
           </a:ln>
@@ -4092,8 +4092,8 @@
         </p:nvSpPr>
         <p:spPr>
           <a:xfrm>
-            <a:off x="2935224" y="2487168"/>
-            <a:ext cx="3502152" cy="420624"/>
+            <a:off x="2935224" y="2478024"/>
+            <a:ext cx="3502152" cy="438912"/>
           </a:xfrm>
           <a:prstGeom prst="rect">
             <a:avLst/>
@@ -4111,9 +4111,9 @@
               <a:buNone/>
             </a:pPr>
             <a:r>
-              <a:rPr lang="en-US" sz="880" dirty="0">
-                <a:solidFill>
-                  <a:srgbClr val="C4CDD9"/>
+              <a:rPr lang="en-US" sz="960" dirty="0">
+                <a:solidFill>
+                  <a:srgbClr val="D9E1EC"/>
                 </a:solidFill>
                 <a:latin typeface="Noto Sans KR" pitchFamily="34" charset="0"/>
                 <a:ea typeface="Noto Sans KR" pitchFamily="34" charset="-122"/>
@@ -4121,16 +4121,16 @@
               </a:rPr>
               <a:t>252 usable cores</a:t>
             </a:r>
-            <a:endParaRPr lang="en-US" sz="880" dirty="0"/>
+            <a:endParaRPr lang="en-US" sz="960" dirty="0"/>
           </a:p>
           <a:p>
             <a:pPr algn="l" indent="0" marL="0">
               <a:buNone/>
             </a:pPr>
             <a:r>
-              <a:rPr lang="en-US" sz="880" dirty="0">
-                <a:solidFill>
-                  <a:srgbClr val="C4CDD9"/>
+              <a:rPr lang="en-US" sz="960" dirty="0">
+                <a:solidFill>
+                  <a:srgbClr val="D9E1EC"/>
                 </a:solidFill>
                 <a:latin typeface="Noto Sans KR" pitchFamily="34" charset="0"/>
                 <a:ea typeface="Noto Sans KR" pitchFamily="34" charset="-122"/>
@@ -4138,7 +4138,7 @@
               </a:rPr>
               <a:t>(OCPU 기반 서비스 세대)</a:t>
             </a:r>
-            <a:endParaRPr lang="en-US" sz="880" dirty="0"/>
+            <a:endParaRPr lang="en-US" sz="960" dirty="0"/>
           </a:p>
         </p:txBody>
       </p:sp>
@@ -4159,9 +4159,9 @@
           <a:solidFill>
             <a:srgbClr val="0D1621"/>
           </a:solidFill>
-          <a:ln w="6985">
+          <a:ln w="8255">
             <a:solidFill>
-              <a:srgbClr val="263448"/>
+              <a:srgbClr val="33445B"/>
             </a:solidFill>
             <a:prstDash val="solid"/>
           </a:ln>
@@ -4175,8 +4175,8 @@
         </p:nvSpPr>
         <p:spPr>
           <a:xfrm>
-            <a:off x="6638544" y="2487168"/>
-            <a:ext cx="3502152" cy="420624"/>
+            <a:off x="6638544" y="2478024"/>
+            <a:ext cx="3502152" cy="438912"/>
           </a:xfrm>
           <a:prstGeom prst="rect">
             <a:avLst/>
@@ -4194,9 +4194,9 @@
               <a:buNone/>
             </a:pPr>
             <a:r>
-              <a:rPr lang="en-US" sz="880" dirty="0">
-                <a:solidFill>
-                  <a:srgbClr val="C4CDD9"/>
+              <a:rPr lang="en-US" sz="960" dirty="0">
+                <a:solidFill>
+                  <a:srgbClr val="D9E1EC"/>
                 </a:solidFill>
                 <a:latin typeface="Noto Sans KR" pitchFamily="34" charset="0"/>
                 <a:ea typeface="Noto Sans KR" pitchFamily="34" charset="-122"/>
@@ -4204,7 +4204,7 @@
               </a:rPr>
               <a:t>60 usable cores / 240 ECPUs</a:t>
             </a:r>
-            <a:endParaRPr lang="en-US" sz="880" dirty="0"/>
+            <a:endParaRPr lang="en-US" sz="960" dirty="0"/>
           </a:p>
         </p:txBody>
       </p:sp>
@@ -4225,9 +4225,9 @@
           <a:solidFill>
             <a:srgbClr val="0D1621"/>
           </a:solidFill>
-          <a:ln w="6985">
+          <a:ln w="8255">
             <a:solidFill>
-              <a:srgbClr val="263448"/>
+              <a:srgbClr val="33445B"/>
             </a:solidFill>
             <a:prstDash val="solid"/>
           </a:ln>
@@ -4241,8 +4241,8 @@
         </p:nvSpPr>
         <p:spPr>
           <a:xfrm>
-            <a:off x="10341864" y="2487168"/>
-            <a:ext cx="1060704" cy="420624"/>
+            <a:off x="10341864" y="2478024"/>
+            <a:ext cx="1060704" cy="438912"/>
           </a:xfrm>
           <a:prstGeom prst="rect">
             <a:avLst/>
@@ -4260,7 +4260,7 @@
               <a:buNone/>
             </a:pPr>
             <a:r>
-              <a:rPr lang="en-US" sz="850" b="1" dirty="0">
+              <a:rPr lang="en-US" sz="920" b="1" dirty="0">
                 <a:solidFill>
                   <a:srgbClr val="FF6B5E"/>
                 </a:solidFill>
@@ -4268,9 +4268,9 @@
                 <a:ea typeface="Noto Sans KR" pitchFamily="34" charset="-122"/>
                 <a:cs typeface="Noto Sans KR" pitchFamily="34" charset="-120"/>
               </a:rPr>
-              <a:t>축소</a:t>
-            </a:r>
-            <a:endParaRPr lang="en-US" sz="850" dirty="0"/>
+              <a:t>약 76%↓</a:t>
+            </a:r>
+            <a:endParaRPr lang="en-US" sz="920" dirty="0"/>
           </a:p>
         </p:txBody>
       </p:sp>
@@ -4291,9 +4291,9 @@
           <a:solidFill>
             <a:srgbClr val="101925"/>
           </a:solidFill>
-          <a:ln w="6985">
+          <a:ln w="8255">
             <a:solidFill>
-              <a:srgbClr val="263448"/>
+              <a:srgbClr val="33445B"/>
             </a:solidFill>
             <a:prstDash val="solid"/>
           </a:ln>
@@ -4307,8 +4307,8 @@
         </p:nvSpPr>
         <p:spPr>
           <a:xfrm>
-            <a:off x="612648" y="3026664"/>
-            <a:ext cx="2121408" cy="420624"/>
+            <a:off x="612648" y="3017520"/>
+            <a:ext cx="2121408" cy="438912"/>
           </a:xfrm>
           <a:prstGeom prst="rect">
             <a:avLst/>
@@ -4326,7 +4326,7 @@
               <a:buNone/>
             </a:pPr>
             <a:r>
-              <a:rPr lang="en-US" sz="880" b="1" dirty="0">
+              <a:rPr lang="en-US" sz="960" b="1" dirty="0">
                 <a:solidFill>
                   <a:srgbClr val="F7F9FC"/>
                 </a:solidFill>
@@ -4336,7 +4336,7 @@
               </a:rPr>
               <a:t>VM memory</a:t>
             </a:r>
-            <a:endParaRPr lang="en-US" sz="880" dirty="0"/>
+            <a:endParaRPr lang="en-US" sz="960" dirty="0"/>
           </a:p>
         </p:txBody>
       </p:sp>
@@ -4357,9 +4357,9 @@
           <a:solidFill>
             <a:srgbClr val="101925"/>
           </a:solidFill>
-          <a:ln w="6985">
+          <a:ln w="8255">
             <a:solidFill>
-              <a:srgbClr val="263448"/>
+              <a:srgbClr val="33445B"/>
             </a:solidFill>
             <a:prstDash val="solid"/>
           </a:ln>
@@ -4373,8 +4373,8 @@
         </p:nvSpPr>
         <p:spPr>
           <a:xfrm>
-            <a:off x="2935224" y="3026664"/>
-            <a:ext cx="3502152" cy="420624"/>
+            <a:off x="2935224" y="3017520"/>
+            <a:ext cx="3502152" cy="438912"/>
           </a:xfrm>
           <a:prstGeom prst="rect">
             <a:avLst/>
@@ -4392,9 +4392,9 @@
               <a:buNone/>
             </a:pPr>
             <a:r>
-              <a:rPr lang="en-US" sz="880" dirty="0">
-                <a:solidFill>
-                  <a:srgbClr val="C4CDD9"/>
+              <a:rPr lang="en-US" sz="960" dirty="0">
+                <a:solidFill>
+                  <a:srgbClr val="D9E1EC"/>
                 </a:solidFill>
                 <a:latin typeface="Noto Sans KR" pitchFamily="34" charset="0"/>
                 <a:ea typeface="Noto Sans KR" pitchFamily="34" charset="-122"/>
@@ -4402,7 +4402,7 @@
               </a:rPr>
               <a:t>2,780 GB available to VMs</a:t>
             </a:r>
-            <a:endParaRPr lang="en-US" sz="880" dirty="0"/>
+            <a:endParaRPr lang="en-US" sz="960" dirty="0"/>
           </a:p>
         </p:txBody>
       </p:sp>
@@ -4423,9 +4423,9 @@
           <a:solidFill>
             <a:srgbClr val="101925"/>
           </a:solidFill>
-          <a:ln w="6985">
+          <a:ln w="8255">
             <a:solidFill>
-              <a:srgbClr val="263448"/>
+              <a:srgbClr val="33445B"/>
             </a:solidFill>
             <a:prstDash val="solid"/>
           </a:ln>
@@ -4439,8 +4439,8 @@
         </p:nvSpPr>
         <p:spPr>
           <a:xfrm>
-            <a:off x="6638544" y="3026664"/>
-            <a:ext cx="3502152" cy="420624"/>
+            <a:off x="6638544" y="3017520"/>
+            <a:ext cx="3502152" cy="438912"/>
           </a:xfrm>
           <a:prstGeom prst="rect">
             <a:avLst/>
@@ -4458,9 +4458,9 @@
               <a:buNone/>
             </a:pPr>
             <a:r>
-              <a:rPr lang="en-US" sz="880" dirty="0">
-                <a:solidFill>
-                  <a:srgbClr val="C4CDD9"/>
+              <a:rPr lang="en-US" sz="960" dirty="0">
+                <a:solidFill>
+                  <a:srgbClr val="D9E1EC"/>
                 </a:solidFill>
                 <a:latin typeface="Noto Sans KR" pitchFamily="34" charset="0"/>
                 <a:ea typeface="Noto Sans KR" pitchFamily="34" charset="-122"/>
@@ -4468,7 +4468,7 @@
               </a:rPr>
               <a:t>1,320 GB available to VMs</a:t>
             </a:r>
-            <a:endParaRPr lang="en-US" sz="880" dirty="0"/>
+            <a:endParaRPr lang="en-US" sz="960" dirty="0"/>
           </a:p>
         </p:txBody>
       </p:sp>
@@ -4489,9 +4489,9 @@
           <a:solidFill>
             <a:srgbClr val="101925"/>
           </a:solidFill>
-          <a:ln w="6985">
+          <a:ln w="8255">
             <a:solidFill>
-              <a:srgbClr val="263448"/>
+              <a:srgbClr val="33445B"/>
             </a:solidFill>
             <a:prstDash val="solid"/>
           </a:ln>
@@ -4505,8 +4505,8 @@
         </p:nvSpPr>
         <p:spPr>
           <a:xfrm>
-            <a:off x="10341864" y="3026664"/>
-            <a:ext cx="1060704" cy="420624"/>
+            <a:off x="10341864" y="3017520"/>
+            <a:ext cx="1060704" cy="438912"/>
           </a:xfrm>
           <a:prstGeom prst="rect">
             <a:avLst/>
@@ -4524,7 +4524,7 @@
               <a:buNone/>
             </a:pPr>
             <a:r>
-              <a:rPr lang="en-US" sz="850" b="1" dirty="0">
+              <a:rPr lang="en-US" sz="920" b="1" dirty="0">
                 <a:solidFill>
                   <a:srgbClr val="FF6B5E"/>
                 </a:solidFill>
@@ -4532,9 +4532,9 @@
                 <a:ea typeface="Noto Sans KR" pitchFamily="34" charset="-122"/>
                 <a:cs typeface="Noto Sans KR" pitchFamily="34" charset="-120"/>
               </a:rPr>
-              <a:t>축소</a:t>
-            </a:r>
-            <a:endParaRPr lang="en-US" sz="850" dirty="0"/>
+              <a:t>약 53%↓</a:t>
+            </a:r>
+            <a:endParaRPr lang="en-US" sz="920" dirty="0"/>
           </a:p>
         </p:txBody>
       </p:sp>
@@ -4555,9 +4555,9 @@
           <a:solidFill>
             <a:srgbClr val="0D1621"/>
           </a:solidFill>
-          <a:ln w="6985">
+          <a:ln w="8255">
             <a:solidFill>
-              <a:srgbClr val="263448"/>
+              <a:srgbClr val="33445B"/>
             </a:solidFill>
             <a:prstDash val="solid"/>
           </a:ln>
@@ -4571,8 +4571,8 @@
         </p:nvSpPr>
         <p:spPr>
           <a:xfrm>
-            <a:off x="612648" y="3566160"/>
-            <a:ext cx="2121408" cy="420624"/>
+            <a:off x="612648" y="3557016"/>
+            <a:ext cx="2121408" cy="438912"/>
           </a:xfrm>
           <a:prstGeom prst="rect">
             <a:avLst/>
@@ -4590,7 +4590,7 @@
               <a:buNone/>
             </a:pPr>
             <a:r>
-              <a:rPr lang="en-US" sz="880" b="1" dirty="0">
+              <a:rPr lang="en-US" sz="960" b="1" dirty="0">
                 <a:solidFill>
                   <a:srgbClr val="F7F9FC"/>
                 </a:solidFill>
@@ -4598,9 +4598,9 @@
                 <a:ea typeface="Noto Sans KR" pitchFamily="34" charset="-122"/>
                 <a:cs typeface="Noto Sans KR" pitchFamily="34" charset="-120"/>
               </a:rPr>
-              <a:t>HC 저장소</a:t>
-            </a:r>
-            <a:endParaRPr lang="en-US" sz="880" dirty="0"/>
+              <a:t>HC 구성 저장 계층</a:t>
+            </a:r>
+            <a:endParaRPr lang="en-US" sz="960" dirty="0"/>
           </a:p>
         </p:txBody>
       </p:sp>
@@ -4621,9 +4621,9 @@
           <a:solidFill>
             <a:srgbClr val="0D1621"/>
           </a:solidFill>
-          <a:ln w="6985">
+          <a:ln w="8255">
             <a:solidFill>
-              <a:srgbClr val="263448"/>
+              <a:srgbClr val="33445B"/>
             </a:solidFill>
             <a:prstDash val="solid"/>
           </a:ln>
@@ -4637,8 +4637,8 @@
         </p:nvSpPr>
         <p:spPr>
           <a:xfrm>
-            <a:off x="2935224" y="3566160"/>
-            <a:ext cx="3502152" cy="420624"/>
+            <a:off x="2935224" y="3557016"/>
+            <a:ext cx="3502152" cy="438912"/>
           </a:xfrm>
           <a:prstGeom prst="rect">
             <a:avLst/>
@@ -4656,9 +4656,9 @@
               <a:buNone/>
             </a:pPr>
             <a:r>
-              <a:rPr lang="en-US" sz="880" dirty="0">
-                <a:solidFill>
-                  <a:srgbClr val="C4CDD9"/>
+              <a:rPr lang="en-US" sz="960" dirty="0">
+                <a:solidFill>
+                  <a:srgbClr val="D9E1EC"/>
                 </a:solidFill>
                 <a:latin typeface="Noto Sans KR" pitchFamily="34" charset="0"/>
                 <a:ea typeface="Noto Sans KR" pitchFamily="34" charset="-122"/>
@@ -4666,16 +4666,16 @@
               </a:rPr>
               <a:t>190 TB usable disk</a:t>
             </a:r>
-            <a:endParaRPr lang="en-US" sz="880" dirty="0"/>
+            <a:endParaRPr lang="en-US" sz="960" dirty="0"/>
           </a:p>
           <a:p>
             <a:pPr algn="l" indent="0" marL="0">
               <a:buNone/>
             </a:pPr>
             <a:r>
-              <a:rPr lang="en-US" sz="880" dirty="0">
-                <a:solidFill>
-                  <a:srgbClr val="C4CDD9"/>
+              <a:rPr lang="en-US" sz="960" dirty="0">
+                <a:solidFill>
+                  <a:srgbClr val="D9E1EC"/>
                 </a:solidFill>
                 <a:latin typeface="Noto Sans KR" pitchFamily="34" charset="0"/>
                 <a:ea typeface="Noto Sans KR" pitchFamily="34" charset="-122"/>
@@ -4683,7 +4683,7 @@
               </a:rPr>
               <a:t>76.8 TB flash + 4.5 TB XRMEM</a:t>
             </a:r>
-            <a:endParaRPr lang="en-US" sz="880" dirty="0"/>
+            <a:endParaRPr lang="en-US" sz="960" dirty="0"/>
           </a:p>
         </p:txBody>
       </p:sp>
@@ -4704,9 +4704,9 @@
           <a:solidFill>
             <a:srgbClr val="0D1621"/>
           </a:solidFill>
-          <a:ln w="6985">
+          <a:ln w="8255">
             <a:solidFill>
-              <a:srgbClr val="263448"/>
+              <a:srgbClr val="33445B"/>
             </a:solidFill>
             <a:prstDash val="solid"/>
           </a:ln>
@@ -4720,8 +4720,8 @@
         </p:nvSpPr>
         <p:spPr>
           <a:xfrm>
-            <a:off x="6638544" y="3566160"/>
-            <a:ext cx="3502152" cy="420624"/>
+            <a:off x="6638544" y="3557016"/>
+            <a:ext cx="3502152" cy="438912"/>
           </a:xfrm>
           <a:prstGeom prst="rect">
             <a:avLst/>
@@ -4739,9 +4739,9 @@
               <a:buNone/>
             </a:pPr>
             <a:r>
-              <a:rPr lang="en-US" sz="880" dirty="0">
-                <a:solidFill>
-                  <a:srgbClr val="C4CDD9"/>
+              <a:rPr lang="en-US" sz="960" dirty="0">
+                <a:solidFill>
+                  <a:srgbClr val="D9E1EC"/>
                 </a:solidFill>
                 <a:latin typeface="Noto Sans KR" pitchFamily="34" charset="0"/>
                 <a:ea typeface="Noto Sans KR" pitchFamily="34" charset="-122"/>
@@ -4749,16 +4749,16 @@
               </a:rPr>
               <a:t>106 TB usable disk</a:t>
             </a:r>
-            <a:endParaRPr lang="en-US" sz="880" dirty="0"/>
+            <a:endParaRPr lang="en-US" sz="960" dirty="0"/>
           </a:p>
           <a:p>
             <a:pPr algn="l" indent="0" marL="0">
               <a:buNone/>
             </a:pPr>
             <a:r>
-              <a:rPr lang="en-US" sz="880" dirty="0">
-                <a:solidFill>
-                  <a:srgbClr val="C4CDD9"/>
+              <a:rPr lang="en-US" sz="960" dirty="0">
+                <a:solidFill>
+                  <a:srgbClr val="D9E1EC"/>
                 </a:solidFill>
                 <a:latin typeface="Noto Sans KR" pitchFamily="34" charset="0"/>
                 <a:ea typeface="Noto Sans KR" pitchFamily="34" charset="-122"/>
@@ -4766,7 +4766,7 @@
               </a:rPr>
               <a:t>38.4 TB flash cache · no XRMEM</a:t>
             </a:r>
-            <a:endParaRPr lang="en-US" sz="880" dirty="0"/>
+            <a:endParaRPr lang="en-US" sz="960" dirty="0"/>
           </a:p>
         </p:txBody>
       </p:sp>
@@ -4787,9 +4787,9 @@
           <a:solidFill>
             <a:srgbClr val="0D1621"/>
           </a:solidFill>
-          <a:ln w="6985">
+          <a:ln w="8255">
             <a:solidFill>
-              <a:srgbClr val="263448"/>
+              <a:srgbClr val="33445B"/>
             </a:solidFill>
             <a:prstDash val="solid"/>
           </a:ln>
@@ -4803,8 +4803,8 @@
         </p:nvSpPr>
         <p:spPr>
           <a:xfrm>
-            <a:off x="10341864" y="3566160"/>
-            <a:ext cx="1060704" cy="420624"/>
+            <a:off x="10341864" y="3557016"/>
+            <a:ext cx="1060704" cy="438912"/>
           </a:xfrm>
           <a:prstGeom prst="rect">
             <a:avLst/>
@@ -4822,7 +4822,7 @@
               <a:buNone/>
             </a:pPr>
             <a:r>
-              <a:rPr lang="en-US" sz="850" b="1" dirty="0">
+              <a:rPr lang="en-US" sz="920" b="1" dirty="0">
                 <a:solidFill>
                   <a:srgbClr val="FF6B5E"/>
                 </a:solidFill>
@@ -4830,9 +4830,9 @@
                 <a:ea typeface="Noto Sans KR" pitchFamily="34" charset="-122"/>
                 <a:cs typeface="Noto Sans KR" pitchFamily="34" charset="-120"/>
               </a:rPr>
-              <a:t>축소</a:t>
-            </a:r>
-            <a:endParaRPr lang="en-US" sz="850" dirty="0"/>
+              <a:t>약 44%↓</a:t>
+            </a:r>
+            <a:endParaRPr lang="en-US" sz="920" dirty="0"/>
           </a:p>
         </p:txBody>
       </p:sp>
@@ -4853,9 +4853,9 @@
           <a:solidFill>
             <a:srgbClr val="101925"/>
           </a:solidFill>
-          <a:ln w="6985">
+          <a:ln w="8255">
             <a:solidFill>
-              <a:srgbClr val="263448"/>
+              <a:srgbClr val="33445B"/>
             </a:solidFill>
             <a:prstDash val="solid"/>
           </a:ln>
@@ -4869,8 +4869,8 @@
         </p:nvSpPr>
         <p:spPr>
           <a:xfrm>
-            <a:off x="612648" y="4105656"/>
-            <a:ext cx="2121408" cy="420624"/>
+            <a:off x="612648" y="4096512"/>
+            <a:ext cx="2121408" cy="438912"/>
           </a:xfrm>
           <a:prstGeom prst="rect">
             <a:avLst/>
@@ -4888,7 +4888,7 @@
               <a:buNone/>
             </a:pPr>
             <a:r>
-              <a:rPr lang="en-US" sz="880" b="1" dirty="0">
+              <a:rPr lang="en-US" sz="960" b="1" dirty="0">
                 <a:solidFill>
                   <a:srgbClr val="F7F9FC"/>
                 </a:solidFill>
@@ -4898,7 +4898,7 @@
               </a:rPr>
               <a:t>Max SQL read IOPS</a:t>
             </a:r>
-            <a:endParaRPr lang="en-US" sz="880" dirty="0"/>
+            <a:endParaRPr lang="en-US" sz="960" dirty="0"/>
           </a:p>
         </p:txBody>
       </p:sp>
@@ -4919,9 +4919,9 @@
           <a:solidFill>
             <a:srgbClr val="101925"/>
           </a:solidFill>
-          <a:ln w="6985">
+          <a:ln w="8255">
             <a:solidFill>
-              <a:srgbClr val="263448"/>
+              <a:srgbClr val="33445B"/>
             </a:solidFill>
             <a:prstDash val="solid"/>
           </a:ln>
@@ -4935,8 +4935,8 @@
         </p:nvSpPr>
         <p:spPr>
           <a:xfrm>
-            <a:off x="2935224" y="4105656"/>
-            <a:ext cx="3502152" cy="420624"/>
+            <a:off x="2935224" y="4096512"/>
+            <a:ext cx="3502152" cy="438912"/>
           </a:xfrm>
           <a:prstGeom prst="rect">
             <a:avLst/>
@@ -4954,9 +4954,9 @@
               <a:buNone/>
             </a:pPr>
             <a:r>
-              <a:rPr lang="en-US" sz="880" dirty="0">
-                <a:solidFill>
-                  <a:srgbClr val="C4CDD9"/>
+              <a:rPr lang="en-US" sz="960" dirty="0">
+                <a:solidFill>
+                  <a:srgbClr val="D9E1EC"/>
                 </a:solidFill>
                 <a:latin typeface="Noto Sans KR" pitchFamily="34" charset="0"/>
                 <a:ea typeface="Noto Sans KR" pitchFamily="34" charset="-122"/>
@@ -4964,7 +4964,7 @@
               </a:rPr>
               <a:t>5.6M SQL read IOPS</a:t>
             </a:r>
-            <a:endParaRPr lang="en-US" sz="880" dirty="0"/>
+            <a:endParaRPr lang="en-US" sz="960" dirty="0"/>
           </a:p>
         </p:txBody>
       </p:sp>
@@ -4985,9 +4985,9 @@
           <a:solidFill>
             <a:srgbClr val="101925"/>
           </a:solidFill>
-          <a:ln w="6985">
+          <a:ln w="8255">
             <a:solidFill>
-              <a:srgbClr val="263448"/>
+              <a:srgbClr val="33445B"/>
             </a:solidFill>
             <a:prstDash val="solid"/>
           </a:ln>
@@ -5001,8 +5001,8 @@
         </p:nvSpPr>
         <p:spPr>
           <a:xfrm>
-            <a:off x="6638544" y="4105656"/>
-            <a:ext cx="3502152" cy="420624"/>
+            <a:off x="6638544" y="4096512"/>
+            <a:ext cx="3502152" cy="438912"/>
           </a:xfrm>
           <a:prstGeom prst="rect">
             <a:avLst/>
@@ -5020,9 +5020,9 @@
               <a:buNone/>
             </a:pPr>
             <a:r>
-              <a:rPr lang="en-US" sz="880" dirty="0">
-                <a:solidFill>
-                  <a:srgbClr val="C4CDD9"/>
+              <a:rPr lang="en-US" sz="960" dirty="0">
+                <a:solidFill>
+                  <a:srgbClr val="D9E1EC"/>
                 </a:solidFill>
                 <a:latin typeface="Noto Sans KR" pitchFamily="34" charset="0"/>
                 <a:ea typeface="Noto Sans KR" pitchFamily="34" charset="-122"/>
@@ -5030,7 +5030,7 @@
               </a:rPr>
               <a:t>597K SQL read IOPS</a:t>
             </a:r>
-            <a:endParaRPr lang="en-US" sz="880" dirty="0"/>
+            <a:endParaRPr lang="en-US" sz="960" dirty="0"/>
           </a:p>
         </p:txBody>
       </p:sp>
@@ -5051,9 +5051,9 @@
           <a:solidFill>
             <a:srgbClr val="101925"/>
           </a:solidFill>
-          <a:ln w="6985">
+          <a:ln w="8255">
             <a:solidFill>
-              <a:srgbClr val="263448"/>
+              <a:srgbClr val="33445B"/>
             </a:solidFill>
             <a:prstDash val="solid"/>
           </a:ln>
@@ -5067,8 +5067,8 @@
         </p:nvSpPr>
         <p:spPr>
           <a:xfrm>
-            <a:off x="10341864" y="4105656"/>
-            <a:ext cx="1060704" cy="420624"/>
+            <a:off x="10341864" y="4096512"/>
+            <a:ext cx="1060704" cy="438912"/>
           </a:xfrm>
           <a:prstGeom prst="rect">
             <a:avLst/>
@@ -5086,7 +5086,7 @@
               <a:buNone/>
             </a:pPr>
             <a:r>
-              <a:rPr lang="en-US" sz="850" b="1" dirty="0">
+              <a:rPr lang="en-US" sz="920" b="1" dirty="0">
                 <a:solidFill>
                   <a:srgbClr val="FF6B5E"/>
                 </a:solidFill>
@@ -5094,9 +5094,9 @@
                 <a:ea typeface="Noto Sans KR" pitchFamily="34" charset="-122"/>
                 <a:cs typeface="Noto Sans KR" pitchFamily="34" charset="-120"/>
               </a:rPr>
-              <a:t>축소</a:t>
-            </a:r>
-            <a:endParaRPr lang="en-US" sz="850" dirty="0"/>
+              <a:t>약 89%↓</a:t>
+            </a:r>
+            <a:endParaRPr lang="en-US" sz="920" dirty="0"/>
           </a:p>
         </p:txBody>
       </p:sp>
@@ -5117,9 +5117,9 @@
           <a:solidFill>
             <a:srgbClr val="0D1621"/>
           </a:solidFill>
-          <a:ln w="6985">
+          <a:ln w="8255">
             <a:solidFill>
-              <a:srgbClr val="263448"/>
+              <a:srgbClr val="33445B"/>
             </a:solidFill>
             <a:prstDash val="solid"/>
           </a:ln>
@@ -5133,8 +5133,8 @@
         </p:nvSpPr>
         <p:spPr>
           <a:xfrm>
-            <a:off x="612648" y="4645152"/>
-            <a:ext cx="2121408" cy="420624"/>
+            <a:off x="612648" y="4636008"/>
+            <a:ext cx="2121408" cy="438912"/>
           </a:xfrm>
           <a:prstGeom prst="rect">
             <a:avLst/>
@@ -5152,7 +5152,7 @@
               <a:buNone/>
             </a:pPr>
             <a:r>
-              <a:rPr lang="en-US" sz="880" b="1" dirty="0">
+              <a:rPr lang="en-US" sz="960" b="1" dirty="0">
                 <a:solidFill>
                   <a:srgbClr val="F7F9FC"/>
                 </a:solidFill>
@@ -5162,7 +5162,7 @@
               </a:rPr>
               <a:t>Max SQL flash bandwidth</a:t>
             </a:r>
-            <a:endParaRPr lang="en-US" sz="880" dirty="0"/>
+            <a:endParaRPr lang="en-US" sz="960" dirty="0"/>
           </a:p>
         </p:txBody>
       </p:sp>
@@ -5183,9 +5183,9 @@
           <a:solidFill>
             <a:srgbClr val="0D1621"/>
           </a:solidFill>
-          <a:ln w="6985">
+          <a:ln w="8255">
             <a:solidFill>
-              <a:srgbClr val="263448"/>
+              <a:srgbClr val="33445B"/>
             </a:solidFill>
             <a:prstDash val="solid"/>
           </a:ln>
@@ -5199,8 +5199,8 @@
         </p:nvSpPr>
         <p:spPr>
           <a:xfrm>
-            <a:off x="2935224" y="4645152"/>
-            <a:ext cx="3502152" cy="420624"/>
+            <a:off x="2935224" y="4636008"/>
+            <a:ext cx="3502152" cy="438912"/>
           </a:xfrm>
           <a:prstGeom prst="rect">
             <a:avLst/>
@@ -5218,9 +5218,9 @@
               <a:buNone/>
             </a:pPr>
             <a:r>
-              <a:rPr lang="en-US" sz="880" dirty="0">
-                <a:solidFill>
-                  <a:srgbClr val="C4CDD9"/>
+              <a:rPr lang="en-US" sz="960" dirty="0">
+                <a:solidFill>
+                  <a:srgbClr val="D9E1EC"/>
                 </a:solidFill>
                 <a:latin typeface="Noto Sans KR" pitchFamily="34" charset="0"/>
                 <a:ea typeface="Noto Sans KR" pitchFamily="34" charset="-122"/>
@@ -5228,7 +5228,7 @@
               </a:rPr>
               <a:t>135 GB/s</a:t>
             </a:r>
-            <a:endParaRPr lang="en-US" sz="880" dirty="0"/>
+            <a:endParaRPr lang="en-US" sz="960" dirty="0"/>
           </a:p>
         </p:txBody>
       </p:sp>
@@ -5249,9 +5249,9 @@
           <a:solidFill>
             <a:srgbClr val="0D1621"/>
           </a:solidFill>
-          <a:ln w="6985">
+          <a:ln w="8255">
             <a:solidFill>
-              <a:srgbClr val="263448"/>
+              <a:srgbClr val="33445B"/>
             </a:solidFill>
             <a:prstDash val="solid"/>
           </a:ln>
@@ -5265,8 +5265,8 @@
         </p:nvSpPr>
         <p:spPr>
           <a:xfrm>
-            <a:off x="6638544" y="4645152"/>
-            <a:ext cx="3502152" cy="420624"/>
+            <a:off x="6638544" y="4636008"/>
+            <a:ext cx="3502152" cy="438912"/>
           </a:xfrm>
           <a:prstGeom prst="rect">
             <a:avLst/>
@@ -5284,9 +5284,9 @@
               <a:buNone/>
             </a:pPr>
             <a:r>
-              <a:rPr lang="en-US" sz="880" dirty="0">
-                <a:solidFill>
-                  <a:srgbClr val="C4CDD9"/>
+              <a:rPr lang="en-US" sz="960" dirty="0">
+                <a:solidFill>
+                  <a:srgbClr val="D9E1EC"/>
                 </a:solidFill>
                 <a:latin typeface="Noto Sans KR" pitchFamily="34" charset="0"/>
                 <a:ea typeface="Noto Sans KR" pitchFamily="34" charset="-122"/>
@@ -5294,7 +5294,7 @@
               </a:rPr>
               <a:t>37.5 GB/s</a:t>
             </a:r>
-            <a:endParaRPr lang="en-US" sz="880" dirty="0"/>
+            <a:endParaRPr lang="en-US" sz="960" dirty="0"/>
           </a:p>
         </p:txBody>
       </p:sp>
@@ -5315,9 +5315,9 @@
           <a:solidFill>
             <a:srgbClr val="0D1621"/>
           </a:solidFill>
-          <a:ln w="6985">
+          <a:ln w="8255">
             <a:solidFill>
-              <a:srgbClr val="263448"/>
+              <a:srgbClr val="33445B"/>
             </a:solidFill>
             <a:prstDash val="solid"/>
           </a:ln>
@@ -5331,8 +5331,8 @@
         </p:nvSpPr>
         <p:spPr>
           <a:xfrm>
-            <a:off x="10341864" y="4645152"/>
-            <a:ext cx="1060704" cy="420624"/>
+            <a:off x="10341864" y="4636008"/>
+            <a:ext cx="1060704" cy="438912"/>
           </a:xfrm>
           <a:prstGeom prst="rect">
             <a:avLst/>
@@ -5350,7 +5350,7 @@
               <a:buNone/>
             </a:pPr>
             <a:r>
-              <a:rPr lang="en-US" sz="850" b="1" dirty="0">
+              <a:rPr lang="en-US" sz="920" b="1" dirty="0">
                 <a:solidFill>
                   <a:srgbClr val="FF6B5E"/>
                 </a:solidFill>
@@ -5358,9 +5358,9 @@
                 <a:ea typeface="Noto Sans KR" pitchFamily="34" charset="-122"/>
                 <a:cs typeface="Noto Sans KR" pitchFamily="34" charset="-120"/>
               </a:rPr>
-              <a:t>축소</a:t>
-            </a:r>
-            <a:endParaRPr lang="en-US" sz="850" dirty="0"/>
+              <a:t>약 72%↓</a:t>
+            </a:r>
+            <a:endParaRPr lang="en-US" sz="920" dirty="0"/>
           </a:p>
         </p:txBody>
       </p:sp>
@@ -5381,9 +5381,9 @@
           <a:solidFill>
             <a:srgbClr val="101925"/>
           </a:solidFill>
-          <a:ln w="6985">
+          <a:ln w="8255">
             <a:solidFill>
-              <a:srgbClr val="263448"/>
+              <a:srgbClr val="33445B"/>
             </a:solidFill>
             <a:prstDash val="solid"/>
           </a:ln>
@@ -5397,8 +5397,8 @@
         </p:nvSpPr>
         <p:spPr>
           <a:xfrm>
-            <a:off x="612648" y="5184648"/>
-            <a:ext cx="2121408" cy="420624"/>
+            <a:off x="612648" y="5175504"/>
+            <a:ext cx="2121408" cy="438912"/>
           </a:xfrm>
           <a:prstGeom prst="rect">
             <a:avLst/>
@@ -5416,7 +5416,7 @@
               <a:buNone/>
             </a:pPr>
             <a:r>
-              <a:rPr lang="en-US" sz="880" b="1" dirty="0">
+              <a:rPr lang="en-US" sz="960" b="1" dirty="0">
                 <a:solidFill>
                   <a:srgbClr val="F7F9FC"/>
                 </a:solidFill>
@@ -5426,7 +5426,7 @@
               </a:rPr>
               <a:t>VM Cluster / System</a:t>
             </a:r>
-            <a:endParaRPr lang="en-US" sz="880" dirty="0"/>
+            <a:endParaRPr lang="en-US" sz="960" dirty="0"/>
           </a:p>
         </p:txBody>
       </p:sp>
@@ -5447,9 +5447,9 @@
           <a:solidFill>
             <a:srgbClr val="101925"/>
           </a:solidFill>
-          <a:ln w="6985">
+          <a:ln w="8255">
             <a:solidFill>
-              <a:srgbClr val="263448"/>
+              <a:srgbClr val="33445B"/>
             </a:solidFill>
             <a:prstDash val="solid"/>
           </a:ln>
@@ -5463,8 +5463,8 @@
         </p:nvSpPr>
         <p:spPr>
           <a:xfrm>
-            <a:off x="2935224" y="5184648"/>
-            <a:ext cx="3502152" cy="420624"/>
+            <a:off x="2935224" y="5175504"/>
+            <a:ext cx="3502152" cy="438912"/>
           </a:xfrm>
           <a:prstGeom prst="rect">
             <a:avLst/>
@@ -5482,9 +5482,9 @@
               <a:buNone/>
             </a:pPr>
             <a:r>
-              <a:rPr lang="en-US" sz="880" dirty="0">
-                <a:solidFill>
-                  <a:srgbClr val="C4CDD9"/>
+              <a:rPr lang="en-US" sz="960" dirty="0">
+                <a:solidFill>
+                  <a:srgbClr val="D9E1EC"/>
                 </a:solidFill>
                 <a:latin typeface="Noto Sans KR" pitchFamily="34" charset="0"/>
                 <a:ea typeface="Noto Sans KR" pitchFamily="34" charset="-122"/>
@@ -5492,7 +5492,7 @@
               </a:rPr>
               <a:t>최대 8</a:t>
             </a:r>
-            <a:endParaRPr lang="en-US" sz="880" dirty="0"/>
+            <a:endParaRPr lang="en-US" sz="960" dirty="0"/>
           </a:p>
         </p:txBody>
       </p:sp>
@@ -5513,9 +5513,9 @@
           <a:solidFill>
             <a:srgbClr val="101925"/>
           </a:solidFill>
-          <a:ln w="6985">
+          <a:ln w="8255">
             <a:solidFill>
-              <a:srgbClr val="263448"/>
+              <a:srgbClr val="33445B"/>
             </a:solidFill>
             <a:prstDash val="solid"/>
           </a:ln>
@@ -5529,8 +5529,8 @@
         </p:nvSpPr>
         <p:spPr>
           <a:xfrm>
-            <a:off x="6638544" y="5184648"/>
-            <a:ext cx="3502152" cy="420624"/>
+            <a:off x="6638544" y="5175504"/>
+            <a:ext cx="3502152" cy="438912"/>
           </a:xfrm>
           <a:prstGeom prst="rect">
             <a:avLst/>
@@ -5548,9 +5548,9 @@
               <a:buNone/>
             </a:pPr>
             <a:r>
-              <a:rPr lang="en-US" sz="880" dirty="0">
-                <a:solidFill>
-                  <a:srgbClr val="C4CDD9"/>
+              <a:rPr lang="en-US" sz="960" dirty="0">
+                <a:solidFill>
+                  <a:srgbClr val="D9E1EC"/>
                 </a:solidFill>
                 <a:latin typeface="Noto Sans KR" pitchFamily="34" charset="0"/>
                 <a:ea typeface="Noto Sans KR" pitchFamily="34" charset="-122"/>
@@ -5558,7 +5558,7 @@
               </a:rPr>
               <a:t>최대 12</a:t>
             </a:r>
-            <a:endParaRPr lang="en-US" sz="880" dirty="0"/>
+            <a:endParaRPr lang="en-US" sz="960" dirty="0"/>
           </a:p>
         </p:txBody>
       </p:sp>
@@ -5579,9 +5579,9 @@
           <a:solidFill>
             <a:srgbClr val="101925"/>
           </a:solidFill>
-          <a:ln w="6985">
+          <a:ln w="8255">
             <a:solidFill>
-              <a:srgbClr val="263448"/>
+              <a:srgbClr val="33445B"/>
             </a:solidFill>
             <a:prstDash val="solid"/>
           </a:ln>
@@ -5595,8 +5595,8 @@
         </p:nvSpPr>
         <p:spPr>
           <a:xfrm>
-            <a:off x="10341864" y="5184648"/>
-            <a:ext cx="1060704" cy="420624"/>
+            <a:off x="10341864" y="5175504"/>
+            <a:ext cx="1060704" cy="438912"/>
           </a:xfrm>
           <a:prstGeom prst="rect">
             <a:avLst/>
@@ -5614,7 +5614,7 @@
               <a:buNone/>
             </a:pPr>
             <a:r>
-              <a:rPr lang="en-US" sz="850" b="1" dirty="0">
+              <a:rPr lang="en-US" sz="920" b="1" dirty="0">
                 <a:solidFill>
                   <a:srgbClr val="F6B44B"/>
                 </a:solidFill>
@@ -5624,7 +5624,7 @@
               </a:rPr>
               <a:t>확대</a:t>
             </a:r>
-            <a:endParaRPr lang="en-US" sz="850" dirty="0"/>
+            <a:endParaRPr lang="en-US" sz="920" dirty="0"/>
           </a:p>
         </p:txBody>
       </p:sp>
@@ -5645,9 +5645,9 @@
           <a:solidFill>
             <a:srgbClr val="0D1621"/>
           </a:solidFill>
-          <a:ln w="6985">
+          <a:ln w="8255">
             <a:solidFill>
-              <a:srgbClr val="263448"/>
+              <a:srgbClr val="33445B"/>
             </a:solidFill>
             <a:prstDash val="solid"/>
           </a:ln>
@@ -5661,8 +5661,8 @@
         </p:nvSpPr>
         <p:spPr>
           <a:xfrm>
-            <a:off x="612648" y="5724144"/>
-            <a:ext cx="2121408" cy="420624"/>
+            <a:off x="612648" y="5715000"/>
+            <a:ext cx="2121408" cy="438912"/>
           </a:xfrm>
           <a:prstGeom prst="rect">
             <a:avLst/>
@@ -5680,7 +5680,7 @@
               <a:buNone/>
             </a:pPr>
             <a:r>
-              <a:rPr lang="en-US" sz="880" b="1" dirty="0">
+              <a:rPr lang="en-US" sz="960" b="1" dirty="0">
                 <a:solidFill>
                   <a:srgbClr val="F7F9FC"/>
                 </a:solidFill>
@@ -5690,7 +5690,7 @@
               </a:rPr>
               <a:t>배치·계약</a:t>
             </a:r>
-            <a:endParaRPr lang="en-US" sz="880" dirty="0"/>
+            <a:endParaRPr lang="en-US" sz="960" dirty="0"/>
           </a:p>
         </p:txBody>
       </p:sp>
@@ -5711,9 +5711,9 @@
           <a:solidFill>
             <a:srgbClr val="0D1621"/>
           </a:solidFill>
-          <a:ln w="6985">
+          <a:ln w="8255">
             <a:solidFill>
-              <a:srgbClr val="263448"/>
+              <a:srgbClr val="33445B"/>
             </a:solidFill>
             <a:prstDash val="solid"/>
           </a:ln>
@@ -5727,8 +5727,8 @@
         </p:nvSpPr>
         <p:spPr>
           <a:xfrm>
-            <a:off x="2935224" y="5724144"/>
-            <a:ext cx="3502152" cy="420624"/>
+            <a:off x="2935224" y="5715000"/>
+            <a:ext cx="3502152" cy="438912"/>
           </a:xfrm>
           <a:prstGeom prst="rect">
             <a:avLst/>
@@ -5746,9 +5746,9 @@
               <a:buNone/>
             </a:pPr>
             <a:r>
-              <a:rPr lang="en-US" sz="880" dirty="0">
-                <a:solidFill>
-                  <a:srgbClr val="C4CDD9"/>
+              <a:rPr lang="en-US" sz="960" dirty="0">
+                <a:solidFill>
+                  <a:srgbClr val="D9E1EC"/>
                 </a:solidFill>
                 <a:latin typeface="Noto Sans KR" pitchFamily="34" charset="0"/>
                 <a:ea typeface="Noto Sans KR" pitchFamily="34" charset="-122"/>
@@ -5756,7 +5756,7 @@
               </a:rPr>
               <a:t>OCI 리전 · 최소 48시간</a:t>
             </a:r>
-            <a:endParaRPr lang="en-US" sz="880" dirty="0"/>
+            <a:endParaRPr lang="en-US" sz="960" dirty="0"/>
           </a:p>
         </p:txBody>
       </p:sp>
@@ -5777,9 +5777,9 @@
           <a:solidFill>
             <a:srgbClr val="0D1621"/>
           </a:solidFill>
-          <a:ln w="6985">
+          <a:ln w="8255">
             <a:solidFill>
-              <a:srgbClr val="263448"/>
+              <a:srgbClr val="33445B"/>
             </a:solidFill>
             <a:prstDash val="solid"/>
           </a:ln>
@@ -5793,8 +5793,8 @@
         </p:nvSpPr>
         <p:spPr>
           <a:xfrm>
-            <a:off x="6638544" y="5724144"/>
-            <a:ext cx="3502152" cy="420624"/>
+            <a:off x="6638544" y="5715000"/>
+            <a:ext cx="3502152" cy="438912"/>
           </a:xfrm>
           <a:prstGeom prst="rect">
             <a:avLst/>
@@ -5812,9 +5812,9 @@
               <a:buNone/>
             </a:pPr>
             <a:r>
-              <a:rPr lang="en-US" sz="880" dirty="0">
-                <a:solidFill>
-                  <a:srgbClr val="C4CDD9"/>
+              <a:rPr lang="en-US" sz="960" dirty="0">
+                <a:solidFill>
+                  <a:srgbClr val="D9E1EC"/>
                 </a:solidFill>
                 <a:latin typeface="Noto Sans KR" pitchFamily="34" charset="0"/>
                 <a:ea typeface="Noto Sans KR" pitchFamily="34" charset="-122"/>
@@ -5822,7 +5822,7 @@
               </a:rPr>
               <a:t>고객 DC · infra 최소 4년</a:t>
             </a:r>
-            <a:endParaRPr lang="en-US" sz="880" dirty="0"/>
+            <a:endParaRPr lang="en-US" sz="960" dirty="0"/>
           </a:p>
         </p:txBody>
       </p:sp>
@@ -5843,9 +5843,9 @@
           <a:solidFill>
             <a:srgbClr val="0D1621"/>
           </a:solidFill>
-          <a:ln w="6985">
+          <a:ln w="8255">
             <a:solidFill>
-              <a:srgbClr val="263448"/>
+              <a:srgbClr val="33445B"/>
             </a:solidFill>
             <a:prstDash val="solid"/>
           </a:ln>
@@ -5859,8 +5859,8 @@
         </p:nvSpPr>
         <p:spPr>
           <a:xfrm>
-            <a:off x="10341864" y="5724144"/>
-            <a:ext cx="1060704" cy="420624"/>
+            <a:off x="10341864" y="5715000"/>
+            <a:ext cx="1060704" cy="438912"/>
           </a:xfrm>
           <a:prstGeom prst="rect">
             <a:avLst/>
@@ -5878,7 +5878,7 @@
               <a:buNone/>
             </a:pPr>
             <a:r>
-              <a:rPr lang="en-US" sz="850" b="1" dirty="0">
+              <a:rPr lang="en-US" sz="920" b="1" dirty="0">
                 <a:solidFill>
                   <a:srgbClr val="F6B44B"/>
                 </a:solidFill>
@@ -5888,7 +5888,7 @@
               </a:rPr>
               <a:t>전환</a:t>
             </a:r>
-            <a:endParaRPr lang="en-US" sz="850" dirty="0"/>
+            <a:endParaRPr lang="en-US" sz="920" dirty="0"/>
           </a:p>
         </p:txBody>
       </p:sp>
@@ -5953,17 +5953,17 @@
               <a:buNone/>
             </a:pPr>
             <a:r>
-              <a:rPr lang="en-US" sz="720" dirty="0">
-                <a:solidFill>
-                  <a:srgbClr val="8290A3"/>
-                </a:solidFill>
-                <a:latin typeface="Noto Sans KR" pitchFamily="34" charset="0"/>
-                <a:ea typeface="Noto Sans KR" pitchFamily="34" charset="-122"/>
-                <a:cs typeface="Noto Sans KR" pitchFamily="34" charset="-120"/>
-              </a:rPr>
-              <a:t>주의: ECPU/OCPU 과금 단위는 세대가 다르므로 usable core와 AWR/ASH를 중심으로 sizing. Published maximum은 보장 성능이 아님.</a:t>
-            </a:r>
-            <a:endParaRPr lang="en-US" sz="720" dirty="0"/>
+              <a:rPr lang="en-US" sz="810" b="1" dirty="0">
+                <a:solidFill>
+                  <a:srgbClr val="D9E1EC"/>
+                </a:solidFill>
+                <a:latin typeface="Noto Sans KR" pitchFamily="34" charset="0"/>
+                <a:ea typeface="Noto Sans KR" pitchFamily="34" charset="-122"/>
+                <a:cs typeface="Noto Sans KR" pitchFamily="34" charset="-120"/>
+              </a:rPr>
+              <a:t>EF는 저장 비교에서 제외 · OCPU/ECPU는 직접 등가 비교 불가 · Published maximum은 workload 보장치가 아님</a:t>
+            </a:r>
+            <a:endParaRPr lang="en-US" sz="810" dirty="0"/>
           </a:p>
         </p:txBody>
       </p:sp>
@@ -6019,7 +6019,7 @@
             <a:r>
               <a:rPr lang="en-US" sz="700" dirty="0">
                 <a:solidFill>
-                  <a:srgbClr val="8290A3"/>
+                  <a:srgbClr val="A8B4C5"/>
                 </a:solidFill>
                 <a:latin typeface="Noto Sans KR" pitchFamily="34" charset="0"/>
                 <a:ea typeface="Noto Sans KR" pitchFamily="34" charset="-122"/>
@@ -6060,13 +6060,13 @@
             <a:r>
               <a:rPr lang="en-US" sz="680" dirty="0">
                 <a:solidFill>
-                  <a:srgbClr val="8290A3"/>
-                </a:solidFill>
-                <a:latin typeface="Noto Sans KR" pitchFamily="34" charset="0"/>
-                <a:ea typeface="Noto Sans KR" pitchFamily="34" charset="-122"/>
-                <a:cs typeface="Noto Sans KR" pitchFamily="34" charset="-120"/>
-              </a:rPr>
-              <a:t>Sources: 첨부: exadata-cloud-infrastructure-x9m.pdf (v1.11, 2024)  |  https://www.oracle.com/a/ocom/docs/engineered-systems/exadata/exadb-cc-x11m-ds.pdf</a:t>
+                  <a:srgbClr val="A8B4C5"/>
+                </a:solidFill>
+                <a:latin typeface="Noto Sans KR" pitchFamily="34" charset="0"/>
+                <a:ea typeface="Noto Sans KR" pitchFamily="34" charset="-122"/>
+                <a:cs typeface="Noto Sans KR" pitchFamily="34" charset="-120"/>
+              </a:rPr>
+              <a:t>Sources: 첨부 X9M Cloud Infrastructure DS v1.11 Table 1 · ExaCC X11M DS v1.5 Table 1</a:t>
             </a:r>
             <a:endParaRPr lang="en-US" sz="680" dirty="0"/>
           </a:p>
@@ -6256,13 +6256,13 @@
             <a:r>
               <a:rPr lang="en-US" sz="1050" dirty="0">
                 <a:solidFill>
-                  <a:srgbClr val="C4CDD9"/>
-                </a:solidFill>
-                <a:latin typeface="Noto Sans KR" pitchFamily="34" charset="0"/>
-                <a:ea typeface="Noto Sans KR" pitchFamily="34" charset="-122"/>
-                <a:cs typeface="Noto Sans KR" pitchFamily="34" charset="-120"/>
-              </a:rPr>
-              <a:t>X9M Cloud Infrastructure는 OCI 리전, ExaCC는 고객 데이터센터 안에서 동일한 Cloud Control Plane 경험을 제공한다.</a:t>
+                  <a:srgbClr val="D9E1EC"/>
+                </a:solidFill>
+                <a:latin typeface="Noto Sans KR" pitchFamily="34" charset="0"/>
+                <a:ea typeface="Noto Sans KR" pitchFamily="34" charset="-122"/>
+                <a:cs typeface="Noto Sans KR" pitchFamily="34" charset="-120"/>
+              </a:rPr>
+              <a:t>X9M Cloud Infrastructure는 OCI 리전, ExaCC는 고객 데이터센터 안에서 Cloud Control Plane 경험을 제공한다.</a:t>
             </a:r>
             <a:endParaRPr lang="en-US" sz="1050" dirty="0"/>
           </a:p>
@@ -6583,7 +6583,7 @@
             <a:r>
               <a:rPr lang="en-US" sz="850" b="1" dirty="0">
                 <a:solidFill>
-                  <a:srgbClr val="8290A3"/>
+                  <a:srgbClr val="A8B4C5"/>
                 </a:solidFill>
                 <a:latin typeface="Noto Sans KR" pitchFamily="34" charset="0"/>
                 <a:ea typeface="Noto Sans KR" pitchFamily="34" charset="-122"/>
@@ -6688,7 +6688,7 @@
             <a:r>
               <a:rPr lang="en-US" sz="850" b="1" dirty="0">
                 <a:solidFill>
-                  <a:srgbClr val="8290A3"/>
+                  <a:srgbClr val="A8B4C5"/>
                 </a:solidFill>
                 <a:latin typeface="Noto Sans KR" pitchFamily="34" charset="0"/>
                 <a:ea typeface="Noto Sans KR" pitchFamily="34" charset="-122"/>
@@ -6793,7 +6793,7 @@
             <a:r>
               <a:rPr lang="en-US" sz="850" b="1" dirty="0">
                 <a:solidFill>
-                  <a:srgbClr val="8290A3"/>
+                  <a:srgbClr val="A8B4C5"/>
                 </a:solidFill>
                 <a:latin typeface="Noto Sans KR" pitchFamily="34" charset="0"/>
                 <a:ea typeface="Noto Sans KR" pitchFamily="34" charset="-122"/>
@@ -6898,7 +6898,7 @@
             <a:r>
               <a:rPr lang="en-US" sz="850" b="1" dirty="0">
                 <a:solidFill>
-                  <a:srgbClr val="8290A3"/>
+                  <a:srgbClr val="A8B4C5"/>
                 </a:solidFill>
                 <a:latin typeface="Noto Sans KR" pitchFamily="34" charset="0"/>
                 <a:ea typeface="Noto Sans KR" pitchFamily="34" charset="-122"/>
@@ -7003,7 +7003,7 @@
             <a:r>
               <a:rPr lang="en-US" sz="850" b="1" dirty="0">
                 <a:solidFill>
-                  <a:srgbClr val="8290A3"/>
+                  <a:srgbClr val="A8B4C5"/>
                 </a:solidFill>
                 <a:latin typeface="Noto Sans KR" pitchFamily="34" charset="0"/>
                 <a:ea typeface="Noto Sans KR" pitchFamily="34" charset="-122"/>
@@ -7619,7 +7619,7 @@
               <a:buNone/>
             </a:pPr>
             <a:r>
-              <a:rPr lang="en-US" sz="830" b="1" dirty="0">
+              <a:rPr lang="en-US" sz="920" b="1" dirty="0">
                 <a:solidFill>
                   <a:srgbClr val="F6B44B"/>
                 </a:solidFill>
@@ -7629,7 +7629,7 @@
               </a:rPr>
               <a:t>공통 책임 경계: Oracle은 물리 서버·RoCE·KVM·Exadata System Software, 고객은 VM/OS·Grid/DB·데이터·접근권한</a:t>
             </a:r>
-            <a:endParaRPr lang="en-US" sz="830" dirty="0"/>
+            <a:endParaRPr lang="en-US" sz="920" dirty="0"/>
           </a:p>
         </p:txBody>
       </p:sp>
@@ -7685,7 +7685,7 @@
             <a:r>
               <a:rPr lang="en-US" sz="700" dirty="0">
                 <a:solidFill>
-                  <a:srgbClr val="8290A3"/>
+                  <a:srgbClr val="A8B4C5"/>
                 </a:solidFill>
                 <a:latin typeface="Noto Sans KR" pitchFamily="34" charset="0"/>
                 <a:ea typeface="Noto Sans KR" pitchFamily="34" charset="-122"/>
@@ -7726,13 +7726,13 @@
             <a:r>
               <a:rPr lang="en-US" sz="680" dirty="0">
                 <a:solidFill>
-                  <a:srgbClr val="8290A3"/>
-                </a:solidFill>
-                <a:latin typeface="Noto Sans KR" pitchFamily="34" charset="0"/>
-                <a:ea typeface="Noto Sans KR" pitchFamily="34" charset="-122"/>
-                <a:cs typeface="Noto Sans KR" pitchFamily="34" charset="-120"/>
-              </a:rPr>
-              <a:t>Sources: 첨부 X9M Cloud Infrastructure DS pp.6–10; ExaCC X11M DS v1.5 pp.1, 6–10</a:t>
+                  <a:srgbClr val="A8B4C5"/>
+                </a:solidFill>
+                <a:latin typeface="Noto Sans KR" pitchFamily="34" charset="0"/>
+                <a:ea typeface="Noto Sans KR" pitchFamily="34" charset="-122"/>
+                <a:cs typeface="Noto Sans KR" pitchFamily="34" charset="-120"/>
+              </a:rPr>
+              <a:t>Sources: 첨부 X9M Cloud Infrastructure DS pp.6–10 · ExaCC X11M DS v1.5 pp.1, 6–10</a:t>
             </a:r>
             <a:endParaRPr lang="en-US" sz="680" dirty="0"/>
           </a:p>
@@ -7922,13 +7922,13 @@
             <a:r>
               <a:rPr lang="en-US" sz="1050" dirty="0">
                 <a:solidFill>
-                  <a:srgbClr val="C4CDD9"/>
-                </a:solidFill>
-                <a:latin typeface="Noto Sans KR" pitchFamily="34" charset="0"/>
-                <a:ea typeface="Noto Sans KR" pitchFamily="34" charset="-122"/>
-                <a:cs typeface="Noto Sans KR" pitchFamily="34" charset="-120"/>
-              </a:rPr>
-              <a:t>26ai Database에는 GI 26ai가 필요하다. 버전별 GI·DB Home lifecycle을 분리해 상호 영향과 patch coupling을 줄인다.</a:t>
+                  <a:srgbClr val="D9E1EC"/>
+                </a:solidFill>
+                <a:latin typeface="Noto Sans KR" pitchFamily="34" charset="0"/>
+                <a:ea typeface="Noto Sans KR" pitchFamily="34" charset="-122"/>
+                <a:cs typeface="Noto Sans KR" pitchFamily="34" charset="-120"/>
+              </a:rPr>
+              <a:t>권장 아키텍처: 26ai DB에는 GI 26ai가 필요하며, major version별 lifecycle 격리로 patch coupling을 줄인다.</a:t>
             </a:r>
             <a:endParaRPr lang="en-US" sz="1050" dirty="0"/>
           </a:p>
@@ -8106,7 +8106,7 @@
             <a:r>
               <a:rPr lang="en-US" sz="750" dirty="0">
                 <a:solidFill>
-                  <a:srgbClr val="8290A3"/>
+                  <a:srgbClr val="A8B4C5"/>
                 </a:solidFill>
                 <a:latin typeface="Noto Sans KR" pitchFamily="34" charset="0"/>
                 <a:ea typeface="Noto Sans KR" pitchFamily="34" charset="-122"/>
@@ -8203,7 +8203,7 @@
             <a:r>
               <a:rPr lang="en-US" sz="850" b="1" dirty="0">
                 <a:solidFill>
-                  <a:srgbClr val="C4CDD9"/>
+                  <a:srgbClr val="D9E1EC"/>
                 </a:solidFill>
                 <a:latin typeface="Noto Sans KR" pitchFamily="34" charset="0"/>
                 <a:ea typeface="Noto Sans KR" pitchFamily="34" charset="-122"/>
@@ -8402,7 +8402,7 @@
             <a:r>
               <a:rPr lang="en-US" sz="650" dirty="0">
                 <a:solidFill>
-                  <a:srgbClr val="8290A3"/>
+                  <a:srgbClr val="A8B4C5"/>
                 </a:solidFill>
                 <a:latin typeface="Noto Sans KR" pitchFamily="34" charset="0"/>
                 <a:ea typeface="Noto Sans KR" pitchFamily="34" charset="-122"/>
@@ -8423,11 +8423,11 @@
         <p:spPr>
           <a:xfrm>
             <a:off x="4892040" y="1883664"/>
-            <a:ext cx="2999232" cy="3840480"/>
+            <a:ext cx="6455664" cy="4069080"/>
           </a:xfrm>
           <a:prstGeom prst="roundRect">
             <a:avLst>
-              <a:gd name="adj" fmla="val 1829"/>
+              <a:gd name="adj" fmla="val 1348"/>
             </a:avLst>
           </a:prstGeom>
           <a:solidFill>
@@ -8435,7 +8435,7 @@
           </a:solidFill>
           <a:ln w="12700">
             <a:solidFill>
-              <a:srgbClr val="34465C"/>
+              <a:srgbClr val="4A607D"/>
             </a:solidFill>
             <a:prstDash val="solid"/>
           </a:ln>
@@ -8524,7 +8524,75 @@
         </p:nvSpPr>
         <p:spPr>
           <a:xfrm>
-            <a:off x="5230368" y="2615184"/>
+            <a:off x="5230368" y="2395728"/>
+            <a:ext cx="2313432" cy="292608"/>
+          </a:xfrm>
+          <a:prstGeom prst="roundRect">
+            <a:avLst>
+              <a:gd name="adj" fmla="val 28125"/>
+            </a:avLst>
+          </a:prstGeom>
+          <a:solidFill>
+            <a:srgbClr val="1A3140"/>
+          </a:solidFill>
+          <a:ln w="12700">
+            <a:solidFill>
+              <a:srgbClr val="1A3140"/>
+            </a:solidFill>
+            <a:prstDash val="solid"/>
+          </a:ln>
+        </p:spPr>
+      </p:sp>
+      <p:sp>
+        <p:nvSpPr>
+          <p:cNvPr id="22" name="Text 20"/>
+          <p:cNvSpPr/>
+          <p:nvPr/>
+        </p:nvSpPr>
+        <p:spPr>
+          <a:xfrm>
+            <a:off x="5230368" y="2395728"/>
+            <a:ext cx="2313432" cy="292608"/>
+          </a:xfrm>
+          <a:prstGeom prst="rect">
+            <a:avLst/>
+          </a:prstGeom>
+          <a:noFill/>
+          <a:ln/>
+        </p:spPr>
+        <p:txBody>
+          <a:bodyPr wrap="square" lIns="0" tIns="0" rIns="0" bIns="0" rtlCol="0" anchor="ctr">
+            <a:normAutofit/>
+          </a:bodyPr>
+          <a:lstStyle/>
+          <a:p>
+            <a:pPr algn="ctr" indent="0" marL="0">
+              <a:buNone/>
+            </a:pPr>
+            <a:r>
+              <a:rPr lang="en-US" sz="850" b="1" dirty="0">
+                <a:solidFill>
+                  <a:srgbClr val="45C7D7"/>
+                </a:solidFill>
+                <a:latin typeface="Noto Sans KR" pitchFamily="34" charset="0"/>
+                <a:ea typeface="Noto Sans KR" pitchFamily="34" charset="-122"/>
+                <a:cs typeface="Noto Sans KR" pitchFamily="34" charset="-120"/>
+              </a:rPr>
+              <a:t>PHYSICAL LAYER</a:t>
+            </a:r>
+            <a:endParaRPr lang="en-US" sz="850" dirty="0"/>
+          </a:p>
+        </p:txBody>
+      </p:sp>
+      <p:sp>
+        <p:nvSpPr>
+          <p:cNvPr id="23" name="Shape 21"/>
+          <p:cNvSpPr/>
+          <p:nvPr/>
+        </p:nvSpPr>
+        <p:spPr>
+          <a:xfrm>
+            <a:off x="5230368" y="2779776"/>
             <a:ext cx="1005840" cy="841248"/>
           </a:xfrm>
           <a:prstGeom prst="roundRect">
@@ -8552,13 +8620,13 @@
       </p:sp>
       <p:sp>
         <p:nvSpPr>
-          <p:cNvPr id="22" name="Shape 20"/>
-          <p:cNvSpPr/>
-          <p:nvPr/>
-        </p:nvSpPr>
-        <p:spPr>
-          <a:xfrm>
-            <a:off x="5358384" y="2761488"/>
+          <p:cNvPr id="24" name="Shape 22"/>
+          <p:cNvSpPr/>
+          <p:nvPr/>
+        </p:nvSpPr>
+        <p:spPr>
+          <a:xfrm>
+            <a:off x="5358384" y="2926080"/>
             <a:ext cx="749808" cy="109728"/>
           </a:xfrm>
           <a:prstGeom prst="rect">
@@ -8577,13 +8645,13 @@
       </p:sp>
       <p:sp>
         <p:nvSpPr>
-          <p:cNvPr id="23" name="Shape 21"/>
-          <p:cNvSpPr/>
-          <p:nvPr/>
-        </p:nvSpPr>
-        <p:spPr>
-          <a:xfrm>
-            <a:off x="5980176" y="2788920"/>
+          <p:cNvPr id="25" name="Shape 23"/>
+          <p:cNvSpPr/>
+          <p:nvPr/>
+        </p:nvSpPr>
+        <p:spPr>
+          <a:xfrm>
+            <a:off x="5980176" y="2953512"/>
             <a:ext cx="41148" cy="41148"/>
           </a:xfrm>
           <a:prstGeom prst="ellipse">
@@ -8602,13 +8670,13 @@
       </p:sp>
       <p:sp>
         <p:nvSpPr>
-          <p:cNvPr id="24" name="Shape 22"/>
-          <p:cNvSpPr/>
-          <p:nvPr/>
-        </p:nvSpPr>
-        <p:spPr>
-          <a:xfrm>
-            <a:off x="5358384" y="2926080"/>
+          <p:cNvPr id="26" name="Shape 24"/>
+          <p:cNvSpPr/>
+          <p:nvPr/>
+        </p:nvSpPr>
+        <p:spPr>
+          <a:xfrm>
+            <a:off x="5358384" y="3090672"/>
             <a:ext cx="749808" cy="109728"/>
           </a:xfrm>
           <a:prstGeom prst="rect">
@@ -8627,13 +8695,13 @@
       </p:sp>
       <p:sp>
         <p:nvSpPr>
-          <p:cNvPr id="25" name="Shape 23"/>
-          <p:cNvSpPr/>
-          <p:nvPr/>
-        </p:nvSpPr>
-        <p:spPr>
-          <a:xfrm>
-            <a:off x="5980176" y="2953512"/>
+          <p:cNvPr id="27" name="Shape 25"/>
+          <p:cNvSpPr/>
+          <p:nvPr/>
+        </p:nvSpPr>
+        <p:spPr>
+          <a:xfrm>
+            <a:off x="5980176" y="3118104"/>
             <a:ext cx="41148" cy="41148"/>
           </a:xfrm>
           <a:prstGeom prst="ellipse">
@@ -8652,13 +8720,13 @@
       </p:sp>
       <p:sp>
         <p:nvSpPr>
-          <p:cNvPr id="26" name="Shape 24"/>
-          <p:cNvSpPr/>
-          <p:nvPr/>
-        </p:nvSpPr>
-        <p:spPr>
-          <a:xfrm>
-            <a:off x="5358384" y="3090672"/>
+          <p:cNvPr id="28" name="Shape 26"/>
+          <p:cNvSpPr/>
+          <p:nvPr/>
+        </p:nvSpPr>
+        <p:spPr>
+          <a:xfrm>
+            <a:off x="5358384" y="3255264"/>
             <a:ext cx="749808" cy="109728"/>
           </a:xfrm>
           <a:prstGeom prst="rect">
@@ -8677,13 +8745,13 @@
       </p:sp>
       <p:sp>
         <p:nvSpPr>
-          <p:cNvPr id="27" name="Shape 25"/>
-          <p:cNvSpPr/>
-          <p:nvPr/>
-        </p:nvSpPr>
-        <p:spPr>
-          <a:xfrm>
-            <a:off x="5980176" y="3118104"/>
+          <p:cNvPr id="29" name="Shape 27"/>
+          <p:cNvSpPr/>
+          <p:nvPr/>
+        </p:nvSpPr>
+        <p:spPr>
+          <a:xfrm>
+            <a:off x="5980176" y="3282696"/>
             <a:ext cx="41148" cy="41148"/>
           </a:xfrm>
           <a:prstGeom prst="ellipse">
@@ -8702,13 +8770,13 @@
       </p:sp>
       <p:sp>
         <p:nvSpPr>
-          <p:cNvPr id="28" name="Text 26"/>
-          <p:cNvSpPr/>
-          <p:nvPr/>
-        </p:nvSpPr>
-        <p:spPr>
-          <a:xfrm>
-            <a:off x="5230368" y="3209544"/>
+          <p:cNvPr id="30" name="Text 28"/>
+          <p:cNvSpPr/>
+          <p:nvPr/>
+        </p:nvSpPr>
+        <p:spPr>
+          <a:xfrm>
+            <a:off x="5230368" y="3374136"/>
             <a:ext cx="1005840" cy="164592"/>
           </a:xfrm>
           <a:prstGeom prst="rect">
@@ -8743,13 +8811,13 @@
       </p:sp>
       <p:sp>
         <p:nvSpPr>
-          <p:cNvPr id="29" name="Shape 27"/>
-          <p:cNvSpPr/>
-          <p:nvPr/>
-        </p:nvSpPr>
-        <p:spPr>
-          <a:xfrm>
-            <a:off x="6537960" y="2615184"/>
+          <p:cNvPr id="31" name="Shape 29"/>
+          <p:cNvSpPr/>
+          <p:nvPr/>
+        </p:nvSpPr>
+        <p:spPr>
+          <a:xfrm>
+            <a:off x="6537960" y="2779776"/>
             <a:ext cx="1005840" cy="841248"/>
           </a:xfrm>
           <a:prstGeom prst="roundRect">
@@ -8777,13 +8845,13 @@
       </p:sp>
       <p:sp>
         <p:nvSpPr>
-          <p:cNvPr id="30" name="Shape 28"/>
-          <p:cNvSpPr/>
-          <p:nvPr/>
-        </p:nvSpPr>
-        <p:spPr>
-          <a:xfrm>
-            <a:off x="6665976" y="2761488"/>
+          <p:cNvPr id="32" name="Shape 30"/>
+          <p:cNvSpPr/>
+          <p:nvPr/>
+        </p:nvSpPr>
+        <p:spPr>
+          <a:xfrm>
+            <a:off x="6665976" y="2926080"/>
             <a:ext cx="749808" cy="109728"/>
           </a:xfrm>
           <a:prstGeom prst="rect">
@@ -8802,13 +8870,13 @@
       </p:sp>
       <p:sp>
         <p:nvSpPr>
-          <p:cNvPr id="31" name="Shape 29"/>
-          <p:cNvSpPr/>
-          <p:nvPr/>
-        </p:nvSpPr>
-        <p:spPr>
-          <a:xfrm>
-            <a:off x="7287768" y="2788920"/>
+          <p:cNvPr id="33" name="Shape 31"/>
+          <p:cNvSpPr/>
+          <p:nvPr/>
+        </p:nvSpPr>
+        <p:spPr>
+          <a:xfrm>
+            <a:off x="7287768" y="2953512"/>
             <a:ext cx="41148" cy="41148"/>
           </a:xfrm>
           <a:prstGeom prst="ellipse">
@@ -8827,13 +8895,13 @@
       </p:sp>
       <p:sp>
         <p:nvSpPr>
-          <p:cNvPr id="32" name="Shape 30"/>
-          <p:cNvSpPr/>
-          <p:nvPr/>
-        </p:nvSpPr>
-        <p:spPr>
-          <a:xfrm>
-            <a:off x="6665976" y="2926080"/>
+          <p:cNvPr id="34" name="Shape 32"/>
+          <p:cNvSpPr/>
+          <p:nvPr/>
+        </p:nvSpPr>
+        <p:spPr>
+          <a:xfrm>
+            <a:off x="6665976" y="3090672"/>
             <a:ext cx="749808" cy="109728"/>
           </a:xfrm>
           <a:prstGeom prst="rect">
@@ -8852,13 +8920,13 @@
       </p:sp>
       <p:sp>
         <p:nvSpPr>
-          <p:cNvPr id="33" name="Shape 31"/>
-          <p:cNvSpPr/>
-          <p:nvPr/>
-        </p:nvSpPr>
-        <p:spPr>
-          <a:xfrm>
-            <a:off x="7287768" y="2953512"/>
+          <p:cNvPr id="35" name="Shape 33"/>
+          <p:cNvSpPr/>
+          <p:nvPr/>
+        </p:nvSpPr>
+        <p:spPr>
+          <a:xfrm>
+            <a:off x="7287768" y="3118104"/>
             <a:ext cx="41148" cy="41148"/>
           </a:xfrm>
           <a:prstGeom prst="ellipse">
@@ -8877,13 +8945,13 @@
       </p:sp>
       <p:sp>
         <p:nvSpPr>
-          <p:cNvPr id="34" name="Shape 32"/>
-          <p:cNvSpPr/>
-          <p:nvPr/>
-        </p:nvSpPr>
-        <p:spPr>
-          <a:xfrm>
-            <a:off x="6665976" y="3090672"/>
+          <p:cNvPr id="36" name="Shape 34"/>
+          <p:cNvSpPr/>
+          <p:nvPr/>
+        </p:nvSpPr>
+        <p:spPr>
+          <a:xfrm>
+            <a:off x="6665976" y="3255264"/>
             <a:ext cx="749808" cy="109728"/>
           </a:xfrm>
           <a:prstGeom prst="rect">
@@ -8902,13 +8970,13 @@
       </p:sp>
       <p:sp>
         <p:nvSpPr>
-          <p:cNvPr id="35" name="Shape 33"/>
-          <p:cNvSpPr/>
-          <p:nvPr/>
-        </p:nvSpPr>
-        <p:spPr>
-          <a:xfrm>
-            <a:off x="7287768" y="3118104"/>
+          <p:cNvPr id="37" name="Shape 35"/>
+          <p:cNvSpPr/>
+          <p:nvPr/>
+        </p:nvSpPr>
+        <p:spPr>
+          <a:xfrm>
+            <a:off x="7287768" y="3282696"/>
             <a:ext cx="41148" cy="41148"/>
           </a:xfrm>
           <a:prstGeom prst="ellipse">
@@ -8927,13 +8995,13 @@
       </p:sp>
       <p:sp>
         <p:nvSpPr>
-          <p:cNvPr id="36" name="Text 34"/>
-          <p:cNvSpPr/>
-          <p:nvPr/>
-        </p:nvSpPr>
-        <p:spPr>
-          <a:xfrm>
-            <a:off x="6537960" y="3209544"/>
+          <p:cNvPr id="38" name="Text 36"/>
+          <p:cNvSpPr/>
+          <p:nvPr/>
+        </p:nvSpPr>
+        <p:spPr>
+          <a:xfrm>
+            <a:off x="6537960" y="3374136"/>
             <a:ext cx="1005840" cy="164592"/>
           </a:xfrm>
           <a:prstGeom prst="rect">
@@ -8968,13 +9036,13 @@
       </p:sp>
       <p:sp>
         <p:nvSpPr>
-          <p:cNvPr id="37" name="Text 35"/>
-          <p:cNvSpPr/>
-          <p:nvPr/>
-        </p:nvSpPr>
-        <p:spPr>
-          <a:xfrm>
-            <a:off x="5184648" y="3529584"/>
+          <p:cNvPr id="39" name="Text 37"/>
+          <p:cNvSpPr/>
+          <p:nvPr/>
+        </p:nvSpPr>
+        <p:spPr>
+          <a:xfrm>
+            <a:off x="5184648" y="3685032"/>
             <a:ext cx="2395728" cy="173736"/>
           </a:xfrm>
           <a:prstGeom prst="rect">
@@ -8993,7 +9061,7 @@
               <a:buNone/>
             </a:pPr>
             <a:r>
-              <a:rPr lang="en-US" sz="800" b="1" dirty="0">
+              <a:rPr lang="en-US" sz="850" b="1" dirty="0">
                 <a:solidFill>
                   <a:srgbClr val="F7F9FC"/>
                 </a:solidFill>
@@ -9003,19 +9071,19 @@
               </a:rPr>
               <a:t>60 usable cores · 240 ECPUs</a:t>
             </a:r>
-            <a:endParaRPr lang="en-US" sz="800" dirty="0"/>
-          </a:p>
-        </p:txBody>
-      </p:sp>
-      <p:sp>
-        <p:nvSpPr>
-          <p:cNvPr id="38" name="Shape 36"/>
-          <p:cNvSpPr/>
-          <p:nvPr/>
-        </p:nvSpPr>
-        <p:spPr>
-          <a:xfrm>
-            <a:off x="5239512" y="3813048"/>
+            <a:endParaRPr lang="en-US" sz="850" dirty="0"/>
+          </a:p>
+        </p:txBody>
+      </p:sp>
+      <p:sp>
+        <p:nvSpPr>
+          <p:cNvPr id="40" name="Shape 38"/>
+          <p:cNvSpPr/>
+          <p:nvPr/>
+        </p:nvSpPr>
+        <p:spPr>
+          <a:xfrm>
+            <a:off x="5239512" y="3968496"/>
             <a:ext cx="2304288" cy="0"/>
           </a:xfrm>
           <a:prstGeom prst="line">
@@ -9032,14 +9100,14 @@
       </p:sp>
       <p:sp>
         <p:nvSpPr>
-          <p:cNvPr id="39" name="Text 37"/>
-          <p:cNvSpPr/>
-          <p:nvPr/>
-        </p:nvSpPr>
-        <p:spPr>
-          <a:xfrm>
-            <a:off x="5385816" y="3867912"/>
-            <a:ext cx="1993392" cy="146304"/>
+          <p:cNvPr id="41" name="Text 39"/>
+          <p:cNvSpPr/>
+          <p:nvPr/>
+        </p:nvSpPr>
+        <p:spPr>
+          <a:xfrm>
+            <a:off x="5285232" y="4023360"/>
+            <a:ext cx="2212848" cy="146304"/>
           </a:xfrm>
           <a:prstGeom prst="rect">
             <a:avLst/>
@@ -9057,7 +9125,7 @@
               <a:buNone/>
             </a:pPr>
             <a:r>
-              <a:rPr lang="en-US" sz="730" b="1" dirty="0">
+              <a:rPr lang="en-US" sz="820" b="1" dirty="0">
                 <a:solidFill>
                   <a:srgbClr val="45C7D7"/>
                 </a:solidFill>
@@ -9065,21 +9133,21 @@
                 <a:ea typeface="Noto Sans KR" pitchFamily="34" charset="-122"/>
                 <a:cs typeface="Noto Sans KR" pitchFamily="34" charset="-120"/>
               </a:rPr>
-              <a:t>2 × 100 Gb/s RoCE</a:t>
-            </a:r>
-            <a:endParaRPr lang="en-US" sz="730" dirty="0"/>
-          </a:p>
-        </p:txBody>
-      </p:sp>
-      <p:sp>
-        <p:nvSpPr>
-          <p:cNvPr id="40" name="Shape 38"/>
-          <p:cNvSpPr/>
-          <p:nvPr/>
-        </p:nvSpPr>
-        <p:spPr>
-          <a:xfrm>
-            <a:off x="5138928" y="4270248"/>
+              <a:t>100 Gb/s RoCE internal fabric</a:t>
+            </a:r>
+            <a:endParaRPr lang="en-US" sz="820" dirty="0"/>
+          </a:p>
+        </p:txBody>
+      </p:sp>
+      <p:sp>
+        <p:nvSpPr>
+          <p:cNvPr id="42" name="Shape 40"/>
+          <p:cNvSpPr/>
+          <p:nvPr/>
+        </p:nvSpPr>
+        <p:spPr>
+          <a:xfrm>
+            <a:off x="5138928" y="4416552"/>
             <a:ext cx="694944" cy="758952"/>
           </a:xfrm>
           <a:prstGeom prst="roundRect">
@@ -9107,13 +9175,13 @@
       </p:sp>
       <p:sp>
         <p:nvSpPr>
-          <p:cNvPr id="41" name="Text 39"/>
-          <p:cNvSpPr/>
-          <p:nvPr/>
-        </p:nvSpPr>
-        <p:spPr>
-          <a:xfrm>
-            <a:off x="5138928" y="4389120"/>
+          <p:cNvPr id="43" name="Text 41"/>
+          <p:cNvSpPr/>
+          <p:nvPr/>
+        </p:nvSpPr>
+        <p:spPr>
+          <a:xfrm>
+            <a:off x="5138928" y="4535424"/>
             <a:ext cx="694944" cy="146304"/>
           </a:xfrm>
           <a:prstGeom prst="rect">
@@ -9148,13 +9216,13 @@
       </p:sp>
       <p:sp>
         <p:nvSpPr>
-          <p:cNvPr id="42" name="Text 40"/>
-          <p:cNvSpPr/>
-          <p:nvPr/>
-        </p:nvSpPr>
-        <p:spPr>
-          <a:xfrm>
-            <a:off x="5138928" y="4645152"/>
+          <p:cNvPr id="44" name="Text 42"/>
+          <p:cNvSpPr/>
+          <p:nvPr/>
+        </p:nvSpPr>
+        <p:spPr>
+          <a:xfrm>
+            <a:off x="5138928" y="4791456"/>
             <a:ext cx="694944" cy="128016"/>
           </a:xfrm>
           <a:prstGeom prst="rect">
@@ -9173,9 +9241,9 @@
               <a:buNone/>
             </a:pPr>
             <a:r>
-              <a:rPr lang="en-US" sz="700" dirty="0">
-                <a:solidFill>
-                  <a:srgbClr val="8290A3"/>
+              <a:rPr lang="en-US" sz="750" dirty="0">
+                <a:solidFill>
+                  <a:srgbClr val="A8B4C5"/>
                 </a:solidFill>
                 <a:latin typeface="Noto Sans KR" pitchFamily="34" charset="0"/>
                 <a:ea typeface="Noto Sans KR" pitchFamily="34" charset="-122"/>
@@ -9183,19 +9251,19 @@
               </a:rPr>
               <a:t>Base</a:t>
             </a:r>
-            <a:endParaRPr lang="en-US" sz="700" dirty="0"/>
-          </a:p>
-        </p:txBody>
-      </p:sp>
-      <p:sp>
-        <p:nvSpPr>
-          <p:cNvPr id="43" name="Shape 41"/>
-          <p:cNvSpPr/>
-          <p:nvPr/>
-        </p:nvSpPr>
-        <p:spPr>
-          <a:xfrm>
-            <a:off x="5989320" y="4270248"/>
+            <a:endParaRPr lang="en-US" sz="750" dirty="0"/>
+          </a:p>
+        </p:txBody>
+      </p:sp>
+      <p:sp>
+        <p:nvSpPr>
+          <p:cNvPr id="45" name="Shape 43"/>
+          <p:cNvSpPr/>
+          <p:nvPr/>
+        </p:nvSpPr>
+        <p:spPr>
+          <a:xfrm>
+            <a:off x="5989320" y="4416552"/>
             <a:ext cx="694944" cy="758952"/>
           </a:xfrm>
           <a:prstGeom prst="roundRect">
@@ -9223,13 +9291,13 @@
       </p:sp>
       <p:sp>
         <p:nvSpPr>
-          <p:cNvPr id="44" name="Text 42"/>
-          <p:cNvSpPr/>
-          <p:nvPr/>
-        </p:nvSpPr>
-        <p:spPr>
-          <a:xfrm>
-            <a:off x="5989320" y="4389120"/>
+          <p:cNvPr id="46" name="Text 44"/>
+          <p:cNvSpPr/>
+          <p:nvPr/>
+        </p:nvSpPr>
+        <p:spPr>
+          <a:xfrm>
+            <a:off x="5989320" y="4535424"/>
             <a:ext cx="694944" cy="146304"/>
           </a:xfrm>
           <a:prstGeom prst="rect">
@@ -9264,13 +9332,13 @@
       </p:sp>
       <p:sp>
         <p:nvSpPr>
-          <p:cNvPr id="45" name="Text 43"/>
-          <p:cNvSpPr/>
-          <p:nvPr/>
-        </p:nvSpPr>
-        <p:spPr>
-          <a:xfrm>
-            <a:off x="5989320" y="4645152"/>
+          <p:cNvPr id="47" name="Text 45"/>
+          <p:cNvSpPr/>
+          <p:nvPr/>
+        </p:nvSpPr>
+        <p:spPr>
+          <a:xfrm>
+            <a:off x="5989320" y="4791456"/>
             <a:ext cx="694944" cy="128016"/>
           </a:xfrm>
           <a:prstGeom prst="rect">
@@ -9289,9 +9357,9 @@
               <a:buNone/>
             </a:pPr>
             <a:r>
-              <a:rPr lang="en-US" sz="700" dirty="0">
-                <a:solidFill>
-                  <a:srgbClr val="8290A3"/>
+              <a:rPr lang="en-US" sz="750" dirty="0">
+                <a:solidFill>
+                  <a:srgbClr val="A8B4C5"/>
                 </a:solidFill>
                 <a:latin typeface="Noto Sans KR" pitchFamily="34" charset="0"/>
                 <a:ea typeface="Noto Sans KR" pitchFamily="34" charset="-122"/>
@@ -9299,19 +9367,19 @@
               </a:rPr>
               <a:t>Base</a:t>
             </a:r>
-            <a:endParaRPr lang="en-US" sz="700" dirty="0"/>
-          </a:p>
-        </p:txBody>
-      </p:sp>
-      <p:sp>
-        <p:nvSpPr>
-          <p:cNvPr id="46" name="Shape 44"/>
-          <p:cNvSpPr/>
-          <p:nvPr/>
-        </p:nvSpPr>
-        <p:spPr>
-          <a:xfrm>
-            <a:off x="6839712" y="4270248"/>
+            <a:endParaRPr lang="en-US" sz="750" dirty="0"/>
+          </a:p>
+        </p:txBody>
+      </p:sp>
+      <p:sp>
+        <p:nvSpPr>
+          <p:cNvPr id="48" name="Shape 46"/>
+          <p:cNvSpPr/>
+          <p:nvPr/>
+        </p:nvSpPr>
+        <p:spPr>
+          <a:xfrm>
+            <a:off x="6839712" y="4416552"/>
             <a:ext cx="694944" cy="758952"/>
           </a:xfrm>
           <a:prstGeom prst="roundRect">
@@ -9339,13 +9407,13 @@
       </p:sp>
       <p:sp>
         <p:nvSpPr>
-          <p:cNvPr id="47" name="Text 45"/>
-          <p:cNvSpPr/>
-          <p:nvPr/>
-        </p:nvSpPr>
-        <p:spPr>
-          <a:xfrm>
-            <a:off x="6839712" y="4389120"/>
+          <p:cNvPr id="49" name="Text 47"/>
+          <p:cNvSpPr/>
+          <p:nvPr/>
+        </p:nvSpPr>
+        <p:spPr>
+          <a:xfrm>
+            <a:off x="6839712" y="4535424"/>
             <a:ext cx="694944" cy="146304"/>
           </a:xfrm>
           <a:prstGeom prst="rect">
@@ -9380,13 +9448,13 @@
       </p:sp>
       <p:sp>
         <p:nvSpPr>
-          <p:cNvPr id="48" name="Text 46"/>
-          <p:cNvSpPr/>
-          <p:nvPr/>
-        </p:nvSpPr>
-        <p:spPr>
-          <a:xfrm>
-            <a:off x="6839712" y="4645152"/>
+          <p:cNvPr id="50" name="Text 48"/>
+          <p:cNvSpPr/>
+          <p:nvPr/>
+        </p:nvSpPr>
+        <p:spPr>
+          <a:xfrm>
+            <a:off x="6839712" y="4791456"/>
             <a:ext cx="694944" cy="128016"/>
           </a:xfrm>
           <a:prstGeom prst="rect">
@@ -9405,9 +9473,9 @@
               <a:buNone/>
             </a:pPr>
             <a:r>
-              <a:rPr lang="en-US" sz="700" dirty="0">
-                <a:solidFill>
-                  <a:srgbClr val="8290A3"/>
+              <a:rPr lang="en-US" sz="750" dirty="0">
+                <a:solidFill>
+                  <a:srgbClr val="A8B4C5"/>
                 </a:solidFill>
                 <a:latin typeface="Noto Sans KR" pitchFamily="34" charset="0"/>
                 <a:ea typeface="Noto Sans KR" pitchFamily="34" charset="-122"/>
@@ -9415,19 +9483,19 @@
               </a:rPr>
               <a:t>Base</a:t>
             </a:r>
-            <a:endParaRPr lang="en-US" sz="700" dirty="0"/>
-          </a:p>
-        </p:txBody>
-      </p:sp>
-      <p:sp>
-        <p:nvSpPr>
-          <p:cNvPr id="49" name="Text 47"/>
-          <p:cNvSpPr/>
-          <p:nvPr/>
-        </p:nvSpPr>
-        <p:spPr>
-          <a:xfrm>
-            <a:off x="5102352" y="5175504"/>
+            <a:endParaRPr lang="en-US" sz="750" dirty="0"/>
+          </a:p>
+        </p:txBody>
+      </p:sp>
+      <p:sp>
+        <p:nvSpPr>
+          <p:cNvPr id="51" name="Text 49"/>
+          <p:cNvSpPr/>
+          <p:nvPr/>
+        </p:nvSpPr>
+        <p:spPr>
+          <a:xfrm>
+            <a:off x="5102352" y="5285232"/>
             <a:ext cx="2596896" cy="173736"/>
           </a:xfrm>
           <a:prstGeom prst="rect">
@@ -9446,7 +9514,7 @@
               <a:buNone/>
             </a:pPr>
             <a:r>
-              <a:rPr lang="en-US" sz="900" b="1" dirty="0">
+              <a:rPr lang="en-US" sz="940" b="1" dirty="0">
                 <a:solidFill>
                   <a:srgbClr val="F7F9FC"/>
                 </a:solidFill>
@@ -9456,19 +9524,19 @@
               </a:rPr>
               <a:t>106 TB usable disk</a:t>
             </a:r>
-            <a:endParaRPr lang="en-US" sz="900" dirty="0"/>
-          </a:p>
-        </p:txBody>
-      </p:sp>
-      <p:sp>
-        <p:nvSpPr>
-          <p:cNvPr id="50" name="Text 48"/>
-          <p:cNvSpPr/>
-          <p:nvPr/>
-        </p:nvSpPr>
-        <p:spPr>
-          <a:xfrm>
-            <a:off x="5084064" y="5431536"/>
+            <a:endParaRPr lang="en-US" sz="940" dirty="0"/>
+          </a:p>
+        </p:txBody>
+      </p:sp>
+      <p:sp>
+        <p:nvSpPr>
+          <p:cNvPr id="52" name="Text 50"/>
+          <p:cNvSpPr/>
+          <p:nvPr/>
+        </p:nvSpPr>
+        <p:spPr>
+          <a:xfrm>
+            <a:off x="5084064" y="5522976"/>
             <a:ext cx="2633472" cy="155448"/>
           </a:xfrm>
           <a:prstGeom prst="rect">
@@ -9487,7 +9555,7 @@
               <a:buNone/>
             </a:pPr>
             <a:r>
-              <a:rPr lang="en-US" sz="760" b="1" dirty="0">
+              <a:rPr lang="en-US" sz="820" b="1" dirty="0">
                 <a:solidFill>
                   <a:srgbClr val="FF6B5E"/>
                 </a:solidFill>
@@ -9497,13 +9565,13 @@
               </a:rPr>
               <a:t>38.4 TB flash · no XRMEM</a:t>
             </a:r>
-            <a:endParaRPr lang="en-US" sz="760" dirty="0"/>
-          </a:p>
-        </p:txBody>
-      </p:sp>
-      <p:sp>
-        <p:nvSpPr>
-          <p:cNvPr id="51" name="Shape 49"/>
+            <a:endParaRPr lang="en-US" sz="820" dirty="0"/>
+          </a:p>
+        </p:txBody>
+      </p:sp>
+      <p:sp>
+        <p:nvSpPr>
+          <p:cNvPr id="53" name="Shape 51"/>
           <p:cNvSpPr/>
           <p:nvPr/>
         </p:nvSpPr>
@@ -9537,7 +9605,7 @@
       </p:sp>
       <p:sp>
         <p:nvSpPr>
-          <p:cNvPr id="52" name="Shape 50"/>
+          <p:cNvPr id="54" name="Shape 52"/>
           <p:cNvSpPr/>
           <p:nvPr/>
         </p:nvSpPr>
@@ -9564,7 +9632,7 @@
       </p:sp>
       <p:sp>
         <p:nvSpPr>
-          <p:cNvPr id="53" name="Text 51"/>
+          <p:cNvPr id="55" name="Text 53"/>
           <p:cNvSpPr/>
           <p:nvPr/>
         </p:nvSpPr>
@@ -9605,7 +9673,7 @@
       </p:sp>
       <p:sp>
         <p:nvSpPr>
-          <p:cNvPr id="54" name="Text 52"/>
+          <p:cNvPr id="56" name="Text 54"/>
           <p:cNvSpPr/>
           <p:nvPr/>
         </p:nvSpPr>
@@ -9646,7 +9714,7 @@
       </p:sp>
       <p:sp>
         <p:nvSpPr>
-          <p:cNvPr id="55" name="Text 53"/>
+          <p:cNvPr id="57" name="Text 55"/>
           <p:cNvSpPr/>
           <p:nvPr/>
         </p:nvSpPr>
@@ -9671,7 +9739,7 @@
               <a:buNone/>
             </a:pPr>
             <a:r>
-              <a:rPr lang="en-US" sz="880" b="1" dirty="0">
+              <a:rPr lang="en-US" sz="950" b="1" dirty="0">
                 <a:solidFill>
                   <a:srgbClr val="2DD4BF"/>
                 </a:solidFill>
@@ -9681,13 +9749,13 @@
               </a:rPr>
               <a:t>GI 19c · DB Home 19c</a:t>
             </a:r>
-            <a:endParaRPr lang="en-US" sz="880" dirty="0"/>
-          </a:p>
-        </p:txBody>
-      </p:sp>
-      <p:sp>
-        <p:nvSpPr>
-          <p:cNvPr id="56" name="Text 54"/>
+            <a:endParaRPr lang="en-US" sz="950" dirty="0"/>
+          </a:p>
+        </p:txBody>
+      </p:sp>
+      <p:sp>
+        <p:nvSpPr>
+          <p:cNvPr id="58" name="Text 56"/>
           <p:cNvSpPr/>
           <p:nvPr/>
         </p:nvSpPr>
@@ -9712,23 +9780,23 @@
               <a:buNone/>
             </a:pPr>
             <a:r>
-              <a:rPr lang="en-US" sz="800" dirty="0">
-                <a:solidFill>
-                  <a:srgbClr val="C4CDD9"/>
-                </a:solidFill>
-                <a:latin typeface="Noto Sans KR" pitchFamily="34" charset="0"/>
-                <a:ea typeface="Noto Sans KR" pitchFamily="34" charset="-122"/>
-                <a:cs typeface="Noto Sans KR" pitchFamily="34" charset="-120"/>
-              </a:rPr>
-              <a:t>기존 production CDB/PDB</a:t>
-            </a:r>
-            <a:endParaRPr lang="en-US" sz="800" dirty="0"/>
-          </a:p>
-        </p:txBody>
-      </p:sp>
-      <p:sp>
-        <p:nvSpPr>
-          <p:cNvPr id="57" name="Shape 55"/>
+              <a:rPr lang="en-US" sz="880" dirty="0">
+                <a:solidFill>
+                  <a:srgbClr val="D9E1EC"/>
+                </a:solidFill>
+                <a:latin typeface="Noto Sans KR" pitchFamily="34" charset="0"/>
+                <a:ea typeface="Noto Sans KR" pitchFamily="34" charset="-122"/>
+                <a:cs typeface="Noto Sans KR" pitchFamily="34" charset="-120"/>
+              </a:rPr>
+              <a:t>CPU·memory·storage: AWR sizing 후 할당</a:t>
+            </a:r>
+            <a:endParaRPr lang="en-US" sz="880" dirty="0"/>
+          </a:p>
+        </p:txBody>
+      </p:sp>
+      <p:sp>
+        <p:nvSpPr>
+          <p:cNvPr id="59" name="Shape 57"/>
           <p:cNvSpPr/>
           <p:nvPr/>
         </p:nvSpPr>
@@ -9762,7 +9830,7 @@
       </p:sp>
       <p:sp>
         <p:nvSpPr>
-          <p:cNvPr id="58" name="Shape 56"/>
+          <p:cNvPr id="60" name="Shape 58"/>
           <p:cNvSpPr/>
           <p:nvPr/>
         </p:nvSpPr>
@@ -9789,7 +9857,7 @@
       </p:sp>
       <p:sp>
         <p:nvSpPr>
-          <p:cNvPr id="59" name="Text 57"/>
+          <p:cNvPr id="61" name="Text 59"/>
           <p:cNvSpPr/>
           <p:nvPr/>
         </p:nvSpPr>
@@ -9830,7 +9898,7 @@
       </p:sp>
       <p:sp>
         <p:nvSpPr>
-          <p:cNvPr id="60" name="Text 58"/>
+          <p:cNvPr id="62" name="Text 60"/>
           <p:cNvSpPr/>
           <p:nvPr/>
         </p:nvSpPr>
@@ -9871,7 +9939,7 @@
       </p:sp>
       <p:sp>
         <p:nvSpPr>
-          <p:cNvPr id="61" name="Text 59"/>
+          <p:cNvPr id="63" name="Text 61"/>
           <p:cNvSpPr/>
           <p:nvPr/>
         </p:nvSpPr>
@@ -9896,7 +9964,7 @@
               <a:buNone/>
             </a:pPr>
             <a:r>
-              <a:rPr lang="en-US" sz="880" b="1" dirty="0">
+              <a:rPr lang="en-US" sz="950" b="1" dirty="0">
                 <a:solidFill>
                   <a:srgbClr val="B18CFF"/>
                 </a:solidFill>
@@ -9906,13 +9974,13 @@
               </a:rPr>
               <a:t>GI 26ai · DB Home 26ai</a:t>
             </a:r>
-            <a:endParaRPr lang="en-US" sz="880" dirty="0"/>
-          </a:p>
-        </p:txBody>
-      </p:sp>
-      <p:sp>
-        <p:nvSpPr>
-          <p:cNvPr id="62" name="Text 60"/>
+            <a:endParaRPr lang="en-US" sz="950" dirty="0"/>
+          </a:p>
+        </p:txBody>
+      </p:sp>
+      <p:sp>
+        <p:nvSpPr>
+          <p:cNvPr id="64" name="Text 62"/>
           <p:cNvSpPr/>
           <p:nvPr/>
         </p:nvSpPr>
@@ -9937,23 +10005,23 @@
               <a:buNone/>
             </a:pPr>
             <a:r>
-              <a:rPr lang="en-US" sz="800" dirty="0">
-                <a:solidFill>
-                  <a:srgbClr val="C4CDD9"/>
-                </a:solidFill>
-                <a:latin typeface="Noto Sans KR" pitchFamily="34" charset="0"/>
-                <a:ea typeface="Noto Sans KR" pitchFamily="34" charset="-122"/>
-                <a:cs typeface="Noto Sans KR" pitchFamily="34" charset="-120"/>
-              </a:rPr>
-              <a:t>AI Vector Search · 신규/전환</a:t>
-            </a:r>
-            <a:endParaRPr lang="en-US" sz="800" dirty="0"/>
-          </a:p>
-        </p:txBody>
-      </p:sp>
-      <p:sp>
-        <p:nvSpPr>
-          <p:cNvPr id="63" name="Shape 61"/>
+              <a:rPr lang="en-US" sz="880" dirty="0">
+                <a:solidFill>
+                  <a:srgbClr val="D9E1EC"/>
+                </a:solidFill>
+                <a:latin typeface="Noto Sans KR" pitchFamily="34" charset="0"/>
+                <a:ea typeface="Noto Sans KR" pitchFamily="34" charset="-122"/>
+                <a:cs typeface="Noto Sans KR" pitchFamily="34" charset="-120"/>
+              </a:rPr>
+              <a:t>CPU·memory·storage: 별도 sizing/승인</a:t>
+            </a:r>
+            <a:endParaRPr lang="en-US" sz="880" dirty="0"/>
+          </a:p>
+        </p:txBody>
+      </p:sp>
+      <p:sp>
+        <p:nvSpPr>
+          <p:cNvPr id="65" name="Shape 63"/>
           <p:cNvSpPr/>
           <p:nvPr/>
         </p:nvSpPr>
@@ -9977,7 +10045,7 @@
       </p:sp>
       <p:sp>
         <p:nvSpPr>
-          <p:cNvPr id="64" name="Shape 62"/>
+          <p:cNvPr id="66" name="Shape 64"/>
           <p:cNvSpPr/>
           <p:nvPr/>
         </p:nvSpPr>
@@ -10001,7 +10069,7 @@
       </p:sp>
       <p:sp>
         <p:nvSpPr>
-          <p:cNvPr id="65" name="Shape 63"/>
+          <p:cNvPr id="67" name="Shape 65"/>
           <p:cNvSpPr/>
           <p:nvPr/>
         </p:nvSpPr>
@@ -10028,7 +10096,7 @@
       </p:sp>
       <p:sp>
         <p:nvSpPr>
-          <p:cNvPr id="66" name="Text 64"/>
+          <p:cNvPr id="68" name="Text 66"/>
           <p:cNvSpPr/>
           <p:nvPr/>
         </p:nvSpPr>
@@ -10061,7 +10129,7 @@
                 <a:ea typeface="Noto Sans KR" pitchFamily="34" charset="-122"/>
                 <a:cs typeface="Noto Sans KR" pitchFamily="34" charset="-120"/>
               </a:rPr>
-              <a:t>최대 12 VM Clusters / Base System</a:t>
+              <a:t>현재 2개 · 시스템 최대 12 VM Clusters</a:t>
             </a:r>
             <a:endParaRPr lang="en-US" sz="850" dirty="0"/>
           </a:p>
@@ -10069,14 +10137,14 @@
       </p:sp>
       <p:sp>
         <p:nvSpPr>
-          <p:cNvPr id="67" name="Text 65"/>
-          <p:cNvSpPr/>
-          <p:nvPr/>
-        </p:nvSpPr>
-        <p:spPr>
-          <a:xfrm>
-            <a:off x="3246120" y="5815584"/>
-            <a:ext cx="4462272" cy="164592"/>
+          <p:cNvPr id="69" name="Text 67"/>
+          <p:cNvSpPr/>
+          <p:nvPr/>
+        </p:nvSpPr>
+        <p:spPr>
+          <a:xfrm>
+            <a:off x="8065008" y="5760720"/>
+            <a:ext cx="3127248" cy="146304"/>
           </a:xfrm>
           <a:prstGeom prst="rect">
             <a:avLst/>
@@ -10094,23 +10162,64 @@
               <a:buNone/>
             </a:pPr>
             <a:r>
-              <a:rPr lang="en-US" sz="780" b="1" dirty="0">
-                <a:solidFill>
-                  <a:srgbClr val="C4CDD9"/>
-                </a:solidFill>
-                <a:latin typeface="Noto Sans KR" pitchFamily="34" charset="0"/>
-                <a:ea typeface="Noto Sans KR" pitchFamily="34" charset="-122"/>
-                <a:cs typeface="Noto Sans KR" pitchFamily="34" charset="-120"/>
-              </a:rPr>
-              <a:t>Client VLAN · Backup VLAN · DNS/NTP · IAM</a:t>
-            </a:r>
-            <a:endParaRPr lang="en-US" sz="780" dirty="0"/>
-          </a:p>
-        </p:txBody>
-      </p:sp>
-      <p:sp>
-        <p:nvSpPr>
-          <p:cNvPr id="68" name="Shape 66"/>
+              <a:rPr lang="en-US" sz="830" b="1" dirty="0">
+                <a:solidFill>
+                  <a:srgbClr val="D9E1EC"/>
+                </a:solidFill>
+                <a:latin typeface="Noto Sans KR" pitchFamily="34" charset="0"/>
+                <a:ea typeface="Noto Sans KR" pitchFamily="34" charset="-122"/>
+                <a:cs typeface="Noto Sans KR" pitchFamily="34" charset="-120"/>
+              </a:rPr>
+              <a:t>논리 분리 · CPU/Memory 별도 할당 · 공용 Exadata Storage</a:t>
+            </a:r>
+            <a:endParaRPr lang="en-US" sz="830" dirty="0"/>
+          </a:p>
+        </p:txBody>
+      </p:sp>
+      <p:sp>
+        <p:nvSpPr>
+          <p:cNvPr id="70" name="Text 68"/>
+          <p:cNvSpPr/>
+          <p:nvPr/>
+        </p:nvSpPr>
+        <p:spPr>
+          <a:xfrm>
+            <a:off x="3154680" y="5376672"/>
+            <a:ext cx="1536192" cy="164592"/>
+          </a:xfrm>
+          <a:prstGeom prst="rect">
+            <a:avLst/>
+          </a:prstGeom>
+          <a:noFill/>
+          <a:ln/>
+        </p:spPr>
+        <p:txBody>
+          <a:bodyPr wrap="square" lIns="0" tIns="0" rIns="0" bIns="0" rtlCol="0" anchor="ctr">
+            <a:normAutofit/>
+          </a:bodyPr>
+          <a:lstStyle/>
+          <a:p>
+            <a:pPr algn="ctr" indent="0" marL="0">
+              <a:buNone/>
+            </a:pPr>
+            <a:r>
+              <a:rPr lang="en-US" sz="840" b="1" dirty="0">
+                <a:solidFill>
+                  <a:srgbClr val="D9E1EC"/>
+                </a:solidFill>
+                <a:latin typeface="Noto Sans KR" pitchFamily="34" charset="0"/>
+                <a:ea typeface="Noto Sans KR" pitchFamily="34" charset="-122"/>
+                <a:cs typeface="Noto Sans KR" pitchFamily="34" charset="-120"/>
+              </a:rPr>
+              <a:t>Client / Backup VLAN</a:t>
+            </a:r>
+            <a:endParaRPr lang="en-US" sz="840" dirty="0"/>
+          </a:p>
+        </p:txBody>
+      </p:sp>
+      <p:sp>
+        <p:nvSpPr>
+          <p:cNvPr id="71" name="Shape 69"/>
           <p:cNvSpPr/>
           <p:nvPr/>
         </p:nvSpPr>
@@ -10133,7 +10242,7 @@
       </p:sp>
       <p:sp>
         <p:nvSpPr>
-          <p:cNvPr id="69" name="Text 67"/>
+          <p:cNvPr id="72" name="Text 70"/>
           <p:cNvSpPr/>
           <p:nvPr/>
         </p:nvSpPr>
@@ -10160,7 +10269,7 @@
             <a:r>
               <a:rPr lang="en-US" sz="700" dirty="0">
                 <a:solidFill>
-                  <a:srgbClr val="8290A3"/>
+                  <a:srgbClr val="A8B4C5"/>
                 </a:solidFill>
                 <a:latin typeface="Noto Sans KR" pitchFamily="34" charset="0"/>
                 <a:ea typeface="Noto Sans KR" pitchFamily="34" charset="-122"/>
@@ -10174,7 +10283,7 @@
       </p:sp>
       <p:sp>
         <p:nvSpPr>
-          <p:cNvPr id="70" name="Text 68"/>
+          <p:cNvPr id="73" name="Text 71"/>
           <p:cNvSpPr/>
           <p:nvPr/>
         </p:nvSpPr>
@@ -10201,13 +10310,13 @@
             <a:r>
               <a:rPr lang="en-US" sz="680" dirty="0">
                 <a:solidFill>
-                  <a:srgbClr val="8290A3"/>
-                </a:solidFill>
-                <a:latin typeface="Noto Sans KR" pitchFamily="34" charset="0"/>
-                <a:ea typeface="Noto Sans KR" pitchFamily="34" charset="-122"/>
-                <a:cs typeface="Noto Sans KR" pitchFamily="34" charset="-120"/>
-              </a:rPr>
-              <a:t>Sources: ExaCC X11M DS v1.5 Table 1; Oracle Manage VM Clusters documentation</a:t>
+                  <a:srgbClr val="A8B4C5"/>
+                </a:solidFill>
+                <a:latin typeface="Noto Sans KR" pitchFamily="34" charset="0"/>
+                <a:ea typeface="Noto Sans KR" pitchFamily="34" charset="-122"/>
+                <a:cs typeface="Noto Sans KR" pitchFamily="34" charset="-120"/>
+              </a:rPr>
+              <a:t>Sources: [2] X11M DS Table 1 · [4] Manage VM Clusters</a:t>
             </a:r>
             <a:endParaRPr lang="en-US" sz="680" dirty="0"/>
           </a:p>
@@ -10362,7 +10471,7 @@
                 <a:ea typeface="Noto Sans KR" pitchFamily="34" charset="-122"/>
                 <a:cs typeface="Noto Sans KR" pitchFamily="34" charset="-120"/>
               </a:rPr>
-              <a:t>OCI X9M의 19c를 ExaCC로 이전하고, 26ai는 별도 lifecycle로 도입</a:t>
+              <a:t>19c baseline: ZDM Physical Online → 26ai는 별도 lifecycle</a:t>
             </a:r>
             <a:endParaRPr lang="en-US" sz="2500" dirty="0"/>
           </a:p>
@@ -10397,13 +10506,13 @@
             <a:r>
               <a:rPr lang="en-US" sz="1050" dirty="0">
                 <a:solidFill>
-                  <a:srgbClr val="C4CDD9"/>
-                </a:solidFill>
-                <a:latin typeface="Noto Sans KR" pitchFamily="34" charset="0"/>
-                <a:ea typeface="Noto Sans KR" pitchFamily="34" charset="-122"/>
-                <a:cs typeface="Noto Sans KR" pitchFamily="34" charset="-120"/>
-              </a:rPr>
-              <a:t>Oracle은 ExaCC 이전에 Zero Downtime Migration(ZDM)을 best practice로 권장한다.</a:t>
+                  <a:srgbClr val="D9E1EC"/>
+                </a:solidFill>
+                <a:latin typeface="Noto Sans KR" pitchFamily="34" charset="0"/>
+                <a:ea typeface="Noto Sans KR" pitchFamily="34" charset="-122"/>
+                <a:cs typeface="Noto Sans KR" pitchFamily="34" charset="-120"/>
+              </a:rPr>
+              <a:t>Data Guard 기반 online migration을 기준으로 abort·fallback·failback을 target write 시점에 따라 구분한다.</a:t>
             </a:r>
             <a:endParaRPr lang="en-US" sz="1050" dirty="0"/>
           </a:p>
@@ -10806,7 +10915,7 @@
             <a:r>
               <a:rPr lang="en-US" sz="800" b="1" dirty="0">
                 <a:solidFill>
-                  <a:srgbClr val="C4CDD9"/>
+                  <a:srgbClr val="D9E1EC"/>
                 </a:solidFill>
                 <a:latin typeface="Noto Sans KR" pitchFamily="34" charset="0"/>
                 <a:ea typeface="Noto Sans KR" pitchFamily="34" charset="-122"/>
@@ -10845,7 +10954,7 @@
               <a:buNone/>
             </a:pPr>
             <a:r>
-              <a:rPr lang="en-US" sz="850" b="1" dirty="0">
+              <a:rPr lang="en-US" sz="900" b="1" dirty="0">
                 <a:solidFill>
                   <a:srgbClr val="F6B44B"/>
                 </a:solidFill>
@@ -10853,9 +10962,9 @@
                 <a:ea typeface="Noto Sans KR" pitchFamily="34" charset="-122"/>
                 <a:cs typeface="Noto Sans KR" pitchFamily="34" charset="-120"/>
               </a:rPr>
-              <a:t>rollback standby</a:t>
-            </a:r>
-            <a:endParaRPr lang="en-US" sz="850" dirty="0"/>
+              <a:t>SOURCE PRIMARY</a:t>
+            </a:r>
+            <a:endParaRPr lang="en-US" sz="900" dirty="0"/>
           </a:p>
         </p:txBody>
       </p:sp>
@@ -10886,17 +10995,17 @@
               <a:buNone/>
             </a:pPr>
             <a:r>
-              <a:rPr lang="en-US" sz="750" dirty="0">
-                <a:solidFill>
-                  <a:srgbClr val="C4CDD9"/>
-                </a:solidFill>
-                <a:latin typeface="Noto Sans KR" pitchFamily="34" charset="0"/>
-                <a:ea typeface="Noto Sans KR" pitchFamily="34" charset="-122"/>
-                <a:cs typeface="Noto Sans KR" pitchFamily="34" charset="-120"/>
-              </a:rPr>
-              <a:t>cutover 후 write freeze</a:t>
-            </a:r>
-            <a:endParaRPr lang="en-US" sz="750" dirty="0"/>
+              <a:rPr lang="en-US" sz="820" dirty="0">
+                <a:solidFill>
+                  <a:srgbClr val="D9E1EC"/>
+                </a:solidFill>
+                <a:latin typeface="Noto Sans KR" pitchFamily="34" charset="0"/>
+                <a:ea typeface="Noto Sans KR" pitchFamily="34" charset="-122"/>
+                <a:cs typeface="Noto Sans KR" pitchFamily="34" charset="-120"/>
+              </a:rPr>
+              <a:t>switchover 전까지 write</a:t>
+            </a:r>
+            <a:endParaRPr lang="en-US" sz="820" dirty="0"/>
           </a:p>
         </p:txBody>
       </p:sp>
@@ -11336,17 +11445,17 @@
               <a:buNone/>
             </a:pPr>
             <a:r>
-              <a:rPr lang="en-US" sz="850" b="1" dirty="0">
-                <a:solidFill>
-                  <a:srgbClr val="B18CFF"/>
-                </a:solidFill>
-                <a:latin typeface="Noto Sans KR" pitchFamily="34" charset="0"/>
-                <a:ea typeface="Noto Sans KR" pitchFamily="34" charset="-122"/>
-                <a:cs typeface="Noto Sans KR" pitchFamily="34" charset="-120"/>
-              </a:rPr>
-              <a:t>26ai 별도 Cluster</a:t>
-            </a:r>
-            <a:endParaRPr lang="en-US" sz="850" dirty="0"/>
+              <a:rPr lang="en-US" sz="900" b="1" dirty="0">
+                <a:solidFill>
+                  <a:srgbClr val="2DD4BF"/>
+                </a:solidFill>
+                <a:latin typeface="Noto Sans KR" pitchFamily="34" charset="0"/>
+                <a:ea typeface="Noto Sans KR" pitchFamily="34" charset="-122"/>
+                <a:cs typeface="Noto Sans KR" pitchFamily="34" charset="-120"/>
+              </a:rPr>
+              <a:t>TARGET PRIMARY</a:t>
+            </a:r>
+            <a:endParaRPr lang="en-US" sz="900" dirty="0"/>
           </a:p>
         </p:txBody>
       </p:sp>
@@ -11377,17 +11486,17 @@
               <a:buNone/>
             </a:pPr>
             <a:r>
-              <a:rPr lang="en-US" sz="750" dirty="0">
-                <a:solidFill>
-                  <a:srgbClr val="C4CDD9"/>
-                </a:solidFill>
-                <a:latin typeface="Noto Sans KR" pitchFamily="34" charset="0"/>
-                <a:ea typeface="Noto Sans KR" pitchFamily="34" charset="-122"/>
-                <a:cs typeface="Noto Sans KR" pitchFamily="34" charset="-120"/>
-              </a:rPr>
-              <a:t>신규/업그레이드</a:t>
-            </a:r>
-            <a:endParaRPr lang="en-US" sz="750" dirty="0"/>
+              <a:rPr lang="en-US" sz="820" dirty="0">
+                <a:solidFill>
+                  <a:srgbClr val="D9E1EC"/>
+                </a:solidFill>
+                <a:latin typeface="Noto Sans KR" pitchFamily="34" charset="0"/>
+                <a:ea typeface="Noto Sans KR" pitchFamily="34" charset="-122"/>
+                <a:cs typeface="Noto Sans KR" pitchFamily="34" charset="-120"/>
+              </a:rPr>
+              <a:t>switchover 후 write</a:t>
+            </a:r>
+            <a:endParaRPr lang="en-US" sz="820" dirty="0"/>
           </a:p>
         </p:txBody>
       </p:sp>
@@ -11411,6 +11520,7 @@
               <a:srgbClr val="345169"/>
             </a:solidFill>
             <a:prstDash val="solid"/>
+            <a:tailEnd type="triangle"/>
           </a:ln>
         </p:spPr>
       </p:sp>
@@ -11507,7 +11617,7 @@
               <a:buNone/>
             </a:pPr>
             <a:r>
-              <a:rPr lang="en-US" sz="900" b="1" dirty="0">
+              <a:rPr lang="en-US" sz="980" b="1" dirty="0">
                 <a:solidFill>
                   <a:srgbClr val="F7F9FC"/>
                 </a:solidFill>
@@ -11515,9 +11625,9 @@
                 <a:ea typeface="Noto Sans KR" pitchFamily="34" charset="-122"/>
                 <a:cs typeface="Noto Sans KR" pitchFamily="34" charset="-120"/>
               </a:rPr>
-              <a:t>측정</a:t>
-            </a:r>
-            <a:endParaRPr lang="en-US" sz="900" dirty="0"/>
+              <a:t>Assess</a:t>
+            </a:r>
+            <a:endParaRPr lang="en-US" sz="980" dirty="0"/>
           </a:p>
         </p:txBody>
       </p:sp>
@@ -11548,34 +11658,34 @@
               <a:buNone/>
             </a:pPr>
             <a:r>
-              <a:rPr lang="en-US" sz="740" dirty="0">
-                <a:solidFill>
-                  <a:srgbClr val="C4CDD9"/>
-                </a:solidFill>
-                <a:latin typeface="Noto Sans KR" pitchFamily="34" charset="0"/>
-                <a:ea typeface="Noto Sans KR" pitchFamily="34" charset="-122"/>
-                <a:cs typeface="Noto Sans KR" pitchFamily="34" charset="-120"/>
-              </a:rPr>
-              <a:t>AWR · 용량</a:t>
-            </a:r>
-            <a:endParaRPr lang="en-US" sz="740" dirty="0"/>
+              <a:rPr lang="en-US" sz="820" dirty="0">
+                <a:solidFill>
+                  <a:srgbClr val="D9E1EC"/>
+                </a:solidFill>
+                <a:latin typeface="Noto Sans KR" pitchFamily="34" charset="0"/>
+                <a:ea typeface="Noto Sans KR" pitchFamily="34" charset="-122"/>
+                <a:cs typeface="Noto Sans KR" pitchFamily="34" charset="-120"/>
+              </a:rPr>
+              <a:t>AWR · ASM</a:t>
+            </a:r>
+            <a:endParaRPr lang="en-US" sz="820" dirty="0"/>
           </a:p>
           <a:p>
             <a:pPr algn="ctr" indent="0" marL="0">
               <a:buNone/>
             </a:pPr>
             <a:r>
-              <a:rPr lang="en-US" sz="740" dirty="0">
-                <a:solidFill>
-                  <a:srgbClr val="C4CDD9"/>
-                </a:solidFill>
-                <a:latin typeface="Noto Sans KR" pitchFamily="34" charset="0"/>
-                <a:ea typeface="Noto Sans KR" pitchFamily="34" charset="-122"/>
-                <a:cs typeface="Noto Sans KR" pitchFamily="34" charset="-120"/>
-              </a:rPr>
-              <a:t>IOPS · 성장</a:t>
-            </a:r>
-            <a:endParaRPr lang="en-US" sz="740" dirty="0"/>
+              <a:rPr lang="en-US" sz="820" dirty="0">
+                <a:solidFill>
+                  <a:srgbClr val="D9E1EC"/>
+                </a:solidFill>
+                <a:latin typeface="Noto Sans KR" pitchFamily="34" charset="0"/>
+                <a:ea typeface="Noto Sans KR" pitchFamily="34" charset="-122"/>
+                <a:cs typeface="Noto Sans KR" pitchFamily="34" charset="-120"/>
+              </a:rPr>
+              <a:t>RPO/RTO · 성장</a:t>
+            </a:r>
+            <a:endParaRPr lang="en-US" sz="820" dirty="0"/>
           </a:p>
         </p:txBody>
       </p:sp>
@@ -11672,7 +11782,7 @@
               <a:buNone/>
             </a:pPr>
             <a:r>
-              <a:rPr lang="en-US" sz="900" b="1" dirty="0">
+              <a:rPr lang="en-US" sz="980" b="1" dirty="0">
                 <a:solidFill>
                   <a:srgbClr val="F7F9FC"/>
                 </a:solidFill>
@@ -11682,7 +11792,7 @@
               </a:rPr>
               <a:t>Foundation</a:t>
             </a:r>
-            <a:endParaRPr lang="en-US" sz="900" dirty="0"/>
+            <a:endParaRPr lang="en-US" sz="980" dirty="0"/>
           </a:p>
         </p:txBody>
       </p:sp>
@@ -11713,9 +11823,9 @@
               <a:buNone/>
             </a:pPr>
             <a:r>
-              <a:rPr lang="en-US" sz="740" dirty="0">
-                <a:solidFill>
-                  <a:srgbClr val="C4CDD9"/>
+              <a:rPr lang="en-US" sz="820" dirty="0">
+                <a:solidFill>
+                  <a:srgbClr val="D9E1EC"/>
                 </a:solidFill>
                 <a:latin typeface="Noto Sans KR" pitchFamily="34" charset="0"/>
                 <a:ea typeface="Noto Sans KR" pitchFamily="34" charset="-122"/>
@@ -11723,16 +11833,16 @@
               </a:rPr>
               <a:t>IAM · VLAN · 방화벽</a:t>
             </a:r>
-            <a:endParaRPr lang="en-US" sz="740" dirty="0"/>
+            <a:endParaRPr lang="en-US" sz="820" dirty="0"/>
           </a:p>
           <a:p>
             <a:pPr algn="ctr" indent="0" marL="0">
               <a:buNone/>
             </a:pPr>
             <a:r>
-              <a:rPr lang="en-US" sz="740" dirty="0">
-                <a:solidFill>
-                  <a:srgbClr val="C4CDD9"/>
+              <a:rPr lang="en-US" sz="820" dirty="0">
+                <a:solidFill>
+                  <a:srgbClr val="D9E1EC"/>
                 </a:solidFill>
                 <a:latin typeface="Noto Sans KR" pitchFamily="34" charset="0"/>
                 <a:ea typeface="Noto Sans KR" pitchFamily="34" charset="-122"/>
@@ -11740,7 +11850,7 @@
               </a:rPr>
               <a:t>DNS/NTP · backup</a:t>
             </a:r>
-            <a:endParaRPr lang="en-US" sz="740" dirty="0"/>
+            <a:endParaRPr lang="en-US" sz="820" dirty="0"/>
           </a:p>
         </p:txBody>
       </p:sp>
@@ -11755,15 +11865,15 @@
             <a:off x="4864608" y="2624328"/>
             <a:ext cx="658368" cy="658368"/>
           </a:xfrm>
-          <a:prstGeom prst="ellipse">
+          <a:prstGeom prst="diamond">
             <a:avLst/>
           </a:prstGeom>
           <a:solidFill>
             <a:srgbClr val="1F3447"/>
           </a:solidFill>
-          <a:ln w="15240">
+          <a:ln w="22860">
             <a:solidFill>
-              <a:srgbClr val="61A8FF"/>
+              <a:srgbClr val="F6B44B"/>
             </a:solidFill>
             <a:prstDash val="solid"/>
           </a:ln>
@@ -11818,6 +11928,47 @@
         </p:nvSpPr>
         <p:spPr>
           <a:xfrm>
+            <a:off x="4846320" y="2386584"/>
+            <a:ext cx="694944" cy="128016"/>
+          </a:xfrm>
+          <a:prstGeom prst="rect">
+            <a:avLst/>
+          </a:prstGeom>
+          <a:noFill/>
+          <a:ln/>
+        </p:spPr>
+        <p:txBody>
+          <a:bodyPr wrap="square" lIns="0" tIns="0" rIns="0" bIns="0" rtlCol="0" anchor="ctr">
+            <a:normAutofit/>
+          </a:bodyPr>
+          <a:lstStyle/>
+          <a:p>
+            <a:pPr algn="ctr" indent="0" marL="0">
+              <a:buNone/>
+            </a:pPr>
+            <a:r>
+              <a:rPr lang="en-US" sz="750" b="1" dirty="0">
+                <a:solidFill>
+                  <a:srgbClr val="F6B44B"/>
+                </a:solidFill>
+                <a:latin typeface="Noto Sans KR" pitchFamily="34" charset="0"/>
+                <a:ea typeface="Noto Sans KR" pitchFamily="34" charset="-122"/>
+                <a:cs typeface="Noto Sans KR" pitchFamily="34" charset="-120"/>
+              </a:rPr>
+              <a:t>GATE</a:t>
+            </a:r>
+            <a:endParaRPr lang="en-US" sz="750" dirty="0"/>
+          </a:p>
+        </p:txBody>
+      </p:sp>
+      <p:sp>
+        <p:nvSpPr>
+          <p:cNvPr id="47" name="Text 45"/>
+          <p:cNvSpPr/>
+          <p:nvPr/>
+        </p:nvSpPr>
+        <p:spPr>
+          <a:xfrm>
             <a:off x="4645152" y="3438144"/>
             <a:ext cx="1097280" cy="173736"/>
           </a:xfrm>
@@ -11837,7 +11988,7 @@
               <a:buNone/>
             </a:pPr>
             <a:r>
-              <a:rPr lang="en-US" sz="900" b="1" dirty="0">
+              <a:rPr lang="en-US" sz="980" b="1" dirty="0">
                 <a:solidFill>
                   <a:srgbClr val="F7F9FC"/>
                 </a:solidFill>
@@ -11847,13 +11998,13 @@
               </a:rPr>
               <a:t>Provision</a:t>
             </a:r>
-            <a:endParaRPr lang="en-US" sz="900" dirty="0"/>
-          </a:p>
-        </p:txBody>
-      </p:sp>
-      <p:sp>
-        <p:nvSpPr>
-          <p:cNvPr id="47" name="Text 45"/>
+            <a:endParaRPr lang="en-US" sz="980" dirty="0"/>
+          </a:p>
+        </p:txBody>
+      </p:sp>
+      <p:sp>
+        <p:nvSpPr>
+          <p:cNvPr id="48" name="Text 46"/>
           <p:cNvSpPr/>
           <p:nvPr/>
         </p:nvSpPr>
@@ -11878,26 +12029,26 @@
               <a:buNone/>
             </a:pPr>
             <a:r>
-              <a:rPr lang="en-US" sz="740" dirty="0">
-                <a:solidFill>
-                  <a:srgbClr val="C4CDD9"/>
-                </a:solidFill>
-                <a:latin typeface="Noto Sans KR" pitchFamily="34" charset="0"/>
-                <a:ea typeface="Noto Sans KR" pitchFamily="34" charset="-122"/>
-                <a:cs typeface="Noto Sans KR" pitchFamily="34" charset="-120"/>
-              </a:rPr>
-              <a:t>Base sizing 통과</a:t>
-            </a:r>
-            <a:endParaRPr lang="en-US" sz="740" dirty="0"/>
+              <a:rPr lang="en-US" sz="820" dirty="0">
+                <a:solidFill>
+                  <a:srgbClr val="D9E1EC"/>
+                </a:solidFill>
+                <a:latin typeface="Noto Sans KR" pitchFamily="34" charset="0"/>
+                <a:ea typeface="Noto Sans KR" pitchFamily="34" charset="-122"/>
+                <a:cs typeface="Noto Sans KR" pitchFamily="34" charset="-120"/>
+              </a:rPr>
+              <a:t>Base gate 통과</a:t>
+            </a:r>
+            <a:endParaRPr lang="en-US" sz="820" dirty="0"/>
           </a:p>
           <a:p>
             <a:pPr algn="ctr" indent="0" marL="0">
               <a:buNone/>
             </a:pPr>
             <a:r>
-              <a:rPr lang="en-US" sz="740" dirty="0">
-                <a:solidFill>
-                  <a:srgbClr val="C4CDD9"/>
+              <a:rPr lang="en-US" sz="820" dirty="0">
+                <a:solidFill>
+                  <a:srgbClr val="D9E1EC"/>
                 </a:solidFill>
                 <a:latin typeface="Noto Sans KR" pitchFamily="34" charset="0"/>
                 <a:ea typeface="Noto Sans KR" pitchFamily="34" charset="-122"/>
@@ -11905,13 +12056,13 @@
               </a:rPr>
               <a:t>19c Cluster 생성</a:t>
             </a:r>
-            <a:endParaRPr lang="en-US" sz="740" dirty="0"/>
-          </a:p>
-        </p:txBody>
-      </p:sp>
-      <p:sp>
-        <p:nvSpPr>
-          <p:cNvPr id="48" name="Shape 46"/>
+            <a:endParaRPr lang="en-US" sz="820" dirty="0"/>
+          </a:p>
+        </p:txBody>
+      </p:sp>
+      <p:sp>
+        <p:nvSpPr>
+          <p:cNvPr id="49" name="Shape 47"/>
           <p:cNvSpPr/>
           <p:nvPr/>
         </p:nvSpPr>
@@ -11936,7 +12087,7 @@
       </p:sp>
       <p:sp>
         <p:nvSpPr>
-          <p:cNvPr id="49" name="Text 47"/>
+          <p:cNvPr id="50" name="Text 48"/>
           <p:cNvSpPr/>
           <p:nvPr/>
         </p:nvSpPr>
@@ -11977,7 +12128,7 @@
       </p:sp>
       <p:sp>
         <p:nvSpPr>
-          <p:cNvPr id="50" name="Text 48"/>
+          <p:cNvPr id="51" name="Text 49"/>
           <p:cNvSpPr/>
           <p:nvPr/>
         </p:nvSpPr>
@@ -12002,7 +12153,7 @@
               <a:buNone/>
             </a:pPr>
             <a:r>
-              <a:rPr lang="en-US" sz="900" b="1" dirty="0">
+              <a:rPr lang="en-US" sz="980" b="1" dirty="0">
                 <a:solidFill>
                   <a:srgbClr val="F7F9FC"/>
                 </a:solidFill>
@@ -12010,15 +12161,15 @@
                 <a:ea typeface="Noto Sans KR" pitchFamily="34" charset="-122"/>
                 <a:cs typeface="Noto Sans KR" pitchFamily="34" charset="-120"/>
               </a:rPr>
-              <a:t>Replicate</a:t>
-            </a:r>
-            <a:endParaRPr lang="en-US" sz="900" dirty="0"/>
-          </a:p>
-        </p:txBody>
-      </p:sp>
-      <p:sp>
-        <p:nvSpPr>
-          <p:cNvPr id="51" name="Text 49"/>
+              <a:t>Pre-copy</a:t>
+            </a:r>
+            <a:endParaRPr lang="en-US" sz="980" dirty="0"/>
+          </a:p>
+        </p:txBody>
+      </p:sp>
+      <p:sp>
+        <p:nvSpPr>
+          <p:cNvPr id="52" name="Text 50"/>
           <p:cNvSpPr/>
           <p:nvPr/>
         </p:nvSpPr>
@@ -12043,40 +12194,40 @@
               <a:buNone/>
             </a:pPr>
             <a:r>
-              <a:rPr lang="en-US" sz="740" dirty="0">
-                <a:solidFill>
-                  <a:srgbClr val="C4CDD9"/>
-                </a:solidFill>
-                <a:latin typeface="Noto Sans KR" pitchFamily="34" charset="0"/>
-                <a:ea typeface="Noto Sans KR" pitchFamily="34" charset="-122"/>
-                <a:cs typeface="Noto Sans KR" pitchFamily="34" charset="-120"/>
-              </a:rPr>
-              <a:t>ZDM · Data Guard</a:t>
-            </a:r>
-            <a:endParaRPr lang="en-US" sz="740" dirty="0"/>
+              <a:rPr lang="en-US" sz="820" dirty="0">
+                <a:solidFill>
+                  <a:srgbClr val="D9E1EC"/>
+                </a:solidFill>
+                <a:latin typeface="Noto Sans KR" pitchFamily="34" charset="0"/>
+                <a:ea typeface="Noto Sans KR" pitchFamily="34" charset="-122"/>
+                <a:cs typeface="Noto Sans KR" pitchFamily="34" charset="-120"/>
+              </a:rPr>
+              <a:t>ZDM Physical Online</a:t>
+            </a:r>
+            <a:endParaRPr lang="en-US" sz="820" dirty="0"/>
           </a:p>
           <a:p>
             <a:pPr algn="ctr" indent="0" marL="0">
               <a:buNone/>
             </a:pPr>
             <a:r>
-              <a:rPr lang="en-US" sz="740" dirty="0">
-                <a:solidFill>
-                  <a:srgbClr val="C4CDD9"/>
-                </a:solidFill>
-                <a:latin typeface="Noto Sans KR" pitchFamily="34" charset="0"/>
-                <a:ea typeface="Noto Sans KR" pitchFamily="34" charset="-122"/>
-                <a:cs typeface="Noto Sans KR" pitchFamily="34" charset="-120"/>
-              </a:rPr>
-              <a:t>RMAN/GoldenGate</a:t>
-            </a:r>
-            <a:endParaRPr lang="en-US" sz="740" dirty="0"/>
-          </a:p>
-        </p:txBody>
-      </p:sp>
-      <p:sp>
-        <p:nvSpPr>
-          <p:cNvPr id="52" name="Shape 50"/>
+              <a:rPr lang="en-US" sz="820" dirty="0">
+                <a:solidFill>
+                  <a:srgbClr val="D9E1EC"/>
+                </a:solidFill>
+                <a:latin typeface="Noto Sans KR" pitchFamily="34" charset="0"/>
+                <a:ea typeface="Noto Sans KR" pitchFamily="34" charset="-122"/>
+                <a:cs typeface="Noto Sans KR" pitchFamily="34" charset="-120"/>
+              </a:rPr>
+              <a:t>Data Guard sync</a:t>
+            </a:r>
+            <a:endParaRPr lang="en-US" sz="820" dirty="0"/>
+          </a:p>
+        </p:txBody>
+      </p:sp>
+      <p:sp>
+        <p:nvSpPr>
+          <p:cNvPr id="53" name="Shape 51"/>
           <p:cNvSpPr/>
           <p:nvPr/>
         </p:nvSpPr>
@@ -12085,15 +12236,15 @@
             <a:off x="7223760" y="2624328"/>
             <a:ext cx="658368" cy="658368"/>
           </a:xfrm>
-          <a:prstGeom prst="ellipse">
+          <a:prstGeom prst="diamond">
             <a:avLst/>
           </a:prstGeom>
           <a:solidFill>
             <a:srgbClr val="153B3A"/>
           </a:solidFill>
-          <a:ln w="15240">
+          <a:ln w="22860">
             <a:solidFill>
-              <a:srgbClr val="2DD4BF"/>
+              <a:srgbClr val="F6B44B"/>
             </a:solidFill>
             <a:prstDash val="solid"/>
           </a:ln>
@@ -12101,7 +12252,7 @@
       </p:sp>
       <p:sp>
         <p:nvSpPr>
-          <p:cNvPr id="53" name="Text 51"/>
+          <p:cNvPr id="54" name="Text 52"/>
           <p:cNvSpPr/>
           <p:nvPr/>
         </p:nvSpPr>
@@ -12142,7 +12293,48 @@
       </p:sp>
       <p:sp>
         <p:nvSpPr>
-          <p:cNvPr id="54" name="Text 52"/>
+          <p:cNvPr id="55" name="Text 53"/>
+          <p:cNvSpPr/>
+          <p:nvPr/>
+        </p:nvSpPr>
+        <p:spPr>
+          <a:xfrm>
+            <a:off x="7205472" y="2386584"/>
+            <a:ext cx="694944" cy="128016"/>
+          </a:xfrm>
+          <a:prstGeom prst="rect">
+            <a:avLst/>
+          </a:prstGeom>
+          <a:noFill/>
+          <a:ln/>
+        </p:spPr>
+        <p:txBody>
+          <a:bodyPr wrap="square" lIns="0" tIns="0" rIns="0" bIns="0" rtlCol="0" anchor="ctr">
+            <a:normAutofit/>
+          </a:bodyPr>
+          <a:lstStyle/>
+          <a:p>
+            <a:pPr algn="ctr" indent="0" marL="0">
+              <a:buNone/>
+            </a:pPr>
+            <a:r>
+              <a:rPr lang="en-US" sz="750" b="1" dirty="0">
+                <a:solidFill>
+                  <a:srgbClr val="F6B44B"/>
+                </a:solidFill>
+                <a:latin typeface="Noto Sans KR" pitchFamily="34" charset="0"/>
+                <a:ea typeface="Noto Sans KR" pitchFamily="34" charset="-122"/>
+                <a:cs typeface="Noto Sans KR" pitchFamily="34" charset="-120"/>
+              </a:rPr>
+              <a:t>GATE</a:t>
+            </a:r>
+            <a:endParaRPr lang="en-US" sz="750" dirty="0"/>
+          </a:p>
+        </p:txBody>
+      </p:sp>
+      <p:sp>
+        <p:nvSpPr>
+          <p:cNvPr id="56" name="Text 54"/>
           <p:cNvSpPr/>
           <p:nvPr/>
         </p:nvSpPr>
@@ -12167,7 +12359,7 @@
               <a:buNone/>
             </a:pPr>
             <a:r>
-              <a:rPr lang="en-US" sz="900" b="1" dirty="0">
+              <a:rPr lang="en-US" sz="980" b="1" dirty="0">
                 <a:solidFill>
                   <a:srgbClr val="F7F9FC"/>
                 </a:solidFill>
@@ -12175,15 +12367,15 @@
                 <a:ea typeface="Noto Sans KR" pitchFamily="34" charset="-122"/>
                 <a:cs typeface="Noto Sans KR" pitchFamily="34" charset="-120"/>
               </a:rPr>
-              <a:t>Validate</a:t>
-            </a:r>
-            <a:endParaRPr lang="en-US" sz="900" dirty="0"/>
-          </a:p>
-        </p:txBody>
-      </p:sp>
-      <p:sp>
-        <p:nvSpPr>
-          <p:cNvPr id="55" name="Text 53"/>
+              <a:t>Switchover</a:t>
+            </a:r>
+            <a:endParaRPr lang="en-US" sz="980" dirty="0"/>
+          </a:p>
+        </p:txBody>
+      </p:sp>
+      <p:sp>
+        <p:nvSpPr>
+          <p:cNvPr id="57" name="Text 55"/>
           <p:cNvSpPr/>
           <p:nvPr/>
         </p:nvSpPr>
@@ -12208,40 +12400,40 @@
               <a:buNone/>
             </a:pPr>
             <a:r>
-              <a:rPr lang="en-US" sz="740" dirty="0">
-                <a:solidFill>
-                  <a:srgbClr val="C4CDD9"/>
-                </a:solidFill>
-                <a:latin typeface="Noto Sans KR" pitchFamily="34" charset="0"/>
-                <a:ea typeface="Noto Sans KR" pitchFamily="34" charset="-122"/>
-                <a:cs typeface="Noto Sans KR" pitchFamily="34" charset="-120"/>
-              </a:rPr>
-              <a:t>성능 · HA/DR</a:t>
-            </a:r>
-            <a:endParaRPr lang="en-US" sz="740" dirty="0"/>
+              <a:rPr lang="en-US" sz="820" dirty="0">
+                <a:solidFill>
+                  <a:srgbClr val="D9E1EC"/>
+                </a:solidFill>
+                <a:latin typeface="Noto Sans KR" pitchFamily="34" charset="0"/>
+                <a:ea typeface="Noto Sans KR" pitchFamily="34" charset="-122"/>
+                <a:cs typeface="Noto Sans KR" pitchFamily="34" charset="-120"/>
+              </a:rPr>
+              <a:t>write stop · final sync</a:t>
+            </a:r>
+            <a:endParaRPr lang="en-US" sz="820" dirty="0"/>
           </a:p>
           <a:p>
             <a:pPr algn="ctr" indent="0" marL="0">
               <a:buNone/>
             </a:pPr>
             <a:r>
-              <a:rPr lang="en-US" sz="740" dirty="0">
-                <a:solidFill>
-                  <a:srgbClr val="C4CDD9"/>
-                </a:solidFill>
-                <a:latin typeface="Noto Sans KR" pitchFamily="34" charset="0"/>
-                <a:ea typeface="Noto Sans KR" pitchFamily="34" charset="-122"/>
-                <a:cs typeface="Noto Sans KR" pitchFamily="34" charset="-120"/>
-              </a:rPr>
-              <a:t>backup · 보안</a:t>
-            </a:r>
-            <a:endParaRPr lang="en-US" sz="740" dirty="0"/>
-          </a:p>
-        </p:txBody>
-      </p:sp>
-      <p:sp>
-        <p:nvSpPr>
-          <p:cNvPr id="56" name="Shape 54"/>
+              <a:rPr lang="en-US" sz="820" dirty="0">
+                <a:solidFill>
+                  <a:srgbClr val="D9E1EC"/>
+                </a:solidFill>
+                <a:latin typeface="Noto Sans KR" pitchFamily="34" charset="0"/>
+                <a:ea typeface="Noto Sans KR" pitchFamily="34" charset="-122"/>
+                <a:cs typeface="Noto Sans KR" pitchFamily="34" charset="-120"/>
+              </a:rPr>
+              <a:t>role/route 전환</a:t>
+            </a:r>
+            <a:endParaRPr lang="en-US" sz="820" dirty="0"/>
+          </a:p>
+        </p:txBody>
+      </p:sp>
+      <p:sp>
+        <p:nvSpPr>
+          <p:cNvPr id="58" name="Shape 56"/>
           <p:cNvSpPr/>
           <p:nvPr/>
         </p:nvSpPr>
@@ -12250,15 +12442,15 @@
             <a:off x="8403336" y="2624328"/>
             <a:ext cx="658368" cy="658368"/>
           </a:xfrm>
-          <a:prstGeom prst="ellipse">
+          <a:prstGeom prst="diamond">
             <a:avLst/>
           </a:prstGeom>
           <a:solidFill>
             <a:srgbClr val="153B3A"/>
           </a:solidFill>
-          <a:ln w="15240">
+          <a:ln w="22860">
             <a:solidFill>
-              <a:srgbClr val="2DD4BF"/>
+              <a:srgbClr val="F6B44B"/>
             </a:solidFill>
             <a:prstDash val="solid"/>
           </a:ln>
@@ -12266,7 +12458,7 @@
       </p:sp>
       <p:sp>
         <p:nvSpPr>
-          <p:cNvPr id="57" name="Text 55"/>
+          <p:cNvPr id="59" name="Text 57"/>
           <p:cNvSpPr/>
           <p:nvPr/>
         </p:nvSpPr>
@@ -12307,7 +12499,48 @@
       </p:sp>
       <p:sp>
         <p:nvSpPr>
-          <p:cNvPr id="58" name="Text 56"/>
+          <p:cNvPr id="60" name="Text 58"/>
+          <p:cNvSpPr/>
+          <p:nvPr/>
+        </p:nvSpPr>
+        <p:spPr>
+          <a:xfrm>
+            <a:off x="8385048" y="2386584"/>
+            <a:ext cx="694944" cy="128016"/>
+          </a:xfrm>
+          <a:prstGeom prst="rect">
+            <a:avLst/>
+          </a:prstGeom>
+          <a:noFill/>
+          <a:ln/>
+        </p:spPr>
+        <p:txBody>
+          <a:bodyPr wrap="square" lIns="0" tIns="0" rIns="0" bIns="0" rtlCol="0" anchor="ctr">
+            <a:normAutofit/>
+          </a:bodyPr>
+          <a:lstStyle/>
+          <a:p>
+            <a:pPr algn="ctr" indent="0" marL="0">
+              <a:buNone/>
+            </a:pPr>
+            <a:r>
+              <a:rPr lang="en-US" sz="750" b="1" dirty="0">
+                <a:solidFill>
+                  <a:srgbClr val="F6B44B"/>
+                </a:solidFill>
+                <a:latin typeface="Noto Sans KR" pitchFamily="34" charset="0"/>
+                <a:ea typeface="Noto Sans KR" pitchFamily="34" charset="-122"/>
+                <a:cs typeface="Noto Sans KR" pitchFamily="34" charset="-120"/>
+              </a:rPr>
+              <a:t>GATE</a:t>
+            </a:r>
+            <a:endParaRPr lang="en-US" sz="750" dirty="0"/>
+          </a:p>
+        </p:txBody>
+      </p:sp>
+      <p:sp>
+        <p:nvSpPr>
+          <p:cNvPr id="61" name="Text 59"/>
           <p:cNvSpPr/>
           <p:nvPr/>
         </p:nvSpPr>
@@ -12332,7 +12565,7 @@
               <a:buNone/>
             </a:pPr>
             <a:r>
-              <a:rPr lang="en-US" sz="900" b="1" dirty="0">
+              <a:rPr lang="en-US" sz="980" b="1" dirty="0">
                 <a:solidFill>
                   <a:srgbClr val="F7F9FC"/>
                 </a:solidFill>
@@ -12340,15 +12573,15 @@
                 <a:ea typeface="Noto Sans KR" pitchFamily="34" charset="-122"/>
                 <a:cs typeface="Noto Sans KR" pitchFamily="34" charset="-120"/>
               </a:rPr>
-              <a:t>Cutover</a:t>
-            </a:r>
-            <a:endParaRPr lang="en-US" sz="900" dirty="0"/>
-          </a:p>
-        </p:txBody>
-      </p:sp>
-      <p:sp>
-        <p:nvSpPr>
-          <p:cNvPr id="59" name="Text 57"/>
+              <a:t>Stabilize</a:t>
+            </a:r>
+            <a:endParaRPr lang="en-US" sz="980" dirty="0"/>
+          </a:p>
+        </p:txBody>
+      </p:sp>
+      <p:sp>
+        <p:nvSpPr>
+          <p:cNvPr id="62" name="Text 60"/>
           <p:cNvSpPr/>
           <p:nvPr/>
         </p:nvSpPr>
@@ -12373,59 +12606,59 @@
               <a:buNone/>
             </a:pPr>
             <a:r>
-              <a:rPr lang="en-US" sz="740" dirty="0">
-                <a:solidFill>
-                  <a:srgbClr val="C4CDD9"/>
-                </a:solidFill>
-                <a:latin typeface="Noto Sans KR" pitchFamily="34" charset="0"/>
-                <a:ea typeface="Noto Sans KR" pitchFamily="34" charset="-122"/>
-                <a:cs typeface="Noto Sans KR" pitchFamily="34" charset="-120"/>
-              </a:rPr>
-              <a:t>최종 sync</a:t>
-            </a:r>
-            <a:endParaRPr lang="en-US" sz="740" dirty="0"/>
+              <a:rPr lang="en-US" sz="820" dirty="0">
+                <a:solidFill>
+                  <a:srgbClr val="D9E1EC"/>
+                </a:solidFill>
+                <a:latin typeface="Noto Sans KR" pitchFamily="34" charset="0"/>
+                <a:ea typeface="Noto Sans KR" pitchFamily="34" charset="-122"/>
+                <a:cs typeface="Noto Sans KR" pitchFamily="34" charset="-120"/>
+              </a:rPr>
+              <a:t>SLA · backup · HA/DR</a:t>
+            </a:r>
+            <a:endParaRPr lang="en-US" sz="820" dirty="0"/>
           </a:p>
           <a:p>
             <a:pPr algn="ctr" indent="0" marL="0">
               <a:buNone/>
             </a:pPr>
             <a:r>
-              <a:rPr lang="en-US" sz="740" dirty="0">
-                <a:solidFill>
-                  <a:srgbClr val="C4CDD9"/>
-                </a:solidFill>
-                <a:latin typeface="Noto Sans KR" pitchFamily="34" charset="0"/>
-                <a:ea typeface="Noto Sans KR" pitchFamily="34" charset="-122"/>
-                <a:cs typeface="Noto Sans KR" pitchFamily="34" charset="-120"/>
-              </a:rPr>
-              <a:t>서비스 전환</a:t>
-            </a:r>
-            <a:endParaRPr lang="en-US" sz="740" dirty="0"/>
-          </a:p>
-        </p:txBody>
-      </p:sp>
-      <p:sp>
-        <p:nvSpPr>
-          <p:cNvPr id="60" name="Shape 58"/>
-          <p:cNvSpPr/>
-          <p:nvPr/>
-        </p:nvSpPr>
-        <p:spPr>
-          <a:xfrm>
-            <a:off x="2505456" y="4754880"/>
-            <a:ext cx="6958584" cy="795528"/>
+              <a:rPr lang="en-US" sz="820" dirty="0">
+                <a:solidFill>
+                  <a:srgbClr val="D9E1EC"/>
+                </a:solidFill>
+                <a:latin typeface="Noto Sans KR" pitchFamily="34" charset="0"/>
+                <a:ea typeface="Noto Sans KR" pitchFamily="34" charset="-122"/>
+                <a:cs typeface="Noto Sans KR" pitchFamily="34" charset="-120"/>
+              </a:rPr>
+              <a:t>acceptance</a:t>
+            </a:r>
+            <a:endParaRPr lang="en-US" sz="820" dirty="0"/>
+          </a:p>
+        </p:txBody>
+      </p:sp>
+      <p:sp>
+        <p:nvSpPr>
+          <p:cNvPr id="63" name="Shape 61"/>
+          <p:cNvSpPr/>
+          <p:nvPr/>
+        </p:nvSpPr>
+        <p:spPr>
+          <a:xfrm>
+            <a:off x="2505456" y="4608576"/>
+            <a:ext cx="2212848" cy="822960"/>
           </a:xfrm>
           <a:prstGeom prst="roundRect">
             <a:avLst>
-              <a:gd name="adj" fmla="val 6897"/>
+              <a:gd name="adj" fmla="val 5556"/>
             </a:avLst>
           </a:prstGeom>
           <a:solidFill>
-            <a:srgbClr val="211C17"/>
+            <a:srgbClr val="161C26"/>
           </a:solidFill>
           <a:ln w="12700">
             <a:solidFill>
-              <a:srgbClr val="5A4728"/>
+              <a:srgbClr val="61A8FF"/>
             </a:solidFill>
             <a:prstDash val="solid"/>
           </a:ln>
@@ -12440,32 +12673,165 @@
       </p:sp>
       <p:sp>
         <p:nvSpPr>
-          <p:cNvPr id="61" name="Text 59"/>
-          <p:cNvSpPr/>
-          <p:nvPr/>
-        </p:nvSpPr>
-        <p:spPr>
-          <a:xfrm>
-            <a:off x="2715768" y="4956048"/>
-            <a:ext cx="777240" cy="164592"/>
-          </a:xfrm>
-          <a:prstGeom prst="rect">
-            <a:avLst/>
-          </a:prstGeom>
-          <a:noFill/>
-          <a:ln/>
-        </p:spPr>
-        <p:txBody>
-          <a:bodyPr wrap="square" lIns="0" tIns="0" rIns="0" bIns="0" rtlCol="0" anchor="ctr">
-            <a:normAutofit/>
-          </a:bodyPr>
-          <a:lstStyle/>
-          <a:p>
-            <a:pPr algn="l" indent="0" marL="0">
-              <a:buNone/>
-            </a:pPr>
-            <a:r>
-              <a:rPr lang="en-US" sz="800" b="1" dirty="0">
+          <p:cNvPr id="64" name="Text 62"/>
+          <p:cNvSpPr/>
+          <p:nvPr/>
+        </p:nvSpPr>
+        <p:spPr>
+          <a:xfrm>
+            <a:off x="2624328" y="4727448"/>
+            <a:ext cx="1975104" cy="164592"/>
+          </a:xfrm>
+          <a:prstGeom prst="rect">
+            <a:avLst/>
+          </a:prstGeom>
+          <a:noFill/>
+          <a:ln/>
+        </p:spPr>
+        <p:txBody>
+          <a:bodyPr wrap="square" lIns="0" tIns="0" rIns="0" bIns="0" rtlCol="0" anchor="ctr">
+            <a:normAutofit/>
+          </a:bodyPr>
+          <a:lstStyle/>
+          <a:p>
+            <a:pPr algn="ctr" indent="0" marL="0">
+              <a:buNone/>
+            </a:pPr>
+            <a:r>
+              <a:rPr lang="en-US" sz="880" b="1" dirty="0">
+                <a:solidFill>
+                  <a:srgbClr val="61A8FF"/>
+                </a:solidFill>
+                <a:latin typeface="Noto Sans KR" pitchFamily="34" charset="0"/>
+                <a:ea typeface="Noto Sans KR" pitchFamily="34" charset="-122"/>
+                <a:cs typeface="Noto Sans KR" pitchFamily="34" charset="-120"/>
+              </a:rPr>
+              <a:t>ABORT · switchover 전</a:t>
+            </a:r>
+            <a:endParaRPr lang="en-US" sz="880" dirty="0"/>
+          </a:p>
+        </p:txBody>
+      </p:sp>
+      <p:sp>
+        <p:nvSpPr>
+          <p:cNvPr id="65" name="Text 63"/>
+          <p:cNvSpPr/>
+          <p:nvPr/>
+        </p:nvSpPr>
+        <p:spPr>
+          <a:xfrm>
+            <a:off x="2615184" y="4965192"/>
+            <a:ext cx="1993392" cy="301752"/>
+          </a:xfrm>
+          <a:prstGeom prst="rect">
+            <a:avLst/>
+          </a:prstGeom>
+          <a:noFill/>
+          <a:ln/>
+        </p:spPr>
+        <p:txBody>
+          <a:bodyPr wrap="square" lIns="0" tIns="0" rIns="0" bIns="0" rtlCol="0" anchor="ctr">
+            <a:normAutofit/>
+          </a:bodyPr>
+          <a:lstStyle/>
+          <a:p>
+            <a:pPr algn="ctr" indent="0" marL="0">
+              <a:buNone/>
+            </a:pPr>
+            <a:r>
+              <a:rPr lang="en-US" sz="820" dirty="0">
+                <a:solidFill>
+                  <a:srgbClr val="F7F9FC"/>
+                </a:solidFill>
+                <a:latin typeface="Noto Sans KR" pitchFamily="34" charset="0"/>
+                <a:ea typeface="Noto Sans KR" pitchFamily="34" charset="-122"/>
+                <a:cs typeface="Noto Sans KR" pitchFamily="34" charset="-120"/>
+              </a:rPr>
+              <a:t>X9M primary 유지 · migration 중단</a:t>
+            </a:r>
+            <a:endParaRPr lang="en-US" sz="820" dirty="0"/>
+          </a:p>
+          <a:p>
+            <a:pPr algn="ctr" indent="0" marL="0">
+              <a:buNone/>
+            </a:pPr>
+            <a:r>
+              <a:rPr lang="en-US" sz="820" dirty="0">
+                <a:solidFill>
+                  <a:srgbClr val="F7F9FC"/>
+                </a:solidFill>
+                <a:latin typeface="Noto Sans KR" pitchFamily="34" charset="0"/>
+                <a:ea typeface="Noto Sans KR" pitchFamily="34" charset="-122"/>
+                <a:cs typeface="Noto Sans KR" pitchFamily="34" charset="-120"/>
+              </a:rPr>
+              <a:t>RPO 0 · route 변경 없음</a:t>
+            </a:r>
+            <a:endParaRPr lang="en-US" sz="820" dirty="0"/>
+          </a:p>
+        </p:txBody>
+      </p:sp>
+      <p:sp>
+        <p:nvSpPr>
+          <p:cNvPr id="66" name="Shape 64"/>
+          <p:cNvSpPr/>
+          <p:nvPr/>
+        </p:nvSpPr>
+        <p:spPr>
+          <a:xfrm>
+            <a:off x="4892040" y="4608576"/>
+            <a:ext cx="2212848" cy="822960"/>
+          </a:xfrm>
+          <a:prstGeom prst="roundRect">
+            <a:avLst>
+              <a:gd name="adj" fmla="val 5556"/>
+            </a:avLst>
+          </a:prstGeom>
+          <a:solidFill>
+            <a:srgbClr val="161C26"/>
+          </a:solidFill>
+          <a:ln w="12700">
+            <a:solidFill>
+              <a:srgbClr val="F6B44B"/>
+            </a:solidFill>
+            <a:prstDash val="solid"/>
+          </a:ln>
+          <a:effectLst>
+            <a:outerShdw sx="100000" sy="100000" kx="0" ky="0" algn="bl" rotWithShape="0" blurRad="50800" dist="17780" dir="2700000">
+              <a:srgbClr val="000000">
+                <a:alpha val="24000"/>
+              </a:srgbClr>
+            </a:outerShdw>
+          </a:effectLst>
+        </p:spPr>
+      </p:sp>
+      <p:sp>
+        <p:nvSpPr>
+          <p:cNvPr id="67" name="Text 65"/>
+          <p:cNvSpPr/>
+          <p:nvPr/>
+        </p:nvSpPr>
+        <p:spPr>
+          <a:xfrm>
+            <a:off x="5010912" y="4727448"/>
+            <a:ext cx="1975104" cy="164592"/>
+          </a:xfrm>
+          <a:prstGeom prst="rect">
+            <a:avLst/>
+          </a:prstGeom>
+          <a:noFill/>
+          <a:ln/>
+        </p:spPr>
+        <p:txBody>
+          <a:bodyPr wrap="square" lIns="0" tIns="0" rIns="0" bIns="0" rtlCol="0" anchor="ctr">
+            <a:normAutofit/>
+          </a:bodyPr>
+          <a:lstStyle/>
+          <a:p>
+            <a:pPr algn="ctr" indent="0" marL="0">
+              <a:buNone/>
+            </a:pPr>
+            <a:r>
+              <a:rPr lang="en-US" sz="880" b="1" dirty="0">
                 <a:solidFill>
                   <a:srgbClr val="F6B44B"/>
                 </a:solidFill>
@@ -12473,40 +12839,40 @@
                 <a:ea typeface="Noto Sans KR" pitchFamily="34" charset="-122"/>
                 <a:cs typeface="Noto Sans KR" pitchFamily="34" charset="-120"/>
               </a:rPr>
-              <a:t>ROLLBACK</a:t>
-            </a:r>
-            <a:endParaRPr lang="en-US" sz="800" dirty="0"/>
-          </a:p>
-        </p:txBody>
-      </p:sp>
-      <p:sp>
-        <p:nvSpPr>
-          <p:cNvPr id="62" name="Text 60"/>
-          <p:cNvSpPr/>
-          <p:nvPr/>
-        </p:nvSpPr>
-        <p:spPr>
-          <a:xfrm>
-            <a:off x="3511296" y="4892040"/>
-            <a:ext cx="5632704" cy="310896"/>
-          </a:xfrm>
-          <a:prstGeom prst="rect">
-            <a:avLst/>
-          </a:prstGeom>
-          <a:noFill/>
-          <a:ln/>
-        </p:spPr>
-        <p:txBody>
-          <a:bodyPr wrap="square" lIns="0" tIns="0" rIns="0" bIns="0" rtlCol="0" anchor="ctr">
-            <a:normAutofit/>
-          </a:bodyPr>
-          <a:lstStyle/>
-          <a:p>
-            <a:pPr algn="l" indent="0" marL="0">
-              <a:buNone/>
-            </a:pPr>
-            <a:r>
-              <a:rPr lang="en-US" sz="870" b="1" dirty="0">
+              <a:t>FALLBACK · target write 전</a:t>
+            </a:r>
+            <a:endParaRPr lang="en-US" sz="880" dirty="0"/>
+          </a:p>
+        </p:txBody>
+      </p:sp>
+      <p:sp>
+        <p:nvSpPr>
+          <p:cNvPr id="68" name="Text 66"/>
+          <p:cNvSpPr/>
+          <p:nvPr/>
+        </p:nvSpPr>
+        <p:spPr>
+          <a:xfrm>
+            <a:off x="5001768" y="4965192"/>
+            <a:ext cx="1993392" cy="301752"/>
+          </a:xfrm>
+          <a:prstGeom prst="rect">
+            <a:avLst/>
+          </a:prstGeom>
+          <a:noFill/>
+          <a:ln/>
+        </p:spPr>
+        <p:txBody>
+          <a:bodyPr wrap="square" lIns="0" tIns="0" rIns="0" bIns="0" rtlCol="0" anchor="ctr">
+            <a:normAutofit/>
+          </a:bodyPr>
+          <a:lstStyle/>
+          <a:p>
+            <a:pPr algn="ctr" indent="0" marL="0">
+              <a:buNone/>
+            </a:pPr>
+            <a:r>
+              <a:rPr lang="en-US" sz="820" dirty="0">
                 <a:solidFill>
                   <a:srgbClr val="F7F9FC"/>
                 </a:solidFill>
@@ -12514,15 +12880,165 @@
                 <a:ea typeface="Noto Sans KR" pitchFamily="34" charset="-122"/>
                 <a:cs typeface="Noto Sans KR" pitchFamily="34" charset="-120"/>
               </a:rPr>
-              <a:t>OCI X9M을 acceptance 완료까지 synchronized standby로 유지 · cutover 후 write freeze · backout 승인 시 route 복구</a:t>
-            </a:r>
-            <a:endParaRPr lang="en-US" sz="870" dirty="0"/>
-          </a:p>
-        </p:txBody>
-      </p:sp>
-      <p:sp>
-        <p:nvSpPr>
-          <p:cNvPr id="63" name="Shape 61"/>
+              <a:t>X9M으로 route 복귀</a:t>
+            </a:r>
+            <a:endParaRPr lang="en-US" sz="820" dirty="0"/>
+          </a:p>
+          <a:p>
+            <a:pPr algn="ctr" indent="0" marL="0">
+              <a:buNone/>
+            </a:pPr>
+            <a:r>
+              <a:rPr lang="en-US" sz="820" dirty="0">
+                <a:solidFill>
+                  <a:srgbClr val="F7F9FC"/>
+                </a:solidFill>
+                <a:latin typeface="Noto Sans KR" pitchFamily="34" charset="0"/>
+                <a:ea typeface="Noto Sans KR" pitchFamily="34" charset="-122"/>
+                <a:cs typeface="Noto Sans KR" pitchFamily="34" charset="-120"/>
+              </a:rPr>
+              <a:t>target write 0건 확인 필수</a:t>
+            </a:r>
+            <a:endParaRPr lang="en-US" sz="820" dirty="0"/>
+          </a:p>
+        </p:txBody>
+      </p:sp>
+      <p:sp>
+        <p:nvSpPr>
+          <p:cNvPr id="69" name="Shape 67"/>
+          <p:cNvSpPr/>
+          <p:nvPr/>
+        </p:nvSpPr>
+        <p:spPr>
+          <a:xfrm>
+            <a:off x="7278624" y="4608576"/>
+            <a:ext cx="2212848" cy="822960"/>
+          </a:xfrm>
+          <a:prstGeom prst="roundRect">
+            <a:avLst>
+              <a:gd name="adj" fmla="val 5556"/>
+            </a:avLst>
+          </a:prstGeom>
+          <a:solidFill>
+            <a:srgbClr val="161C26"/>
+          </a:solidFill>
+          <a:ln w="12700">
+            <a:solidFill>
+              <a:srgbClr val="FF6B5E"/>
+            </a:solidFill>
+            <a:prstDash val="solid"/>
+          </a:ln>
+          <a:effectLst>
+            <a:outerShdw sx="100000" sy="100000" kx="0" ky="0" algn="bl" rotWithShape="0" blurRad="50800" dist="17780" dir="2700000">
+              <a:srgbClr val="000000">
+                <a:alpha val="24000"/>
+              </a:srgbClr>
+            </a:outerShdw>
+          </a:effectLst>
+        </p:spPr>
+      </p:sp>
+      <p:sp>
+        <p:nvSpPr>
+          <p:cNvPr id="70" name="Text 68"/>
+          <p:cNvSpPr/>
+          <p:nvPr/>
+        </p:nvSpPr>
+        <p:spPr>
+          <a:xfrm>
+            <a:off x="7397496" y="4727448"/>
+            <a:ext cx="1975104" cy="164592"/>
+          </a:xfrm>
+          <a:prstGeom prst="rect">
+            <a:avLst/>
+          </a:prstGeom>
+          <a:noFill/>
+          <a:ln/>
+        </p:spPr>
+        <p:txBody>
+          <a:bodyPr wrap="square" lIns="0" tIns="0" rIns="0" bIns="0" rtlCol="0" anchor="ctr">
+            <a:normAutofit/>
+          </a:bodyPr>
+          <a:lstStyle/>
+          <a:p>
+            <a:pPr algn="ctr" indent="0" marL="0">
+              <a:buNone/>
+            </a:pPr>
+            <a:r>
+              <a:rPr lang="en-US" sz="880" b="1" dirty="0">
+                <a:solidFill>
+                  <a:srgbClr val="FF6B5E"/>
+                </a:solidFill>
+                <a:latin typeface="Noto Sans KR" pitchFamily="34" charset="0"/>
+                <a:ea typeface="Noto Sans KR" pitchFamily="34" charset="-122"/>
+                <a:cs typeface="Noto Sans KR" pitchFamily="34" charset="-120"/>
+              </a:rPr>
+              <a:t>FAILBACK · target write 후</a:t>
+            </a:r>
+            <a:endParaRPr lang="en-US" sz="880" dirty="0"/>
+          </a:p>
+        </p:txBody>
+      </p:sp>
+      <p:sp>
+        <p:nvSpPr>
+          <p:cNvPr id="71" name="Text 69"/>
+          <p:cNvSpPr/>
+          <p:nvPr/>
+        </p:nvSpPr>
+        <p:spPr>
+          <a:xfrm>
+            <a:off x="7388352" y="4965192"/>
+            <a:ext cx="1993392" cy="301752"/>
+          </a:xfrm>
+          <a:prstGeom prst="rect">
+            <a:avLst/>
+          </a:prstGeom>
+          <a:noFill/>
+          <a:ln/>
+        </p:spPr>
+        <p:txBody>
+          <a:bodyPr wrap="square" lIns="0" tIns="0" rIns="0" bIns="0" rtlCol="0" anchor="ctr">
+            <a:normAutofit/>
+          </a:bodyPr>
+          <a:lstStyle/>
+          <a:p>
+            <a:pPr algn="ctr" indent="0" marL="0">
+              <a:buNone/>
+            </a:pPr>
+            <a:r>
+              <a:rPr lang="en-US" sz="820" dirty="0">
+                <a:solidFill>
+                  <a:srgbClr val="F7F9FC"/>
+                </a:solidFill>
+                <a:latin typeface="Noto Sans KR" pitchFamily="34" charset="0"/>
+                <a:ea typeface="Noto Sans KR" pitchFamily="34" charset="-122"/>
+                <a:cs typeface="Noto Sans KR" pitchFamily="34" charset="-120"/>
+              </a:rPr>
+              <a:t>단순 rollback 불가 · reverse DG/restore</a:t>
+            </a:r>
+            <a:endParaRPr lang="en-US" sz="820" dirty="0"/>
+          </a:p>
+          <a:p>
+            <a:pPr algn="ctr" indent="0" marL="0">
+              <a:buNone/>
+            </a:pPr>
+            <a:r>
+              <a:rPr lang="en-US" sz="820" dirty="0">
+                <a:solidFill>
+                  <a:srgbClr val="F7F9FC"/>
+                </a:solidFill>
+                <a:latin typeface="Noto Sans KR" pitchFamily="34" charset="0"/>
+                <a:ea typeface="Noto Sans KR" pitchFamily="34" charset="-122"/>
+                <a:cs typeface="Noto Sans KR" pitchFamily="34" charset="-120"/>
+              </a:rPr>
+              <a:t>승인 RPO/RTO + rehearsal 필수</a:t>
+            </a:r>
+            <a:endParaRPr lang="en-US" sz="820" dirty="0"/>
+          </a:p>
+        </p:txBody>
+      </p:sp>
+      <p:sp>
+        <p:nvSpPr>
+          <p:cNvPr id="72" name="Shape 70"/>
           <p:cNvSpPr/>
           <p:nvPr/>
         </p:nvSpPr>
@@ -12556,7 +13072,7 @@
       </p:sp>
       <p:sp>
         <p:nvSpPr>
-          <p:cNvPr id="64" name="Text 62"/>
+          <p:cNvPr id="73" name="Text 71"/>
           <p:cNvSpPr/>
           <p:nvPr/>
         </p:nvSpPr>
@@ -12581,7 +13097,7 @@
               <a:buNone/>
             </a:pPr>
             <a:r>
-              <a:rPr lang="en-US" sz="880" b="1" dirty="0">
+              <a:rPr lang="en-US" sz="950" b="1" dirty="0">
                 <a:solidFill>
                   <a:srgbClr val="B18CFF"/>
                 </a:solidFill>
@@ -12589,15 +13105,15 @@
                 <a:ea typeface="Noto Sans KR" pitchFamily="34" charset="-122"/>
                 <a:cs typeface="Noto Sans KR" pitchFamily="34" charset="-120"/>
               </a:rPr>
-              <a:t>26ai 도입은 19c 이전 성공과 분리: 새 VM Cluster → 새 DB Home → app/데이터 compatibility test → 별도 승인 후 단계 전환</a:t>
-            </a:r>
-            <a:endParaRPr lang="en-US" sz="880" dirty="0"/>
-          </a:p>
-        </p:txBody>
-      </p:sp>
-      <p:sp>
-        <p:nvSpPr>
-          <p:cNvPr id="65" name="Shape 63"/>
+              <a:t>26ai는 19c landing과 분리: 새 VM Cluster → 새 DB Home → compatibility test → 별도 change approval</a:t>
+            </a:r>
+            <a:endParaRPr lang="en-US" sz="950" dirty="0"/>
+          </a:p>
+        </p:txBody>
+      </p:sp>
+      <p:sp>
+        <p:nvSpPr>
+          <p:cNvPr id="74" name="Shape 72"/>
           <p:cNvSpPr/>
           <p:nvPr/>
         </p:nvSpPr>
@@ -12620,7 +13136,7 @@
       </p:sp>
       <p:sp>
         <p:nvSpPr>
-          <p:cNvPr id="66" name="Text 64"/>
+          <p:cNvPr id="75" name="Text 73"/>
           <p:cNvSpPr/>
           <p:nvPr/>
         </p:nvSpPr>
@@ -12647,7 +13163,7 @@
             <a:r>
               <a:rPr lang="en-US" sz="700" dirty="0">
                 <a:solidFill>
-                  <a:srgbClr val="8290A3"/>
+                  <a:srgbClr val="A8B4C5"/>
                 </a:solidFill>
                 <a:latin typeface="Noto Sans KR" pitchFamily="34" charset="0"/>
                 <a:ea typeface="Noto Sans KR" pitchFamily="34" charset="-122"/>
@@ -12661,7 +13177,7 @@
       </p:sp>
       <p:sp>
         <p:nvSpPr>
-          <p:cNvPr id="67" name="Text 65"/>
+          <p:cNvPr id="76" name="Text 74"/>
           <p:cNvSpPr/>
           <p:nvPr/>
         </p:nvSpPr>
@@ -12688,13 +13204,13 @@
             <a:r>
               <a:rPr lang="en-US" sz="680" dirty="0">
                 <a:solidFill>
-                  <a:srgbClr val="8290A3"/>
-                </a:solidFill>
-                <a:latin typeface="Noto Sans KR" pitchFamily="34" charset="0"/>
-                <a:ea typeface="Noto Sans KR" pitchFamily="34" charset="-122"/>
-                <a:cs typeface="Noto Sans KR" pitchFamily="34" charset="-120"/>
-              </a:rPr>
-              <a:t>Source: ExaCC X11M DS v1.5, “Migration To Exadata Cloud@Customer” · Oracle recommends ZDM</a:t>
+                  <a:srgbClr val="A8B4C5"/>
+                </a:solidFill>
+                <a:latin typeface="Noto Sans KR" pitchFamily="34" charset="0"/>
+                <a:ea typeface="Noto Sans KR" pitchFamily="34" charset="-122"/>
+                <a:cs typeface="Noto Sans KR" pitchFamily="34" charset="-120"/>
+              </a:rPr>
+              <a:t>Source: [2] X11M DS “Migration to ExaCC” · baseline runbook is an architecture recommendation</a:t>
             </a:r>
             <a:endParaRPr lang="en-US" sz="680" dirty="0"/>
           </a:p>
@@ -12849,7 +13365,7 @@
                 <a:ea typeface="Noto Sans KR" pitchFamily="34" charset="-122"/>
                 <a:cs typeface="Noto Sans KR" pitchFamily="34" charset="-120"/>
               </a:rPr>
-              <a:t>Base System은 “조건부 GO” — 현행 사용량이 published envelope 안에 들어와야 한다</a:t>
+              <a:t>Base System은 “조건부 후보” — published maximum은 GO 기준이 아니다</a:t>
             </a:r>
             <a:endParaRPr lang="en-US" sz="2500" dirty="0"/>
           </a:p>
@@ -12884,13 +13400,13 @@
             <a:r>
               <a:rPr lang="en-US" sz="1050" dirty="0">
                 <a:solidFill>
-                  <a:srgbClr val="C4CDD9"/>
-                </a:solidFill>
-                <a:latin typeface="Noto Sans KR" pitchFamily="34" charset="0"/>
-                <a:ea typeface="Noto Sans KR" pitchFamily="34" charset="-122"/>
-                <a:cs typeface="Noto Sans KR" pitchFamily="34" charset="-120"/>
-              </a:rPr>
-              <a:t>Base가 탈락하면 X11M Standard DB + HC/EF Storage elastic shape가 X9M Quarter에 더 가까운 대안이다.</a:t>
+                  <a:srgbClr val="D9E1EC"/>
+                </a:solidFill>
+                <a:latin typeface="Noto Sans KR" pitchFamily="34" charset="0"/>
+                <a:ea typeface="Noto Sans KR" pitchFamily="34" charset="-122"/>
+                <a:cs typeface="Noto Sans KR" pitchFamily="34" charset="-120"/>
+              </a:rPr>
+              <a:t>실제 threshold는 성장·N-1·backup/DR·배치 중첩·운영 안전율을 포함한 workload POC로 승인한다.</a:t>
             </a:r>
             <a:endParaRPr lang="en-US" sz="1050" dirty="0"/>
           </a:p>
@@ -12939,7 +13455,7 @@
         <p:spPr>
           <a:xfrm>
             <a:off x="740664" y="1746504"/>
-            <a:ext cx="1609344" cy="292608"/>
+            <a:ext cx="1755648" cy="292608"/>
           </a:xfrm>
           <a:prstGeom prst="roundRect">
             <a:avLst>
@@ -12966,7 +13482,7 @@
         <p:spPr>
           <a:xfrm>
             <a:off x="740664" y="1746504"/>
-            <a:ext cx="1609344" cy="292608"/>
+            <a:ext cx="1755648" cy="292608"/>
           </a:xfrm>
           <a:prstGeom prst="rect">
             <a:avLst/>
@@ -12992,7 +13508,7 @@
                 <a:ea typeface="Noto Sans KR" pitchFamily="34" charset="-122"/>
                 <a:cs typeface="Noto Sans KR" pitchFamily="34" charset="-120"/>
               </a:rPr>
-              <a:t>BASE · GO 후보</a:t>
+              <a:t>BASE · CANDIDATE</a:t>
             </a:r>
             <a:endParaRPr lang="en-US" sz="850" dirty="0"/>
           </a:p>
@@ -13025,7 +13541,7 @@
               <a:buNone/>
             </a:pPr>
             <a:r>
-              <a:rPr lang="en-US" sz="1500" b="1" dirty="0">
+              <a:rPr lang="en-US" sz="1400" b="1" dirty="0">
                 <a:solidFill>
                   <a:srgbClr val="F7F9FC"/>
                 </a:solidFill>
@@ -13033,9 +13549,9 @@
                 <a:ea typeface="Noto Sans KR" pitchFamily="34" charset="-122"/>
                 <a:cs typeface="Noto Sans KR" pitchFamily="34" charset="-120"/>
               </a:rPr>
-              <a:t>작고 안정적인 footprint</a:t>
-            </a:r>
-            <a:endParaRPr lang="en-US" sz="1500" dirty="0"/>
+              <a:t>hard ceiling 이하 + 검증된 headroom</a:t>
+            </a:r>
+            <a:endParaRPr lang="en-US" sz="1400" dirty="0"/>
           </a:p>
         </p:txBody>
       </p:sp>
@@ -13091,17 +13607,17 @@
               <a:buNone/>
             </a:pPr>
             <a:r>
-              <a:rPr lang="en-US" sz="900" dirty="0">
-                <a:solidFill>
-                  <a:srgbClr val="C4CDD9"/>
-                </a:solidFill>
-                <a:latin typeface="Noto Sans KR" pitchFamily="34" charset="0"/>
-                <a:ea typeface="Noto Sans KR" pitchFamily="34" charset="-122"/>
-                <a:cs typeface="Noto Sans KR" pitchFamily="34" charset="-120"/>
-              </a:rPr>
-              <a:t>Peak SQL read IOPS &lt; 597K</a:t>
-            </a:r>
-            <a:endParaRPr lang="en-US" sz="900" dirty="0"/>
+              <a:rPr lang="en-US" sz="950" b="1" dirty="0">
+                <a:solidFill>
+                  <a:srgbClr val="D9E1EC"/>
+                </a:solidFill>
+                <a:latin typeface="Noto Sans KR" pitchFamily="34" charset="0"/>
+                <a:ea typeface="Noto Sans KR" pitchFamily="34" charset="-122"/>
+                <a:cs typeface="Noto Sans KR" pitchFamily="34" charset="-120"/>
+              </a:rPr>
+              <a:t>85/42 TB는 hard ceiling · target limit 별도</a:t>
+            </a:r>
+            <a:endParaRPr lang="en-US" sz="950" dirty="0"/>
           </a:p>
         </p:txBody>
       </p:sp>
@@ -13157,17 +13673,17 @@
               <a:buNone/>
             </a:pPr>
             <a:r>
-              <a:rPr lang="en-US" sz="900" dirty="0">
-                <a:solidFill>
-                  <a:srgbClr val="C4CDD9"/>
-                </a:solidFill>
-                <a:latin typeface="Noto Sans KR" pitchFamily="34" charset="0"/>
-                <a:ea typeface="Noto Sans KR" pitchFamily="34" charset="-122"/>
-                <a:cs typeface="Noto Sans KR" pitchFamily="34" charset="-120"/>
-              </a:rPr>
-              <a:t>Flash scan 요구 &lt; 37.5 GB/s</a:t>
-            </a:r>
-            <a:endParaRPr lang="en-US" sz="900" dirty="0"/>
+              <a:rPr lang="en-US" sz="950" dirty="0">
+                <a:solidFill>
+                  <a:srgbClr val="D9E1EC"/>
+                </a:solidFill>
+                <a:latin typeface="Noto Sans KR" pitchFamily="34" charset="0"/>
+                <a:ea typeface="Noto Sans KR" pitchFamily="34" charset="-122"/>
+                <a:cs typeface="Noto Sans KR" pitchFamily="34" charset="-120"/>
+              </a:rPr>
+              <a:t>597K/37.5 GB/s는 max · GO threshold 금지</a:t>
+            </a:r>
+            <a:endParaRPr lang="en-US" sz="950" dirty="0"/>
           </a:p>
         </p:txBody>
       </p:sp>
@@ -13223,17 +13739,17 @@
               <a:buNone/>
             </a:pPr>
             <a:r>
-              <a:rPr lang="en-US" sz="900" b="1" dirty="0">
-                <a:solidFill>
-                  <a:srgbClr val="C4CDD9"/>
-                </a:solidFill>
-                <a:latin typeface="Noto Sans KR" pitchFamily="34" charset="0"/>
-                <a:ea typeface="Noto Sans KR" pitchFamily="34" charset="-122"/>
-                <a:cs typeface="Noto Sans KR" pitchFamily="34" charset="-120"/>
-              </a:rPr>
-              <a:t>DB size ≤ 85 TB (local backup 없음)</a:t>
-            </a:r>
-            <a:endParaRPr lang="en-US" sz="900" dirty="0"/>
+              <a:rPr lang="en-US" sz="950" dirty="0">
+                <a:solidFill>
+                  <a:srgbClr val="D9E1EC"/>
+                </a:solidFill>
+                <a:latin typeface="Noto Sans KR" pitchFamily="34" charset="0"/>
+                <a:ea typeface="Noto Sans KR" pitchFamily="34" charset="-122"/>
+                <a:cs typeface="Noto Sans KR" pitchFamily="34" charset="-120"/>
+              </a:rPr>
+              <a:t>Peak + 성장 + N-1 + backup/DR 포함</a:t>
+            </a:r>
+            <a:endParaRPr lang="en-US" sz="950" dirty="0"/>
           </a:p>
         </p:txBody>
       </p:sp>
@@ -13289,17 +13805,17 @@
               <a:buNone/>
             </a:pPr>
             <a:r>
-              <a:rPr lang="en-US" sz="900" dirty="0">
-                <a:solidFill>
-                  <a:srgbClr val="C4CDD9"/>
-                </a:solidFill>
-                <a:latin typeface="Noto Sans KR" pitchFamily="34" charset="0"/>
-                <a:ea typeface="Noto Sans KR" pitchFamily="34" charset="-122"/>
-                <a:cs typeface="Noto Sans KR" pitchFamily="34" charset="-120"/>
-              </a:rPr>
-              <a:t>DB size ≤ 42 TB (local backup 있음)</a:t>
-            </a:r>
-            <a:endParaRPr lang="en-US" sz="900" dirty="0"/>
+              <a:rPr lang="en-US" sz="950" dirty="0">
+                <a:solidFill>
+                  <a:srgbClr val="D9E1EC"/>
+                </a:solidFill>
+                <a:latin typeface="Noto Sans KR" pitchFamily="34" charset="0"/>
+                <a:ea typeface="Noto Sans KR" pitchFamily="34" charset="-122"/>
+                <a:cs typeface="Noto Sans KR" pitchFamily="34" charset="-120"/>
+              </a:rPr>
+              <a:t>대표 workload POC가 SLA 충족</a:t>
+            </a:r>
+            <a:endParaRPr lang="en-US" sz="950" dirty="0"/>
           </a:p>
         </p:txBody>
       </p:sp>
@@ -13355,17 +13871,17 @@
               <a:buNone/>
             </a:pPr>
             <a:r>
-              <a:rPr lang="en-US" sz="900" dirty="0">
-                <a:solidFill>
-                  <a:srgbClr val="C4CDD9"/>
-                </a:solidFill>
-                <a:latin typeface="Noto Sans KR" pitchFamily="34" charset="0"/>
-                <a:ea typeface="Noto Sans KR" pitchFamily="34" charset="-122"/>
-                <a:cs typeface="Noto Sans KR" pitchFamily="34" charset="-120"/>
-              </a:rPr>
-              <a:t>No-XRMEM latency를 실측으로 수용</a:t>
-            </a:r>
-            <a:endParaRPr lang="en-US" sz="900" dirty="0"/>
+              <a:rPr lang="en-US" sz="950" dirty="0">
+                <a:solidFill>
+                  <a:srgbClr val="D9E1EC"/>
+                </a:solidFill>
+                <a:latin typeface="Noto Sans KR" pitchFamily="34" charset="0"/>
+                <a:ea typeface="Noto Sans KR" pitchFamily="34" charset="-122"/>
+                <a:cs typeface="Noto Sans KR" pitchFamily="34" charset="-120"/>
+              </a:rPr>
+              <a:t>운영 안전율을 business owner가 승인</a:t>
+            </a:r>
+            <a:endParaRPr lang="en-US" sz="950" dirty="0"/>
           </a:p>
         </p:txBody>
       </p:sp>
@@ -13412,7 +13928,7 @@
         <p:spPr>
           <a:xfrm>
             <a:off x="4562856" y="1746504"/>
-            <a:ext cx="1609344" cy="292608"/>
+            <a:ext cx="1755648" cy="292608"/>
           </a:xfrm>
           <a:prstGeom prst="roundRect">
             <a:avLst>
@@ -13439,7 +13955,7 @@
         <p:spPr>
           <a:xfrm>
             <a:off x="4562856" y="1746504"/>
-            <a:ext cx="1609344" cy="292608"/>
+            <a:ext cx="1755648" cy="292608"/>
           </a:xfrm>
           <a:prstGeom prst="rect">
             <a:avLst/>
@@ -13465,7 +13981,7 @@
                 <a:ea typeface="Noto Sans KR" pitchFamily="34" charset="-122"/>
                 <a:cs typeface="Noto Sans KR" pitchFamily="34" charset="-120"/>
               </a:rPr>
-              <a:t>ELASTIC STD · 대안</a:t>
+              <a:t>ELASTIC STD · 비교 후보</a:t>
             </a:r>
             <a:endParaRPr lang="en-US" sz="850" dirty="0"/>
           </a:p>
@@ -13498,7 +14014,7 @@
               <a:buNone/>
             </a:pPr>
             <a:r>
-              <a:rPr lang="en-US" sz="1500" b="1" dirty="0">
+              <a:rPr lang="en-US" sz="1400" b="1" dirty="0">
                 <a:solidFill>
                   <a:srgbClr val="F7F9FC"/>
                 </a:solidFill>
@@ -13506,9 +14022,9 @@
                 <a:ea typeface="Noto Sans KR" pitchFamily="34" charset="-122"/>
                 <a:cs typeface="Noto Sans KR" pitchFamily="34" charset="-120"/>
               </a:rPr>
-              <a:t>X9M Quarter에 가까운 envelope</a:t>
-            </a:r>
-            <a:endParaRPr lang="en-US" sz="1500" dirty="0"/>
+              <a:t>예시: 2 Std DB + 3 HC w/XRMEM</a:t>
+            </a:r>
+            <a:endParaRPr lang="en-US" sz="1400" dirty="0"/>
           </a:p>
         </p:txBody>
       </p:sp>
@@ -13564,9 +14080,9 @@
               <a:buNone/>
             </a:pPr>
             <a:r>
-              <a:rPr lang="en-US" sz="900" dirty="0">
-                <a:solidFill>
-                  <a:srgbClr val="C4CDD9"/>
+              <a:rPr lang="en-US" sz="950" dirty="0">
+                <a:solidFill>
+                  <a:srgbClr val="D9E1EC"/>
                 </a:solidFill>
                 <a:latin typeface="Noto Sans KR" pitchFamily="34" charset="0"/>
                 <a:ea typeface="Noto Sans KR" pitchFamily="34" charset="-122"/>
@@ -13574,7 +14090,7 @@
               </a:rPr>
               <a:t>380 usable cores / 1,520 ECPUs</a:t>
             </a:r>
-            <a:endParaRPr lang="en-US" sz="900" dirty="0"/>
+            <a:endParaRPr lang="en-US" sz="950" dirty="0"/>
           </a:p>
         </p:txBody>
       </p:sp>
@@ -13630,9 +14146,9 @@
               <a:buNone/>
             </a:pPr>
             <a:r>
-              <a:rPr lang="en-US" sz="900" dirty="0">
-                <a:solidFill>
-                  <a:srgbClr val="C4CDD9"/>
+              <a:rPr lang="en-US" sz="950" dirty="0">
+                <a:solidFill>
+                  <a:srgbClr val="D9E1EC"/>
                 </a:solidFill>
                 <a:latin typeface="Noto Sans KR" pitchFamily="34" charset="0"/>
                 <a:ea typeface="Noto Sans KR" pitchFamily="34" charset="-122"/>
@@ -13640,7 +14156,7 @@
               </a:rPr>
               <a:t>240 TB usable HC</a:t>
             </a:r>
-            <a:endParaRPr lang="en-US" sz="900" dirty="0"/>
+            <a:endParaRPr lang="en-US" sz="950" dirty="0"/>
           </a:p>
         </p:txBody>
       </p:sp>
@@ -13696,9 +14212,9 @@
               <a:buNone/>
             </a:pPr>
             <a:r>
-              <a:rPr lang="en-US" sz="900" dirty="0">
-                <a:solidFill>
-                  <a:srgbClr val="C4CDD9"/>
+              <a:rPr lang="en-US" sz="950" dirty="0">
+                <a:solidFill>
+                  <a:srgbClr val="D9E1EC"/>
                 </a:solidFill>
                 <a:latin typeface="Noto Sans KR" pitchFamily="34" charset="0"/>
                 <a:ea typeface="Noto Sans KR" pitchFamily="34" charset="-122"/>
@@ -13706,7 +14222,7 @@
               </a:rPr>
               <a:t>81.6 TB flash + 3.75 TB XRMEM</a:t>
             </a:r>
-            <a:endParaRPr lang="en-US" sz="900" dirty="0"/>
+            <a:endParaRPr lang="en-US" sz="950" dirty="0"/>
           </a:p>
         </p:txBody>
       </p:sp>
@@ -13762,17 +14278,17 @@
               <a:buNone/>
             </a:pPr>
             <a:r>
-              <a:rPr lang="en-US" sz="900" dirty="0">
-                <a:solidFill>
-                  <a:srgbClr val="C4CDD9"/>
-                </a:solidFill>
-                <a:latin typeface="Noto Sans KR" pitchFamily="34" charset="0"/>
-                <a:ea typeface="Noto Sans KR" pitchFamily="34" charset="-122"/>
-                <a:cs typeface="Noto Sans KR" pitchFamily="34" charset="-120"/>
-              </a:rPr>
-              <a:t>5.6M SQL read IOPS</a:t>
-            </a:r>
-            <a:endParaRPr lang="en-US" sz="900" dirty="0"/>
+              <a:rPr lang="en-US" sz="950" dirty="0">
+                <a:solidFill>
+                  <a:srgbClr val="D9E1EC"/>
+                </a:solidFill>
+                <a:latin typeface="Noto Sans KR" pitchFamily="34" charset="0"/>
+                <a:ea typeface="Noto Sans KR" pitchFamily="34" charset="-122"/>
+                <a:cs typeface="Noto Sans KR" pitchFamily="34" charset="-120"/>
+              </a:rPr>
+              <a:t>5.6M read IOPS · 300 GB/s flash</a:t>
+            </a:r>
+            <a:endParaRPr lang="en-US" sz="950" dirty="0"/>
           </a:p>
         </p:txBody>
       </p:sp>
@@ -13828,17 +14344,17 @@
               <a:buNone/>
             </a:pPr>
             <a:r>
-              <a:rPr lang="en-US" sz="900" dirty="0">
-                <a:solidFill>
-                  <a:srgbClr val="C4CDD9"/>
-                </a:solidFill>
-                <a:latin typeface="Noto Sans KR" pitchFamily="34" charset="0"/>
-                <a:ea typeface="Noto Sans KR" pitchFamily="34" charset="-122"/>
-                <a:cs typeface="Noto Sans KR" pitchFamily="34" charset="-120"/>
-              </a:rPr>
-              <a:t>300 GB/s SQL flash bandwidth</a:t>
-            </a:r>
-            <a:endParaRPr lang="en-US" sz="900" dirty="0"/>
+              <a:rPr lang="en-US" sz="950" dirty="0">
+                <a:solidFill>
+                  <a:srgbClr val="D9E1EC"/>
+                </a:solidFill>
+                <a:latin typeface="Noto Sans KR" pitchFamily="34" charset="0"/>
+                <a:ea typeface="Noto Sans KR" pitchFamily="34" charset="-122"/>
+                <a:cs typeface="Noto Sans KR" pitchFamily="34" charset="-120"/>
+              </a:rPr>
+              <a:t>동급 아님 · license/POC 재산정 필수</a:t>
+            </a:r>
+            <a:endParaRPr lang="en-US" sz="950" dirty="0"/>
           </a:p>
         </p:txBody>
       </p:sp>
@@ -13885,7 +14401,7 @@
         <p:spPr>
           <a:xfrm>
             <a:off x="8385048" y="1746504"/>
-            <a:ext cx="1609344" cy="292608"/>
+            <a:ext cx="1755648" cy="292608"/>
           </a:xfrm>
           <a:prstGeom prst="roundRect">
             <a:avLst>
@@ -13912,7 +14428,7 @@
         <p:spPr>
           <a:xfrm>
             <a:off x="8385048" y="1746504"/>
-            <a:ext cx="1609344" cy="292608"/>
+            <a:ext cx="1755648" cy="292608"/>
           </a:xfrm>
           <a:prstGeom prst="rect">
             <a:avLst/>
@@ -13971,7 +14487,7 @@
               <a:buNone/>
             </a:pPr>
             <a:r>
-              <a:rPr lang="en-US" sz="1500" b="1" dirty="0">
+              <a:rPr lang="en-US" sz="1400" b="1" dirty="0">
                 <a:solidFill>
                   <a:srgbClr val="F7F9FC"/>
                 </a:solidFill>
@@ -13981,7 +14497,7 @@
               </a:rPr>
               <a:t>Base 확정 전 해소할 blocker</a:t>
             </a:r>
-            <a:endParaRPr lang="en-US" sz="1500" dirty="0"/>
+            <a:endParaRPr lang="en-US" sz="1400" dirty="0"/>
           </a:p>
         </p:txBody>
       </p:sp>
@@ -14037,17 +14553,17 @@
               <a:buNone/>
             </a:pPr>
             <a:r>
-              <a:rPr lang="en-US" sz="900" dirty="0">
-                <a:solidFill>
-                  <a:srgbClr val="C4CDD9"/>
-                </a:solidFill>
-                <a:latin typeface="Noto Sans KR" pitchFamily="34" charset="0"/>
-                <a:ea typeface="Noto Sans KR" pitchFamily="34" charset="-122"/>
-                <a:cs typeface="Noto Sans KR" pitchFamily="34" charset="-120"/>
-              </a:rPr>
-              <a:t>현재 ASM allocated가 106 TB 근접/초과</a:t>
-            </a:r>
-            <a:endParaRPr lang="en-US" sz="900" dirty="0"/>
+              <a:rPr lang="en-US" sz="950" dirty="0">
+                <a:solidFill>
+                  <a:srgbClr val="D9E1EC"/>
+                </a:solidFill>
+                <a:latin typeface="Noto Sans KR" pitchFamily="34" charset="0"/>
+                <a:ea typeface="Noto Sans KR" pitchFamily="34" charset="-122"/>
+                <a:cs typeface="Noto Sans KR" pitchFamily="34" charset="-120"/>
+              </a:rPr>
+              <a:t>설계 DB size가 85/42 TB ceiling 초과</a:t>
+            </a:r>
+            <a:endParaRPr lang="en-US" sz="950" dirty="0"/>
           </a:p>
         </p:txBody>
       </p:sp>
@@ -14103,17 +14619,17 @@
               <a:buNone/>
             </a:pPr>
             <a:r>
-              <a:rPr lang="en-US" sz="900" dirty="0">
-                <a:solidFill>
-                  <a:srgbClr val="C4CDD9"/>
-                </a:solidFill>
-                <a:latin typeface="Noto Sans KR" pitchFamily="34" charset="0"/>
-                <a:ea typeface="Noto Sans KR" pitchFamily="34" charset="-122"/>
-                <a:cs typeface="Noto Sans KR" pitchFamily="34" charset="-120"/>
-              </a:rPr>
-              <a:t>Peak/배치 window가 Base 한계 초과</a:t>
-            </a:r>
-            <a:endParaRPr lang="en-US" sz="900" dirty="0"/>
+              <a:rPr lang="en-US" sz="950" dirty="0">
+                <a:solidFill>
+                  <a:srgbClr val="D9E1EC"/>
+                </a:solidFill>
+                <a:latin typeface="Noto Sans KR" pitchFamily="34" charset="0"/>
+                <a:ea typeface="Noto Sans KR" pitchFamily="34" charset="-122"/>
+                <a:cs typeface="Noto Sans KR" pitchFamily="34" charset="-120"/>
+              </a:rPr>
+              <a:t>N-1·backup·배치 포함 시 SLA 실패</a:t>
+            </a:r>
+            <a:endParaRPr lang="en-US" sz="950" dirty="0"/>
           </a:p>
         </p:txBody>
       </p:sp>
@@ -14169,17 +14685,17 @@
               <a:buNone/>
             </a:pPr>
             <a:r>
-              <a:rPr lang="en-US" sz="900" dirty="0">
-                <a:solidFill>
-                  <a:srgbClr val="C4CDD9"/>
-                </a:solidFill>
-                <a:latin typeface="Noto Sans KR" pitchFamily="34" charset="0"/>
-                <a:ea typeface="Noto Sans KR" pitchFamily="34" charset="-122"/>
-                <a:cs typeface="Noto Sans KR" pitchFamily="34" charset="-120"/>
-              </a:rPr>
-              <a:t>backup/DR 보존량 미산정</a:t>
-            </a:r>
-            <a:endParaRPr lang="en-US" sz="900" dirty="0"/>
+              <a:rPr lang="en-US" sz="950" dirty="0">
+                <a:solidFill>
+                  <a:srgbClr val="D9E1EC"/>
+                </a:solidFill>
+                <a:latin typeface="Noto Sans KR" pitchFamily="34" charset="0"/>
+                <a:ea typeface="Noto Sans KR" pitchFamily="34" charset="-122"/>
+                <a:cs typeface="Noto Sans KR" pitchFamily="34" charset="-120"/>
+              </a:rPr>
+              <a:t>client/backup network 설계 미충족</a:t>
+            </a:r>
+            <a:endParaRPr lang="en-US" sz="950" dirty="0"/>
           </a:p>
         </p:txBody>
       </p:sp>
@@ -14235,17 +14751,17 @@
               <a:buNone/>
             </a:pPr>
             <a:r>
-              <a:rPr lang="en-US" sz="900" dirty="0">
-                <a:solidFill>
-                  <a:srgbClr val="C4CDD9"/>
-                </a:solidFill>
-                <a:latin typeface="Noto Sans KR" pitchFamily="34" charset="0"/>
-                <a:ea typeface="Noto Sans KR" pitchFamily="34" charset="-122"/>
-                <a:cs typeface="Noto Sans KR" pitchFamily="34" charset="-120"/>
-              </a:rPr>
-              <a:t>19c app의 26ai compatibility 미검증</a:t>
-            </a:r>
-            <a:endParaRPr lang="en-US" sz="900" dirty="0"/>
+              <a:rPr lang="en-US" sz="950" dirty="0">
+                <a:solidFill>
+                  <a:srgbClr val="D9E1EC"/>
+                </a:solidFill>
+                <a:latin typeface="Noto Sans KR" pitchFamily="34" charset="0"/>
+                <a:ea typeface="Noto Sans KR" pitchFamily="34" charset="-122"/>
+                <a:cs typeface="Noto Sans KR" pitchFamily="34" charset="-120"/>
+              </a:rPr>
+              <a:t>19c ZDM prerequisite/support 미확인</a:t>
+            </a:r>
+            <a:endParaRPr lang="en-US" sz="950" dirty="0"/>
           </a:p>
         </p:txBody>
       </p:sp>
@@ -14301,9 +14817,9 @@
               <a:buNone/>
             </a:pPr>
             <a:r>
-              <a:rPr lang="en-US" sz="900" dirty="0">
-                <a:solidFill>
-                  <a:srgbClr val="C4CDD9"/>
+              <a:rPr lang="en-US" sz="950" dirty="0">
+                <a:solidFill>
+                  <a:srgbClr val="D9E1EC"/>
                 </a:solidFill>
                 <a:latin typeface="Noto Sans KR" pitchFamily="34" charset="0"/>
                 <a:ea typeface="Noto Sans KR" pitchFamily="34" charset="-122"/>
@@ -14311,7 +14827,7 @@
               </a:rPr>
               <a:t>4년 계약·운영 책임 승인 없음</a:t>
             </a:r>
-            <a:endParaRPr lang="en-US" sz="900" dirty="0"/>
+            <a:endParaRPr lang="en-US" sz="950" dirty="0"/>
           </a:p>
         </p:txBody>
       </p:sp>
@@ -14323,12 +14839,12 @@
         </p:nvSpPr>
         <p:spPr>
           <a:xfrm>
-            <a:off x="512064" y="5943600"/>
-            <a:ext cx="11173968" cy="265176"/>
+            <a:off x="512064" y="5870448"/>
+            <a:ext cx="11173968" cy="411480"/>
           </a:xfrm>
           <a:prstGeom prst="roundRect">
             <a:avLst>
-              <a:gd name="adj" fmla="val 10345"/>
+              <a:gd name="adj" fmla="val 6667"/>
             </a:avLst>
           </a:prstGeom>
           <a:solidFill>
@@ -14336,7 +14852,7 @@
           </a:solidFill>
           <a:ln w="12700">
             <a:solidFill>
-              <a:srgbClr val="5B4826"/>
+              <a:srgbClr val="8A6731"/>
             </a:solidFill>
             <a:prstDash val="solid"/>
           </a:ln>
@@ -14357,8 +14873,8 @@
         </p:nvSpPr>
         <p:spPr>
           <a:xfrm>
-            <a:off x="667512" y="5980176"/>
-            <a:ext cx="10863072" cy="182880"/>
+            <a:off x="667512" y="5943600"/>
+            <a:ext cx="10863072" cy="228600"/>
           </a:xfrm>
           <a:prstGeom prst="rect">
             <a:avLst/>
@@ -14376,7 +14892,7 @@
               <a:buNone/>
             </a:pPr>
             <a:r>
-              <a:rPr lang="en-US" sz="820" b="1" dirty="0">
+              <a:rPr lang="en-US" sz="940" b="1" dirty="0">
                 <a:solidFill>
                   <a:srgbClr val="F6B44B"/>
                 </a:solidFill>
@@ -14384,9 +14900,9 @@
                 <a:ea typeface="Noto Sans KR" pitchFamily="34" charset="-122"/>
                 <a:cs typeface="Noto Sans KR" pitchFamily="34" charset="-120"/>
               </a:rPr>
-              <a:t>승인 gate: AWR/ASH + Exachk + ASM/backup capacity + network latency + HA/DR rehearsal + OCI shape availability + MOS support matrix</a:t>
-            </a:r>
-            <a:endParaRPr lang="en-US" sz="820" dirty="0"/>
+              <a:t>최종 승인 GATE · AWR/ASH · ASM/backup · workload POC · N-1/HA/DR rehearsal · network latency · MOS support</a:t>
+            </a:r>
+            <a:endParaRPr lang="en-US" sz="940" dirty="0"/>
           </a:p>
         </p:txBody>
       </p:sp>
@@ -14442,7 +14958,7 @@
             <a:r>
               <a:rPr lang="en-US" sz="700" dirty="0">
                 <a:solidFill>
-                  <a:srgbClr val="8290A3"/>
+                  <a:srgbClr val="A8B4C5"/>
                 </a:solidFill>
                 <a:latin typeface="Noto Sans KR" pitchFamily="34" charset="0"/>
                 <a:ea typeface="Noto Sans KR" pitchFamily="34" charset="-122"/>
@@ -14483,13 +14999,13 @@
             <a:r>
               <a:rPr lang="en-US" sz="680" dirty="0">
                 <a:solidFill>
-                  <a:srgbClr val="8290A3"/>
-                </a:solidFill>
-                <a:latin typeface="Noto Sans KR" pitchFamily="34" charset="0"/>
-                <a:ea typeface="Noto Sans KR" pitchFamily="34" charset="-122"/>
-                <a:cs typeface="Noto Sans KR" pitchFamily="34" charset="-120"/>
-              </a:rPr>
-              <a:t>Source: ExaCC X11M DS v1.5 Table 1 · numbers are published maxima, not workload guarantees</a:t>
+                  <a:srgbClr val="A8B4C5"/>
+                </a:solidFill>
+                <a:latin typeface="Noto Sans KR" pitchFamily="34" charset="0"/>
+                <a:ea typeface="Noto Sans KR" pitchFamily="34" charset="-122"/>
+                <a:cs typeface="Noto Sans KR" pitchFamily="34" charset="-120"/>
+              </a:rPr>
+              <a:t>Source: [2] X11M DS Table 1 · published maxima are not workload guarantees</a:t>
             </a:r>
             <a:endParaRPr lang="en-US" sz="680" dirty="0"/>
           </a:p>
@@ -14644,7 +15160,7 @@
                 <a:ea typeface="Noto Sans KR" pitchFamily="34" charset="-122"/>
                 <a:cs typeface="Noto Sans KR" pitchFamily="34" charset="-120"/>
               </a:rPr>
-              <a:t>첨부 Datasheet 반영 범위와 해석 경계</a:t>
+              <a:t>첨부 Datasheet 반영 범위와 배포 전 검증 조건</a:t>
             </a:r>
             <a:endParaRPr lang="en-US" sz="2500" dirty="0"/>
           </a:p>
@@ -14679,13 +15195,13 @@
             <a:r>
               <a:rPr lang="en-US" sz="1050" dirty="0">
                 <a:solidFill>
-                  <a:srgbClr val="C4CDD9"/>
-                </a:solidFill>
-                <a:latin typeface="Noto Sans KR" pitchFamily="34" charset="0"/>
-                <a:ea typeface="Noto Sans KR" pitchFamily="34" charset="-122"/>
-                <a:cs typeface="Noto Sans KR" pitchFamily="34" charset="-120"/>
-              </a:rPr>
-              <a:t>X9M 첨부는 Cloud Infrastructure v1.11, X11M 첨부는 Database Machine v1.2이며 ExaCC 고유 수치는 공식 ExaCC v1.5로 보완했다.</a:t>
+                  <a:srgbClr val="D9E1EC"/>
+                </a:solidFill>
+                <a:latin typeface="Noto Sans KR" pitchFamily="34" charset="0"/>
+                <a:ea typeface="Noto Sans KR" pitchFamily="34" charset="-122"/>
+                <a:cs typeface="Noto Sans KR" pitchFamily="34" charset="-120"/>
+              </a:rPr>
+              <a:t>X9M 첨부는 Cloud Infrastructure v1.11, X11M 첨부는 Database Machine v1.2이며 ExaCC 고유 수치는 공식 v1.5로 보완했다.</a:t>
             </a:r>
             <a:endParaRPr lang="en-US" sz="1050" dirty="0"/>
           </a:p>
@@ -14820,7 +15336,7 @@
               <a:buNone/>
             </a:pPr>
             <a:r>
-              <a:rPr lang="en-US" sz="1020" b="1" dirty="0">
+              <a:rPr lang="en-US" sz="1050" b="1" dirty="0">
                 <a:solidFill>
                   <a:srgbClr val="F7F9FC"/>
                 </a:solidFill>
@@ -14830,7 +15346,7 @@
               </a:rPr>
               <a:t>첨부 · Exadata Cloud Infrastructure X9M DS v1.11</a:t>
             </a:r>
-            <a:endParaRPr lang="en-US" sz="1020" dirty="0"/>
+            <a:endParaRPr lang="en-US" sz="1050" dirty="0"/>
           </a:p>
         </p:txBody>
       </p:sp>
@@ -14843,7 +15359,7 @@
         <p:spPr>
           <a:xfrm>
             <a:off x="1280160" y="1865376"/>
-            <a:ext cx="4773168" cy="256032"/>
+            <a:ext cx="4846320" cy="256032"/>
           </a:xfrm>
           <a:prstGeom prst="rect">
             <a:avLst/>
@@ -14861,17 +15377,17 @@
               <a:buNone/>
             </a:pPr>
             <a:r>
-              <a:rPr lang="en-US" sz="760" dirty="0">
-                <a:solidFill>
-                  <a:srgbClr val="C4CDD9"/>
-                </a:solidFill>
-                <a:latin typeface="Noto Sans KR" pitchFamily="34" charset="0"/>
-                <a:ea typeface="Noto Sans KR" pitchFamily="34" charset="-122"/>
-                <a:cs typeface="Noto Sans KR" pitchFamily="34" charset="-120"/>
-              </a:rPr>
-              <a:t>X9M Quarter: 2+3, 252 usable cores, 2,780GB VM memory, 190TB usable disk, 4.5TB XRMEM</a:t>
-            </a:r>
-            <a:endParaRPr lang="en-US" sz="760" dirty="0"/>
+              <a:rPr lang="en-US" sz="880" dirty="0">
+                <a:solidFill>
+                  <a:srgbClr val="D9E1EC"/>
+                </a:solidFill>
+                <a:latin typeface="Noto Sans KR" pitchFamily="34" charset="0"/>
+                <a:ea typeface="Noto Sans KR" pitchFamily="34" charset="-122"/>
+                <a:cs typeface="Noto Sans KR" pitchFamily="34" charset="-120"/>
+              </a:rPr>
+              <a:t>Quarter 2+3, 252 usable cores, 2,780GB VM memory, 190TB usable disk</a:t>
+            </a:r>
+            <a:endParaRPr lang="en-US" sz="880" dirty="0"/>
           </a:p>
         </p:txBody>
       </p:sp>
@@ -14883,8 +15399,8 @@
         </p:nvSpPr>
         <p:spPr>
           <a:xfrm>
-            <a:off x="6327648" y="1709928"/>
-            <a:ext cx="5029200" cy="256032"/>
+            <a:off x="6382512" y="1719072"/>
+            <a:ext cx="4681728" cy="237744"/>
           </a:xfrm>
           <a:prstGeom prst="rect">
             <a:avLst/>
@@ -14902,7 +15418,7 @@
               <a:buNone/>
             </a:pPr>
             <a:r>
-              <a:rPr lang="en-US" sz="700" dirty="0">
+              <a:rPr lang="en-US" sz="950" b="1" dirty="0">
                 <a:solidFill>
                   <a:srgbClr val="61A8FF"/>
                 </a:solidFill>
@@ -14910,9 +15426,9 @@
                 <a:ea typeface="Noto Sans KR" pitchFamily="34" charset="-122"/>
                 <a:cs typeface="Noto Sans KR" pitchFamily="34" charset="-120"/>
               </a:rPr>
-              <a:t>첨부: exadata-cloud-infrastructure-x9m.pdf (v1.11, 2024)</a:t>
-            </a:r>
-            <a:endParaRPr lang="en-US" sz="700" dirty="0"/>
+              <a:t>[1] 첨부 X9M Cloud Infrastructure DS</a:t>
+            </a:r>
+            <a:endParaRPr lang="en-US" sz="950" dirty="0"/>
           </a:p>
         </p:txBody>
       </p:sp>
@@ -15045,7 +15561,7 @@
               <a:buNone/>
             </a:pPr>
             <a:r>
-              <a:rPr lang="en-US" sz="1020" b="1" dirty="0">
+              <a:rPr lang="en-US" sz="1050" b="1" dirty="0">
                 <a:solidFill>
                   <a:srgbClr val="F7F9FC"/>
                 </a:solidFill>
@@ -15053,9 +15569,9 @@
                 <a:ea typeface="Noto Sans KR" pitchFamily="34" charset="-122"/>
                 <a:cs typeface="Noto Sans KR" pitchFamily="34" charset="-120"/>
               </a:rPr>
-              <a:t>첨부 · Exadata Database Machine X11M DS v1.2 (한국어)</a:t>
-            </a:r>
-            <a:endParaRPr lang="en-US" sz="1020" dirty="0"/>
+              <a:t>첨부 · Exadata Database Machine X11M DS v1.2</a:t>
+            </a:r>
+            <a:endParaRPr lang="en-US" sz="1050" dirty="0"/>
           </a:p>
         </p:txBody>
       </p:sp>
@@ -15068,7 +15584,7 @@
         <p:spPr>
           <a:xfrm>
             <a:off x="1280160" y="2852928"/>
-            <a:ext cx="4773168" cy="256032"/>
+            <a:ext cx="4846320" cy="256032"/>
           </a:xfrm>
           <a:prstGeom prst="rect">
             <a:avLst/>
@@ -15086,17 +15602,17 @@
               <a:buNone/>
             </a:pPr>
             <a:r>
-              <a:rPr lang="en-US" sz="760" dirty="0">
-                <a:solidFill>
-                  <a:srgbClr val="C4CDD9"/>
-                </a:solidFill>
-                <a:latin typeface="Noto Sans KR" pitchFamily="34" charset="0"/>
-                <a:ea typeface="Noto Sans KR" pitchFamily="34" charset="-122"/>
-                <a:cs typeface="Noto Sans KR" pitchFamily="34" charset="-120"/>
-              </a:rPr>
-              <a:t>X11M 하드웨어: DDR5, PCIe 5.0, XRMEM, AI Smart Scan, Exascale 맥락</a:t>
-            </a:r>
-            <a:endParaRPr lang="en-US" sz="760" dirty="0"/>
+              <a:rPr lang="en-US" sz="880" dirty="0">
+                <a:solidFill>
+                  <a:srgbClr val="D9E1EC"/>
+                </a:solidFill>
+                <a:latin typeface="Noto Sans KR" pitchFamily="34" charset="0"/>
+                <a:ea typeface="Noto Sans KR" pitchFamily="34" charset="-122"/>
+                <a:cs typeface="Noto Sans KR" pitchFamily="34" charset="-120"/>
+              </a:rPr>
+              <a:t>X11M 하드웨어, DDR5/PCIe 5.0, XRMEM, AI Smart Scan, Exascale 맥락</a:t>
+            </a:r>
+            <a:endParaRPr lang="en-US" sz="880" dirty="0"/>
           </a:p>
         </p:txBody>
       </p:sp>
@@ -15108,8 +15624,8 @@
         </p:nvSpPr>
         <p:spPr>
           <a:xfrm>
-            <a:off x="6327648" y="2697480"/>
-            <a:ext cx="5029200" cy="256032"/>
+            <a:off x="6382512" y="2706624"/>
+            <a:ext cx="4681728" cy="237744"/>
           </a:xfrm>
           <a:prstGeom prst="rect">
             <a:avLst/>
@@ -15127,7 +15643,7 @@
               <a:buNone/>
             </a:pPr>
             <a:r>
-              <a:rPr lang="en-US" sz="700" dirty="0">
+              <a:rPr lang="en-US" sz="950" b="1" dirty="0">
                 <a:solidFill>
                   <a:srgbClr val="61A8FF"/>
                 </a:solidFill>
@@ -15135,9 +15651,9 @@
                 <a:ea typeface="Noto Sans KR" pitchFamily="34" charset="-122"/>
                 <a:cs typeface="Noto Sans KR" pitchFamily="34" charset="-120"/>
               </a:rPr>
-              <a:t>첨부: Exadata-X11M-DS-FINAL_ko_KR.pdf (DB Machine v1.2, 2025)</a:t>
-            </a:r>
-            <a:endParaRPr lang="en-US" sz="700" dirty="0"/>
+              <a:t>[2] 첨부 X11M Database Machine DS</a:t>
+            </a:r>
+            <a:endParaRPr lang="en-US" sz="950" dirty="0"/>
           </a:p>
         </p:txBody>
       </p:sp>
@@ -15270,7 +15786,7 @@
               <a:buNone/>
             </a:pPr>
             <a:r>
-              <a:rPr lang="en-US" sz="1020" b="1" dirty="0">
+              <a:rPr lang="en-US" sz="1050" b="1" dirty="0">
                 <a:solidFill>
                   <a:srgbClr val="F7F9FC"/>
                 </a:solidFill>
@@ -15278,9 +15794,9 @@
                 <a:ea typeface="Noto Sans KR" pitchFamily="34" charset="-122"/>
                 <a:cs typeface="Noto Sans KR" pitchFamily="34" charset="-120"/>
               </a:rPr>
-              <a:t>공식 · ExaCC X11M DS v1.5</a:t>
-            </a:r>
-            <a:endParaRPr lang="en-US" sz="1020" dirty="0"/>
+              <a:t>ExaCC X11M Data Sheet v1.5</a:t>
+            </a:r>
+            <a:endParaRPr lang="en-US" sz="1050" dirty="0"/>
           </a:p>
         </p:txBody>
       </p:sp>
@@ -15293,7 +15809,7 @@
         <p:spPr>
           <a:xfrm>
             <a:off x="1280160" y="3840480"/>
-            <a:ext cx="4773168" cy="256032"/>
+            <a:ext cx="4846320" cy="256032"/>
           </a:xfrm>
           <a:prstGeom prst="rect">
             <a:avLst/>
@@ -15311,17 +15827,17 @@
               <a:buNone/>
             </a:pPr>
             <a:r>
-              <a:rPr lang="en-US" sz="760" dirty="0">
-                <a:solidFill>
-                  <a:srgbClr val="C4CDD9"/>
-                </a:solidFill>
-                <a:latin typeface="Noto Sans KR" pitchFamily="34" charset="0"/>
-                <a:ea typeface="Noto Sans KR" pitchFamily="34" charset="-122"/>
-                <a:cs typeface="Noto Sans KR" pitchFamily="34" charset="-120"/>
-              </a:rPr>
-              <a:t>Base specs, 책임 모델, 4년 subscription, ZDM 권고, 26ai 관련 제품</a:t>
-            </a:r>
-            <a:endParaRPr lang="en-US" sz="760" dirty="0"/>
+              <a:rPr lang="en-US" sz="880" dirty="0">
+                <a:solidFill>
+                  <a:srgbClr val="D9E1EC"/>
+                </a:solidFill>
+                <a:latin typeface="Noto Sans KR" pitchFamily="34" charset="0"/>
+                <a:ea typeface="Noto Sans KR" pitchFamily="34" charset="-122"/>
+                <a:cs typeface="Noto Sans KR" pitchFamily="34" charset="-120"/>
+              </a:rPr>
+              <a:t>Base specs, 책임 모델, 4년 infrastructure subscription, ZDM 권고</a:t>
+            </a:r>
+            <a:endParaRPr lang="en-US" sz="880" dirty="0"/>
           </a:p>
         </p:txBody>
       </p:sp>
@@ -15333,8 +15849,8 @@
         </p:nvSpPr>
         <p:spPr>
           <a:xfrm>
-            <a:off x="6327648" y="3685032"/>
-            <a:ext cx="5029200" cy="256032"/>
+            <a:off x="6382512" y="3694176"/>
+            <a:ext cx="4681728" cy="237744"/>
           </a:xfrm>
           <a:prstGeom prst="rect">
             <a:avLst/>
@@ -15352,7 +15868,7 @@
               <a:buNone/>
             </a:pPr>
             <a:r>
-              <a:rPr lang="en-US" sz="700" dirty="0">
+              <a:rPr lang="en-US" sz="950" b="1" dirty="0">
                 <a:solidFill>
                   <a:srgbClr val="61A8FF"/>
                 </a:solidFill>
@@ -15360,9 +15876,9 @@
                 <a:ea typeface="Noto Sans KR" pitchFamily="34" charset="-122"/>
                 <a:cs typeface="Noto Sans KR" pitchFamily="34" charset="-120"/>
               </a:rPr>
-              <a:t>https://www.oracle.com/a/ocom/docs/engineered-systems/exadata/exadb-cc-x11m-ds.pdf</a:t>
-            </a:r>
-            <a:endParaRPr lang="en-US" sz="700" dirty="0"/>
+              <a:t>[3] ExaCC X11M DS Table 1, pp.6–11</a:t>
+            </a:r>
+            <a:endParaRPr lang="en-US" sz="950" dirty="0"/>
           </a:p>
         </p:txBody>
       </p:sp>
@@ -15495,7 +16011,7 @@
               <a:buNone/>
             </a:pPr>
             <a:r>
-              <a:rPr lang="en-US" sz="1020" b="1" dirty="0">
+              <a:rPr lang="en-US" sz="1050" b="1" dirty="0">
                 <a:solidFill>
                   <a:srgbClr val="F7F9FC"/>
                 </a:solidFill>
@@ -15503,9 +16019,9 @@
                 <a:ea typeface="Noto Sans KR" pitchFamily="34" charset="-122"/>
                 <a:cs typeface="Noto Sans KR" pitchFamily="34" charset="-120"/>
               </a:rPr>
-              <a:t>공식 · Manage VM Clusters documentation</a:t>
-            </a:r>
-            <a:endParaRPr lang="en-US" sz="1020" dirty="0"/>
+              <a:t>Oracle Manage VM Clusters</a:t>
+            </a:r>
+            <a:endParaRPr lang="en-US" sz="1050" dirty="0"/>
           </a:p>
         </p:txBody>
       </p:sp>
@@ -15518,7 +16034,7 @@
         <p:spPr>
           <a:xfrm>
             <a:off x="1280160" y="4828032"/>
-            <a:ext cx="4773168" cy="256032"/>
+            <a:ext cx="4846320" cy="256032"/>
           </a:xfrm>
           <a:prstGeom prst="rect">
             <a:avLst/>
@@ -15536,17 +16052,17 @@
               <a:buNone/>
             </a:pPr>
             <a:r>
-              <a:rPr lang="en-US" sz="760" dirty="0">
-                <a:solidFill>
-                  <a:srgbClr val="C4CDD9"/>
-                </a:solidFill>
-                <a:latin typeface="Noto Sans KR" pitchFamily="34" charset="0"/>
-                <a:ea typeface="Noto Sans KR" pitchFamily="34" charset="-122"/>
-                <a:cs typeface="Noto Sans KR" pitchFamily="34" charset="-120"/>
-              </a:rPr>
-              <a:t>GI는 cluster별 선택; 26ai DB에는 GI 26ai 필요; major별 DB Home 분리</a:t>
-            </a:r>
-            <a:endParaRPr lang="en-US" sz="760" dirty="0"/>
+              <a:rPr lang="en-US" sz="880" dirty="0">
+                <a:solidFill>
+                  <a:srgbClr val="D9E1EC"/>
+                </a:solidFill>
+                <a:latin typeface="Noto Sans KR" pitchFamily="34" charset="0"/>
+                <a:ea typeface="Noto Sans KR" pitchFamily="34" charset="-122"/>
+                <a:cs typeface="Noto Sans KR" pitchFamily="34" charset="-120"/>
+              </a:rPr>
+              <a:t>GI 19c/26ai 선택, 26ai DB의 GI 26ai 요구사항과 software minimum</a:t>
+            </a:r>
+            <a:endParaRPr lang="en-US" sz="880" dirty="0"/>
           </a:p>
         </p:txBody>
       </p:sp>
@@ -15558,8 +16074,8 @@
         </p:nvSpPr>
         <p:spPr>
           <a:xfrm>
-            <a:off x="6327648" y="4672584"/>
-            <a:ext cx="5029200" cy="256032"/>
+            <a:off x="6382512" y="4681728"/>
+            <a:ext cx="4681728" cy="237744"/>
           </a:xfrm>
           <a:prstGeom prst="rect">
             <a:avLst/>
@@ -15577,7 +16093,7 @@
               <a:buNone/>
             </a:pPr>
             <a:r>
-              <a:rPr lang="en-US" sz="700" dirty="0">
+              <a:rPr lang="en-US" sz="950" b="1" dirty="0">
                 <a:solidFill>
                   <a:srgbClr val="61A8FF"/>
                 </a:solidFill>
@@ -15585,9 +16101,9 @@
                 <a:ea typeface="Noto Sans KR" pitchFamily="34" charset="-122"/>
                 <a:cs typeface="Noto Sans KR" pitchFamily="34" charset="-120"/>
               </a:rPr>
-              <a:t>https://docs.oracle.com/en/engineered-systems/exadata-cloud-at-customer/ecccm/ecc-manage-vm-clusters.html</a:t>
-            </a:r>
-            <a:endParaRPr lang="en-US" sz="700" dirty="0"/>
+              <a:t>[4] VM Cluster administration</a:t>
+            </a:r>
+            <a:endParaRPr lang="en-US" sz="950" dirty="0"/>
           </a:p>
         </p:txBody>
       </p:sp>
@@ -15633,7 +16149,7 @@
         </p:nvSpPr>
         <p:spPr>
           <a:xfrm>
-            <a:off x="749808" y="5751576"/>
+            <a:off x="749808" y="5669280"/>
             <a:ext cx="1060704" cy="164592"/>
           </a:xfrm>
           <a:prstGeom prst="rect">
@@ -15652,7 +16168,7 @@
               <a:buNone/>
             </a:pPr>
             <a:r>
-              <a:rPr lang="en-US" sz="850" b="1" dirty="0">
+              <a:rPr lang="en-US" sz="900" b="1" dirty="0">
                 <a:solidFill>
                   <a:srgbClr val="FF6B5E"/>
                 </a:solidFill>
@@ -15660,9 +16176,9 @@
                 <a:ea typeface="Noto Sans KR" pitchFamily="34" charset="-122"/>
                 <a:cs typeface="Noto Sans KR" pitchFamily="34" charset="-120"/>
               </a:rPr>
-              <a:t>반드시 재확인</a:t>
-            </a:r>
-            <a:endParaRPr lang="en-US" sz="850" dirty="0"/>
+              <a:t>NEXT ACTION</a:t>
+            </a:r>
+            <a:endParaRPr lang="en-US" sz="900" dirty="0"/>
           </a:p>
         </p:txBody>
       </p:sp>
@@ -15674,8 +16190,8 @@
         </p:nvSpPr>
         <p:spPr>
           <a:xfrm>
-            <a:off x="1874520" y="5678424"/>
-            <a:ext cx="9464040" cy="292608"/>
+            <a:off x="1874520" y="5614416"/>
+            <a:ext cx="9464040" cy="219456"/>
           </a:xfrm>
           <a:prstGeom prst="rect">
             <a:avLst/>
@@ -15693,7 +16209,7 @@
               <a:buNone/>
             </a:pPr>
             <a:r>
-              <a:rPr lang="en-US" sz="840" b="1" dirty="0">
+              <a:rPr lang="en-US" sz="920" b="1" dirty="0">
                 <a:solidFill>
                   <a:srgbClr val="F7F9FC"/>
                 </a:solidFill>
@@ -15701,15 +16217,56 @@
                 <a:ea typeface="Noto Sans KR" pitchFamily="34" charset="-122"/>
                 <a:cs typeface="Noto Sans KR" pitchFamily="34" charset="-120"/>
               </a:rPr>
-              <a:t>Target OCI tenancy/region의 shape 제공 여부 · MOS 742060.1 지원 상태 · 19c/26ai RU 조합 · GI/Guest image · 라이선스 · ZDM 지원 경로</a:t>
-            </a:r>
-            <a:endParaRPr lang="en-US" sz="840" dirty="0"/>
-          </a:p>
-        </p:txBody>
-      </p:sp>
-      <p:sp>
-        <p:nvSpPr>
-          <p:cNvPr id="32" name="Shape 30"/>
+              <a:t>Owner: 고객 DBA/Infra + Oracle · AWR/ASM sizing, MOS/RU·GI 검증, network readiness · 상세설계 착수 전</a:t>
+            </a:r>
+            <a:endParaRPr lang="en-US" sz="920" dirty="0"/>
+          </a:p>
+        </p:txBody>
+      </p:sp>
+      <p:sp>
+        <p:nvSpPr>
+          <p:cNvPr id="32" name="Text 30"/>
+          <p:cNvSpPr/>
+          <p:nvPr/>
+        </p:nvSpPr>
+        <p:spPr>
+          <a:xfrm>
+            <a:off x="1874520" y="5870448"/>
+            <a:ext cx="9464040" cy="164592"/>
+          </a:xfrm>
+          <a:prstGeom prst="rect">
+            <a:avLst/>
+          </a:prstGeom>
+          <a:noFill/>
+          <a:ln/>
+        </p:spPr>
+        <p:txBody>
+          <a:bodyPr wrap="square" lIns="0" tIns="0" rIns="0" bIns="0" rtlCol="0" anchor="ctr">
+            <a:normAutofit/>
+          </a:bodyPr>
+          <a:lstStyle/>
+          <a:p>
+            <a:pPr algn="l" indent="0" marL="0">
+              <a:buNone/>
+            </a:pPr>
+            <a:r>
+              <a:rPr lang="en-US" sz="830" dirty="0">
+                <a:solidFill>
+                  <a:srgbClr val="D9E1EC"/>
+                </a:solidFill>
+                <a:latin typeface="Noto Sans KR" pitchFamily="34" charset="0"/>
+                <a:ea typeface="Noto Sans KR" pitchFamily="34" charset="-122"/>
+                <a:cs typeface="Noto Sans KR" pitchFamily="34" charset="-120"/>
+              </a:rPr>
+              <a:t>Shape 제공 여부 · Guest image · 라이선스 · ZDM 경로 · 승인 RPO/RTO 재확인</a:t>
+            </a:r>
+            <a:endParaRPr lang="en-US" sz="830" dirty="0"/>
+          </a:p>
+        </p:txBody>
+      </p:sp>
+      <p:sp>
+        <p:nvSpPr>
+          <p:cNvPr id="33" name="Shape 31"/>
           <p:cNvSpPr/>
           <p:nvPr/>
         </p:nvSpPr>
@@ -15732,7 +16289,7 @@
       </p:sp>
       <p:sp>
         <p:nvSpPr>
-          <p:cNvPr id="33" name="Text 31"/>
+          <p:cNvPr id="34" name="Text 32"/>
           <p:cNvSpPr/>
           <p:nvPr/>
         </p:nvSpPr>
@@ -15759,7 +16316,7 @@
             <a:r>
               <a:rPr lang="en-US" sz="700" dirty="0">
                 <a:solidFill>
-                  <a:srgbClr val="8290A3"/>
+                  <a:srgbClr val="A8B4C5"/>
                 </a:solidFill>
                 <a:latin typeface="Noto Sans KR" pitchFamily="34" charset="0"/>
                 <a:ea typeface="Noto Sans KR" pitchFamily="34" charset="-122"/>
@@ -15773,7 +16330,7 @@
       </p:sp>
       <p:sp>
         <p:nvSpPr>
-          <p:cNvPr id="34" name="Text 32"/>
+          <p:cNvPr id="35" name="Text 33"/>
           <p:cNvSpPr/>
           <p:nvPr/>
         </p:nvSpPr>
@@ -15800,13 +16357,13 @@
             <a:r>
               <a:rPr lang="en-US" sz="680" dirty="0">
                 <a:solidFill>
-                  <a:srgbClr val="8290A3"/>
-                </a:solidFill>
-                <a:latin typeface="Noto Sans KR" pitchFamily="34" charset="0"/>
-                <a:ea typeface="Noto Sans KR" pitchFamily="34" charset="-122"/>
-                <a:cs typeface="Noto Sans KR" pitchFamily="34" charset="-120"/>
-              </a:rPr>
-              <a:t>Prepared from the two user attachments plus Oracle ExaCC X11M v1.5 and current administration docs</a:t>
+                  <a:srgbClr val="A8B4C5"/>
+                </a:solidFill>
+                <a:latin typeface="Noto Sans KR" pitchFamily="34" charset="0"/>
+                <a:ea typeface="Noto Sans KR" pitchFamily="34" charset="-122"/>
+                <a:cs typeface="Noto Sans KR" pitchFamily="34" charset="-120"/>
+              </a:rPr>
+              <a:t>Decision architecture · not deployment approval</a:t>
             </a:r>
             <a:endParaRPr lang="en-US" sz="680" dirty="0"/>
           </a:p>

--- a/hermes_docs/exadata-x9m-to-exacc-x11m-transition.pptx
+++ b/hermes_docs/exadata-x9m-to-exacc-x11m-transition.pptx
@@ -6879,7 +6879,7 @@
                 <a:ea typeface="Noto Sans KR" pitchFamily="34" charset="-122"/>
                 <a:cs typeface="Noto Sans KR" pitchFamily="34" charset="-120"/>
               </a:rPr>
-              <a:t>2+3 동일</a:t>
+              <a:t>노드 수 2+3 동일</a:t>
             </a:r>
             <a:endParaRPr lang="en-US" sz="920" dirty="0"/>
           </a:p>
@@ -7722,7 +7722,7 @@
                 <a:ea typeface="Noto Sans KR" pitchFamily="34" charset="-122"/>
                 <a:cs typeface="Noto Sans KR" pitchFamily="34" charset="-120"/>
               </a:rPr>
-              <a:t>disk 26%↑</a:t>
+              <a:t>Disk 26%↑ · Flash 6%↑</a:t>
             </a:r>
             <a:endParaRPr lang="en-US" sz="920" dirty="0"/>
           </a:p>
@@ -8531,7 +8531,24 @@
                 <a:ea typeface="Noto Sans KR" pitchFamily="34" charset="-122"/>
                 <a:cs typeface="Noto Sans KR" pitchFamily="34" charset="-120"/>
               </a:rPr>
-              <a:t>쓰기 63%↑</a:t>
+              <a:t>읽기 동일</a:t>
+            </a:r>
+            <a:endParaRPr lang="en-US" sz="920" dirty="0"/>
+          </a:p>
+          <a:p>
+            <a:pPr algn="ctr" indent="0" marL="0">
+              <a:buNone/>
+            </a:pPr>
+            <a:r>
+              <a:rPr lang="en-US" sz="920" b="1" dirty="0">
+                <a:solidFill>
+                  <a:srgbClr val="2DD4BF"/>
+                </a:solidFill>
+                <a:latin typeface="Noto Sans KR" pitchFamily="34" charset="0"/>
+                <a:ea typeface="Noto Sans KR" pitchFamily="34" charset="-122"/>
+                <a:cs typeface="Noto Sans KR" pitchFamily="34" charset="-120"/>
+              </a:rPr>
+              <a:t>쓰기 약 63%↑</a:t>
             </a:r>
             <a:endParaRPr lang="en-US" sz="920" dirty="0"/>
           </a:p>
@@ -8870,7 +8887,7 @@
                 <a:ea typeface="Noto Sans KR" pitchFamily="34" charset="-122"/>
                 <a:cs typeface="Noto Sans KR" pitchFamily="34" charset="-120"/>
               </a:rPr>
-              <a:t>주의: “Quarter 상당”은 비교 편의 표현이며 Oracle 공식 X11M shape명은 Elastic 구성 · OCPU/ECPU 직접 등가 비교 불가</a:t>
+              <a:t>ExaCC X11M에는 공식 Quarter Rack shape가 없음 · 본 장표는 2 Standard DB + 3 HC w/XRMEM Elastic 구성 비교 · OCPU/ECPU 직접 등가 비교 불가</a:t>
             </a:r>
             <a:endParaRPr lang="en-US" sz="810" dirty="0"/>
           </a:p>

--- a/hermes_docs/exadata-x9m-to-exacc-x11m-transition.pptx
+++ b/hermes_docs/exadata-x9m-to-exacc-x11m-transition.pptx
@@ -685,7 +685,7 @@
           <a:p>
             <a:r>
               <a:rPr lang="en-US" dirty="0"/>
-              <a:t>ExaCC X11M does not publish a Quarter Rack shape name. This slide compares the analogous 2 Standard DB Server + 3 High Capacity Storage Server with XRMEM elastic configuration.,Published performance metrics are maxima, not workload guarantees. Validate with AWR/ASH and representative workload POC.</a:t>
+              <a:t>X9M-2 Eighth Rack values are from the on-premises Exadata Database Machine X9M-2 data sheet: 2 database servers, 3 Eighth Rack HC storage servers, 64 physical database cores, and 96.2 TB usable capacity at ASM high redundancy.,ExaC@C X11M does not publish a Quarter Rack shape name. The Elastic comparison uses 2 Standard database servers and 3 High Capacity storage servers with XRMEM.,Physical cores, usable cores, OCPUs, and ECPUs are different service and licensing measures. Do not treat them as direct equivalents; final sizing requires AWR/ASH and workload validation.</a:t>
             </a:r>
             <a:endParaRPr lang="en-US" dirty="0"/>
           </a:p>
@@ -6310,7 +6310,7 @@
                 <a:ea typeface="Noto Sans KR" pitchFamily="34" charset="-122"/>
                 <a:cs typeface="Noto Sans KR" pitchFamily="34" charset="-120"/>
               </a:rPr>
-              <a:t>X9M Quarter와 ExaCC X11M “Quarter 상당 2+3” 구성 비교</a:t>
+              <a:t>X9M Eighth Rack vs ExaC@C X11M Base·Elastic 사양 비교</a:t>
             </a:r>
             <a:endParaRPr lang="en-US" sz="2500" dirty="0"/>
           </a:p>
@@ -6351,7 +6351,7 @@
                 <a:ea typeface="Noto Sans KR" pitchFamily="34" charset="-122"/>
                 <a:cs typeface="Noto Sans KR" pitchFamily="34" charset="-120"/>
               </a:rPr>
-              <a:t>ExaCC X11M은 Quarter Rack 명칭 대신 Elastic 구성 사용 · 비교 기준: 2 Standard DB + 3 HC Storage with XRMEM</a:t>
+              <a:t>온프레미스 최소 구성과 Cloud@Customer의 Base 및 Quarter 상당 2+3 Elastic 구성을 동일 지표로 비교</a:t>
             </a:r>
             <a:endParaRPr lang="en-US" sz="1050" dirty="0"/>
           </a:p>
@@ -6366,7 +6366,7 @@
         <p:spPr>
           <a:xfrm>
             <a:off x="512064" y="1463040"/>
-            <a:ext cx="2322576" cy="429768"/>
+            <a:ext cx="1984248" cy="484632"/>
           </a:xfrm>
           <a:prstGeom prst="rect">
             <a:avLst/>
@@ -6391,7 +6391,7 @@
         <p:spPr>
           <a:xfrm>
             <a:off x="603504" y="1517904"/>
-            <a:ext cx="2139696" cy="274320"/>
+            <a:ext cx="1801368" cy="365760"/>
           </a:xfrm>
           <a:prstGeom prst="rect">
             <a:avLst/>
@@ -6409,7 +6409,7 @@
               <a:buNone/>
             </a:pPr>
             <a:r>
-              <a:rPr lang="en-US" sz="940" b="1" dirty="0">
+              <a:rPr lang="en-US" sz="910" b="1" dirty="0">
                 <a:solidFill>
                   <a:srgbClr val="F7F9FC"/>
                 </a:solidFill>
@@ -6419,7 +6419,7 @@
               </a:rPr>
               <a:t>비교 항목</a:t>
             </a:r>
-            <a:endParaRPr lang="en-US" sz="940" dirty="0"/>
+            <a:endParaRPr lang="en-US" sz="910" dirty="0"/>
           </a:p>
         </p:txBody>
       </p:sp>
@@ -6431,8 +6431,8 @@
         </p:nvSpPr>
         <p:spPr>
           <a:xfrm>
-            <a:off x="2834640" y="1463040"/>
-            <a:ext cx="3703320" cy="429768"/>
+            <a:off x="2496312" y="1463040"/>
+            <a:ext cx="3008376" cy="484632"/>
           </a:xfrm>
           <a:prstGeom prst="rect">
             <a:avLst/>
@@ -6456,8 +6456,257 @@
         </p:nvSpPr>
         <p:spPr>
           <a:xfrm>
-            <a:off x="2926080" y="1517904"/>
-            <a:ext cx="3520440" cy="274320"/>
+            <a:off x="2587752" y="1517904"/>
+            <a:ext cx="2825496" cy="365760"/>
+          </a:xfrm>
+          <a:prstGeom prst="rect">
+            <a:avLst/>
+          </a:prstGeom>
+          <a:noFill/>
+          <a:ln/>
+        </p:spPr>
+        <p:txBody>
+          <a:bodyPr wrap="square" lIns="0" tIns="0" rIns="0" bIns="0" rtlCol="0" anchor="ctr">
+            <a:normAutofit/>
+          </a:bodyPr>
+          <a:lstStyle/>
+          <a:p>
+            <a:pPr algn="ctr" indent="0" marL="0">
+              <a:buNone/>
+            </a:pPr>
+            <a:r>
+              <a:rPr lang="en-US" sz="910" b="1" dirty="0">
+                <a:solidFill>
+                  <a:srgbClr val="F7F9FC"/>
+                </a:solidFill>
+                <a:latin typeface="Noto Sans KR" pitchFamily="34" charset="0"/>
+                <a:ea typeface="Noto Sans KR" pitchFamily="34" charset="-122"/>
+                <a:cs typeface="Noto Sans KR" pitchFamily="34" charset="-120"/>
+              </a:rPr>
+              <a:t>X9M-2 Eighth Rack</a:t>
+            </a:r>
+            <a:endParaRPr lang="en-US" sz="910" dirty="0"/>
+          </a:p>
+          <a:p>
+            <a:pPr algn="ctr" indent="0" marL="0">
+              <a:buNone/>
+            </a:pPr>
+            <a:r>
+              <a:rPr lang="en-US" sz="910" b="1" dirty="0">
+                <a:solidFill>
+                  <a:srgbClr val="F7F9FC"/>
+                </a:solidFill>
+                <a:latin typeface="Noto Sans KR" pitchFamily="34" charset="0"/>
+                <a:ea typeface="Noto Sans KR" pitchFamily="34" charset="-122"/>
+                <a:cs typeface="Noto Sans KR" pitchFamily="34" charset="-120"/>
+              </a:rPr>
+              <a:t>On-premises</a:t>
+            </a:r>
+            <a:endParaRPr lang="en-US" sz="910" dirty="0"/>
+          </a:p>
+        </p:txBody>
+      </p:sp>
+      <p:sp>
+        <p:nvSpPr>
+          <p:cNvPr id="9" name="Shape 7"/>
+          <p:cNvSpPr/>
+          <p:nvPr/>
+        </p:nvSpPr>
+        <p:spPr>
+          <a:xfrm>
+            <a:off x="5504688" y="1463040"/>
+            <a:ext cx="3008376" cy="484632"/>
+          </a:xfrm>
+          <a:prstGeom prst="rect">
+            <a:avLst/>
+          </a:prstGeom>
+          <a:solidFill>
+            <a:srgbClr val="203247"/>
+          </a:solidFill>
+          <a:ln w="8890">
+            <a:solidFill>
+              <a:srgbClr val="36465C"/>
+            </a:solidFill>
+            <a:prstDash val="solid"/>
+          </a:ln>
+        </p:spPr>
+      </p:sp>
+      <p:sp>
+        <p:nvSpPr>
+          <p:cNvPr id="10" name="Text 8"/>
+          <p:cNvSpPr/>
+          <p:nvPr/>
+        </p:nvSpPr>
+        <p:spPr>
+          <a:xfrm>
+            <a:off x="5596128" y="1517904"/>
+            <a:ext cx="2825496" cy="365760"/>
+          </a:xfrm>
+          <a:prstGeom prst="rect">
+            <a:avLst/>
+          </a:prstGeom>
+          <a:noFill/>
+          <a:ln/>
+        </p:spPr>
+        <p:txBody>
+          <a:bodyPr wrap="square" lIns="0" tIns="0" rIns="0" bIns="0" rtlCol="0" anchor="ctr">
+            <a:normAutofit/>
+          </a:bodyPr>
+          <a:lstStyle/>
+          <a:p>
+            <a:pPr algn="ctr" indent="0" marL="0">
+              <a:buNone/>
+            </a:pPr>
+            <a:r>
+              <a:rPr lang="en-US" sz="910" b="1" dirty="0">
+                <a:solidFill>
+                  <a:srgbClr val="F7F9FC"/>
+                </a:solidFill>
+                <a:latin typeface="Noto Sans KR" pitchFamily="34" charset="0"/>
+                <a:ea typeface="Noto Sans KR" pitchFamily="34" charset="-122"/>
+                <a:cs typeface="Noto Sans KR" pitchFamily="34" charset="-120"/>
+              </a:rPr>
+              <a:t>ExaC@C X11M</a:t>
+            </a:r>
+            <a:endParaRPr lang="en-US" sz="910" dirty="0"/>
+          </a:p>
+          <a:p>
+            <a:pPr algn="ctr" indent="0" marL="0">
+              <a:buNone/>
+            </a:pPr>
+            <a:r>
+              <a:rPr lang="en-US" sz="910" b="1" dirty="0">
+                <a:solidFill>
+                  <a:srgbClr val="F7F9FC"/>
+                </a:solidFill>
+                <a:latin typeface="Noto Sans KR" pitchFamily="34" charset="0"/>
+                <a:ea typeface="Noto Sans KR" pitchFamily="34" charset="-122"/>
+                <a:cs typeface="Noto Sans KR" pitchFamily="34" charset="-120"/>
+              </a:rPr>
+              <a:t>Base System</a:t>
+            </a:r>
+            <a:endParaRPr lang="en-US" sz="910" dirty="0"/>
+          </a:p>
+        </p:txBody>
+      </p:sp>
+      <p:sp>
+        <p:nvSpPr>
+          <p:cNvPr id="11" name="Shape 9"/>
+          <p:cNvSpPr/>
+          <p:nvPr/>
+        </p:nvSpPr>
+        <p:spPr>
+          <a:xfrm>
+            <a:off x="8513064" y="1463040"/>
+            <a:ext cx="3008376" cy="484632"/>
+          </a:xfrm>
+          <a:prstGeom prst="rect">
+            <a:avLst/>
+          </a:prstGeom>
+          <a:solidFill>
+            <a:srgbClr val="173A3D"/>
+          </a:solidFill>
+          <a:ln w="8890">
+            <a:solidFill>
+              <a:srgbClr val="36465C"/>
+            </a:solidFill>
+            <a:prstDash val="solid"/>
+          </a:ln>
+        </p:spPr>
+      </p:sp>
+      <p:sp>
+        <p:nvSpPr>
+          <p:cNvPr id="12" name="Text 10"/>
+          <p:cNvSpPr/>
+          <p:nvPr/>
+        </p:nvSpPr>
+        <p:spPr>
+          <a:xfrm>
+            <a:off x="8604504" y="1517904"/>
+            <a:ext cx="2825496" cy="365760"/>
+          </a:xfrm>
+          <a:prstGeom prst="rect">
+            <a:avLst/>
+          </a:prstGeom>
+          <a:noFill/>
+          <a:ln/>
+        </p:spPr>
+        <p:txBody>
+          <a:bodyPr wrap="square" lIns="0" tIns="0" rIns="0" bIns="0" rtlCol="0" anchor="ctr">
+            <a:normAutofit/>
+          </a:bodyPr>
+          <a:lstStyle/>
+          <a:p>
+            <a:pPr algn="ctr" indent="0" marL="0">
+              <a:buNone/>
+            </a:pPr>
+            <a:r>
+              <a:rPr lang="en-US" sz="910" b="1" dirty="0">
+                <a:solidFill>
+                  <a:srgbClr val="2DD4BF"/>
+                </a:solidFill>
+                <a:latin typeface="Noto Sans KR" pitchFamily="34" charset="0"/>
+                <a:ea typeface="Noto Sans KR" pitchFamily="34" charset="-122"/>
+                <a:cs typeface="Noto Sans KR" pitchFamily="34" charset="-120"/>
+              </a:rPr>
+              <a:t>ExaC@C X11M Elastic</a:t>
+            </a:r>
+            <a:endParaRPr lang="en-US" sz="910" dirty="0"/>
+          </a:p>
+          <a:p>
+            <a:pPr algn="ctr" indent="0" marL="0">
+              <a:buNone/>
+            </a:pPr>
+            <a:r>
+              <a:rPr lang="en-US" sz="910" b="1" dirty="0">
+                <a:solidFill>
+                  <a:srgbClr val="2DD4BF"/>
+                </a:solidFill>
+                <a:latin typeface="Noto Sans KR" pitchFamily="34" charset="0"/>
+                <a:ea typeface="Noto Sans KR" pitchFamily="34" charset="-122"/>
+                <a:cs typeface="Noto Sans KR" pitchFamily="34" charset="-120"/>
+              </a:rPr>
+              <a:t>2 Standard DB + 3 HC</a:t>
+            </a:r>
+            <a:endParaRPr lang="en-US" sz="910" dirty="0"/>
+          </a:p>
+        </p:txBody>
+      </p:sp>
+      <p:sp>
+        <p:nvSpPr>
+          <p:cNvPr id="13" name="Shape 11"/>
+          <p:cNvSpPr/>
+          <p:nvPr/>
+        </p:nvSpPr>
+        <p:spPr>
+          <a:xfrm>
+            <a:off x="512064" y="1947672"/>
+            <a:ext cx="1984248" cy="457200"/>
+          </a:xfrm>
+          <a:prstGeom prst="rect">
+            <a:avLst/>
+          </a:prstGeom>
+          <a:solidFill>
+            <a:srgbClr val="101925"/>
+          </a:solidFill>
+          <a:ln w="8255">
+            <a:solidFill>
+              <a:srgbClr val="33445B"/>
+            </a:solidFill>
+            <a:prstDash val="solid"/>
+          </a:ln>
+        </p:spPr>
+      </p:sp>
+      <p:sp>
+        <p:nvSpPr>
+          <p:cNvPr id="14" name="Text 12"/>
+          <p:cNvSpPr/>
+          <p:nvPr/>
+        </p:nvSpPr>
+        <p:spPr>
+          <a:xfrm>
+            <a:off x="603504" y="1979676"/>
+            <a:ext cx="1801368" cy="393192"/>
           </a:xfrm>
           <a:prstGeom prst="rect">
             <a:avLst/>
@@ -6475,7 +6724,7 @@
               <a:buNone/>
             </a:pPr>
             <a:r>
-              <a:rPr lang="en-US" sz="940" b="1" dirty="0">
+              <a:rPr lang="en-US" sz="900" b="1" dirty="0">
                 <a:solidFill>
                   <a:srgbClr val="F7F9FC"/>
                 </a:solidFill>
@@ -6483,47 +6732,245 @@
                 <a:ea typeface="Noto Sans KR" pitchFamily="34" charset="-122"/>
                 <a:cs typeface="Noto Sans KR" pitchFamily="34" charset="-120"/>
               </a:rPr>
-              <a:t>X9M Cloud Infra Quarter</a:t>
-            </a:r>
-            <a:endParaRPr lang="en-US" sz="940" dirty="0"/>
-          </a:p>
-        </p:txBody>
-      </p:sp>
-      <p:sp>
-        <p:nvSpPr>
-          <p:cNvPr id="9" name="Shape 7"/>
-          <p:cNvSpPr/>
-          <p:nvPr/>
-        </p:nvSpPr>
-        <p:spPr>
-          <a:xfrm>
-            <a:off x="6537960" y="1463040"/>
-            <a:ext cx="3703320" cy="429768"/>
-          </a:xfrm>
-          <a:prstGeom prst="rect">
-            <a:avLst/>
-          </a:prstGeom>
-          <a:solidFill>
-            <a:srgbClr val="173A3D"/>
-          </a:solidFill>
-          <a:ln w="8890">
-            <a:solidFill>
-              <a:srgbClr val="36465C"/>
-            </a:solidFill>
-            <a:prstDash val="solid"/>
-          </a:ln>
-        </p:spPr>
-      </p:sp>
-      <p:sp>
-        <p:nvSpPr>
-          <p:cNvPr id="10" name="Text 8"/>
-          <p:cNvSpPr/>
-          <p:nvPr/>
-        </p:nvSpPr>
-        <p:spPr>
-          <a:xfrm>
-            <a:off x="6629400" y="1517904"/>
-            <a:ext cx="3520440" cy="274320"/>
+              <a:t>물리 구성</a:t>
+            </a:r>
+            <a:endParaRPr lang="en-US" sz="900" dirty="0"/>
+          </a:p>
+        </p:txBody>
+      </p:sp>
+      <p:sp>
+        <p:nvSpPr>
+          <p:cNvPr id="15" name="Shape 13"/>
+          <p:cNvSpPr/>
+          <p:nvPr/>
+        </p:nvSpPr>
+        <p:spPr>
+          <a:xfrm>
+            <a:off x="2496312" y="1947672"/>
+            <a:ext cx="3008376" cy="457200"/>
+          </a:xfrm>
+          <a:prstGeom prst="rect">
+            <a:avLst/>
+          </a:prstGeom>
+          <a:solidFill>
+            <a:srgbClr val="101925"/>
+          </a:solidFill>
+          <a:ln w="8255">
+            <a:solidFill>
+              <a:srgbClr val="33445B"/>
+            </a:solidFill>
+            <a:prstDash val="solid"/>
+          </a:ln>
+        </p:spPr>
+      </p:sp>
+      <p:sp>
+        <p:nvSpPr>
+          <p:cNvPr id="16" name="Text 14"/>
+          <p:cNvSpPr/>
+          <p:nvPr/>
+        </p:nvSpPr>
+        <p:spPr>
+          <a:xfrm>
+            <a:off x="2587752" y="1979676"/>
+            <a:ext cx="2825496" cy="393192"/>
+          </a:xfrm>
+          <a:prstGeom prst="rect">
+            <a:avLst/>
+          </a:prstGeom>
+          <a:noFill/>
+          <a:ln/>
+        </p:spPr>
+        <p:txBody>
+          <a:bodyPr wrap="square" lIns="0" tIns="0" rIns="0" bIns="0" rtlCol="0" anchor="ctr">
+            <a:normAutofit/>
+          </a:bodyPr>
+          <a:lstStyle/>
+          <a:p>
+            <a:pPr algn="ctr" indent="0" marL="0">
+              <a:buNone/>
+            </a:pPr>
+            <a:r>
+              <a:rPr lang="en-US" sz="890" dirty="0">
+                <a:solidFill>
+                  <a:srgbClr val="D9E1EC"/>
+                </a:solidFill>
+                <a:latin typeface="Noto Sans KR" pitchFamily="34" charset="0"/>
+                <a:ea typeface="Noto Sans KR" pitchFamily="34" charset="-122"/>
+                <a:cs typeface="Noto Sans KR" pitchFamily="34" charset="-120"/>
+              </a:rPr>
+              <a:t>2 DB + 3 Eighth HC</a:t>
+            </a:r>
+            <a:endParaRPr lang="en-US" sz="890" dirty="0"/>
+          </a:p>
+        </p:txBody>
+      </p:sp>
+      <p:sp>
+        <p:nvSpPr>
+          <p:cNvPr id="17" name="Shape 15"/>
+          <p:cNvSpPr/>
+          <p:nvPr/>
+        </p:nvSpPr>
+        <p:spPr>
+          <a:xfrm>
+            <a:off x="5504688" y="1947672"/>
+            <a:ext cx="3008376" cy="457200"/>
+          </a:xfrm>
+          <a:prstGeom prst="rect">
+            <a:avLst/>
+          </a:prstGeom>
+          <a:solidFill>
+            <a:srgbClr val="101925"/>
+          </a:solidFill>
+          <a:ln w="8255">
+            <a:solidFill>
+              <a:srgbClr val="33445B"/>
+            </a:solidFill>
+            <a:prstDash val="solid"/>
+          </a:ln>
+        </p:spPr>
+      </p:sp>
+      <p:sp>
+        <p:nvSpPr>
+          <p:cNvPr id="18" name="Text 16"/>
+          <p:cNvSpPr/>
+          <p:nvPr/>
+        </p:nvSpPr>
+        <p:spPr>
+          <a:xfrm>
+            <a:off x="5596128" y="1979676"/>
+            <a:ext cx="2825496" cy="393192"/>
+          </a:xfrm>
+          <a:prstGeom prst="rect">
+            <a:avLst/>
+          </a:prstGeom>
+          <a:noFill/>
+          <a:ln/>
+        </p:spPr>
+        <p:txBody>
+          <a:bodyPr wrap="square" lIns="0" tIns="0" rIns="0" bIns="0" rtlCol="0" anchor="ctr">
+            <a:normAutofit/>
+          </a:bodyPr>
+          <a:lstStyle/>
+          <a:p>
+            <a:pPr algn="ctr" indent="0" marL="0">
+              <a:buNone/>
+            </a:pPr>
+            <a:r>
+              <a:rPr lang="en-US" sz="890" dirty="0">
+                <a:solidFill>
+                  <a:srgbClr val="D9E1EC"/>
+                </a:solidFill>
+                <a:latin typeface="Noto Sans KR" pitchFamily="34" charset="0"/>
+                <a:ea typeface="Noto Sans KR" pitchFamily="34" charset="-122"/>
+                <a:cs typeface="Noto Sans KR" pitchFamily="34" charset="-120"/>
+              </a:rPr>
+              <a:t>2 Base DB + 3 Base Storage</a:t>
+            </a:r>
+            <a:endParaRPr lang="en-US" sz="890" dirty="0"/>
+          </a:p>
+        </p:txBody>
+      </p:sp>
+      <p:sp>
+        <p:nvSpPr>
+          <p:cNvPr id="19" name="Shape 17"/>
+          <p:cNvSpPr/>
+          <p:nvPr/>
+        </p:nvSpPr>
+        <p:spPr>
+          <a:xfrm>
+            <a:off x="8513064" y="1947672"/>
+            <a:ext cx="3008376" cy="457200"/>
+          </a:xfrm>
+          <a:prstGeom prst="rect">
+            <a:avLst/>
+          </a:prstGeom>
+          <a:solidFill>
+            <a:srgbClr val="101925"/>
+          </a:solidFill>
+          <a:ln w="8255">
+            <a:solidFill>
+              <a:srgbClr val="33445B"/>
+            </a:solidFill>
+            <a:prstDash val="solid"/>
+          </a:ln>
+        </p:spPr>
+      </p:sp>
+      <p:sp>
+        <p:nvSpPr>
+          <p:cNvPr id="20" name="Text 18"/>
+          <p:cNvSpPr/>
+          <p:nvPr/>
+        </p:nvSpPr>
+        <p:spPr>
+          <a:xfrm>
+            <a:off x="8604504" y="1979676"/>
+            <a:ext cx="2825496" cy="393192"/>
+          </a:xfrm>
+          <a:prstGeom prst="rect">
+            <a:avLst/>
+          </a:prstGeom>
+          <a:noFill/>
+          <a:ln/>
+        </p:spPr>
+        <p:txBody>
+          <a:bodyPr wrap="square" lIns="0" tIns="0" rIns="0" bIns="0" rtlCol="0" anchor="ctr">
+            <a:normAutofit/>
+          </a:bodyPr>
+          <a:lstStyle/>
+          <a:p>
+            <a:pPr algn="ctr" indent="0" marL="0">
+              <a:buNone/>
+            </a:pPr>
+            <a:r>
+              <a:rPr lang="en-US" sz="890" dirty="0">
+                <a:solidFill>
+                  <a:srgbClr val="2DD4BF"/>
+                </a:solidFill>
+                <a:latin typeface="Noto Sans KR" pitchFamily="34" charset="0"/>
+                <a:ea typeface="Noto Sans KR" pitchFamily="34" charset="-122"/>
+                <a:cs typeface="Noto Sans KR" pitchFamily="34" charset="-120"/>
+              </a:rPr>
+              <a:t>2 Standard DB + 3 HC w/XRMEM</a:t>
+            </a:r>
+            <a:endParaRPr lang="en-US" sz="890" dirty="0"/>
+          </a:p>
+        </p:txBody>
+      </p:sp>
+      <p:sp>
+        <p:nvSpPr>
+          <p:cNvPr id="21" name="Shape 19"/>
+          <p:cNvSpPr/>
+          <p:nvPr/>
+        </p:nvSpPr>
+        <p:spPr>
+          <a:xfrm>
+            <a:off x="512064" y="2404872"/>
+            <a:ext cx="1984248" cy="457200"/>
+          </a:xfrm>
+          <a:prstGeom prst="rect">
+            <a:avLst/>
+          </a:prstGeom>
+          <a:solidFill>
+            <a:srgbClr val="0D1621"/>
+          </a:solidFill>
+          <a:ln w="8255">
+            <a:solidFill>
+              <a:srgbClr val="33445B"/>
+            </a:solidFill>
+            <a:prstDash val="solid"/>
+          </a:ln>
+        </p:spPr>
+      </p:sp>
+      <p:sp>
+        <p:nvSpPr>
+          <p:cNvPr id="22" name="Text 20"/>
+          <p:cNvSpPr/>
+          <p:nvPr/>
+        </p:nvSpPr>
+        <p:spPr>
+          <a:xfrm>
+            <a:off x="603504" y="2436876"/>
+            <a:ext cx="1801368" cy="393192"/>
           </a:xfrm>
           <a:prstGeom prst="rect">
             <a:avLst/>
@@ -6541,7 +6988,222 @@
               <a:buNone/>
             </a:pPr>
             <a:r>
-              <a:rPr lang="en-US" sz="940" b="1" dirty="0">
+              <a:rPr lang="en-US" sz="900" b="1" dirty="0">
+                <a:solidFill>
+                  <a:srgbClr val="F7F9FC"/>
+                </a:solidFill>
+                <a:latin typeface="Noto Sans KR" pitchFamily="34" charset="0"/>
+                <a:ea typeface="Noto Sans KR" pitchFamily="34" charset="-122"/>
+                <a:cs typeface="Noto Sans KR" pitchFamily="34" charset="-120"/>
+              </a:rPr>
+              <a:t>DB compute</a:t>
+            </a:r>
+            <a:endParaRPr lang="en-US" sz="900" dirty="0"/>
+          </a:p>
+        </p:txBody>
+      </p:sp>
+      <p:sp>
+        <p:nvSpPr>
+          <p:cNvPr id="23" name="Shape 21"/>
+          <p:cNvSpPr/>
+          <p:nvPr/>
+        </p:nvSpPr>
+        <p:spPr>
+          <a:xfrm>
+            <a:off x="2496312" y="2404872"/>
+            <a:ext cx="3008376" cy="457200"/>
+          </a:xfrm>
+          <a:prstGeom prst="rect">
+            <a:avLst/>
+          </a:prstGeom>
+          <a:solidFill>
+            <a:srgbClr val="0D1621"/>
+          </a:solidFill>
+          <a:ln w="8255">
+            <a:solidFill>
+              <a:srgbClr val="33445B"/>
+            </a:solidFill>
+            <a:prstDash val="solid"/>
+          </a:ln>
+        </p:spPr>
+      </p:sp>
+      <p:sp>
+        <p:nvSpPr>
+          <p:cNvPr id="24" name="Text 22"/>
+          <p:cNvSpPr/>
+          <p:nvPr/>
+        </p:nvSpPr>
+        <p:spPr>
+          <a:xfrm>
+            <a:off x="2587752" y="2436876"/>
+            <a:ext cx="2825496" cy="393192"/>
+          </a:xfrm>
+          <a:prstGeom prst="rect">
+            <a:avLst/>
+          </a:prstGeom>
+          <a:noFill/>
+          <a:ln/>
+        </p:spPr>
+        <p:txBody>
+          <a:bodyPr wrap="square" lIns="0" tIns="0" rIns="0" bIns="0" rtlCol="0" anchor="ctr">
+            <a:normAutofit/>
+          </a:bodyPr>
+          <a:lstStyle/>
+          <a:p>
+            <a:pPr algn="ctr" indent="0" marL="0">
+              <a:buNone/>
+            </a:pPr>
+            <a:r>
+              <a:rPr lang="en-US" sz="890" dirty="0">
+                <a:solidFill>
+                  <a:srgbClr val="D9E1EC"/>
+                </a:solidFill>
+                <a:latin typeface="Noto Sans KR" pitchFamily="34" charset="0"/>
+                <a:ea typeface="Noto Sans KR" pitchFamily="34" charset="-122"/>
+                <a:cs typeface="Noto Sans KR" pitchFamily="34" charset="-120"/>
+              </a:rPr>
+              <a:t>64 physical cores</a:t>
+            </a:r>
+            <a:endParaRPr lang="en-US" sz="890" dirty="0"/>
+          </a:p>
+        </p:txBody>
+      </p:sp>
+      <p:sp>
+        <p:nvSpPr>
+          <p:cNvPr id="25" name="Shape 23"/>
+          <p:cNvSpPr/>
+          <p:nvPr/>
+        </p:nvSpPr>
+        <p:spPr>
+          <a:xfrm>
+            <a:off x="5504688" y="2404872"/>
+            <a:ext cx="3008376" cy="457200"/>
+          </a:xfrm>
+          <a:prstGeom prst="rect">
+            <a:avLst/>
+          </a:prstGeom>
+          <a:solidFill>
+            <a:srgbClr val="0D1621"/>
+          </a:solidFill>
+          <a:ln w="8255">
+            <a:solidFill>
+              <a:srgbClr val="33445B"/>
+            </a:solidFill>
+            <a:prstDash val="solid"/>
+          </a:ln>
+        </p:spPr>
+      </p:sp>
+      <p:sp>
+        <p:nvSpPr>
+          <p:cNvPr id="26" name="Text 24"/>
+          <p:cNvSpPr/>
+          <p:nvPr/>
+        </p:nvSpPr>
+        <p:spPr>
+          <a:xfrm>
+            <a:off x="5596128" y="2436876"/>
+            <a:ext cx="2825496" cy="393192"/>
+          </a:xfrm>
+          <a:prstGeom prst="rect">
+            <a:avLst/>
+          </a:prstGeom>
+          <a:noFill/>
+          <a:ln/>
+        </p:spPr>
+        <p:txBody>
+          <a:bodyPr wrap="square" lIns="0" tIns="0" rIns="0" bIns="0" rtlCol="0" anchor="ctr">
+            <a:normAutofit/>
+          </a:bodyPr>
+          <a:lstStyle/>
+          <a:p>
+            <a:pPr algn="ctr" indent="0" marL="0">
+              <a:buNone/>
+            </a:pPr>
+            <a:r>
+              <a:rPr lang="en-US" sz="890" dirty="0">
+                <a:solidFill>
+                  <a:srgbClr val="D9E1EC"/>
+                </a:solidFill>
+                <a:latin typeface="Noto Sans KR" pitchFamily="34" charset="0"/>
+                <a:ea typeface="Noto Sans KR" pitchFamily="34" charset="-122"/>
+                <a:cs typeface="Noto Sans KR" pitchFamily="34" charset="-120"/>
+              </a:rPr>
+              <a:t>60 usable cores</a:t>
+            </a:r>
+            <a:endParaRPr lang="en-US" sz="890" dirty="0"/>
+          </a:p>
+          <a:p>
+            <a:pPr algn="ctr" indent="0" marL="0">
+              <a:buNone/>
+            </a:pPr>
+            <a:r>
+              <a:rPr lang="en-US" sz="890" dirty="0">
+                <a:solidFill>
+                  <a:srgbClr val="D9E1EC"/>
+                </a:solidFill>
+                <a:latin typeface="Noto Sans KR" pitchFamily="34" charset="0"/>
+                <a:ea typeface="Noto Sans KR" pitchFamily="34" charset="-122"/>
+                <a:cs typeface="Noto Sans KR" pitchFamily="34" charset="-120"/>
+              </a:rPr>
+              <a:t>240 ECPUs</a:t>
+            </a:r>
+            <a:endParaRPr lang="en-US" sz="890" dirty="0"/>
+          </a:p>
+        </p:txBody>
+      </p:sp>
+      <p:sp>
+        <p:nvSpPr>
+          <p:cNvPr id="27" name="Shape 25"/>
+          <p:cNvSpPr/>
+          <p:nvPr/>
+        </p:nvSpPr>
+        <p:spPr>
+          <a:xfrm>
+            <a:off x="8513064" y="2404872"/>
+            <a:ext cx="3008376" cy="457200"/>
+          </a:xfrm>
+          <a:prstGeom prst="rect">
+            <a:avLst/>
+          </a:prstGeom>
+          <a:solidFill>
+            <a:srgbClr val="0D1621"/>
+          </a:solidFill>
+          <a:ln w="8255">
+            <a:solidFill>
+              <a:srgbClr val="33445B"/>
+            </a:solidFill>
+            <a:prstDash val="solid"/>
+          </a:ln>
+        </p:spPr>
+      </p:sp>
+      <p:sp>
+        <p:nvSpPr>
+          <p:cNvPr id="28" name="Text 26"/>
+          <p:cNvSpPr/>
+          <p:nvPr/>
+        </p:nvSpPr>
+        <p:spPr>
+          <a:xfrm>
+            <a:off x="8604504" y="2436876"/>
+            <a:ext cx="2825496" cy="393192"/>
+          </a:xfrm>
+          <a:prstGeom prst="rect">
+            <a:avLst/>
+          </a:prstGeom>
+          <a:noFill/>
+          <a:ln/>
+        </p:spPr>
+        <p:txBody>
+          <a:bodyPr wrap="square" lIns="0" tIns="0" rIns="0" bIns="0" rtlCol="0" anchor="ctr">
+            <a:normAutofit/>
+          </a:bodyPr>
+          <a:lstStyle/>
+          <a:p>
+            <a:pPr algn="ctr" indent="0" marL="0">
+              <a:buNone/>
+            </a:pPr>
+            <a:r>
+              <a:rPr lang="en-US" sz="890" dirty="0">
                 <a:solidFill>
                   <a:srgbClr val="2DD4BF"/>
                 </a:solidFill>
@@ -6549,65 +7211,82 @@
                 <a:ea typeface="Noto Sans KR" pitchFamily="34" charset="-122"/>
                 <a:cs typeface="Noto Sans KR" pitchFamily="34" charset="-120"/>
               </a:rPr>
-              <a:t>ExaCC X11M 2+3 Elastic</a:t>
-            </a:r>
-            <a:endParaRPr lang="en-US" sz="940" dirty="0"/>
-          </a:p>
-        </p:txBody>
-      </p:sp>
-      <p:sp>
-        <p:nvSpPr>
-          <p:cNvPr id="11" name="Shape 9"/>
-          <p:cNvSpPr/>
-          <p:nvPr/>
-        </p:nvSpPr>
-        <p:spPr>
-          <a:xfrm>
-            <a:off x="10241280" y="1463040"/>
-            <a:ext cx="1261872" cy="429768"/>
-          </a:xfrm>
-          <a:prstGeom prst="rect">
-            <a:avLst/>
-          </a:prstGeom>
-          <a:solidFill>
-            <a:srgbClr val="182331"/>
-          </a:solidFill>
-          <a:ln w="8890">
-            <a:solidFill>
-              <a:srgbClr val="36465C"/>
-            </a:solidFill>
-            <a:prstDash val="solid"/>
-          </a:ln>
-        </p:spPr>
-      </p:sp>
-      <p:sp>
-        <p:nvSpPr>
-          <p:cNvPr id="12" name="Text 10"/>
-          <p:cNvSpPr/>
-          <p:nvPr/>
-        </p:nvSpPr>
-        <p:spPr>
-          <a:xfrm>
-            <a:off x="10332720" y="1517904"/>
-            <a:ext cx="1078992" cy="274320"/>
-          </a:xfrm>
-          <a:prstGeom prst="rect">
-            <a:avLst/>
-          </a:prstGeom>
-          <a:noFill/>
-          <a:ln/>
-        </p:spPr>
-        <p:txBody>
-          <a:bodyPr wrap="square" lIns="0" tIns="0" rIns="0" bIns="0" rtlCol="0" anchor="ctr">
-            <a:normAutofit/>
-          </a:bodyPr>
-          <a:lstStyle/>
+              <a:t>380 usable cores</a:t>
+            </a:r>
+            <a:endParaRPr lang="en-US" sz="890" dirty="0"/>
+          </a:p>
           <a:p>
             <a:pPr algn="ctr" indent="0" marL="0">
               <a:buNone/>
             </a:pPr>
             <a:r>
-              <a:rPr lang="en-US" sz="940" b="1" dirty="0">
+              <a:rPr lang="en-US" sz="890" dirty="0">
+                <a:solidFill>
+                  <a:srgbClr val="2DD4BF"/>
+                </a:solidFill>
+                <a:latin typeface="Noto Sans KR" pitchFamily="34" charset="0"/>
+                <a:ea typeface="Noto Sans KR" pitchFamily="34" charset="-122"/>
+                <a:cs typeface="Noto Sans KR" pitchFamily="34" charset="-120"/>
+              </a:rPr>
+              <a:t>1,520 ECPUs</a:t>
+            </a:r>
+            <a:endParaRPr lang="en-US" sz="890" dirty="0"/>
+          </a:p>
+        </p:txBody>
+      </p:sp>
+      <p:sp>
+        <p:nvSpPr>
+          <p:cNvPr id="29" name="Shape 27"/>
+          <p:cNvSpPr/>
+          <p:nvPr/>
+        </p:nvSpPr>
+        <p:spPr>
+          <a:xfrm>
+            <a:off x="512064" y="2862072"/>
+            <a:ext cx="1984248" cy="457200"/>
+          </a:xfrm>
+          <a:prstGeom prst="rect">
+            <a:avLst/>
+          </a:prstGeom>
+          <a:solidFill>
+            <a:srgbClr val="101925"/>
+          </a:solidFill>
+          <a:ln w="8255">
+            <a:solidFill>
+              <a:srgbClr val="33445B"/>
+            </a:solidFill>
+            <a:prstDash val="solid"/>
+          </a:ln>
+        </p:spPr>
+      </p:sp>
+      <p:sp>
+        <p:nvSpPr>
+          <p:cNvPr id="30" name="Text 28"/>
+          <p:cNvSpPr/>
+          <p:nvPr/>
+        </p:nvSpPr>
+        <p:spPr>
+          <a:xfrm>
+            <a:off x="603504" y="2894076"/>
+            <a:ext cx="1801368" cy="393192"/>
+          </a:xfrm>
+          <a:prstGeom prst="rect">
+            <a:avLst/>
+          </a:prstGeom>
+          <a:noFill/>
+          <a:ln/>
+        </p:spPr>
+        <p:txBody>
+          <a:bodyPr wrap="square" lIns="0" tIns="0" rIns="0" bIns="0" rtlCol="0" anchor="ctr">
+            <a:normAutofit/>
+          </a:bodyPr>
+          <a:lstStyle/>
+          <a:p>
+            <a:pPr algn="l" indent="0" marL="0">
+              <a:buNone/>
+            </a:pPr>
+            <a:r>
+              <a:rPr lang="en-US" sz="900" b="1" dirty="0">
                 <a:solidFill>
                   <a:srgbClr val="F7F9FC"/>
                 </a:solidFill>
@@ -6615,22 +7294,22 @@
                 <a:ea typeface="Noto Sans KR" pitchFamily="34" charset="-122"/>
                 <a:cs typeface="Noto Sans KR" pitchFamily="34" charset="-120"/>
               </a:rPr>
-              <a:t>변화</a:t>
-            </a:r>
-            <a:endParaRPr lang="en-US" sz="940" dirty="0"/>
-          </a:p>
-        </p:txBody>
-      </p:sp>
-      <p:sp>
-        <p:nvSpPr>
-          <p:cNvPr id="13" name="Shape 11"/>
-          <p:cNvSpPr/>
-          <p:nvPr/>
-        </p:nvSpPr>
-        <p:spPr>
-          <a:xfrm>
-            <a:off x="512064" y="1892808"/>
-            <a:ext cx="2322576" cy="539496"/>
+              <a:t>DB memory</a:t>
+            </a:r>
+            <a:endParaRPr lang="en-US" sz="900" dirty="0"/>
+          </a:p>
+        </p:txBody>
+      </p:sp>
+      <p:sp>
+        <p:nvSpPr>
+          <p:cNvPr id="31" name="Shape 29"/>
+          <p:cNvSpPr/>
+          <p:nvPr/>
+        </p:nvSpPr>
+        <p:spPr>
+          <a:xfrm>
+            <a:off x="2496312" y="2862072"/>
+            <a:ext cx="3008376" cy="457200"/>
           </a:xfrm>
           <a:prstGeom prst="rect">
             <a:avLst/>
@@ -6648,14 +7327,263 @@
       </p:sp>
       <p:sp>
         <p:nvSpPr>
-          <p:cNvPr id="14" name="Text 12"/>
-          <p:cNvSpPr/>
-          <p:nvPr/>
-        </p:nvSpPr>
-        <p:spPr>
-          <a:xfrm>
-            <a:off x="612648" y="1938528"/>
-            <a:ext cx="2121408" cy="438912"/>
+          <p:cNvPr id="32" name="Text 30"/>
+          <p:cNvSpPr/>
+          <p:nvPr/>
+        </p:nvSpPr>
+        <p:spPr>
+          <a:xfrm>
+            <a:off x="2587752" y="2894076"/>
+            <a:ext cx="2825496" cy="393192"/>
+          </a:xfrm>
+          <a:prstGeom prst="rect">
+            <a:avLst/>
+          </a:prstGeom>
+          <a:noFill/>
+          <a:ln/>
+        </p:spPr>
+        <p:txBody>
+          <a:bodyPr wrap="square" lIns="0" tIns="0" rIns="0" bIns="0" rtlCol="0" anchor="ctr">
+            <a:normAutofit/>
+          </a:bodyPr>
+          <a:lstStyle/>
+          <a:p>
+            <a:pPr algn="ctr" indent="0" marL="0">
+              <a:buNone/>
+            </a:pPr>
+            <a:r>
+              <a:rPr lang="en-US" sz="890" dirty="0">
+                <a:solidFill>
+                  <a:srgbClr val="D9E1EC"/>
+                </a:solidFill>
+                <a:latin typeface="Noto Sans KR" pitchFamily="34" charset="0"/>
+                <a:ea typeface="Noto Sans KR" pitchFamily="34" charset="-122"/>
+                <a:cs typeface="Noto Sans KR" pitchFamily="34" charset="-120"/>
+              </a:rPr>
+              <a:t>768 GB default</a:t>
+            </a:r>
+            <a:endParaRPr lang="en-US" sz="890" dirty="0"/>
+          </a:p>
+          <a:p>
+            <a:pPr algn="ctr" indent="0" marL="0">
+              <a:buNone/>
+            </a:pPr>
+            <a:r>
+              <a:rPr lang="en-US" sz="890" dirty="0">
+                <a:solidFill>
+                  <a:srgbClr val="D9E1EC"/>
+                </a:solidFill>
+                <a:latin typeface="Noto Sans KR" pitchFamily="34" charset="0"/>
+                <a:ea typeface="Noto Sans KR" pitchFamily="34" charset="-122"/>
+                <a:cs typeface="Noto Sans KR" pitchFamily="34" charset="-120"/>
+              </a:rPr>
+              <a:t>최대 2,048 GB</a:t>
+            </a:r>
+            <a:endParaRPr lang="en-US" sz="890" dirty="0"/>
+          </a:p>
+        </p:txBody>
+      </p:sp>
+      <p:sp>
+        <p:nvSpPr>
+          <p:cNvPr id="33" name="Shape 31"/>
+          <p:cNvSpPr/>
+          <p:nvPr/>
+        </p:nvSpPr>
+        <p:spPr>
+          <a:xfrm>
+            <a:off x="5504688" y="2862072"/>
+            <a:ext cx="3008376" cy="457200"/>
+          </a:xfrm>
+          <a:prstGeom prst="rect">
+            <a:avLst/>
+          </a:prstGeom>
+          <a:solidFill>
+            <a:srgbClr val="101925"/>
+          </a:solidFill>
+          <a:ln w="8255">
+            <a:solidFill>
+              <a:srgbClr val="33445B"/>
+            </a:solidFill>
+            <a:prstDash val="solid"/>
+          </a:ln>
+        </p:spPr>
+      </p:sp>
+      <p:sp>
+        <p:nvSpPr>
+          <p:cNvPr id="34" name="Text 32"/>
+          <p:cNvSpPr/>
+          <p:nvPr/>
+        </p:nvSpPr>
+        <p:spPr>
+          <a:xfrm>
+            <a:off x="5596128" y="2894076"/>
+            <a:ext cx="2825496" cy="393192"/>
+          </a:xfrm>
+          <a:prstGeom prst="rect">
+            <a:avLst/>
+          </a:prstGeom>
+          <a:noFill/>
+          <a:ln/>
+        </p:spPr>
+        <p:txBody>
+          <a:bodyPr wrap="square" lIns="0" tIns="0" rIns="0" bIns="0" rtlCol="0" anchor="ctr">
+            <a:normAutofit/>
+          </a:bodyPr>
+          <a:lstStyle/>
+          <a:p>
+            <a:pPr algn="ctr" indent="0" marL="0">
+              <a:buNone/>
+            </a:pPr>
+            <a:r>
+              <a:rPr lang="en-US" sz="890" dirty="0">
+                <a:solidFill>
+                  <a:srgbClr val="D9E1EC"/>
+                </a:solidFill>
+                <a:latin typeface="Noto Sans KR" pitchFamily="34" charset="0"/>
+                <a:ea typeface="Noto Sans KR" pitchFamily="34" charset="-122"/>
+                <a:cs typeface="Noto Sans KR" pitchFamily="34" charset="-120"/>
+              </a:rPr>
+              <a:t>1,320 GB</a:t>
+            </a:r>
+            <a:endParaRPr lang="en-US" sz="890" dirty="0"/>
+          </a:p>
+          <a:p>
+            <a:pPr algn="ctr" indent="0" marL="0">
+              <a:buNone/>
+            </a:pPr>
+            <a:r>
+              <a:rPr lang="en-US" sz="890" dirty="0">
+                <a:solidFill>
+                  <a:srgbClr val="D9E1EC"/>
+                </a:solidFill>
+                <a:latin typeface="Noto Sans KR" pitchFamily="34" charset="0"/>
+                <a:ea typeface="Noto Sans KR" pitchFamily="34" charset="-122"/>
+                <a:cs typeface="Noto Sans KR" pitchFamily="34" charset="-120"/>
+              </a:rPr>
+              <a:t>available to VMs</a:t>
+            </a:r>
+            <a:endParaRPr lang="en-US" sz="890" dirty="0"/>
+          </a:p>
+        </p:txBody>
+      </p:sp>
+      <p:sp>
+        <p:nvSpPr>
+          <p:cNvPr id="35" name="Shape 33"/>
+          <p:cNvSpPr/>
+          <p:nvPr/>
+        </p:nvSpPr>
+        <p:spPr>
+          <a:xfrm>
+            <a:off x="8513064" y="2862072"/>
+            <a:ext cx="3008376" cy="457200"/>
+          </a:xfrm>
+          <a:prstGeom prst="rect">
+            <a:avLst/>
+          </a:prstGeom>
+          <a:solidFill>
+            <a:srgbClr val="101925"/>
+          </a:solidFill>
+          <a:ln w="8255">
+            <a:solidFill>
+              <a:srgbClr val="33445B"/>
+            </a:solidFill>
+            <a:prstDash val="solid"/>
+          </a:ln>
+        </p:spPr>
+      </p:sp>
+      <p:sp>
+        <p:nvSpPr>
+          <p:cNvPr id="36" name="Text 34"/>
+          <p:cNvSpPr/>
+          <p:nvPr/>
+        </p:nvSpPr>
+        <p:spPr>
+          <a:xfrm>
+            <a:off x="8604504" y="2894076"/>
+            <a:ext cx="2825496" cy="393192"/>
+          </a:xfrm>
+          <a:prstGeom prst="rect">
+            <a:avLst/>
+          </a:prstGeom>
+          <a:noFill/>
+          <a:ln/>
+        </p:spPr>
+        <p:txBody>
+          <a:bodyPr wrap="square" lIns="0" tIns="0" rIns="0" bIns="0" rtlCol="0" anchor="ctr">
+            <a:normAutofit/>
+          </a:bodyPr>
+          <a:lstStyle/>
+          <a:p>
+            <a:pPr algn="ctr" indent="0" marL="0">
+              <a:buNone/>
+            </a:pPr>
+            <a:r>
+              <a:rPr lang="en-US" sz="890" dirty="0">
+                <a:solidFill>
+                  <a:srgbClr val="2DD4BF"/>
+                </a:solidFill>
+                <a:latin typeface="Noto Sans KR" pitchFamily="34" charset="0"/>
+                <a:ea typeface="Noto Sans KR" pitchFamily="34" charset="-122"/>
+                <a:cs typeface="Noto Sans KR" pitchFamily="34" charset="-120"/>
+              </a:rPr>
+              <a:t>2,780 GB</a:t>
+            </a:r>
+            <a:endParaRPr lang="en-US" sz="890" dirty="0"/>
+          </a:p>
+          <a:p>
+            <a:pPr algn="ctr" indent="0" marL="0">
+              <a:buNone/>
+            </a:pPr>
+            <a:r>
+              <a:rPr lang="en-US" sz="890" dirty="0">
+                <a:solidFill>
+                  <a:srgbClr val="2DD4BF"/>
+                </a:solidFill>
+                <a:latin typeface="Noto Sans KR" pitchFamily="34" charset="0"/>
+                <a:ea typeface="Noto Sans KR" pitchFamily="34" charset="-122"/>
+                <a:cs typeface="Noto Sans KR" pitchFamily="34" charset="-120"/>
+              </a:rPr>
+              <a:t>available to VMs</a:t>
+            </a:r>
+            <a:endParaRPr lang="en-US" sz="890" dirty="0"/>
+          </a:p>
+        </p:txBody>
+      </p:sp>
+      <p:sp>
+        <p:nvSpPr>
+          <p:cNvPr id="37" name="Shape 35"/>
+          <p:cNvSpPr/>
+          <p:nvPr/>
+        </p:nvSpPr>
+        <p:spPr>
+          <a:xfrm>
+            <a:off x="512064" y="3319272"/>
+            <a:ext cx="1984248" cy="457200"/>
+          </a:xfrm>
+          <a:prstGeom prst="rect">
+            <a:avLst/>
+          </a:prstGeom>
+          <a:solidFill>
+            <a:srgbClr val="0D1621"/>
+          </a:solidFill>
+          <a:ln w="8255">
+            <a:solidFill>
+              <a:srgbClr val="33445B"/>
+            </a:solidFill>
+            <a:prstDash val="solid"/>
+          </a:ln>
+        </p:spPr>
+      </p:sp>
+      <p:sp>
+        <p:nvSpPr>
+          <p:cNvPr id="38" name="Text 36"/>
+          <p:cNvSpPr/>
+          <p:nvPr/>
+        </p:nvSpPr>
+        <p:spPr>
+          <a:xfrm>
+            <a:off x="603504" y="3351276"/>
+            <a:ext cx="1801368" cy="393192"/>
           </a:xfrm>
           <a:prstGeom prst="rect">
             <a:avLst/>
@@ -6673,7 +7601,7 @@
               <a:buNone/>
             </a:pPr>
             <a:r>
-              <a:rPr lang="en-US" sz="960" b="1" dirty="0">
+              <a:rPr lang="en-US" sz="900" b="1" dirty="0">
                 <a:solidFill>
                   <a:srgbClr val="F7F9FC"/>
                 </a:solidFill>
@@ -6681,22 +7609,220 @@
                 <a:ea typeface="Noto Sans KR" pitchFamily="34" charset="-122"/>
                 <a:cs typeface="Noto Sans KR" pitchFamily="34" charset="-120"/>
               </a:rPr>
-              <a:t>물리 구성</a:t>
-            </a:r>
-            <a:endParaRPr lang="en-US" sz="960" dirty="0"/>
-          </a:p>
-        </p:txBody>
-      </p:sp>
-      <p:sp>
-        <p:nvSpPr>
-          <p:cNvPr id="15" name="Shape 13"/>
-          <p:cNvSpPr/>
-          <p:nvPr/>
-        </p:nvSpPr>
-        <p:spPr>
-          <a:xfrm>
-            <a:off x="2834640" y="1892808"/>
-            <a:ext cx="3703320" cy="539496"/>
+              <a:t>Storage compute</a:t>
+            </a:r>
+            <a:endParaRPr lang="en-US" sz="900" dirty="0"/>
+          </a:p>
+        </p:txBody>
+      </p:sp>
+      <p:sp>
+        <p:nvSpPr>
+          <p:cNvPr id="39" name="Shape 37"/>
+          <p:cNvSpPr/>
+          <p:nvPr/>
+        </p:nvSpPr>
+        <p:spPr>
+          <a:xfrm>
+            <a:off x="2496312" y="3319272"/>
+            <a:ext cx="3008376" cy="457200"/>
+          </a:xfrm>
+          <a:prstGeom prst="rect">
+            <a:avLst/>
+          </a:prstGeom>
+          <a:solidFill>
+            <a:srgbClr val="0D1621"/>
+          </a:solidFill>
+          <a:ln w="8255">
+            <a:solidFill>
+              <a:srgbClr val="33445B"/>
+            </a:solidFill>
+            <a:prstDash val="solid"/>
+          </a:ln>
+        </p:spPr>
+      </p:sp>
+      <p:sp>
+        <p:nvSpPr>
+          <p:cNvPr id="40" name="Text 38"/>
+          <p:cNvSpPr/>
+          <p:nvPr/>
+        </p:nvSpPr>
+        <p:spPr>
+          <a:xfrm>
+            <a:off x="2587752" y="3351276"/>
+            <a:ext cx="2825496" cy="393192"/>
+          </a:xfrm>
+          <a:prstGeom prst="rect">
+            <a:avLst/>
+          </a:prstGeom>
+          <a:noFill/>
+          <a:ln/>
+        </p:spPr>
+        <p:txBody>
+          <a:bodyPr wrap="square" lIns="0" tIns="0" rIns="0" bIns="0" rtlCol="0" anchor="ctr">
+            <a:normAutofit/>
+          </a:bodyPr>
+          <a:lstStyle/>
+          <a:p>
+            <a:pPr algn="ctr" indent="0" marL="0">
+              <a:buNone/>
+            </a:pPr>
+            <a:r>
+              <a:rPr lang="en-US" sz="890" dirty="0">
+                <a:solidFill>
+                  <a:srgbClr val="D9E1EC"/>
+                </a:solidFill>
+                <a:latin typeface="Noto Sans KR" pitchFamily="34" charset="0"/>
+                <a:ea typeface="Noto Sans KR" pitchFamily="34" charset="-122"/>
+                <a:cs typeface="Noto Sans KR" pitchFamily="34" charset="-120"/>
+              </a:rPr>
+              <a:t>48 storage cores</a:t>
+            </a:r>
+            <a:endParaRPr lang="en-US" sz="890" dirty="0"/>
+          </a:p>
+        </p:txBody>
+      </p:sp>
+      <p:sp>
+        <p:nvSpPr>
+          <p:cNvPr id="41" name="Shape 39"/>
+          <p:cNvSpPr/>
+          <p:nvPr/>
+        </p:nvSpPr>
+        <p:spPr>
+          <a:xfrm>
+            <a:off x="5504688" y="3319272"/>
+            <a:ext cx="3008376" cy="457200"/>
+          </a:xfrm>
+          <a:prstGeom prst="rect">
+            <a:avLst/>
+          </a:prstGeom>
+          <a:solidFill>
+            <a:srgbClr val="0D1621"/>
+          </a:solidFill>
+          <a:ln w="8255">
+            <a:solidFill>
+              <a:srgbClr val="33445B"/>
+            </a:solidFill>
+            <a:prstDash val="solid"/>
+          </a:ln>
+        </p:spPr>
+      </p:sp>
+      <p:sp>
+        <p:nvSpPr>
+          <p:cNvPr id="42" name="Text 40"/>
+          <p:cNvSpPr/>
+          <p:nvPr/>
+        </p:nvSpPr>
+        <p:spPr>
+          <a:xfrm>
+            <a:off x="5596128" y="3351276"/>
+            <a:ext cx="2825496" cy="393192"/>
+          </a:xfrm>
+          <a:prstGeom prst="rect">
+            <a:avLst/>
+          </a:prstGeom>
+          <a:noFill/>
+          <a:ln/>
+        </p:spPr>
+        <p:txBody>
+          <a:bodyPr wrap="square" lIns="0" tIns="0" rIns="0" bIns="0" rtlCol="0" anchor="ctr">
+            <a:normAutofit/>
+          </a:bodyPr>
+          <a:lstStyle/>
+          <a:p>
+            <a:pPr algn="ctr" indent="0" marL="0">
+              <a:buNone/>
+            </a:pPr>
+            <a:r>
+              <a:rPr lang="en-US" sz="890" dirty="0">
+                <a:solidFill>
+                  <a:srgbClr val="D9E1EC"/>
+                </a:solidFill>
+                <a:latin typeface="Noto Sans KR" pitchFamily="34" charset="0"/>
+                <a:ea typeface="Noto Sans KR" pitchFamily="34" charset="-122"/>
+                <a:cs typeface="Noto Sans KR" pitchFamily="34" charset="-120"/>
+              </a:rPr>
+              <a:t>96 storage cores</a:t>
+            </a:r>
+            <a:endParaRPr lang="en-US" sz="890" dirty="0"/>
+          </a:p>
+        </p:txBody>
+      </p:sp>
+      <p:sp>
+        <p:nvSpPr>
+          <p:cNvPr id="43" name="Shape 41"/>
+          <p:cNvSpPr/>
+          <p:nvPr/>
+        </p:nvSpPr>
+        <p:spPr>
+          <a:xfrm>
+            <a:off x="8513064" y="3319272"/>
+            <a:ext cx="3008376" cy="457200"/>
+          </a:xfrm>
+          <a:prstGeom prst="rect">
+            <a:avLst/>
+          </a:prstGeom>
+          <a:solidFill>
+            <a:srgbClr val="0D1621"/>
+          </a:solidFill>
+          <a:ln w="8255">
+            <a:solidFill>
+              <a:srgbClr val="33445B"/>
+            </a:solidFill>
+            <a:prstDash val="solid"/>
+          </a:ln>
+        </p:spPr>
+      </p:sp>
+      <p:sp>
+        <p:nvSpPr>
+          <p:cNvPr id="44" name="Text 42"/>
+          <p:cNvSpPr/>
+          <p:nvPr/>
+        </p:nvSpPr>
+        <p:spPr>
+          <a:xfrm>
+            <a:off x="8604504" y="3351276"/>
+            <a:ext cx="2825496" cy="393192"/>
+          </a:xfrm>
+          <a:prstGeom prst="rect">
+            <a:avLst/>
+          </a:prstGeom>
+          <a:noFill/>
+          <a:ln/>
+        </p:spPr>
+        <p:txBody>
+          <a:bodyPr wrap="square" lIns="0" tIns="0" rIns="0" bIns="0" rtlCol="0" anchor="ctr">
+            <a:normAutofit/>
+          </a:bodyPr>
+          <a:lstStyle/>
+          <a:p>
+            <a:pPr algn="ctr" indent="0" marL="0">
+              <a:buNone/>
+            </a:pPr>
+            <a:r>
+              <a:rPr lang="en-US" sz="890" dirty="0">
+                <a:solidFill>
+                  <a:srgbClr val="2DD4BF"/>
+                </a:solidFill>
+                <a:latin typeface="Noto Sans KR" pitchFamily="34" charset="0"/>
+                <a:ea typeface="Noto Sans KR" pitchFamily="34" charset="-122"/>
+                <a:cs typeface="Noto Sans KR" pitchFamily="34" charset="-120"/>
+              </a:rPr>
+              <a:t>192 storage cores</a:t>
+            </a:r>
+            <a:endParaRPr lang="en-US" sz="890" dirty="0"/>
+          </a:p>
+        </p:txBody>
+      </p:sp>
+      <p:sp>
+        <p:nvSpPr>
+          <p:cNvPr id="45" name="Shape 43"/>
+          <p:cNvSpPr/>
+          <p:nvPr/>
+        </p:nvSpPr>
+        <p:spPr>
+          <a:xfrm>
+            <a:off x="512064" y="3776472"/>
+            <a:ext cx="1984248" cy="457200"/>
           </a:xfrm>
           <a:prstGeom prst="rect">
             <a:avLst/>
@@ -6714,14 +7840,14 @@
       </p:sp>
       <p:sp>
         <p:nvSpPr>
-          <p:cNvPr id="16" name="Text 14"/>
-          <p:cNvSpPr/>
-          <p:nvPr/>
-        </p:nvSpPr>
-        <p:spPr>
-          <a:xfrm>
-            <a:off x="2935224" y="1938528"/>
-            <a:ext cx="3502152" cy="438912"/>
+          <p:cNvPr id="46" name="Text 44"/>
+          <p:cNvSpPr/>
+          <p:nvPr/>
+        </p:nvSpPr>
+        <p:spPr>
+          <a:xfrm>
+            <a:off x="603504" y="3808476"/>
+            <a:ext cx="1801368" cy="393192"/>
           </a:xfrm>
           <a:prstGeom prst="rect">
             <a:avLst/>
@@ -6739,7 +7865,73 @@
               <a:buNone/>
             </a:pPr>
             <a:r>
-              <a:rPr lang="en-US" sz="960" dirty="0">
+              <a:rPr lang="en-US" sz="900" b="1" dirty="0">
+                <a:solidFill>
+                  <a:srgbClr val="F7F9FC"/>
+                </a:solidFill>
+                <a:latin typeface="Noto Sans KR" pitchFamily="34" charset="0"/>
+                <a:ea typeface="Noto Sans KR" pitchFamily="34" charset="-122"/>
+                <a:cs typeface="Noto Sans KR" pitchFamily="34" charset="-120"/>
+              </a:rPr>
+              <a:t>HC usable (ASM HR)¹</a:t>
+            </a:r>
+            <a:endParaRPr lang="en-US" sz="900" dirty="0"/>
+          </a:p>
+        </p:txBody>
+      </p:sp>
+      <p:sp>
+        <p:nvSpPr>
+          <p:cNvPr id="47" name="Shape 45"/>
+          <p:cNvSpPr/>
+          <p:nvPr/>
+        </p:nvSpPr>
+        <p:spPr>
+          <a:xfrm>
+            <a:off x="2496312" y="3776472"/>
+            <a:ext cx="3008376" cy="457200"/>
+          </a:xfrm>
+          <a:prstGeom prst="rect">
+            <a:avLst/>
+          </a:prstGeom>
+          <a:solidFill>
+            <a:srgbClr val="101925"/>
+          </a:solidFill>
+          <a:ln w="8255">
+            <a:solidFill>
+              <a:srgbClr val="33445B"/>
+            </a:solidFill>
+            <a:prstDash val="solid"/>
+          </a:ln>
+        </p:spPr>
+      </p:sp>
+      <p:sp>
+        <p:nvSpPr>
+          <p:cNvPr id="48" name="Text 46"/>
+          <p:cNvSpPr/>
+          <p:nvPr/>
+        </p:nvSpPr>
+        <p:spPr>
+          <a:xfrm>
+            <a:off x="2587752" y="3808476"/>
+            <a:ext cx="2825496" cy="393192"/>
+          </a:xfrm>
+          <a:prstGeom prst="rect">
+            <a:avLst/>
+          </a:prstGeom>
+          <a:noFill/>
+          <a:ln/>
+        </p:spPr>
+        <p:txBody>
+          <a:bodyPr wrap="square" lIns="0" tIns="0" rIns="0" bIns="0" rtlCol="0" anchor="ctr">
+            <a:normAutofit/>
+          </a:bodyPr>
+          <a:lstStyle/>
+          <a:p>
+            <a:pPr algn="ctr" indent="0" marL="0">
+              <a:buNone/>
+            </a:pPr>
+            <a:r>
+              <a:rPr lang="en-US" sz="890" dirty="0">
                 <a:solidFill>
                   <a:srgbClr val="D9E1EC"/>
                 </a:solidFill>
@@ -6747,22 +7939,22 @@
                 <a:ea typeface="Noto Sans KR" pitchFamily="34" charset="-122"/>
                 <a:cs typeface="Noto Sans KR" pitchFamily="34" charset="-120"/>
               </a:rPr>
-              <a:t>2 DB + 3 HC Storage</a:t>
-            </a:r>
-            <a:endParaRPr lang="en-US" sz="960" dirty="0"/>
-          </a:p>
-        </p:txBody>
-      </p:sp>
-      <p:sp>
-        <p:nvSpPr>
-          <p:cNvPr id="17" name="Shape 15"/>
-          <p:cNvSpPr/>
-          <p:nvPr/>
-        </p:nvSpPr>
-        <p:spPr>
-          <a:xfrm>
-            <a:off x="6537960" y="1892808"/>
-            <a:ext cx="3703320" cy="539496"/>
+              <a:t>96.2 TB</a:t>
+            </a:r>
+            <a:endParaRPr lang="en-US" sz="890" dirty="0"/>
+          </a:p>
+        </p:txBody>
+      </p:sp>
+      <p:sp>
+        <p:nvSpPr>
+          <p:cNvPr id="49" name="Shape 47"/>
+          <p:cNvSpPr/>
+          <p:nvPr/>
+        </p:nvSpPr>
+        <p:spPr>
+          <a:xfrm>
+            <a:off x="5504688" y="3776472"/>
+            <a:ext cx="3008376" cy="457200"/>
           </a:xfrm>
           <a:prstGeom prst="rect">
             <a:avLst/>
@@ -6780,14 +7972,146 @@
       </p:sp>
       <p:sp>
         <p:nvSpPr>
-          <p:cNvPr id="18" name="Text 16"/>
-          <p:cNvSpPr/>
-          <p:nvPr/>
-        </p:nvSpPr>
-        <p:spPr>
-          <a:xfrm>
-            <a:off x="6638544" y="1938528"/>
-            <a:ext cx="3502152" cy="438912"/>
+          <p:cNvPr id="50" name="Text 48"/>
+          <p:cNvSpPr/>
+          <p:nvPr/>
+        </p:nvSpPr>
+        <p:spPr>
+          <a:xfrm>
+            <a:off x="5596128" y="3808476"/>
+            <a:ext cx="2825496" cy="393192"/>
+          </a:xfrm>
+          <a:prstGeom prst="rect">
+            <a:avLst/>
+          </a:prstGeom>
+          <a:noFill/>
+          <a:ln/>
+        </p:spPr>
+        <p:txBody>
+          <a:bodyPr wrap="square" lIns="0" tIns="0" rIns="0" bIns="0" rtlCol="0" anchor="ctr">
+            <a:normAutofit/>
+          </a:bodyPr>
+          <a:lstStyle/>
+          <a:p>
+            <a:pPr algn="ctr" indent="0" marL="0">
+              <a:buNone/>
+            </a:pPr>
+            <a:r>
+              <a:rPr lang="en-US" sz="890" dirty="0">
+                <a:solidFill>
+                  <a:srgbClr val="D9E1EC"/>
+                </a:solidFill>
+                <a:latin typeface="Noto Sans KR" pitchFamily="34" charset="0"/>
+                <a:ea typeface="Noto Sans KR" pitchFamily="34" charset="-122"/>
+                <a:cs typeface="Noto Sans KR" pitchFamily="34" charset="-120"/>
+              </a:rPr>
+              <a:t>106 TB</a:t>
+            </a:r>
+            <a:endParaRPr lang="en-US" sz="890" dirty="0"/>
+          </a:p>
+        </p:txBody>
+      </p:sp>
+      <p:sp>
+        <p:nvSpPr>
+          <p:cNvPr id="51" name="Shape 49"/>
+          <p:cNvSpPr/>
+          <p:nvPr/>
+        </p:nvSpPr>
+        <p:spPr>
+          <a:xfrm>
+            <a:off x="8513064" y="3776472"/>
+            <a:ext cx="3008376" cy="457200"/>
+          </a:xfrm>
+          <a:prstGeom prst="rect">
+            <a:avLst/>
+          </a:prstGeom>
+          <a:solidFill>
+            <a:srgbClr val="101925"/>
+          </a:solidFill>
+          <a:ln w="8255">
+            <a:solidFill>
+              <a:srgbClr val="33445B"/>
+            </a:solidFill>
+            <a:prstDash val="solid"/>
+          </a:ln>
+        </p:spPr>
+      </p:sp>
+      <p:sp>
+        <p:nvSpPr>
+          <p:cNvPr id="52" name="Text 50"/>
+          <p:cNvSpPr/>
+          <p:nvPr/>
+        </p:nvSpPr>
+        <p:spPr>
+          <a:xfrm>
+            <a:off x="8604504" y="3808476"/>
+            <a:ext cx="2825496" cy="393192"/>
+          </a:xfrm>
+          <a:prstGeom prst="rect">
+            <a:avLst/>
+          </a:prstGeom>
+          <a:noFill/>
+          <a:ln/>
+        </p:spPr>
+        <p:txBody>
+          <a:bodyPr wrap="square" lIns="0" tIns="0" rIns="0" bIns="0" rtlCol="0" anchor="ctr">
+            <a:normAutofit/>
+          </a:bodyPr>
+          <a:lstStyle/>
+          <a:p>
+            <a:pPr algn="ctr" indent="0" marL="0">
+              <a:buNone/>
+            </a:pPr>
+            <a:r>
+              <a:rPr lang="en-US" sz="890" dirty="0">
+                <a:solidFill>
+                  <a:srgbClr val="2DD4BF"/>
+                </a:solidFill>
+                <a:latin typeface="Noto Sans KR" pitchFamily="34" charset="0"/>
+                <a:ea typeface="Noto Sans KR" pitchFamily="34" charset="-122"/>
+                <a:cs typeface="Noto Sans KR" pitchFamily="34" charset="-120"/>
+              </a:rPr>
+              <a:t>240 TB</a:t>
+            </a:r>
+            <a:endParaRPr lang="en-US" sz="890" dirty="0"/>
+          </a:p>
+        </p:txBody>
+      </p:sp>
+      <p:sp>
+        <p:nvSpPr>
+          <p:cNvPr id="53" name="Shape 51"/>
+          <p:cNvSpPr/>
+          <p:nvPr/>
+        </p:nvSpPr>
+        <p:spPr>
+          <a:xfrm>
+            <a:off x="512064" y="4233672"/>
+            <a:ext cx="1984248" cy="457200"/>
+          </a:xfrm>
+          <a:prstGeom prst="rect">
+            <a:avLst/>
+          </a:prstGeom>
+          <a:solidFill>
+            <a:srgbClr val="0D1621"/>
+          </a:solidFill>
+          <a:ln w="8255">
+            <a:solidFill>
+              <a:srgbClr val="33445B"/>
+            </a:solidFill>
+            <a:prstDash val="solid"/>
+          </a:ln>
+        </p:spPr>
+      </p:sp>
+      <p:sp>
+        <p:nvSpPr>
+          <p:cNvPr id="54" name="Text 52"/>
+          <p:cNvSpPr/>
+          <p:nvPr/>
+        </p:nvSpPr>
+        <p:spPr>
+          <a:xfrm>
+            <a:off x="603504" y="4265676"/>
+            <a:ext cx="1801368" cy="393192"/>
           </a:xfrm>
           <a:prstGeom prst="rect">
             <a:avLst/>
@@ -6805,7 +8129,73 @@
               <a:buNone/>
             </a:pPr>
             <a:r>
-              <a:rPr lang="en-US" sz="960" dirty="0">
+              <a:rPr lang="en-US" sz="900" b="1" dirty="0">
+                <a:solidFill>
+                  <a:srgbClr val="F7F9FC"/>
+                </a:solidFill>
+                <a:latin typeface="Noto Sans KR" pitchFamily="34" charset="0"/>
+                <a:ea typeface="Noto Sans KR" pitchFamily="34" charset="-122"/>
+                <a:cs typeface="Noto Sans KR" pitchFamily="34" charset="-120"/>
+              </a:rPr>
+              <a:t>Flash · PMEM/XRMEM</a:t>
+            </a:r>
+            <a:endParaRPr lang="en-US" sz="900" dirty="0"/>
+          </a:p>
+        </p:txBody>
+      </p:sp>
+      <p:sp>
+        <p:nvSpPr>
+          <p:cNvPr id="55" name="Shape 53"/>
+          <p:cNvSpPr/>
+          <p:nvPr/>
+        </p:nvSpPr>
+        <p:spPr>
+          <a:xfrm>
+            <a:off x="2496312" y="4233672"/>
+            <a:ext cx="3008376" cy="457200"/>
+          </a:xfrm>
+          <a:prstGeom prst="rect">
+            <a:avLst/>
+          </a:prstGeom>
+          <a:solidFill>
+            <a:srgbClr val="0D1621"/>
+          </a:solidFill>
+          <a:ln w="8255">
+            <a:solidFill>
+              <a:srgbClr val="33445B"/>
+            </a:solidFill>
+            <a:prstDash val="solid"/>
+          </a:ln>
+        </p:spPr>
+      </p:sp>
+      <p:sp>
+        <p:nvSpPr>
+          <p:cNvPr id="56" name="Text 54"/>
+          <p:cNvSpPr/>
+          <p:nvPr/>
+        </p:nvSpPr>
+        <p:spPr>
+          <a:xfrm>
+            <a:off x="2587752" y="4265676"/>
+            <a:ext cx="2825496" cy="393192"/>
+          </a:xfrm>
+          <a:prstGeom prst="rect">
+            <a:avLst/>
+          </a:prstGeom>
+          <a:noFill/>
+          <a:ln/>
+        </p:spPr>
+        <p:txBody>
+          <a:bodyPr wrap="square" lIns="0" tIns="0" rIns="0" bIns="0" rtlCol="0" anchor="ctr">
+            <a:normAutofit/>
+          </a:bodyPr>
+          <a:lstStyle/>
+          <a:p>
+            <a:pPr algn="ctr" indent="0" marL="0">
+              <a:buNone/>
+            </a:pPr>
+            <a:r>
+              <a:rPr lang="en-US" sz="890" dirty="0">
                 <a:solidFill>
                   <a:srgbClr val="D9E1EC"/>
                 </a:solidFill>
@@ -6813,22 +8203,154 @@
                 <a:ea typeface="Noto Sans KR" pitchFamily="34" charset="-122"/>
                 <a:cs typeface="Noto Sans KR" pitchFamily="34" charset="-120"/>
               </a:rPr>
-              <a:t>2 Standard DB + 3 HC w/XRMEM</a:t>
-            </a:r>
-            <a:endParaRPr lang="en-US" sz="960" dirty="0"/>
-          </a:p>
-        </p:txBody>
-      </p:sp>
-      <p:sp>
-        <p:nvSpPr>
-          <p:cNvPr id="19" name="Shape 17"/>
-          <p:cNvSpPr/>
-          <p:nvPr/>
-        </p:nvSpPr>
-        <p:spPr>
-          <a:xfrm>
-            <a:off x="10241280" y="1892808"/>
-            <a:ext cx="1261872" cy="539496"/>
+              <a:t>38.4 TB · 2.3 TB PMEM</a:t>
+            </a:r>
+            <a:endParaRPr lang="en-US" sz="890" dirty="0"/>
+          </a:p>
+        </p:txBody>
+      </p:sp>
+      <p:sp>
+        <p:nvSpPr>
+          <p:cNvPr id="57" name="Shape 55"/>
+          <p:cNvSpPr/>
+          <p:nvPr/>
+        </p:nvSpPr>
+        <p:spPr>
+          <a:xfrm>
+            <a:off x="5504688" y="4233672"/>
+            <a:ext cx="3008376" cy="457200"/>
+          </a:xfrm>
+          <a:prstGeom prst="rect">
+            <a:avLst/>
+          </a:prstGeom>
+          <a:solidFill>
+            <a:srgbClr val="0D1621"/>
+          </a:solidFill>
+          <a:ln w="8255">
+            <a:solidFill>
+              <a:srgbClr val="33445B"/>
+            </a:solidFill>
+            <a:prstDash val="solid"/>
+          </a:ln>
+        </p:spPr>
+      </p:sp>
+      <p:sp>
+        <p:nvSpPr>
+          <p:cNvPr id="58" name="Text 56"/>
+          <p:cNvSpPr/>
+          <p:nvPr/>
+        </p:nvSpPr>
+        <p:spPr>
+          <a:xfrm>
+            <a:off x="5596128" y="4265676"/>
+            <a:ext cx="2825496" cy="393192"/>
+          </a:xfrm>
+          <a:prstGeom prst="rect">
+            <a:avLst/>
+          </a:prstGeom>
+          <a:noFill/>
+          <a:ln/>
+        </p:spPr>
+        <p:txBody>
+          <a:bodyPr wrap="square" lIns="0" tIns="0" rIns="0" bIns="0" rtlCol="0" anchor="ctr">
+            <a:normAutofit/>
+          </a:bodyPr>
+          <a:lstStyle/>
+          <a:p>
+            <a:pPr algn="ctr" indent="0" marL="0">
+              <a:buNone/>
+            </a:pPr>
+            <a:r>
+              <a:rPr lang="en-US" sz="890" dirty="0">
+                <a:solidFill>
+                  <a:srgbClr val="D9E1EC"/>
+                </a:solidFill>
+                <a:latin typeface="Noto Sans KR" pitchFamily="34" charset="0"/>
+                <a:ea typeface="Noto Sans KR" pitchFamily="34" charset="-122"/>
+                <a:cs typeface="Noto Sans KR" pitchFamily="34" charset="-120"/>
+              </a:rPr>
+              <a:t>38.4 TB · XRMEM 없음</a:t>
+            </a:r>
+            <a:endParaRPr lang="en-US" sz="890" dirty="0"/>
+          </a:p>
+        </p:txBody>
+      </p:sp>
+      <p:sp>
+        <p:nvSpPr>
+          <p:cNvPr id="59" name="Shape 57"/>
+          <p:cNvSpPr/>
+          <p:nvPr/>
+        </p:nvSpPr>
+        <p:spPr>
+          <a:xfrm>
+            <a:off x="8513064" y="4233672"/>
+            <a:ext cx="3008376" cy="457200"/>
+          </a:xfrm>
+          <a:prstGeom prst="rect">
+            <a:avLst/>
+          </a:prstGeom>
+          <a:solidFill>
+            <a:srgbClr val="0D1621"/>
+          </a:solidFill>
+          <a:ln w="8255">
+            <a:solidFill>
+              <a:srgbClr val="33445B"/>
+            </a:solidFill>
+            <a:prstDash val="solid"/>
+          </a:ln>
+        </p:spPr>
+      </p:sp>
+      <p:sp>
+        <p:nvSpPr>
+          <p:cNvPr id="60" name="Text 58"/>
+          <p:cNvSpPr/>
+          <p:nvPr/>
+        </p:nvSpPr>
+        <p:spPr>
+          <a:xfrm>
+            <a:off x="8604504" y="4265676"/>
+            <a:ext cx="2825496" cy="393192"/>
+          </a:xfrm>
+          <a:prstGeom prst="rect">
+            <a:avLst/>
+          </a:prstGeom>
+          <a:noFill/>
+          <a:ln/>
+        </p:spPr>
+        <p:txBody>
+          <a:bodyPr wrap="square" lIns="0" tIns="0" rIns="0" bIns="0" rtlCol="0" anchor="ctr">
+            <a:normAutofit/>
+          </a:bodyPr>
+          <a:lstStyle/>
+          <a:p>
+            <a:pPr algn="ctr" indent="0" marL="0">
+              <a:buNone/>
+            </a:pPr>
+            <a:r>
+              <a:rPr lang="en-US" sz="890" dirty="0">
+                <a:solidFill>
+                  <a:srgbClr val="2DD4BF"/>
+                </a:solidFill>
+                <a:latin typeface="Noto Sans KR" pitchFamily="34" charset="0"/>
+                <a:ea typeface="Noto Sans KR" pitchFamily="34" charset="-122"/>
+                <a:cs typeface="Noto Sans KR" pitchFamily="34" charset="-120"/>
+              </a:rPr>
+              <a:t>81.6 TB · 3.75 TB XRMEM</a:t>
+            </a:r>
+            <a:endParaRPr lang="en-US" sz="890" dirty="0"/>
+          </a:p>
+        </p:txBody>
+      </p:sp>
+      <p:sp>
+        <p:nvSpPr>
+          <p:cNvPr id="61" name="Shape 59"/>
+          <p:cNvSpPr/>
+          <p:nvPr/>
+        </p:nvSpPr>
+        <p:spPr>
+          <a:xfrm>
+            <a:off x="512064" y="4690872"/>
+            <a:ext cx="1984248" cy="457200"/>
           </a:xfrm>
           <a:prstGeom prst="rect">
             <a:avLst/>
@@ -6846,14 +8368,80 @@
       </p:sp>
       <p:sp>
         <p:nvSpPr>
-          <p:cNvPr id="20" name="Text 18"/>
-          <p:cNvSpPr/>
-          <p:nvPr/>
-        </p:nvSpPr>
-        <p:spPr>
-          <a:xfrm>
-            <a:off x="10341864" y="1938528"/>
-            <a:ext cx="1060704" cy="438912"/>
+          <p:cNvPr id="62" name="Text 60"/>
+          <p:cNvSpPr/>
+          <p:nvPr/>
+        </p:nvSpPr>
+        <p:spPr>
+          <a:xfrm>
+            <a:off x="603504" y="4722876"/>
+            <a:ext cx="1801368" cy="393192"/>
+          </a:xfrm>
+          <a:prstGeom prst="rect">
+            <a:avLst/>
+          </a:prstGeom>
+          <a:noFill/>
+          <a:ln/>
+        </p:spPr>
+        <p:txBody>
+          <a:bodyPr wrap="square" lIns="0" tIns="0" rIns="0" bIns="0" rtlCol="0" anchor="ctr">
+            <a:normAutofit/>
+          </a:bodyPr>
+          <a:lstStyle/>
+          <a:p>
+            <a:pPr algn="l" indent="0" marL="0">
+              <a:buNone/>
+            </a:pPr>
+            <a:r>
+              <a:rPr lang="en-US" sz="900" b="1" dirty="0">
+                <a:solidFill>
+                  <a:srgbClr val="F7F9FC"/>
+                </a:solidFill>
+                <a:latin typeface="Noto Sans KR" pitchFamily="34" charset="0"/>
+                <a:ea typeface="Noto Sans KR" pitchFamily="34" charset="-122"/>
+                <a:cs typeface="Noto Sans KR" pitchFamily="34" charset="-120"/>
+              </a:rPr>
+              <a:t>Max SQL flash BW</a:t>
+            </a:r>
+            <a:endParaRPr lang="en-US" sz="900" dirty="0"/>
+          </a:p>
+        </p:txBody>
+      </p:sp>
+      <p:sp>
+        <p:nvSpPr>
+          <p:cNvPr id="63" name="Shape 61"/>
+          <p:cNvSpPr/>
+          <p:nvPr/>
+        </p:nvSpPr>
+        <p:spPr>
+          <a:xfrm>
+            <a:off x="2496312" y="4690872"/>
+            <a:ext cx="3008376" cy="457200"/>
+          </a:xfrm>
+          <a:prstGeom prst="rect">
+            <a:avLst/>
+          </a:prstGeom>
+          <a:solidFill>
+            <a:srgbClr val="101925"/>
+          </a:solidFill>
+          <a:ln w="8255">
+            <a:solidFill>
+              <a:srgbClr val="33445B"/>
+            </a:solidFill>
+            <a:prstDash val="solid"/>
+          </a:ln>
+        </p:spPr>
+      </p:sp>
+      <p:sp>
+        <p:nvSpPr>
+          <p:cNvPr id="64" name="Text 62"/>
+          <p:cNvSpPr/>
+          <p:nvPr/>
+        </p:nvSpPr>
+        <p:spPr>
+          <a:xfrm>
+            <a:off x="2587752" y="4722876"/>
+            <a:ext cx="2825496" cy="393192"/>
           </a:xfrm>
           <a:prstGeom prst="rect">
             <a:avLst/>
@@ -6871,7 +8459,139 @@
               <a:buNone/>
             </a:pPr>
             <a:r>
-              <a:rPr lang="en-US" sz="920" b="1" dirty="0">
+              <a:rPr lang="en-US" sz="890" dirty="0">
+                <a:solidFill>
+                  <a:srgbClr val="D9E1EC"/>
+                </a:solidFill>
+                <a:latin typeface="Noto Sans KR" pitchFamily="34" charset="0"/>
+                <a:ea typeface="Noto Sans KR" pitchFamily="34" charset="-122"/>
+                <a:cs typeface="Noto Sans KR" pitchFamily="34" charset="-120"/>
+              </a:rPr>
+              <a:t>67.5 GB/s</a:t>
+            </a:r>
+            <a:endParaRPr lang="en-US" sz="890" dirty="0"/>
+          </a:p>
+        </p:txBody>
+      </p:sp>
+      <p:sp>
+        <p:nvSpPr>
+          <p:cNvPr id="65" name="Shape 63"/>
+          <p:cNvSpPr/>
+          <p:nvPr/>
+        </p:nvSpPr>
+        <p:spPr>
+          <a:xfrm>
+            <a:off x="5504688" y="4690872"/>
+            <a:ext cx="3008376" cy="457200"/>
+          </a:xfrm>
+          <a:prstGeom prst="rect">
+            <a:avLst/>
+          </a:prstGeom>
+          <a:solidFill>
+            <a:srgbClr val="101925"/>
+          </a:solidFill>
+          <a:ln w="8255">
+            <a:solidFill>
+              <a:srgbClr val="33445B"/>
+            </a:solidFill>
+            <a:prstDash val="solid"/>
+          </a:ln>
+        </p:spPr>
+      </p:sp>
+      <p:sp>
+        <p:nvSpPr>
+          <p:cNvPr id="66" name="Text 64"/>
+          <p:cNvSpPr/>
+          <p:nvPr/>
+        </p:nvSpPr>
+        <p:spPr>
+          <a:xfrm>
+            <a:off x="5596128" y="4722876"/>
+            <a:ext cx="2825496" cy="393192"/>
+          </a:xfrm>
+          <a:prstGeom prst="rect">
+            <a:avLst/>
+          </a:prstGeom>
+          <a:noFill/>
+          <a:ln/>
+        </p:spPr>
+        <p:txBody>
+          <a:bodyPr wrap="square" lIns="0" tIns="0" rIns="0" bIns="0" rtlCol="0" anchor="ctr">
+            <a:normAutofit/>
+          </a:bodyPr>
+          <a:lstStyle/>
+          <a:p>
+            <a:pPr algn="ctr" indent="0" marL="0">
+              <a:buNone/>
+            </a:pPr>
+            <a:r>
+              <a:rPr lang="en-US" sz="890" dirty="0">
+                <a:solidFill>
+                  <a:srgbClr val="D9E1EC"/>
+                </a:solidFill>
+                <a:latin typeface="Noto Sans KR" pitchFamily="34" charset="0"/>
+                <a:ea typeface="Noto Sans KR" pitchFamily="34" charset="-122"/>
+                <a:cs typeface="Noto Sans KR" pitchFamily="34" charset="-120"/>
+              </a:rPr>
+              <a:t>37.5 GB/s</a:t>
+            </a:r>
+            <a:endParaRPr lang="en-US" sz="890" dirty="0"/>
+          </a:p>
+        </p:txBody>
+      </p:sp>
+      <p:sp>
+        <p:nvSpPr>
+          <p:cNvPr id="67" name="Shape 65"/>
+          <p:cNvSpPr/>
+          <p:nvPr/>
+        </p:nvSpPr>
+        <p:spPr>
+          <a:xfrm>
+            <a:off x="8513064" y="4690872"/>
+            <a:ext cx="3008376" cy="457200"/>
+          </a:xfrm>
+          <a:prstGeom prst="rect">
+            <a:avLst/>
+          </a:prstGeom>
+          <a:solidFill>
+            <a:srgbClr val="101925"/>
+          </a:solidFill>
+          <a:ln w="8255">
+            <a:solidFill>
+              <a:srgbClr val="33445B"/>
+            </a:solidFill>
+            <a:prstDash val="solid"/>
+          </a:ln>
+        </p:spPr>
+      </p:sp>
+      <p:sp>
+        <p:nvSpPr>
+          <p:cNvPr id="68" name="Text 66"/>
+          <p:cNvSpPr/>
+          <p:nvPr/>
+        </p:nvSpPr>
+        <p:spPr>
+          <a:xfrm>
+            <a:off x="8604504" y="4722876"/>
+            <a:ext cx="2825496" cy="393192"/>
+          </a:xfrm>
+          <a:prstGeom prst="rect">
+            <a:avLst/>
+          </a:prstGeom>
+          <a:noFill/>
+          <a:ln/>
+        </p:spPr>
+        <p:txBody>
+          <a:bodyPr wrap="square" lIns="0" tIns="0" rIns="0" bIns="0" rtlCol="0" anchor="ctr">
+            <a:normAutofit/>
+          </a:bodyPr>
+          <a:lstStyle/>
+          <a:p>
+            <a:pPr algn="ctr" indent="0" marL="0">
+              <a:buNone/>
+            </a:pPr>
+            <a:r>
+              <a:rPr lang="en-US" sz="890" dirty="0">
                 <a:solidFill>
                   <a:srgbClr val="2DD4BF"/>
                 </a:solidFill>
@@ -6879,22 +8599,22 @@
                 <a:ea typeface="Noto Sans KR" pitchFamily="34" charset="-122"/>
                 <a:cs typeface="Noto Sans KR" pitchFamily="34" charset="-120"/>
               </a:rPr>
-              <a:t>노드 수 2+3 동일</a:t>
-            </a:r>
-            <a:endParaRPr lang="en-US" sz="920" dirty="0"/>
-          </a:p>
-        </p:txBody>
-      </p:sp>
-      <p:sp>
-        <p:nvSpPr>
-          <p:cNvPr id="21" name="Shape 19"/>
-          <p:cNvSpPr/>
-          <p:nvPr/>
-        </p:nvSpPr>
-        <p:spPr>
-          <a:xfrm>
-            <a:off x="512064" y="2432304"/>
-            <a:ext cx="2322576" cy="539496"/>
+              <a:t>300 GB/s</a:t>
+            </a:r>
+            <a:endParaRPr lang="en-US" sz="890" dirty="0"/>
+          </a:p>
+        </p:txBody>
+      </p:sp>
+      <p:sp>
+        <p:nvSpPr>
+          <p:cNvPr id="69" name="Shape 67"/>
+          <p:cNvSpPr/>
+          <p:nvPr/>
+        </p:nvSpPr>
+        <p:spPr>
+          <a:xfrm>
+            <a:off x="512064" y="5148072"/>
+            <a:ext cx="1984248" cy="457200"/>
           </a:xfrm>
           <a:prstGeom prst="rect">
             <a:avLst/>
@@ -6912,14 +8632,14 @@
       </p:sp>
       <p:sp>
         <p:nvSpPr>
-          <p:cNvPr id="22" name="Text 20"/>
-          <p:cNvSpPr/>
-          <p:nvPr/>
-        </p:nvSpPr>
-        <p:spPr>
-          <a:xfrm>
-            <a:off x="612648" y="2478024"/>
-            <a:ext cx="2121408" cy="438912"/>
+          <p:cNvPr id="70" name="Text 68"/>
+          <p:cNvSpPr/>
+          <p:nvPr/>
+        </p:nvSpPr>
+        <p:spPr>
+          <a:xfrm>
+            <a:off x="603504" y="5180076"/>
+            <a:ext cx="1801368" cy="393192"/>
           </a:xfrm>
           <a:prstGeom prst="rect">
             <a:avLst/>
@@ -6937,7 +8657,7 @@
               <a:buNone/>
             </a:pPr>
             <a:r>
-              <a:rPr lang="en-US" sz="960" b="1" dirty="0">
+              <a:rPr lang="en-US" sz="900" b="1" dirty="0">
                 <a:solidFill>
                   <a:srgbClr val="F7F9FC"/>
                 </a:solidFill>
@@ -6945,22 +8665,22 @@
                 <a:ea typeface="Noto Sans KR" pitchFamily="34" charset="-122"/>
                 <a:cs typeface="Noto Sans KR" pitchFamily="34" charset="-120"/>
               </a:rPr>
-              <a:t>DB compute</a:t>
-            </a:r>
-            <a:endParaRPr lang="en-US" sz="960" dirty="0"/>
-          </a:p>
-        </p:txBody>
-      </p:sp>
-      <p:sp>
-        <p:nvSpPr>
-          <p:cNvPr id="23" name="Shape 21"/>
-          <p:cNvSpPr/>
-          <p:nvPr/>
-        </p:nvSpPr>
-        <p:spPr>
-          <a:xfrm>
-            <a:off x="2834640" y="2432304"/>
-            <a:ext cx="3703320" cy="539496"/>
+              <a:t>SQL Read / Write IOPS</a:t>
+            </a:r>
+            <a:endParaRPr lang="en-US" sz="900" dirty="0"/>
+          </a:p>
+        </p:txBody>
+      </p:sp>
+      <p:sp>
+        <p:nvSpPr>
+          <p:cNvPr id="71" name="Shape 69"/>
+          <p:cNvSpPr/>
+          <p:nvPr/>
+        </p:nvSpPr>
+        <p:spPr>
+          <a:xfrm>
+            <a:off x="2496312" y="5148072"/>
+            <a:ext cx="3008376" cy="457200"/>
           </a:xfrm>
           <a:prstGeom prst="rect">
             <a:avLst/>
@@ -6978,14 +8698,212 @@
       </p:sp>
       <p:sp>
         <p:nvSpPr>
-          <p:cNvPr id="24" name="Text 22"/>
-          <p:cNvSpPr/>
-          <p:nvPr/>
-        </p:nvSpPr>
-        <p:spPr>
-          <a:xfrm>
-            <a:off x="2935224" y="2478024"/>
-            <a:ext cx="3502152" cy="438912"/>
+          <p:cNvPr id="72" name="Text 70"/>
+          <p:cNvSpPr/>
+          <p:nvPr/>
+        </p:nvSpPr>
+        <p:spPr>
+          <a:xfrm>
+            <a:off x="2587752" y="5180076"/>
+            <a:ext cx="2825496" cy="393192"/>
+          </a:xfrm>
+          <a:prstGeom prst="rect">
+            <a:avLst/>
+          </a:prstGeom>
+          <a:noFill/>
+          <a:ln/>
+        </p:spPr>
+        <p:txBody>
+          <a:bodyPr wrap="square" lIns="0" tIns="0" rIns="0" bIns="0" rtlCol="0" anchor="ctr">
+            <a:normAutofit/>
+          </a:bodyPr>
+          <a:lstStyle/>
+          <a:p>
+            <a:pPr algn="ctr" indent="0" marL="0">
+              <a:buNone/>
+            </a:pPr>
+            <a:r>
+              <a:rPr lang="en-US" sz="890" dirty="0">
+                <a:solidFill>
+                  <a:srgbClr val="D9E1EC"/>
+                </a:solidFill>
+                <a:latin typeface="Noto Sans KR" pitchFamily="34" charset="0"/>
+                <a:ea typeface="Noto Sans KR" pitchFamily="34" charset="-122"/>
+                <a:cs typeface="Noto Sans KR" pitchFamily="34" charset="-120"/>
+              </a:rPr>
+              <a:t>2.8M / 921K</a:t>
+            </a:r>
+            <a:endParaRPr lang="en-US" sz="890" dirty="0"/>
+          </a:p>
+        </p:txBody>
+      </p:sp>
+      <p:sp>
+        <p:nvSpPr>
+          <p:cNvPr id="73" name="Shape 71"/>
+          <p:cNvSpPr/>
+          <p:nvPr/>
+        </p:nvSpPr>
+        <p:spPr>
+          <a:xfrm>
+            <a:off x="5504688" y="5148072"/>
+            <a:ext cx="3008376" cy="457200"/>
+          </a:xfrm>
+          <a:prstGeom prst="rect">
+            <a:avLst/>
+          </a:prstGeom>
+          <a:solidFill>
+            <a:srgbClr val="0D1621"/>
+          </a:solidFill>
+          <a:ln w="8255">
+            <a:solidFill>
+              <a:srgbClr val="33445B"/>
+            </a:solidFill>
+            <a:prstDash val="solid"/>
+          </a:ln>
+        </p:spPr>
+      </p:sp>
+      <p:sp>
+        <p:nvSpPr>
+          <p:cNvPr id="74" name="Text 72"/>
+          <p:cNvSpPr/>
+          <p:nvPr/>
+        </p:nvSpPr>
+        <p:spPr>
+          <a:xfrm>
+            <a:off x="5596128" y="5180076"/>
+            <a:ext cx="2825496" cy="393192"/>
+          </a:xfrm>
+          <a:prstGeom prst="rect">
+            <a:avLst/>
+          </a:prstGeom>
+          <a:noFill/>
+          <a:ln/>
+        </p:spPr>
+        <p:txBody>
+          <a:bodyPr wrap="square" lIns="0" tIns="0" rIns="0" bIns="0" rtlCol="0" anchor="ctr">
+            <a:normAutofit/>
+          </a:bodyPr>
+          <a:lstStyle/>
+          <a:p>
+            <a:pPr algn="ctr" indent="0" marL="0">
+              <a:buNone/>
+            </a:pPr>
+            <a:r>
+              <a:rPr lang="en-US" sz="890" dirty="0">
+                <a:solidFill>
+                  <a:srgbClr val="D9E1EC"/>
+                </a:solidFill>
+                <a:latin typeface="Noto Sans KR" pitchFamily="34" charset="0"/>
+                <a:ea typeface="Noto Sans KR" pitchFamily="34" charset="-122"/>
+                <a:cs typeface="Noto Sans KR" pitchFamily="34" charset="-120"/>
+              </a:rPr>
+              <a:t>597K / 544K</a:t>
+            </a:r>
+            <a:endParaRPr lang="en-US" sz="890" dirty="0"/>
+          </a:p>
+        </p:txBody>
+      </p:sp>
+      <p:sp>
+        <p:nvSpPr>
+          <p:cNvPr id="75" name="Shape 73"/>
+          <p:cNvSpPr/>
+          <p:nvPr/>
+        </p:nvSpPr>
+        <p:spPr>
+          <a:xfrm>
+            <a:off x="8513064" y="5148072"/>
+            <a:ext cx="3008376" cy="457200"/>
+          </a:xfrm>
+          <a:prstGeom prst="rect">
+            <a:avLst/>
+          </a:prstGeom>
+          <a:solidFill>
+            <a:srgbClr val="0D1621"/>
+          </a:solidFill>
+          <a:ln w="8255">
+            <a:solidFill>
+              <a:srgbClr val="33445B"/>
+            </a:solidFill>
+            <a:prstDash val="solid"/>
+          </a:ln>
+        </p:spPr>
+      </p:sp>
+      <p:sp>
+        <p:nvSpPr>
+          <p:cNvPr id="76" name="Text 74"/>
+          <p:cNvSpPr/>
+          <p:nvPr/>
+        </p:nvSpPr>
+        <p:spPr>
+          <a:xfrm>
+            <a:off x="8604504" y="5180076"/>
+            <a:ext cx="2825496" cy="393192"/>
+          </a:xfrm>
+          <a:prstGeom prst="rect">
+            <a:avLst/>
+          </a:prstGeom>
+          <a:noFill/>
+          <a:ln/>
+        </p:spPr>
+        <p:txBody>
+          <a:bodyPr wrap="square" lIns="0" tIns="0" rIns="0" bIns="0" rtlCol="0" anchor="ctr">
+            <a:normAutofit/>
+          </a:bodyPr>
+          <a:lstStyle/>
+          <a:p>
+            <a:pPr algn="ctr" indent="0" marL="0">
+              <a:buNone/>
+            </a:pPr>
+            <a:r>
+              <a:rPr lang="en-US" sz="890" dirty="0">
+                <a:solidFill>
+                  <a:srgbClr val="2DD4BF"/>
+                </a:solidFill>
+                <a:latin typeface="Noto Sans KR" pitchFamily="34" charset="0"/>
+                <a:ea typeface="Noto Sans KR" pitchFamily="34" charset="-122"/>
+                <a:cs typeface="Noto Sans KR" pitchFamily="34" charset="-120"/>
+              </a:rPr>
+              <a:t>5.6M / 3.0M</a:t>
+            </a:r>
+            <a:endParaRPr lang="en-US" sz="890" dirty="0"/>
+          </a:p>
+        </p:txBody>
+      </p:sp>
+      <p:sp>
+        <p:nvSpPr>
+          <p:cNvPr id="77" name="Shape 75"/>
+          <p:cNvSpPr/>
+          <p:nvPr/>
+        </p:nvSpPr>
+        <p:spPr>
+          <a:xfrm>
+            <a:off x="512064" y="5605272"/>
+            <a:ext cx="1984248" cy="457200"/>
+          </a:xfrm>
+          <a:prstGeom prst="rect">
+            <a:avLst/>
+          </a:prstGeom>
+          <a:solidFill>
+            <a:srgbClr val="101925"/>
+          </a:solidFill>
+          <a:ln w="8255">
+            <a:solidFill>
+              <a:srgbClr val="33445B"/>
+            </a:solidFill>
+            <a:prstDash val="solid"/>
+          </a:ln>
+        </p:spPr>
+      </p:sp>
+      <p:sp>
+        <p:nvSpPr>
+          <p:cNvPr id="78" name="Text 76"/>
+          <p:cNvSpPr/>
+          <p:nvPr/>
+        </p:nvSpPr>
+        <p:spPr>
+          <a:xfrm>
+            <a:off x="603504" y="5637276"/>
+            <a:ext cx="1801368" cy="393192"/>
           </a:xfrm>
           <a:prstGeom prst="rect">
             <a:avLst/>
@@ -7003,7 +8921,73 @@
               <a:buNone/>
             </a:pPr>
             <a:r>
-              <a:rPr lang="en-US" sz="960" dirty="0">
+              <a:rPr lang="en-US" sz="900" b="1" dirty="0">
+                <a:solidFill>
+                  <a:srgbClr val="F7F9FC"/>
+                </a:solidFill>
+                <a:latin typeface="Noto Sans KR" pitchFamily="34" charset="0"/>
+                <a:ea typeface="Noto Sans KR" pitchFamily="34" charset="-122"/>
+                <a:cs typeface="Noto Sans KR" pitchFamily="34" charset="-120"/>
+              </a:rPr>
+              <a:t>Disk BW · IOPS · Load</a:t>
+            </a:r>
+            <a:endParaRPr lang="en-US" sz="900" dirty="0"/>
+          </a:p>
+        </p:txBody>
+      </p:sp>
+      <p:sp>
+        <p:nvSpPr>
+          <p:cNvPr id="79" name="Shape 77"/>
+          <p:cNvSpPr/>
+          <p:nvPr/>
+        </p:nvSpPr>
+        <p:spPr>
+          <a:xfrm>
+            <a:off x="2496312" y="5605272"/>
+            <a:ext cx="3008376" cy="457200"/>
+          </a:xfrm>
+          <a:prstGeom prst="rect">
+            <a:avLst/>
+          </a:prstGeom>
+          <a:solidFill>
+            <a:srgbClr val="101925"/>
+          </a:solidFill>
+          <a:ln w="8255">
+            <a:solidFill>
+              <a:srgbClr val="33445B"/>
+            </a:solidFill>
+            <a:prstDash val="solid"/>
+          </a:ln>
+        </p:spPr>
+      </p:sp>
+      <p:sp>
+        <p:nvSpPr>
+          <p:cNvPr id="80" name="Text 78"/>
+          <p:cNvSpPr/>
+          <p:nvPr/>
+        </p:nvSpPr>
+        <p:spPr>
+          <a:xfrm>
+            <a:off x="2587752" y="5637276"/>
+            <a:ext cx="2825496" cy="393192"/>
+          </a:xfrm>
+          <a:prstGeom prst="rect">
+            <a:avLst/>
+          </a:prstGeom>
+          <a:noFill/>
+          <a:ln/>
+        </p:spPr>
+        <p:txBody>
+          <a:bodyPr wrap="square" lIns="0" tIns="0" rIns="0" bIns="0" rtlCol="0" anchor="ctr">
+            <a:normAutofit/>
+          </a:bodyPr>
+          <a:lstStyle/>
+          <a:p>
+            <a:pPr algn="ctr" indent="0" marL="0">
+              <a:buNone/>
+            </a:pPr>
+            <a:r>
+              <a:rPr lang="en-US" sz="890" dirty="0">
                 <a:solidFill>
                   <a:srgbClr val="D9E1EC"/>
                 </a:solidFill>
@@ -7011,16 +8995,16 @@
                 <a:ea typeface="Noto Sans KR" pitchFamily="34" charset="-122"/>
                 <a:cs typeface="Noto Sans KR" pitchFamily="34" charset="-120"/>
               </a:rPr>
-              <a:t>252 usable cores</a:t>
-            </a:r>
-            <a:endParaRPr lang="en-US" sz="960" dirty="0"/>
-          </a:p>
-          <a:p>
-            <a:pPr algn="l" indent="0" marL="0">
-              <a:buNone/>
-            </a:pPr>
-            <a:r>
-              <a:rPr lang="en-US" sz="960" dirty="0">
+              <a:t>2.7 GB/s · 3,900</a:t>
+            </a:r>
+            <a:endParaRPr lang="en-US" sz="890" dirty="0"/>
+          </a:p>
+          <a:p>
+            <a:pPr algn="ctr" indent="0" marL="0">
+              <a:buNone/>
+            </a:pPr>
+            <a:r>
+              <a:rPr lang="en-US" sz="890" dirty="0">
                 <a:solidFill>
                   <a:srgbClr val="D9E1EC"/>
                 </a:solidFill>
@@ -7028,28 +9012,28 @@
                 <a:ea typeface="Noto Sans KR" pitchFamily="34" charset="-122"/>
                 <a:cs typeface="Noto Sans KR" pitchFamily="34" charset="-120"/>
               </a:rPr>
-              <a:t>(OCPU 기반 서비스 세대)</a:t>
-            </a:r>
-            <a:endParaRPr lang="en-US" sz="960" dirty="0"/>
-          </a:p>
-        </p:txBody>
-      </p:sp>
-      <p:sp>
-        <p:nvSpPr>
-          <p:cNvPr id="25" name="Shape 23"/>
-          <p:cNvSpPr/>
-          <p:nvPr/>
-        </p:nvSpPr>
-        <p:spPr>
-          <a:xfrm>
-            <a:off x="6537960" y="2432304"/>
-            <a:ext cx="3703320" cy="539496"/>
-          </a:xfrm>
-          <a:prstGeom prst="rect">
-            <a:avLst/>
-          </a:prstGeom>
-          <a:solidFill>
-            <a:srgbClr val="0D1621"/>
+              <a:t>3.8 TB/hr</a:t>
+            </a:r>
+            <a:endParaRPr lang="en-US" sz="890" dirty="0"/>
+          </a:p>
+        </p:txBody>
+      </p:sp>
+      <p:sp>
+        <p:nvSpPr>
+          <p:cNvPr id="81" name="Shape 79"/>
+          <p:cNvSpPr/>
+          <p:nvPr/>
+        </p:nvSpPr>
+        <p:spPr>
+          <a:xfrm>
+            <a:off x="5504688" y="5605272"/>
+            <a:ext cx="3008376" cy="457200"/>
+          </a:xfrm>
+          <a:prstGeom prst="rect">
+            <a:avLst/>
+          </a:prstGeom>
+          <a:solidFill>
+            <a:srgbClr val="101925"/>
           </a:solidFill>
           <a:ln w="8255">
             <a:solidFill>
@@ -7061,32 +9045,32 @@
       </p:sp>
       <p:sp>
         <p:nvSpPr>
-          <p:cNvPr id="26" name="Text 24"/>
-          <p:cNvSpPr/>
-          <p:nvPr/>
-        </p:nvSpPr>
-        <p:spPr>
-          <a:xfrm>
-            <a:off x="6638544" y="2478024"/>
-            <a:ext cx="3502152" cy="438912"/>
-          </a:xfrm>
-          <a:prstGeom prst="rect">
-            <a:avLst/>
-          </a:prstGeom>
-          <a:noFill/>
-          <a:ln/>
-        </p:spPr>
-        <p:txBody>
-          <a:bodyPr wrap="square" lIns="0" tIns="0" rIns="0" bIns="0" rtlCol="0" anchor="ctr">
-            <a:normAutofit/>
-          </a:bodyPr>
-          <a:lstStyle/>
-          <a:p>
-            <a:pPr algn="l" indent="0" marL="0">
-              <a:buNone/>
-            </a:pPr>
-            <a:r>
-              <a:rPr lang="en-US" sz="960" dirty="0">
+          <p:cNvPr id="82" name="Text 80"/>
+          <p:cNvSpPr/>
+          <p:nvPr/>
+        </p:nvSpPr>
+        <p:spPr>
+          <a:xfrm>
+            <a:off x="5596128" y="5637276"/>
+            <a:ext cx="2825496" cy="393192"/>
+          </a:xfrm>
+          <a:prstGeom prst="rect">
+            <a:avLst/>
+          </a:prstGeom>
+          <a:noFill/>
+          <a:ln/>
+        </p:spPr>
+        <p:txBody>
+          <a:bodyPr wrap="square" lIns="0" tIns="0" rIns="0" bIns="0" rtlCol="0" anchor="ctr">
+            <a:normAutofit/>
+          </a:bodyPr>
+          <a:lstStyle/>
+          <a:p>
+            <a:pPr algn="ctr" indent="0" marL="0">
+              <a:buNone/>
+            </a:pPr>
+            <a:r>
+              <a:rPr lang="en-US" sz="890" dirty="0">
                 <a:solidFill>
                   <a:srgbClr val="D9E1EC"/>
                 </a:solidFill>
@@ -7094,28 +9078,45 @@
                 <a:ea typeface="Noto Sans KR" pitchFamily="34" charset="-122"/>
                 <a:cs typeface="Noto Sans KR" pitchFamily="34" charset="-120"/>
               </a:rPr>
-              <a:t>380 usable cores / 1,520 ECPUs</a:t>
-            </a:r>
-            <a:endParaRPr lang="en-US" sz="960" dirty="0"/>
-          </a:p>
-        </p:txBody>
-      </p:sp>
-      <p:sp>
-        <p:nvSpPr>
-          <p:cNvPr id="27" name="Shape 25"/>
-          <p:cNvSpPr/>
-          <p:nvPr/>
-        </p:nvSpPr>
-        <p:spPr>
-          <a:xfrm>
-            <a:off x="10241280" y="2432304"/>
-            <a:ext cx="1261872" cy="539496"/>
-          </a:xfrm>
-          <a:prstGeom prst="rect">
-            <a:avLst/>
-          </a:prstGeom>
-          <a:solidFill>
-            <a:srgbClr val="0D1621"/>
+              <a:t>2.7 GB/s · 3,900</a:t>
+            </a:r>
+            <a:endParaRPr lang="en-US" sz="890" dirty="0"/>
+          </a:p>
+          <a:p>
+            <a:pPr algn="ctr" indent="0" marL="0">
+              <a:buNone/>
+            </a:pPr>
+            <a:r>
+              <a:rPr lang="en-US" sz="890" dirty="0">
+                <a:solidFill>
+                  <a:srgbClr val="D9E1EC"/>
+                </a:solidFill>
+                <a:latin typeface="Noto Sans KR" pitchFamily="34" charset="0"/>
+                <a:ea typeface="Noto Sans KR" pitchFamily="34" charset="-122"/>
+                <a:cs typeface="Noto Sans KR" pitchFamily="34" charset="-120"/>
+              </a:rPr>
+              <a:t>3.8 TB/hr</a:t>
+            </a:r>
+            <a:endParaRPr lang="en-US" sz="890" dirty="0"/>
+          </a:p>
+        </p:txBody>
+      </p:sp>
+      <p:sp>
+        <p:nvSpPr>
+          <p:cNvPr id="83" name="Shape 81"/>
+          <p:cNvSpPr/>
+          <p:nvPr/>
+        </p:nvSpPr>
+        <p:spPr>
+          <a:xfrm>
+            <a:off x="8513064" y="5605272"/>
+            <a:ext cx="3008376" cy="457200"/>
+          </a:xfrm>
+          <a:prstGeom prst="rect">
+            <a:avLst/>
+          </a:prstGeom>
+          <a:solidFill>
+            <a:srgbClr val="101925"/>
           </a:solidFill>
           <a:ln w="8255">
             <a:solidFill>
@@ -7127,14 +9128,14 @@
       </p:sp>
       <p:sp>
         <p:nvSpPr>
-          <p:cNvPr id="28" name="Text 26"/>
-          <p:cNvSpPr/>
-          <p:nvPr/>
-        </p:nvSpPr>
-        <p:spPr>
-          <a:xfrm>
-            <a:off x="10341864" y="2478024"/>
-            <a:ext cx="1060704" cy="438912"/>
+          <p:cNvPr id="84" name="Text 82"/>
+          <p:cNvSpPr/>
+          <p:nvPr/>
+        </p:nvSpPr>
+        <p:spPr>
+          <a:xfrm>
+            <a:off x="8604504" y="5637276"/>
+            <a:ext cx="2825496" cy="393192"/>
           </a:xfrm>
           <a:prstGeom prst="rect">
             <a:avLst/>
@@ -7152,7 +9153,7 @@
               <a:buNone/>
             </a:pPr>
             <a:r>
-              <a:rPr lang="en-US" sz="920" b="1" dirty="0">
+              <a:rPr lang="en-US" sz="890" dirty="0">
                 <a:solidFill>
                   <a:srgbClr val="2DD4BF"/>
                 </a:solidFill>
@@ -7160,263 +9161,16 @@
                 <a:ea typeface="Noto Sans KR" pitchFamily="34" charset="-122"/>
                 <a:cs typeface="Noto Sans KR" pitchFamily="34" charset="-120"/>
               </a:rPr>
-              <a:t>약 51%↑</a:t>
-            </a:r>
-            <a:endParaRPr lang="en-US" sz="920" dirty="0"/>
-          </a:p>
-        </p:txBody>
-      </p:sp>
-      <p:sp>
-        <p:nvSpPr>
-          <p:cNvPr id="29" name="Shape 27"/>
-          <p:cNvSpPr/>
-          <p:nvPr/>
-        </p:nvSpPr>
-        <p:spPr>
-          <a:xfrm>
-            <a:off x="512064" y="2971800"/>
-            <a:ext cx="2322576" cy="539496"/>
-          </a:xfrm>
-          <a:prstGeom prst="rect">
-            <a:avLst/>
-          </a:prstGeom>
-          <a:solidFill>
-            <a:srgbClr val="101925"/>
-          </a:solidFill>
-          <a:ln w="8255">
-            <a:solidFill>
-              <a:srgbClr val="33445B"/>
-            </a:solidFill>
-            <a:prstDash val="solid"/>
-          </a:ln>
-        </p:spPr>
-      </p:sp>
-      <p:sp>
-        <p:nvSpPr>
-          <p:cNvPr id="30" name="Text 28"/>
-          <p:cNvSpPr/>
-          <p:nvPr/>
-        </p:nvSpPr>
-        <p:spPr>
-          <a:xfrm>
-            <a:off x="612648" y="3017520"/>
-            <a:ext cx="2121408" cy="438912"/>
-          </a:xfrm>
-          <a:prstGeom prst="rect">
-            <a:avLst/>
-          </a:prstGeom>
-          <a:noFill/>
-          <a:ln/>
-        </p:spPr>
-        <p:txBody>
-          <a:bodyPr wrap="square" lIns="0" tIns="0" rIns="0" bIns="0" rtlCol="0" anchor="ctr">
-            <a:normAutofit/>
-          </a:bodyPr>
-          <a:lstStyle/>
-          <a:p>
-            <a:pPr algn="l" indent="0" marL="0">
-              <a:buNone/>
-            </a:pPr>
-            <a:r>
-              <a:rPr lang="en-US" sz="960" b="1" dirty="0">
-                <a:solidFill>
-                  <a:srgbClr val="F7F9FC"/>
-                </a:solidFill>
-                <a:latin typeface="Noto Sans KR" pitchFamily="34" charset="0"/>
-                <a:ea typeface="Noto Sans KR" pitchFamily="34" charset="-122"/>
-                <a:cs typeface="Noto Sans KR" pitchFamily="34" charset="-120"/>
-              </a:rPr>
-              <a:t>VM memory</a:t>
-            </a:r>
-            <a:endParaRPr lang="en-US" sz="960" dirty="0"/>
-          </a:p>
-        </p:txBody>
-      </p:sp>
-      <p:sp>
-        <p:nvSpPr>
-          <p:cNvPr id="31" name="Shape 29"/>
-          <p:cNvSpPr/>
-          <p:nvPr/>
-        </p:nvSpPr>
-        <p:spPr>
-          <a:xfrm>
-            <a:off x="2834640" y="2971800"/>
-            <a:ext cx="3703320" cy="539496"/>
-          </a:xfrm>
-          <a:prstGeom prst="rect">
-            <a:avLst/>
-          </a:prstGeom>
-          <a:solidFill>
-            <a:srgbClr val="101925"/>
-          </a:solidFill>
-          <a:ln w="8255">
-            <a:solidFill>
-              <a:srgbClr val="33445B"/>
-            </a:solidFill>
-            <a:prstDash val="solid"/>
-          </a:ln>
-        </p:spPr>
-      </p:sp>
-      <p:sp>
-        <p:nvSpPr>
-          <p:cNvPr id="32" name="Text 30"/>
-          <p:cNvSpPr/>
-          <p:nvPr/>
-        </p:nvSpPr>
-        <p:spPr>
-          <a:xfrm>
-            <a:off x="2935224" y="3017520"/>
-            <a:ext cx="3502152" cy="438912"/>
-          </a:xfrm>
-          <a:prstGeom prst="rect">
-            <a:avLst/>
-          </a:prstGeom>
-          <a:noFill/>
-          <a:ln/>
-        </p:spPr>
-        <p:txBody>
-          <a:bodyPr wrap="square" lIns="0" tIns="0" rIns="0" bIns="0" rtlCol="0" anchor="ctr">
-            <a:normAutofit/>
-          </a:bodyPr>
-          <a:lstStyle/>
-          <a:p>
-            <a:pPr algn="l" indent="0" marL="0">
-              <a:buNone/>
-            </a:pPr>
-            <a:r>
-              <a:rPr lang="en-US" sz="960" dirty="0">
-                <a:solidFill>
-                  <a:srgbClr val="D9E1EC"/>
-                </a:solidFill>
-                <a:latin typeface="Noto Sans KR" pitchFamily="34" charset="0"/>
-                <a:ea typeface="Noto Sans KR" pitchFamily="34" charset="-122"/>
-                <a:cs typeface="Noto Sans KR" pitchFamily="34" charset="-120"/>
-              </a:rPr>
-              <a:t>2,780 GB available to VMs</a:t>
-            </a:r>
-            <a:endParaRPr lang="en-US" sz="960" dirty="0"/>
-          </a:p>
-        </p:txBody>
-      </p:sp>
-      <p:sp>
-        <p:nvSpPr>
-          <p:cNvPr id="33" name="Shape 31"/>
-          <p:cNvSpPr/>
-          <p:nvPr/>
-        </p:nvSpPr>
-        <p:spPr>
-          <a:xfrm>
-            <a:off x="6537960" y="2971800"/>
-            <a:ext cx="3703320" cy="539496"/>
-          </a:xfrm>
-          <a:prstGeom prst="rect">
-            <a:avLst/>
-          </a:prstGeom>
-          <a:solidFill>
-            <a:srgbClr val="101925"/>
-          </a:solidFill>
-          <a:ln w="8255">
-            <a:solidFill>
-              <a:srgbClr val="33445B"/>
-            </a:solidFill>
-            <a:prstDash val="solid"/>
-          </a:ln>
-        </p:spPr>
-      </p:sp>
-      <p:sp>
-        <p:nvSpPr>
-          <p:cNvPr id="34" name="Text 32"/>
-          <p:cNvSpPr/>
-          <p:nvPr/>
-        </p:nvSpPr>
-        <p:spPr>
-          <a:xfrm>
-            <a:off x="6638544" y="3017520"/>
-            <a:ext cx="3502152" cy="438912"/>
-          </a:xfrm>
-          <a:prstGeom prst="rect">
-            <a:avLst/>
-          </a:prstGeom>
-          <a:noFill/>
-          <a:ln/>
-        </p:spPr>
-        <p:txBody>
-          <a:bodyPr wrap="square" lIns="0" tIns="0" rIns="0" bIns="0" rtlCol="0" anchor="ctr">
-            <a:normAutofit/>
-          </a:bodyPr>
-          <a:lstStyle/>
-          <a:p>
-            <a:pPr algn="l" indent="0" marL="0">
-              <a:buNone/>
-            </a:pPr>
-            <a:r>
-              <a:rPr lang="en-US" sz="960" dirty="0">
-                <a:solidFill>
-                  <a:srgbClr val="D9E1EC"/>
-                </a:solidFill>
-                <a:latin typeface="Noto Sans KR" pitchFamily="34" charset="0"/>
-                <a:ea typeface="Noto Sans KR" pitchFamily="34" charset="-122"/>
-                <a:cs typeface="Noto Sans KR" pitchFamily="34" charset="-120"/>
-              </a:rPr>
-              <a:t>2,780 GB available to VMs</a:t>
-            </a:r>
-            <a:endParaRPr lang="en-US" sz="960" dirty="0"/>
-          </a:p>
-        </p:txBody>
-      </p:sp>
-      <p:sp>
-        <p:nvSpPr>
-          <p:cNvPr id="35" name="Shape 33"/>
-          <p:cNvSpPr/>
-          <p:nvPr/>
-        </p:nvSpPr>
-        <p:spPr>
-          <a:xfrm>
-            <a:off x="10241280" y="2971800"/>
-            <a:ext cx="1261872" cy="539496"/>
-          </a:xfrm>
-          <a:prstGeom prst="rect">
-            <a:avLst/>
-          </a:prstGeom>
-          <a:solidFill>
-            <a:srgbClr val="101925"/>
-          </a:solidFill>
-          <a:ln w="8255">
-            <a:solidFill>
-              <a:srgbClr val="33445B"/>
-            </a:solidFill>
-            <a:prstDash val="solid"/>
-          </a:ln>
-        </p:spPr>
-      </p:sp>
-      <p:sp>
-        <p:nvSpPr>
-          <p:cNvPr id="36" name="Text 34"/>
-          <p:cNvSpPr/>
-          <p:nvPr/>
-        </p:nvSpPr>
-        <p:spPr>
-          <a:xfrm>
-            <a:off x="10341864" y="3017520"/>
-            <a:ext cx="1060704" cy="438912"/>
-          </a:xfrm>
-          <a:prstGeom prst="rect">
-            <a:avLst/>
-          </a:prstGeom>
-          <a:noFill/>
-          <a:ln/>
-        </p:spPr>
-        <p:txBody>
-          <a:bodyPr wrap="square" lIns="0" tIns="0" rIns="0" bIns="0" rtlCol="0" anchor="ctr">
-            <a:normAutofit/>
-          </a:bodyPr>
-          <a:lstStyle/>
+              <a:t>5.4 GB/s · 7,800</a:t>
+            </a:r>
+            <a:endParaRPr lang="en-US" sz="890" dirty="0"/>
+          </a:p>
           <a:p>
             <a:pPr algn="ctr" indent="0" marL="0">
               <a:buNone/>
             </a:pPr>
             <a:r>
-              <a:rPr lang="en-US" sz="920" b="1" dirty="0">
+              <a:rPr lang="en-US" sz="890" dirty="0">
                 <a:solidFill>
                   <a:srgbClr val="2DD4BF"/>
                 </a:solidFill>
@@ -7424,1414 +9178,26 @@
                 <a:ea typeface="Noto Sans KR" pitchFamily="34" charset="-122"/>
                 <a:cs typeface="Noto Sans KR" pitchFamily="34" charset="-120"/>
               </a:rPr>
-              <a:t>동일</a:t>
-            </a:r>
-            <a:endParaRPr lang="en-US" sz="920" dirty="0"/>
-          </a:p>
-        </p:txBody>
-      </p:sp>
-      <p:sp>
-        <p:nvSpPr>
-          <p:cNvPr id="37" name="Shape 35"/>
-          <p:cNvSpPr/>
-          <p:nvPr/>
-        </p:nvSpPr>
-        <p:spPr>
-          <a:xfrm>
-            <a:off x="512064" y="3511296"/>
-            <a:ext cx="2322576" cy="539496"/>
-          </a:xfrm>
-          <a:prstGeom prst="rect">
-            <a:avLst/>
-          </a:prstGeom>
-          <a:solidFill>
-            <a:srgbClr val="0D1621"/>
-          </a:solidFill>
-          <a:ln w="8255">
-            <a:solidFill>
-              <a:srgbClr val="33445B"/>
-            </a:solidFill>
-            <a:prstDash val="solid"/>
-          </a:ln>
-        </p:spPr>
-      </p:sp>
-      <p:sp>
-        <p:nvSpPr>
-          <p:cNvPr id="38" name="Text 36"/>
-          <p:cNvSpPr/>
-          <p:nvPr/>
-        </p:nvSpPr>
-        <p:spPr>
-          <a:xfrm>
-            <a:off x="612648" y="3557016"/>
-            <a:ext cx="2121408" cy="438912"/>
-          </a:xfrm>
-          <a:prstGeom prst="rect">
-            <a:avLst/>
-          </a:prstGeom>
-          <a:noFill/>
-          <a:ln/>
-        </p:spPr>
-        <p:txBody>
-          <a:bodyPr wrap="square" lIns="0" tIns="0" rIns="0" bIns="0" rtlCol="0" anchor="ctr">
-            <a:normAutofit/>
-          </a:bodyPr>
-          <a:lstStyle/>
-          <a:p>
-            <a:pPr algn="l" indent="0" marL="0">
-              <a:buNone/>
-            </a:pPr>
-            <a:r>
-              <a:rPr lang="en-US" sz="960" b="1" dirty="0">
-                <a:solidFill>
-                  <a:srgbClr val="F7F9FC"/>
-                </a:solidFill>
-                <a:latin typeface="Noto Sans KR" pitchFamily="34" charset="0"/>
-                <a:ea typeface="Noto Sans KR" pitchFamily="34" charset="-122"/>
-                <a:cs typeface="Noto Sans KR" pitchFamily="34" charset="-120"/>
-              </a:rPr>
-              <a:t>HC 구성 저장 계층</a:t>
-            </a:r>
-            <a:endParaRPr lang="en-US" sz="960" dirty="0"/>
-          </a:p>
-        </p:txBody>
-      </p:sp>
-      <p:sp>
-        <p:nvSpPr>
-          <p:cNvPr id="39" name="Shape 37"/>
-          <p:cNvSpPr/>
-          <p:nvPr/>
-        </p:nvSpPr>
-        <p:spPr>
-          <a:xfrm>
-            <a:off x="2834640" y="3511296"/>
-            <a:ext cx="3703320" cy="539496"/>
-          </a:xfrm>
-          <a:prstGeom prst="rect">
-            <a:avLst/>
-          </a:prstGeom>
-          <a:solidFill>
-            <a:srgbClr val="0D1621"/>
-          </a:solidFill>
-          <a:ln w="8255">
-            <a:solidFill>
-              <a:srgbClr val="33445B"/>
-            </a:solidFill>
-            <a:prstDash val="solid"/>
-          </a:ln>
-        </p:spPr>
-      </p:sp>
-      <p:sp>
-        <p:nvSpPr>
-          <p:cNvPr id="40" name="Text 38"/>
-          <p:cNvSpPr/>
-          <p:nvPr/>
-        </p:nvSpPr>
-        <p:spPr>
-          <a:xfrm>
-            <a:off x="2935224" y="3557016"/>
-            <a:ext cx="3502152" cy="438912"/>
-          </a:xfrm>
-          <a:prstGeom prst="rect">
-            <a:avLst/>
-          </a:prstGeom>
-          <a:noFill/>
-          <a:ln/>
-        </p:spPr>
-        <p:txBody>
-          <a:bodyPr wrap="square" lIns="0" tIns="0" rIns="0" bIns="0" rtlCol="0" anchor="ctr">
-            <a:normAutofit/>
-          </a:bodyPr>
-          <a:lstStyle/>
-          <a:p>
-            <a:pPr algn="l" indent="0" marL="0">
-              <a:buNone/>
-            </a:pPr>
-            <a:r>
-              <a:rPr lang="en-US" sz="960" dirty="0">
-                <a:solidFill>
-                  <a:srgbClr val="D9E1EC"/>
-                </a:solidFill>
-                <a:latin typeface="Noto Sans KR" pitchFamily="34" charset="0"/>
-                <a:ea typeface="Noto Sans KR" pitchFamily="34" charset="-122"/>
-                <a:cs typeface="Noto Sans KR" pitchFamily="34" charset="-120"/>
-              </a:rPr>
-              <a:t>190 TB usable disk</a:t>
-            </a:r>
-            <a:endParaRPr lang="en-US" sz="960" dirty="0"/>
-          </a:p>
-          <a:p>
-            <a:pPr algn="l" indent="0" marL="0">
-              <a:buNone/>
-            </a:pPr>
-            <a:r>
-              <a:rPr lang="en-US" sz="960" dirty="0">
-                <a:solidFill>
-                  <a:srgbClr val="D9E1EC"/>
-                </a:solidFill>
-                <a:latin typeface="Noto Sans KR" pitchFamily="34" charset="0"/>
-                <a:ea typeface="Noto Sans KR" pitchFamily="34" charset="-122"/>
-                <a:cs typeface="Noto Sans KR" pitchFamily="34" charset="-120"/>
-              </a:rPr>
-              <a:t>76.8 TB flash + 4.5 TB XRMEM</a:t>
-            </a:r>
-            <a:endParaRPr lang="en-US" sz="960" dirty="0"/>
-          </a:p>
-        </p:txBody>
-      </p:sp>
-      <p:sp>
-        <p:nvSpPr>
-          <p:cNvPr id="41" name="Shape 39"/>
-          <p:cNvSpPr/>
-          <p:nvPr/>
-        </p:nvSpPr>
-        <p:spPr>
-          <a:xfrm>
-            <a:off x="6537960" y="3511296"/>
-            <a:ext cx="3703320" cy="539496"/>
-          </a:xfrm>
-          <a:prstGeom prst="rect">
-            <a:avLst/>
-          </a:prstGeom>
-          <a:solidFill>
-            <a:srgbClr val="0D1621"/>
-          </a:solidFill>
-          <a:ln w="8255">
-            <a:solidFill>
-              <a:srgbClr val="33445B"/>
-            </a:solidFill>
-            <a:prstDash val="solid"/>
-          </a:ln>
-        </p:spPr>
-      </p:sp>
-      <p:sp>
-        <p:nvSpPr>
-          <p:cNvPr id="42" name="Text 40"/>
-          <p:cNvSpPr/>
-          <p:nvPr/>
-        </p:nvSpPr>
-        <p:spPr>
-          <a:xfrm>
-            <a:off x="6638544" y="3557016"/>
-            <a:ext cx="3502152" cy="438912"/>
-          </a:xfrm>
-          <a:prstGeom prst="rect">
-            <a:avLst/>
-          </a:prstGeom>
-          <a:noFill/>
-          <a:ln/>
-        </p:spPr>
-        <p:txBody>
-          <a:bodyPr wrap="square" lIns="0" tIns="0" rIns="0" bIns="0" rtlCol="0" anchor="ctr">
-            <a:normAutofit/>
-          </a:bodyPr>
-          <a:lstStyle/>
-          <a:p>
-            <a:pPr algn="l" indent="0" marL="0">
-              <a:buNone/>
-            </a:pPr>
-            <a:r>
-              <a:rPr lang="en-US" sz="960" dirty="0">
-                <a:solidFill>
-                  <a:srgbClr val="D9E1EC"/>
-                </a:solidFill>
-                <a:latin typeface="Noto Sans KR" pitchFamily="34" charset="0"/>
-                <a:ea typeface="Noto Sans KR" pitchFamily="34" charset="-122"/>
-                <a:cs typeface="Noto Sans KR" pitchFamily="34" charset="-120"/>
-              </a:rPr>
-              <a:t>240 TB usable disk</a:t>
-            </a:r>
-            <a:endParaRPr lang="en-US" sz="960" dirty="0"/>
-          </a:p>
-          <a:p>
-            <a:pPr algn="l" indent="0" marL="0">
-              <a:buNone/>
-            </a:pPr>
-            <a:r>
-              <a:rPr lang="en-US" sz="960" dirty="0">
-                <a:solidFill>
-                  <a:srgbClr val="D9E1EC"/>
-                </a:solidFill>
-                <a:latin typeface="Noto Sans KR" pitchFamily="34" charset="0"/>
-                <a:ea typeface="Noto Sans KR" pitchFamily="34" charset="-122"/>
-                <a:cs typeface="Noto Sans KR" pitchFamily="34" charset="-120"/>
-              </a:rPr>
-              <a:t>81.6 TB flash + 3.75 TB XRMEM</a:t>
-            </a:r>
-            <a:endParaRPr lang="en-US" sz="960" dirty="0"/>
-          </a:p>
-        </p:txBody>
-      </p:sp>
-      <p:sp>
-        <p:nvSpPr>
-          <p:cNvPr id="43" name="Shape 41"/>
-          <p:cNvSpPr/>
-          <p:nvPr/>
-        </p:nvSpPr>
-        <p:spPr>
-          <a:xfrm>
-            <a:off x="10241280" y="3511296"/>
-            <a:ext cx="1261872" cy="539496"/>
-          </a:xfrm>
-          <a:prstGeom prst="rect">
-            <a:avLst/>
-          </a:prstGeom>
-          <a:solidFill>
-            <a:srgbClr val="0D1621"/>
-          </a:solidFill>
-          <a:ln w="8255">
-            <a:solidFill>
-              <a:srgbClr val="33445B"/>
-            </a:solidFill>
-            <a:prstDash val="solid"/>
-          </a:ln>
-        </p:spPr>
-      </p:sp>
-      <p:sp>
-        <p:nvSpPr>
-          <p:cNvPr id="44" name="Text 42"/>
-          <p:cNvSpPr/>
-          <p:nvPr/>
-        </p:nvSpPr>
-        <p:spPr>
-          <a:xfrm>
-            <a:off x="10341864" y="3557016"/>
-            <a:ext cx="1060704" cy="438912"/>
-          </a:xfrm>
-          <a:prstGeom prst="rect">
-            <a:avLst/>
-          </a:prstGeom>
-          <a:noFill/>
-          <a:ln/>
-        </p:spPr>
-        <p:txBody>
-          <a:bodyPr wrap="square" lIns="0" tIns="0" rIns="0" bIns="0" rtlCol="0" anchor="ctr">
-            <a:normAutofit/>
-          </a:bodyPr>
-          <a:lstStyle/>
-          <a:p>
-            <a:pPr algn="ctr" indent="0" marL="0">
-              <a:buNone/>
-            </a:pPr>
-            <a:r>
-              <a:rPr lang="en-US" sz="920" b="1" dirty="0">
-                <a:solidFill>
-                  <a:srgbClr val="2DD4BF"/>
-                </a:solidFill>
-                <a:latin typeface="Noto Sans KR" pitchFamily="34" charset="0"/>
-                <a:ea typeface="Noto Sans KR" pitchFamily="34" charset="-122"/>
-                <a:cs typeface="Noto Sans KR" pitchFamily="34" charset="-120"/>
-              </a:rPr>
-              <a:t>Disk 26%↑ · Flash 6%↑</a:t>
-            </a:r>
-            <a:endParaRPr lang="en-US" sz="920" dirty="0"/>
-          </a:p>
-          <a:p>
-            <a:pPr algn="ctr" indent="0" marL="0">
-              <a:buNone/>
-            </a:pPr>
-            <a:r>
-              <a:rPr lang="en-US" sz="920" b="1" dirty="0">
-                <a:solidFill>
-                  <a:srgbClr val="2DD4BF"/>
-                </a:solidFill>
-                <a:latin typeface="Noto Sans KR" pitchFamily="34" charset="0"/>
-                <a:ea typeface="Noto Sans KR" pitchFamily="34" charset="-122"/>
-                <a:cs typeface="Noto Sans KR" pitchFamily="34" charset="-120"/>
-              </a:rPr>
-              <a:t>XRMEM 17%↓</a:t>
-            </a:r>
-            <a:endParaRPr lang="en-US" sz="920" dirty="0"/>
-          </a:p>
-        </p:txBody>
-      </p:sp>
-      <p:sp>
-        <p:nvSpPr>
-          <p:cNvPr id="45" name="Shape 43"/>
-          <p:cNvSpPr/>
-          <p:nvPr/>
-        </p:nvSpPr>
-        <p:spPr>
-          <a:xfrm>
-            <a:off x="512064" y="4050792"/>
-            <a:ext cx="2322576" cy="539496"/>
-          </a:xfrm>
-          <a:prstGeom prst="rect">
-            <a:avLst/>
-          </a:prstGeom>
-          <a:solidFill>
-            <a:srgbClr val="101925"/>
-          </a:solidFill>
-          <a:ln w="8255">
-            <a:solidFill>
-              <a:srgbClr val="33445B"/>
-            </a:solidFill>
-            <a:prstDash val="solid"/>
-          </a:ln>
-        </p:spPr>
-      </p:sp>
-      <p:sp>
-        <p:nvSpPr>
-          <p:cNvPr id="46" name="Text 44"/>
-          <p:cNvSpPr/>
-          <p:nvPr/>
-        </p:nvSpPr>
-        <p:spPr>
-          <a:xfrm>
-            <a:off x="612648" y="4096512"/>
-            <a:ext cx="2121408" cy="438912"/>
-          </a:xfrm>
-          <a:prstGeom prst="rect">
-            <a:avLst/>
-          </a:prstGeom>
-          <a:noFill/>
-          <a:ln/>
-        </p:spPr>
-        <p:txBody>
-          <a:bodyPr wrap="square" lIns="0" tIns="0" rIns="0" bIns="0" rtlCol="0" anchor="ctr">
-            <a:normAutofit/>
-          </a:bodyPr>
-          <a:lstStyle/>
-          <a:p>
-            <a:pPr algn="l" indent="0" marL="0">
-              <a:buNone/>
-            </a:pPr>
-            <a:r>
-              <a:rPr lang="en-US" sz="960" b="1" dirty="0">
-                <a:solidFill>
-                  <a:srgbClr val="F7F9FC"/>
-                </a:solidFill>
-                <a:latin typeface="Noto Sans KR" pitchFamily="34" charset="0"/>
-                <a:ea typeface="Noto Sans KR" pitchFamily="34" charset="-122"/>
-                <a:cs typeface="Noto Sans KR" pitchFamily="34" charset="-120"/>
-              </a:rPr>
-              <a:t>Max DB size · no backup</a:t>
-            </a:r>
-            <a:endParaRPr lang="en-US" sz="960" dirty="0"/>
-          </a:p>
-        </p:txBody>
-      </p:sp>
-      <p:sp>
-        <p:nvSpPr>
-          <p:cNvPr id="47" name="Shape 45"/>
-          <p:cNvSpPr/>
-          <p:nvPr/>
-        </p:nvSpPr>
-        <p:spPr>
-          <a:xfrm>
-            <a:off x="2834640" y="4050792"/>
-            <a:ext cx="3703320" cy="539496"/>
-          </a:xfrm>
-          <a:prstGeom prst="rect">
-            <a:avLst/>
-          </a:prstGeom>
-          <a:solidFill>
-            <a:srgbClr val="101925"/>
-          </a:solidFill>
-          <a:ln w="8255">
-            <a:solidFill>
-              <a:srgbClr val="33445B"/>
-            </a:solidFill>
-            <a:prstDash val="solid"/>
-          </a:ln>
-        </p:spPr>
-      </p:sp>
-      <p:sp>
-        <p:nvSpPr>
-          <p:cNvPr id="48" name="Text 46"/>
-          <p:cNvSpPr/>
-          <p:nvPr/>
-        </p:nvSpPr>
-        <p:spPr>
-          <a:xfrm>
-            <a:off x="2935224" y="4096512"/>
-            <a:ext cx="3502152" cy="438912"/>
-          </a:xfrm>
-          <a:prstGeom prst="rect">
-            <a:avLst/>
-          </a:prstGeom>
-          <a:noFill/>
-          <a:ln/>
-        </p:spPr>
-        <p:txBody>
-          <a:bodyPr wrap="square" lIns="0" tIns="0" rIns="0" bIns="0" rtlCol="0" anchor="ctr">
-            <a:normAutofit/>
-          </a:bodyPr>
-          <a:lstStyle/>
-          <a:p>
-            <a:pPr algn="l" indent="0" marL="0">
-              <a:buNone/>
-            </a:pPr>
-            <a:r>
-              <a:rPr lang="en-US" sz="960" dirty="0">
-                <a:solidFill>
-                  <a:srgbClr val="D9E1EC"/>
-                </a:solidFill>
-                <a:latin typeface="Noto Sans KR" pitchFamily="34" charset="0"/>
-                <a:ea typeface="Noto Sans KR" pitchFamily="34" charset="-122"/>
-                <a:cs typeface="Noto Sans KR" pitchFamily="34" charset="-120"/>
-              </a:rPr>
-              <a:t>152 TB</a:t>
-            </a:r>
-            <a:endParaRPr lang="en-US" sz="960" dirty="0"/>
-          </a:p>
-        </p:txBody>
-      </p:sp>
-      <p:sp>
-        <p:nvSpPr>
-          <p:cNvPr id="49" name="Shape 47"/>
-          <p:cNvSpPr/>
-          <p:nvPr/>
-        </p:nvSpPr>
-        <p:spPr>
-          <a:xfrm>
-            <a:off x="6537960" y="4050792"/>
-            <a:ext cx="3703320" cy="539496"/>
-          </a:xfrm>
-          <a:prstGeom prst="rect">
-            <a:avLst/>
-          </a:prstGeom>
-          <a:solidFill>
-            <a:srgbClr val="101925"/>
-          </a:solidFill>
-          <a:ln w="8255">
-            <a:solidFill>
-              <a:srgbClr val="33445B"/>
-            </a:solidFill>
-            <a:prstDash val="solid"/>
-          </a:ln>
-        </p:spPr>
-      </p:sp>
-      <p:sp>
-        <p:nvSpPr>
-          <p:cNvPr id="50" name="Text 48"/>
-          <p:cNvSpPr/>
-          <p:nvPr/>
-        </p:nvSpPr>
-        <p:spPr>
-          <a:xfrm>
-            <a:off x="6638544" y="4096512"/>
-            <a:ext cx="3502152" cy="438912"/>
-          </a:xfrm>
-          <a:prstGeom prst="rect">
-            <a:avLst/>
-          </a:prstGeom>
-          <a:noFill/>
-          <a:ln/>
-        </p:spPr>
-        <p:txBody>
-          <a:bodyPr wrap="square" lIns="0" tIns="0" rIns="0" bIns="0" rtlCol="0" anchor="ctr">
-            <a:normAutofit/>
-          </a:bodyPr>
-          <a:lstStyle/>
-          <a:p>
-            <a:pPr algn="l" indent="0" marL="0">
-              <a:buNone/>
-            </a:pPr>
-            <a:r>
-              <a:rPr lang="en-US" sz="960" dirty="0">
-                <a:solidFill>
-                  <a:srgbClr val="D9E1EC"/>
-                </a:solidFill>
-                <a:latin typeface="Noto Sans KR" pitchFamily="34" charset="0"/>
-                <a:ea typeface="Noto Sans KR" pitchFamily="34" charset="-122"/>
-                <a:cs typeface="Noto Sans KR" pitchFamily="34" charset="-120"/>
-              </a:rPr>
-              <a:t>192 TB</a:t>
-            </a:r>
-            <a:endParaRPr lang="en-US" sz="960" dirty="0"/>
-          </a:p>
-        </p:txBody>
-      </p:sp>
-      <p:sp>
-        <p:nvSpPr>
-          <p:cNvPr id="51" name="Shape 49"/>
-          <p:cNvSpPr/>
-          <p:nvPr/>
-        </p:nvSpPr>
-        <p:spPr>
-          <a:xfrm>
-            <a:off x="10241280" y="4050792"/>
-            <a:ext cx="1261872" cy="539496"/>
-          </a:xfrm>
-          <a:prstGeom prst="rect">
-            <a:avLst/>
-          </a:prstGeom>
-          <a:solidFill>
-            <a:srgbClr val="101925"/>
-          </a:solidFill>
-          <a:ln w="8255">
-            <a:solidFill>
-              <a:srgbClr val="33445B"/>
-            </a:solidFill>
-            <a:prstDash val="solid"/>
-          </a:ln>
-        </p:spPr>
-      </p:sp>
-      <p:sp>
-        <p:nvSpPr>
-          <p:cNvPr id="52" name="Text 50"/>
-          <p:cNvSpPr/>
-          <p:nvPr/>
-        </p:nvSpPr>
-        <p:spPr>
-          <a:xfrm>
-            <a:off x="10341864" y="4096512"/>
-            <a:ext cx="1060704" cy="438912"/>
-          </a:xfrm>
-          <a:prstGeom prst="rect">
-            <a:avLst/>
-          </a:prstGeom>
-          <a:noFill/>
-          <a:ln/>
-        </p:spPr>
-        <p:txBody>
-          <a:bodyPr wrap="square" lIns="0" tIns="0" rIns="0" bIns="0" rtlCol="0" anchor="ctr">
-            <a:normAutofit/>
-          </a:bodyPr>
-          <a:lstStyle/>
-          <a:p>
-            <a:pPr algn="ctr" indent="0" marL="0">
-              <a:buNone/>
-            </a:pPr>
-            <a:r>
-              <a:rPr lang="en-US" sz="920" b="1" dirty="0">
-                <a:solidFill>
-                  <a:srgbClr val="2DD4BF"/>
-                </a:solidFill>
-                <a:latin typeface="Noto Sans KR" pitchFamily="34" charset="0"/>
-                <a:ea typeface="Noto Sans KR" pitchFamily="34" charset="-122"/>
-                <a:cs typeface="Noto Sans KR" pitchFamily="34" charset="-120"/>
-              </a:rPr>
-              <a:t>약 26%↑</a:t>
-            </a:r>
-            <a:endParaRPr lang="en-US" sz="920" dirty="0"/>
-          </a:p>
-        </p:txBody>
-      </p:sp>
-      <p:sp>
-        <p:nvSpPr>
-          <p:cNvPr id="53" name="Shape 51"/>
-          <p:cNvSpPr/>
-          <p:nvPr/>
-        </p:nvSpPr>
-        <p:spPr>
-          <a:xfrm>
-            <a:off x="512064" y="4590288"/>
-            <a:ext cx="2322576" cy="539496"/>
-          </a:xfrm>
-          <a:prstGeom prst="rect">
-            <a:avLst/>
-          </a:prstGeom>
-          <a:solidFill>
-            <a:srgbClr val="0D1621"/>
-          </a:solidFill>
-          <a:ln w="8255">
-            <a:solidFill>
-              <a:srgbClr val="33445B"/>
-            </a:solidFill>
-            <a:prstDash val="solid"/>
-          </a:ln>
-        </p:spPr>
-      </p:sp>
-      <p:sp>
-        <p:nvSpPr>
-          <p:cNvPr id="54" name="Text 52"/>
-          <p:cNvSpPr/>
-          <p:nvPr/>
-        </p:nvSpPr>
-        <p:spPr>
-          <a:xfrm>
-            <a:off x="612648" y="4636008"/>
-            <a:ext cx="2121408" cy="438912"/>
-          </a:xfrm>
-          <a:prstGeom prst="rect">
-            <a:avLst/>
-          </a:prstGeom>
-          <a:noFill/>
-          <a:ln/>
-        </p:spPr>
-        <p:txBody>
-          <a:bodyPr wrap="square" lIns="0" tIns="0" rIns="0" bIns="0" rtlCol="0" anchor="ctr">
-            <a:normAutofit/>
-          </a:bodyPr>
-          <a:lstStyle/>
-          <a:p>
-            <a:pPr algn="l" indent="0" marL="0">
-              <a:buNone/>
-            </a:pPr>
-            <a:r>
-              <a:rPr lang="en-US" sz="960" b="1" dirty="0">
-                <a:solidFill>
-                  <a:srgbClr val="F7F9FC"/>
-                </a:solidFill>
-                <a:latin typeface="Noto Sans KR" pitchFamily="34" charset="0"/>
-                <a:ea typeface="Noto Sans KR" pitchFamily="34" charset="-122"/>
-                <a:cs typeface="Noto Sans KR" pitchFamily="34" charset="-120"/>
-              </a:rPr>
-              <a:t>Max SQL flash bandwidth</a:t>
-            </a:r>
-            <a:endParaRPr lang="en-US" sz="960" dirty="0"/>
-          </a:p>
-        </p:txBody>
-      </p:sp>
-      <p:sp>
-        <p:nvSpPr>
-          <p:cNvPr id="55" name="Shape 53"/>
-          <p:cNvSpPr/>
-          <p:nvPr/>
-        </p:nvSpPr>
-        <p:spPr>
-          <a:xfrm>
-            <a:off x="2834640" y="4590288"/>
-            <a:ext cx="3703320" cy="539496"/>
-          </a:xfrm>
-          <a:prstGeom prst="rect">
-            <a:avLst/>
-          </a:prstGeom>
-          <a:solidFill>
-            <a:srgbClr val="0D1621"/>
-          </a:solidFill>
-          <a:ln w="8255">
-            <a:solidFill>
-              <a:srgbClr val="33445B"/>
-            </a:solidFill>
-            <a:prstDash val="solid"/>
-          </a:ln>
-        </p:spPr>
-      </p:sp>
-      <p:sp>
-        <p:nvSpPr>
-          <p:cNvPr id="56" name="Text 54"/>
-          <p:cNvSpPr/>
-          <p:nvPr/>
-        </p:nvSpPr>
-        <p:spPr>
-          <a:xfrm>
-            <a:off x="2935224" y="4636008"/>
-            <a:ext cx="3502152" cy="438912"/>
-          </a:xfrm>
-          <a:prstGeom prst="rect">
-            <a:avLst/>
-          </a:prstGeom>
-          <a:noFill/>
-          <a:ln/>
-        </p:spPr>
-        <p:txBody>
-          <a:bodyPr wrap="square" lIns="0" tIns="0" rIns="0" bIns="0" rtlCol="0" anchor="ctr">
-            <a:normAutofit/>
-          </a:bodyPr>
-          <a:lstStyle/>
-          <a:p>
-            <a:pPr algn="l" indent="0" marL="0">
-              <a:buNone/>
-            </a:pPr>
-            <a:r>
-              <a:rPr lang="en-US" sz="960" dirty="0">
-                <a:solidFill>
-                  <a:srgbClr val="D9E1EC"/>
-                </a:solidFill>
-                <a:latin typeface="Noto Sans KR" pitchFamily="34" charset="0"/>
-                <a:ea typeface="Noto Sans KR" pitchFamily="34" charset="-122"/>
-                <a:cs typeface="Noto Sans KR" pitchFamily="34" charset="-120"/>
-              </a:rPr>
-              <a:t>135 GB/s</a:t>
-            </a:r>
-            <a:endParaRPr lang="en-US" sz="960" dirty="0"/>
-          </a:p>
-        </p:txBody>
-      </p:sp>
-      <p:sp>
-        <p:nvSpPr>
-          <p:cNvPr id="57" name="Shape 55"/>
-          <p:cNvSpPr/>
-          <p:nvPr/>
-        </p:nvSpPr>
-        <p:spPr>
-          <a:xfrm>
-            <a:off x="6537960" y="4590288"/>
-            <a:ext cx="3703320" cy="539496"/>
-          </a:xfrm>
-          <a:prstGeom prst="rect">
-            <a:avLst/>
-          </a:prstGeom>
-          <a:solidFill>
-            <a:srgbClr val="0D1621"/>
-          </a:solidFill>
-          <a:ln w="8255">
-            <a:solidFill>
-              <a:srgbClr val="33445B"/>
-            </a:solidFill>
-            <a:prstDash val="solid"/>
-          </a:ln>
-        </p:spPr>
-      </p:sp>
-      <p:sp>
-        <p:nvSpPr>
-          <p:cNvPr id="58" name="Text 56"/>
-          <p:cNvSpPr/>
-          <p:nvPr/>
-        </p:nvSpPr>
-        <p:spPr>
-          <a:xfrm>
-            <a:off x="6638544" y="4636008"/>
-            <a:ext cx="3502152" cy="438912"/>
-          </a:xfrm>
-          <a:prstGeom prst="rect">
-            <a:avLst/>
-          </a:prstGeom>
-          <a:noFill/>
-          <a:ln/>
-        </p:spPr>
-        <p:txBody>
-          <a:bodyPr wrap="square" lIns="0" tIns="0" rIns="0" bIns="0" rtlCol="0" anchor="ctr">
-            <a:normAutofit/>
-          </a:bodyPr>
-          <a:lstStyle/>
-          <a:p>
-            <a:pPr algn="l" indent="0" marL="0">
-              <a:buNone/>
-            </a:pPr>
-            <a:r>
-              <a:rPr lang="en-US" sz="960" dirty="0">
-                <a:solidFill>
-                  <a:srgbClr val="D9E1EC"/>
-                </a:solidFill>
-                <a:latin typeface="Noto Sans KR" pitchFamily="34" charset="0"/>
-                <a:ea typeface="Noto Sans KR" pitchFamily="34" charset="-122"/>
-                <a:cs typeface="Noto Sans KR" pitchFamily="34" charset="-120"/>
-              </a:rPr>
-              <a:t>300 GB/s</a:t>
-            </a:r>
-            <a:endParaRPr lang="en-US" sz="960" dirty="0"/>
-          </a:p>
-        </p:txBody>
-      </p:sp>
-      <p:sp>
-        <p:nvSpPr>
-          <p:cNvPr id="59" name="Shape 57"/>
-          <p:cNvSpPr/>
-          <p:nvPr/>
-        </p:nvSpPr>
-        <p:spPr>
-          <a:xfrm>
-            <a:off x="10241280" y="4590288"/>
-            <a:ext cx="1261872" cy="539496"/>
-          </a:xfrm>
-          <a:prstGeom prst="rect">
-            <a:avLst/>
-          </a:prstGeom>
-          <a:solidFill>
-            <a:srgbClr val="0D1621"/>
-          </a:solidFill>
-          <a:ln w="8255">
-            <a:solidFill>
-              <a:srgbClr val="33445B"/>
-            </a:solidFill>
-            <a:prstDash val="solid"/>
-          </a:ln>
-        </p:spPr>
-      </p:sp>
-      <p:sp>
-        <p:nvSpPr>
-          <p:cNvPr id="60" name="Text 58"/>
-          <p:cNvSpPr/>
-          <p:nvPr/>
-        </p:nvSpPr>
-        <p:spPr>
-          <a:xfrm>
-            <a:off x="10341864" y="4636008"/>
-            <a:ext cx="1060704" cy="438912"/>
-          </a:xfrm>
-          <a:prstGeom prst="rect">
-            <a:avLst/>
-          </a:prstGeom>
-          <a:noFill/>
-          <a:ln/>
-        </p:spPr>
-        <p:txBody>
-          <a:bodyPr wrap="square" lIns="0" tIns="0" rIns="0" bIns="0" rtlCol="0" anchor="ctr">
-            <a:normAutofit/>
-          </a:bodyPr>
-          <a:lstStyle/>
-          <a:p>
-            <a:pPr algn="ctr" indent="0" marL="0">
-              <a:buNone/>
-            </a:pPr>
-            <a:r>
-              <a:rPr lang="en-US" sz="920" b="1" dirty="0">
-                <a:solidFill>
-                  <a:srgbClr val="2DD4BF"/>
-                </a:solidFill>
-                <a:latin typeface="Noto Sans KR" pitchFamily="34" charset="0"/>
-                <a:ea typeface="Noto Sans KR" pitchFamily="34" charset="-122"/>
-                <a:cs typeface="Noto Sans KR" pitchFamily="34" charset="-120"/>
-              </a:rPr>
-              <a:t>약 122%↑</a:t>
-            </a:r>
-            <a:endParaRPr lang="en-US" sz="920" dirty="0"/>
-          </a:p>
-        </p:txBody>
-      </p:sp>
-      <p:sp>
-        <p:nvSpPr>
-          <p:cNvPr id="61" name="Shape 59"/>
-          <p:cNvSpPr/>
-          <p:nvPr/>
-        </p:nvSpPr>
-        <p:spPr>
-          <a:xfrm>
-            <a:off x="512064" y="5129784"/>
-            <a:ext cx="2322576" cy="539496"/>
-          </a:xfrm>
-          <a:prstGeom prst="rect">
-            <a:avLst/>
-          </a:prstGeom>
-          <a:solidFill>
-            <a:srgbClr val="101925"/>
-          </a:solidFill>
-          <a:ln w="8255">
-            <a:solidFill>
-              <a:srgbClr val="33445B"/>
-            </a:solidFill>
-            <a:prstDash val="solid"/>
-          </a:ln>
-        </p:spPr>
-      </p:sp>
-      <p:sp>
-        <p:nvSpPr>
-          <p:cNvPr id="62" name="Text 60"/>
-          <p:cNvSpPr/>
-          <p:nvPr/>
-        </p:nvSpPr>
-        <p:spPr>
-          <a:xfrm>
-            <a:off x="612648" y="5175504"/>
-            <a:ext cx="2121408" cy="438912"/>
-          </a:xfrm>
-          <a:prstGeom prst="rect">
-            <a:avLst/>
-          </a:prstGeom>
-          <a:noFill/>
-          <a:ln/>
-        </p:spPr>
-        <p:txBody>
-          <a:bodyPr wrap="square" lIns="0" tIns="0" rIns="0" bIns="0" rtlCol="0" anchor="ctr">
-            <a:normAutofit/>
-          </a:bodyPr>
-          <a:lstStyle/>
-          <a:p>
-            <a:pPr algn="l" indent="0" marL="0">
-              <a:buNone/>
-            </a:pPr>
-            <a:r>
-              <a:rPr lang="en-US" sz="960" b="1" dirty="0">
-                <a:solidFill>
-                  <a:srgbClr val="F7F9FC"/>
-                </a:solidFill>
-                <a:latin typeface="Noto Sans KR" pitchFamily="34" charset="0"/>
-                <a:ea typeface="Noto Sans KR" pitchFamily="34" charset="-122"/>
-                <a:cs typeface="Noto Sans KR" pitchFamily="34" charset="-120"/>
-              </a:rPr>
-              <a:t>Max SQL Read / Write IOPS</a:t>
-            </a:r>
-            <a:endParaRPr lang="en-US" sz="960" dirty="0"/>
-          </a:p>
-        </p:txBody>
-      </p:sp>
-      <p:sp>
-        <p:nvSpPr>
-          <p:cNvPr id="63" name="Shape 61"/>
-          <p:cNvSpPr/>
-          <p:nvPr/>
-        </p:nvSpPr>
-        <p:spPr>
-          <a:xfrm>
-            <a:off x="2834640" y="5129784"/>
-            <a:ext cx="3703320" cy="539496"/>
-          </a:xfrm>
-          <a:prstGeom prst="rect">
-            <a:avLst/>
-          </a:prstGeom>
-          <a:solidFill>
-            <a:srgbClr val="101925"/>
-          </a:solidFill>
-          <a:ln w="8255">
-            <a:solidFill>
-              <a:srgbClr val="33445B"/>
-            </a:solidFill>
-            <a:prstDash val="solid"/>
-          </a:ln>
-        </p:spPr>
-      </p:sp>
-      <p:sp>
-        <p:nvSpPr>
-          <p:cNvPr id="64" name="Text 62"/>
-          <p:cNvSpPr/>
-          <p:nvPr/>
-        </p:nvSpPr>
-        <p:spPr>
-          <a:xfrm>
-            <a:off x="2935224" y="5175504"/>
-            <a:ext cx="3502152" cy="438912"/>
-          </a:xfrm>
-          <a:prstGeom prst="rect">
-            <a:avLst/>
-          </a:prstGeom>
-          <a:noFill/>
-          <a:ln/>
-        </p:spPr>
-        <p:txBody>
-          <a:bodyPr wrap="square" lIns="0" tIns="0" rIns="0" bIns="0" rtlCol="0" anchor="ctr">
-            <a:normAutofit/>
-          </a:bodyPr>
-          <a:lstStyle/>
-          <a:p>
-            <a:pPr algn="l" indent="0" marL="0">
-              <a:buNone/>
-            </a:pPr>
-            <a:r>
-              <a:rPr lang="en-US" sz="960" dirty="0">
-                <a:solidFill>
-                  <a:srgbClr val="D9E1EC"/>
-                </a:solidFill>
-                <a:latin typeface="Noto Sans KR" pitchFamily="34" charset="0"/>
-                <a:ea typeface="Noto Sans KR" pitchFamily="34" charset="-122"/>
-                <a:cs typeface="Noto Sans KR" pitchFamily="34" charset="-120"/>
-              </a:rPr>
-              <a:t>5.6M / 1.842M</a:t>
-            </a:r>
-            <a:endParaRPr lang="en-US" sz="960" dirty="0"/>
-          </a:p>
-        </p:txBody>
-      </p:sp>
-      <p:sp>
-        <p:nvSpPr>
-          <p:cNvPr id="65" name="Shape 63"/>
-          <p:cNvSpPr/>
-          <p:nvPr/>
-        </p:nvSpPr>
-        <p:spPr>
-          <a:xfrm>
-            <a:off x="6537960" y="5129784"/>
-            <a:ext cx="3703320" cy="539496"/>
-          </a:xfrm>
-          <a:prstGeom prst="rect">
-            <a:avLst/>
-          </a:prstGeom>
-          <a:solidFill>
-            <a:srgbClr val="101925"/>
-          </a:solidFill>
-          <a:ln w="8255">
-            <a:solidFill>
-              <a:srgbClr val="33445B"/>
-            </a:solidFill>
-            <a:prstDash val="solid"/>
-          </a:ln>
-        </p:spPr>
-      </p:sp>
-      <p:sp>
-        <p:nvSpPr>
-          <p:cNvPr id="66" name="Text 64"/>
-          <p:cNvSpPr/>
-          <p:nvPr/>
-        </p:nvSpPr>
-        <p:spPr>
-          <a:xfrm>
-            <a:off x="6638544" y="5175504"/>
-            <a:ext cx="3502152" cy="438912"/>
-          </a:xfrm>
-          <a:prstGeom prst="rect">
-            <a:avLst/>
-          </a:prstGeom>
-          <a:noFill/>
-          <a:ln/>
-        </p:spPr>
-        <p:txBody>
-          <a:bodyPr wrap="square" lIns="0" tIns="0" rIns="0" bIns="0" rtlCol="0" anchor="ctr">
-            <a:normAutofit/>
-          </a:bodyPr>
-          <a:lstStyle/>
-          <a:p>
-            <a:pPr algn="l" indent="0" marL="0">
-              <a:buNone/>
-            </a:pPr>
-            <a:r>
-              <a:rPr lang="en-US" sz="960" dirty="0">
-                <a:solidFill>
-                  <a:srgbClr val="D9E1EC"/>
-                </a:solidFill>
-                <a:latin typeface="Noto Sans KR" pitchFamily="34" charset="0"/>
-                <a:ea typeface="Noto Sans KR" pitchFamily="34" charset="-122"/>
-                <a:cs typeface="Noto Sans KR" pitchFamily="34" charset="-120"/>
-              </a:rPr>
-              <a:t>5.6M / 3.0M</a:t>
-            </a:r>
-            <a:endParaRPr lang="en-US" sz="960" dirty="0"/>
-          </a:p>
-        </p:txBody>
-      </p:sp>
-      <p:sp>
-        <p:nvSpPr>
-          <p:cNvPr id="67" name="Shape 65"/>
-          <p:cNvSpPr/>
-          <p:nvPr/>
-        </p:nvSpPr>
-        <p:spPr>
-          <a:xfrm>
-            <a:off x="10241280" y="5129784"/>
-            <a:ext cx="1261872" cy="539496"/>
-          </a:xfrm>
-          <a:prstGeom prst="rect">
-            <a:avLst/>
-          </a:prstGeom>
-          <a:solidFill>
-            <a:srgbClr val="101925"/>
-          </a:solidFill>
-          <a:ln w="8255">
-            <a:solidFill>
-              <a:srgbClr val="33445B"/>
-            </a:solidFill>
-            <a:prstDash val="solid"/>
-          </a:ln>
-        </p:spPr>
-      </p:sp>
-      <p:sp>
-        <p:nvSpPr>
-          <p:cNvPr id="68" name="Text 66"/>
-          <p:cNvSpPr/>
-          <p:nvPr/>
-        </p:nvSpPr>
-        <p:spPr>
-          <a:xfrm>
-            <a:off x="10341864" y="5175504"/>
-            <a:ext cx="1060704" cy="438912"/>
-          </a:xfrm>
-          <a:prstGeom prst="rect">
-            <a:avLst/>
-          </a:prstGeom>
-          <a:noFill/>
-          <a:ln/>
-        </p:spPr>
-        <p:txBody>
-          <a:bodyPr wrap="square" lIns="0" tIns="0" rIns="0" bIns="0" rtlCol="0" anchor="ctr">
-            <a:normAutofit/>
-          </a:bodyPr>
-          <a:lstStyle/>
-          <a:p>
-            <a:pPr algn="ctr" indent="0" marL="0">
-              <a:buNone/>
-            </a:pPr>
-            <a:r>
-              <a:rPr lang="en-US" sz="920" b="1" dirty="0">
-                <a:solidFill>
-                  <a:srgbClr val="2DD4BF"/>
-                </a:solidFill>
-                <a:latin typeface="Noto Sans KR" pitchFamily="34" charset="0"/>
-                <a:ea typeface="Noto Sans KR" pitchFamily="34" charset="-122"/>
-                <a:cs typeface="Noto Sans KR" pitchFamily="34" charset="-120"/>
-              </a:rPr>
-              <a:t>읽기 동일</a:t>
-            </a:r>
-            <a:endParaRPr lang="en-US" sz="920" dirty="0"/>
-          </a:p>
-          <a:p>
-            <a:pPr algn="ctr" indent="0" marL="0">
-              <a:buNone/>
-            </a:pPr>
-            <a:r>
-              <a:rPr lang="en-US" sz="920" b="1" dirty="0">
-                <a:solidFill>
-                  <a:srgbClr val="2DD4BF"/>
-                </a:solidFill>
-                <a:latin typeface="Noto Sans KR" pitchFamily="34" charset="0"/>
-                <a:ea typeface="Noto Sans KR" pitchFamily="34" charset="-122"/>
-                <a:cs typeface="Noto Sans KR" pitchFamily="34" charset="-120"/>
-              </a:rPr>
-              <a:t>쓰기 약 63%↑</a:t>
-            </a:r>
-            <a:endParaRPr lang="en-US" sz="920" dirty="0"/>
-          </a:p>
-        </p:txBody>
-      </p:sp>
-      <p:sp>
-        <p:nvSpPr>
-          <p:cNvPr id="69" name="Shape 67"/>
-          <p:cNvSpPr/>
-          <p:nvPr/>
-        </p:nvSpPr>
-        <p:spPr>
-          <a:xfrm>
-            <a:off x="512064" y="5669280"/>
-            <a:ext cx="2322576" cy="539496"/>
-          </a:xfrm>
-          <a:prstGeom prst="rect">
-            <a:avLst/>
-          </a:prstGeom>
-          <a:solidFill>
-            <a:srgbClr val="0D1621"/>
-          </a:solidFill>
-          <a:ln w="8255">
-            <a:solidFill>
-              <a:srgbClr val="33445B"/>
-            </a:solidFill>
-            <a:prstDash val="solid"/>
-          </a:ln>
-        </p:spPr>
-      </p:sp>
-      <p:sp>
-        <p:nvSpPr>
-          <p:cNvPr id="70" name="Text 68"/>
-          <p:cNvSpPr/>
-          <p:nvPr/>
-        </p:nvSpPr>
-        <p:spPr>
-          <a:xfrm>
-            <a:off x="612648" y="5715000"/>
-            <a:ext cx="2121408" cy="438912"/>
-          </a:xfrm>
-          <a:prstGeom prst="rect">
-            <a:avLst/>
-          </a:prstGeom>
-          <a:noFill/>
-          <a:ln/>
-        </p:spPr>
-        <p:txBody>
-          <a:bodyPr wrap="square" lIns="0" tIns="0" rIns="0" bIns="0" rtlCol="0" anchor="ctr">
-            <a:normAutofit/>
-          </a:bodyPr>
-          <a:lstStyle/>
-          <a:p>
-            <a:pPr algn="l" indent="0" marL="0">
-              <a:buNone/>
-            </a:pPr>
-            <a:r>
-              <a:rPr lang="en-US" sz="960" b="1" dirty="0">
-                <a:solidFill>
-                  <a:srgbClr val="F7F9FC"/>
-                </a:solidFill>
-                <a:latin typeface="Noto Sans KR" pitchFamily="34" charset="0"/>
-                <a:ea typeface="Noto Sans KR" pitchFamily="34" charset="-122"/>
-                <a:cs typeface="Noto Sans KR" pitchFamily="34" charset="-120"/>
-              </a:rPr>
-              <a:t>VM Cluster / Network</a:t>
-            </a:r>
-            <a:endParaRPr lang="en-US" sz="960" dirty="0"/>
-          </a:p>
-        </p:txBody>
-      </p:sp>
-      <p:sp>
-        <p:nvSpPr>
-          <p:cNvPr id="71" name="Shape 69"/>
-          <p:cNvSpPr/>
-          <p:nvPr/>
-        </p:nvSpPr>
-        <p:spPr>
-          <a:xfrm>
-            <a:off x="2834640" y="5669280"/>
-            <a:ext cx="3703320" cy="539496"/>
-          </a:xfrm>
-          <a:prstGeom prst="rect">
-            <a:avLst/>
-          </a:prstGeom>
-          <a:solidFill>
-            <a:srgbClr val="0D1621"/>
-          </a:solidFill>
-          <a:ln w="8255">
-            <a:solidFill>
-              <a:srgbClr val="33445B"/>
-            </a:solidFill>
-            <a:prstDash val="solid"/>
-          </a:ln>
-        </p:spPr>
-      </p:sp>
-      <p:sp>
-        <p:nvSpPr>
-          <p:cNvPr id="72" name="Text 70"/>
-          <p:cNvSpPr/>
-          <p:nvPr/>
-        </p:nvSpPr>
-        <p:spPr>
-          <a:xfrm>
-            <a:off x="2935224" y="5715000"/>
-            <a:ext cx="3502152" cy="438912"/>
-          </a:xfrm>
-          <a:prstGeom prst="rect">
-            <a:avLst/>
-          </a:prstGeom>
-          <a:noFill/>
-          <a:ln/>
-        </p:spPr>
-        <p:txBody>
-          <a:bodyPr wrap="square" lIns="0" tIns="0" rIns="0" bIns="0" rtlCol="0" anchor="ctr">
-            <a:normAutofit/>
-          </a:bodyPr>
-          <a:lstStyle/>
-          <a:p>
-            <a:pPr algn="l" indent="0" marL="0">
-              <a:buNone/>
-            </a:pPr>
-            <a:r>
-              <a:rPr lang="en-US" sz="960" dirty="0">
-                <a:solidFill>
-                  <a:srgbClr val="D9E1EC"/>
-                </a:solidFill>
-                <a:latin typeface="Noto Sans KR" pitchFamily="34" charset="0"/>
-                <a:ea typeface="Noto Sans KR" pitchFamily="34" charset="-122"/>
-                <a:cs typeface="Noto Sans KR" pitchFamily="34" charset="-120"/>
-              </a:rPr>
-              <a:t>최대 8 · 50 GbE</a:t>
-            </a:r>
-            <a:endParaRPr lang="en-US" sz="960" dirty="0"/>
-          </a:p>
-        </p:txBody>
-      </p:sp>
-      <p:sp>
-        <p:nvSpPr>
-          <p:cNvPr id="73" name="Shape 71"/>
-          <p:cNvSpPr/>
-          <p:nvPr/>
-        </p:nvSpPr>
-        <p:spPr>
-          <a:xfrm>
-            <a:off x="6537960" y="5669280"/>
-            <a:ext cx="3703320" cy="539496"/>
-          </a:xfrm>
-          <a:prstGeom prst="rect">
-            <a:avLst/>
-          </a:prstGeom>
-          <a:solidFill>
-            <a:srgbClr val="0D1621"/>
-          </a:solidFill>
-          <a:ln w="8255">
-            <a:solidFill>
-              <a:srgbClr val="33445B"/>
-            </a:solidFill>
-            <a:prstDash val="solid"/>
-          </a:ln>
-        </p:spPr>
-      </p:sp>
-      <p:sp>
-        <p:nvSpPr>
-          <p:cNvPr id="74" name="Text 72"/>
-          <p:cNvSpPr/>
-          <p:nvPr/>
-        </p:nvSpPr>
-        <p:spPr>
-          <a:xfrm>
-            <a:off x="6638544" y="5715000"/>
-            <a:ext cx="3502152" cy="438912"/>
-          </a:xfrm>
-          <a:prstGeom prst="rect">
-            <a:avLst/>
-          </a:prstGeom>
-          <a:noFill/>
-          <a:ln/>
-        </p:spPr>
-        <p:txBody>
-          <a:bodyPr wrap="square" lIns="0" tIns="0" rIns="0" bIns="0" rtlCol="0" anchor="ctr">
-            <a:normAutofit/>
-          </a:bodyPr>
-          <a:lstStyle/>
-          <a:p>
-            <a:pPr algn="l" indent="0" marL="0">
-              <a:buNone/>
-            </a:pPr>
-            <a:r>
-              <a:rPr lang="en-US" sz="960" dirty="0">
-                <a:solidFill>
-                  <a:srgbClr val="D9E1EC"/>
-                </a:solidFill>
-                <a:latin typeface="Noto Sans KR" pitchFamily="34" charset="0"/>
-                <a:ea typeface="Noto Sans KR" pitchFamily="34" charset="-122"/>
-                <a:cs typeface="Noto Sans KR" pitchFamily="34" charset="-120"/>
-              </a:rPr>
-              <a:t>최대 12 · 25/100 GbE</a:t>
-            </a:r>
-            <a:endParaRPr lang="en-US" sz="960" dirty="0"/>
-          </a:p>
-        </p:txBody>
-      </p:sp>
-      <p:sp>
-        <p:nvSpPr>
-          <p:cNvPr id="75" name="Shape 73"/>
-          <p:cNvSpPr/>
-          <p:nvPr/>
-        </p:nvSpPr>
-        <p:spPr>
-          <a:xfrm>
-            <a:off x="10241280" y="5669280"/>
-            <a:ext cx="1261872" cy="539496"/>
-          </a:xfrm>
-          <a:prstGeom prst="rect">
-            <a:avLst/>
-          </a:prstGeom>
-          <a:solidFill>
-            <a:srgbClr val="0D1621"/>
-          </a:solidFill>
-          <a:ln w="8255">
-            <a:solidFill>
-              <a:srgbClr val="33445B"/>
-            </a:solidFill>
-            <a:prstDash val="solid"/>
-          </a:ln>
-        </p:spPr>
-      </p:sp>
-      <p:sp>
-        <p:nvSpPr>
-          <p:cNvPr id="76" name="Text 74"/>
-          <p:cNvSpPr/>
-          <p:nvPr/>
-        </p:nvSpPr>
-        <p:spPr>
-          <a:xfrm>
-            <a:off x="10341864" y="5715000"/>
-            <a:ext cx="1060704" cy="438912"/>
-          </a:xfrm>
-          <a:prstGeom prst="rect">
-            <a:avLst/>
-          </a:prstGeom>
-          <a:noFill/>
-          <a:ln/>
-        </p:spPr>
-        <p:txBody>
-          <a:bodyPr wrap="square" lIns="0" tIns="0" rIns="0" bIns="0" rtlCol="0" anchor="ctr">
-            <a:normAutofit/>
-          </a:bodyPr>
-          <a:lstStyle/>
-          <a:p>
-            <a:pPr algn="ctr" indent="0" marL="0">
-              <a:buNone/>
-            </a:pPr>
-            <a:r>
-              <a:rPr lang="en-US" sz="920" b="1" dirty="0">
-                <a:solidFill>
-                  <a:srgbClr val="F6B44B"/>
-                </a:solidFill>
-                <a:latin typeface="Noto Sans KR" pitchFamily="34" charset="0"/>
-                <a:ea typeface="Noto Sans KR" pitchFamily="34" charset="-122"/>
-                <a:cs typeface="Noto Sans KR" pitchFamily="34" charset="-120"/>
-              </a:rPr>
-              <a:t>확장</a:t>
-            </a:r>
-            <a:endParaRPr lang="en-US" sz="920" dirty="0"/>
-          </a:p>
-        </p:txBody>
-      </p:sp>
-      <p:sp>
-        <p:nvSpPr>
-          <p:cNvPr id="77" name="Shape 75"/>
-          <p:cNvSpPr/>
-          <p:nvPr/>
-        </p:nvSpPr>
-        <p:spPr>
-          <a:xfrm>
-            <a:off x="512064" y="6263640"/>
-            <a:ext cx="11173968" cy="164592"/>
+              <a:t>7.5 TB/hr</a:t>
+            </a:r>
+            <a:endParaRPr lang="en-US" sz="890" dirty="0"/>
+          </a:p>
+        </p:txBody>
+      </p:sp>
+      <p:sp>
+        <p:nvSpPr>
+          <p:cNvPr id="85" name="Shape 83"/>
+          <p:cNvSpPr/>
+          <p:nvPr/>
+        </p:nvSpPr>
+        <p:spPr>
+          <a:xfrm>
+            <a:off x="512064" y="6108192"/>
+            <a:ext cx="11009376" cy="246888"/>
           </a:xfrm>
           <a:prstGeom prst="roundRect">
             <a:avLst>
-              <a:gd name="adj" fmla="val 11111"/>
+              <a:gd name="adj" fmla="val 7407"/>
             </a:avLst>
           </a:prstGeom>
           <a:solidFill>
@@ -8854,14 +9220,14 @@
       </p:sp>
       <p:sp>
         <p:nvSpPr>
-          <p:cNvPr id="78" name="Text 76"/>
-          <p:cNvSpPr/>
-          <p:nvPr/>
-        </p:nvSpPr>
-        <p:spPr>
-          <a:xfrm>
-            <a:off x="621792" y="6254496"/>
-            <a:ext cx="10881360" cy="155448"/>
+          <p:cNvPr id="86" name="Text 84"/>
+          <p:cNvSpPr/>
+          <p:nvPr/>
+        </p:nvSpPr>
+        <p:spPr>
+          <a:xfrm>
+            <a:off x="621792" y="6144768"/>
+            <a:ext cx="10789920" cy="164592"/>
           </a:xfrm>
           <a:prstGeom prst="rect">
             <a:avLst/>
@@ -8887,7 +9253,7 @@
                 <a:ea typeface="Noto Sans KR" pitchFamily="34" charset="-122"/>
                 <a:cs typeface="Noto Sans KR" pitchFamily="34" charset="-120"/>
               </a:rPr>
-              <a:t>ExaCC X11M에는 공식 Quarter Rack shape가 없음 · 본 장표는 2 Standard DB + 3 HC w/XRMEM Elastic 구성 비교 · OCPU/ECPU 직접 등가 비교 불가</a:t>
+              <a:t>¹ ASM High Redundancy usable · X9M physical core와 ExaC@C usable core/ECPU는 직접 등가 비교 불가 · X11M에는 공식 Quarter Rack shape가 없음</a:t>
             </a:r>
             <a:endParaRPr lang="en-US" sz="810" dirty="0"/>
           </a:p>
@@ -8895,7 +9261,7 @@
       </p:sp>
       <p:sp>
         <p:nvSpPr>
-          <p:cNvPr id="79" name="Shape 77"/>
+          <p:cNvPr id="87" name="Shape 85"/>
           <p:cNvSpPr/>
           <p:nvPr/>
         </p:nvSpPr>
@@ -8918,7 +9284,7 @@
       </p:sp>
       <p:sp>
         <p:nvSpPr>
-          <p:cNvPr id="80" name="Text 78"/>
+          <p:cNvPr id="88" name="Text 86"/>
           <p:cNvSpPr/>
           <p:nvPr/>
         </p:nvSpPr>
@@ -8959,7 +9325,7 @@
       </p:sp>
       <p:sp>
         <p:nvSpPr>
-          <p:cNvPr id="81" name="Text 79"/>
+          <p:cNvPr id="89" name="Text 87"/>
           <p:cNvSpPr/>
           <p:nvPr/>
         </p:nvSpPr>
@@ -8992,7 +9358,7 @@
                 <a:ea typeface="Noto Sans KR" pitchFamily="34" charset="-122"/>
                 <a:cs typeface="Noto Sans KR" pitchFamily="34" charset="-120"/>
               </a:rPr>
-              <a:t>Sources: 첨부 X9M Cloud Infrastructure DS v1.11 Table 1 · ExaCC X11M DS v1.5 Table 1</a:t>
+              <a:t>Sources: Oracle Exadata Database Machine X9M-2 DS (2023) pp.20–23 · ExaC@C X11M DS v1.5 Table 1</a:t>
             </a:r>
             <a:endParaRPr lang="en-US" sz="680" dirty="0"/>
           </a:p>

--- a/hermes_docs/exadata-x9m-to-exacc-x11m-transition.pptx
+++ b/hermes_docs/exadata-x9m-to-exacc-x11m-transition.pptx
@@ -6351,7 +6351,7 @@
                 <a:ea typeface="Noto Sans KR" pitchFamily="34" charset="-122"/>
                 <a:cs typeface="Noto Sans KR" pitchFamily="34" charset="-120"/>
               </a:rPr>
-              <a:t>온프레미스 최소 구성과 Cloud@Customer의 Base 및 Quarter 상당 2+3 Elastic 구성을 동일 지표로 비교</a:t>
+              <a:t>온프레미스 최소 구성과 Cloud@Customer Base 및 공식 Quarter shape가 아닌 2 DB + 3 Storage Elastic 비교</a:t>
             </a:r>
             <a:endParaRPr lang="en-US" sz="1050" dirty="0"/>
           </a:p>
@@ -6376,7 +6376,7 @@
           </a:solidFill>
           <a:ln w="8890">
             <a:solidFill>
-              <a:srgbClr val="36465C"/>
+              <a:srgbClr val="4B6078"/>
             </a:solidFill>
             <a:prstDash val="solid"/>
           </a:ln>
@@ -6438,11 +6438,11 @@
             <a:avLst/>
           </a:prstGeom>
           <a:solidFill>
-            <a:srgbClr val="263449"/>
+            <a:srgbClr val="2C405E"/>
           </a:solidFill>
           <a:ln w="8890">
             <a:solidFill>
-              <a:srgbClr val="36465C"/>
+              <a:srgbClr val="4B6078"/>
             </a:solidFill>
             <a:prstDash val="solid"/>
           </a:ln>
@@ -6521,11 +6521,11 @@
             <a:avLst/>
           </a:prstGeom>
           <a:solidFill>
-            <a:srgbClr val="203247"/>
+            <a:srgbClr val="244860"/>
           </a:solidFill>
           <a:ln w="8890">
             <a:solidFill>
-              <a:srgbClr val="36465C"/>
+              <a:srgbClr val="4B6078"/>
             </a:solidFill>
             <a:prstDash val="solid"/>
           </a:ln>
@@ -6604,11 +6604,11 @@
             <a:avLst/>
           </a:prstGeom>
           <a:solidFill>
-            <a:srgbClr val="173A3D"/>
+            <a:srgbClr val="16504A"/>
           </a:solidFill>
           <a:ln w="8890">
             <a:solidFill>
-              <a:srgbClr val="36465C"/>
+              <a:srgbClr val="4B6078"/>
             </a:solidFill>
             <a:prstDash val="solid"/>
           </a:ln>
@@ -6691,7 +6691,7 @@
           </a:solidFill>
           <a:ln w="8255">
             <a:solidFill>
-              <a:srgbClr val="33445B"/>
+              <a:srgbClr val="3D5169"/>
             </a:solidFill>
             <a:prstDash val="solid"/>
           </a:ln>
@@ -6724,7 +6724,7 @@
               <a:buNone/>
             </a:pPr>
             <a:r>
-              <a:rPr lang="en-US" sz="900" b="1" dirty="0">
+              <a:rPr lang="en-US" sz="910" b="1" dirty="0">
                 <a:solidFill>
                   <a:srgbClr val="F7F9FC"/>
                 </a:solidFill>
@@ -6734,7 +6734,7 @@
               </a:rPr>
               <a:t>물리 구성</a:t>
             </a:r>
-            <a:endParaRPr lang="en-US" sz="900" dirty="0"/>
+            <a:endParaRPr lang="en-US" sz="910" dirty="0"/>
           </a:p>
         </p:txBody>
       </p:sp>
@@ -6757,7 +6757,7 @@
           </a:solidFill>
           <a:ln w="8255">
             <a:solidFill>
-              <a:srgbClr val="33445B"/>
+              <a:srgbClr val="3D5169"/>
             </a:solidFill>
             <a:prstDash val="solid"/>
           </a:ln>
@@ -6790,9 +6790,9 @@
               <a:buNone/>
             </a:pPr>
             <a:r>
-              <a:rPr lang="en-US" sz="890" dirty="0">
-                <a:solidFill>
-                  <a:srgbClr val="D9E1EC"/>
+              <a:rPr lang="en-US" sz="900" dirty="0">
+                <a:solidFill>
+                  <a:srgbClr val="CAD5E3"/>
                 </a:solidFill>
                 <a:latin typeface="Noto Sans KR" pitchFamily="34" charset="0"/>
                 <a:ea typeface="Noto Sans KR" pitchFamily="34" charset="-122"/>
@@ -6800,7 +6800,7 @@
               </a:rPr>
               <a:t>2 DB + 3 Eighth HC</a:t>
             </a:r>
-            <a:endParaRPr lang="en-US" sz="890" dirty="0"/>
+            <a:endParaRPr lang="en-US" sz="900" dirty="0"/>
           </a:p>
         </p:txBody>
       </p:sp>
@@ -6823,7 +6823,7 @@
           </a:solidFill>
           <a:ln w="8255">
             <a:solidFill>
-              <a:srgbClr val="33445B"/>
+              <a:srgbClr val="3D5169"/>
             </a:solidFill>
             <a:prstDash val="solid"/>
           </a:ln>
@@ -6856,9 +6856,9 @@
               <a:buNone/>
             </a:pPr>
             <a:r>
-              <a:rPr lang="en-US" sz="890" dirty="0">
-                <a:solidFill>
-                  <a:srgbClr val="D9E1EC"/>
+              <a:rPr lang="en-US" sz="900" dirty="0">
+                <a:solidFill>
+                  <a:srgbClr val="CAD5E3"/>
                 </a:solidFill>
                 <a:latin typeface="Noto Sans KR" pitchFamily="34" charset="0"/>
                 <a:ea typeface="Noto Sans KR" pitchFamily="34" charset="-122"/>
@@ -6866,7 +6866,7 @@
               </a:rPr>
               <a:t>2 Base DB + 3 Base Storage</a:t>
             </a:r>
-            <a:endParaRPr lang="en-US" sz="890" dirty="0"/>
+            <a:endParaRPr lang="en-US" sz="900" dirty="0"/>
           </a:p>
         </p:txBody>
       </p:sp>
@@ -6889,7 +6889,7 @@
           </a:solidFill>
           <a:ln w="8255">
             <a:solidFill>
-              <a:srgbClr val="33445B"/>
+              <a:srgbClr val="3D5169"/>
             </a:solidFill>
             <a:prstDash val="solid"/>
           </a:ln>
@@ -6922,7 +6922,7 @@
               <a:buNone/>
             </a:pPr>
             <a:r>
-              <a:rPr lang="en-US" sz="890" dirty="0">
+              <a:rPr lang="en-US" sz="900" dirty="0">
                 <a:solidFill>
                   <a:srgbClr val="2DD4BF"/>
                 </a:solidFill>
@@ -6932,7 +6932,7 @@
               </a:rPr>
               <a:t>2 Standard DB + 3 HC w/XRMEM</a:t>
             </a:r>
-            <a:endParaRPr lang="en-US" sz="890" dirty="0"/>
+            <a:endParaRPr lang="en-US" sz="900" dirty="0"/>
           </a:p>
         </p:txBody>
       </p:sp>
@@ -6955,7 +6955,7 @@
           </a:solidFill>
           <a:ln w="8255">
             <a:solidFill>
-              <a:srgbClr val="33445B"/>
+              <a:srgbClr val="3D5169"/>
             </a:solidFill>
             <a:prstDash val="solid"/>
           </a:ln>
@@ -6988,7 +6988,7 @@
               <a:buNone/>
             </a:pPr>
             <a:r>
-              <a:rPr lang="en-US" sz="900" b="1" dirty="0">
+              <a:rPr lang="en-US" sz="910" b="1" dirty="0">
                 <a:solidFill>
                   <a:srgbClr val="F7F9FC"/>
                 </a:solidFill>
@@ -6996,9 +6996,9 @@
                 <a:ea typeface="Noto Sans KR" pitchFamily="34" charset="-122"/>
                 <a:cs typeface="Noto Sans KR" pitchFamily="34" charset="-120"/>
               </a:rPr>
-              <a:t>DB compute</a:t>
-            </a:r>
-            <a:endParaRPr lang="en-US" sz="900" dirty="0"/>
+              <a:t>DB CPU¹</a:t>
+            </a:r>
+            <a:endParaRPr lang="en-US" sz="910" dirty="0"/>
           </a:p>
         </p:txBody>
       </p:sp>
@@ -7021,7 +7021,7 @@
           </a:solidFill>
           <a:ln w="8255">
             <a:solidFill>
-              <a:srgbClr val="33445B"/>
+              <a:srgbClr val="3D5169"/>
             </a:solidFill>
             <a:prstDash val="solid"/>
           </a:ln>
@@ -7054,17 +7054,17 @@
               <a:buNone/>
             </a:pPr>
             <a:r>
-              <a:rPr lang="en-US" sz="890" dirty="0">
-                <a:solidFill>
-                  <a:srgbClr val="D9E1EC"/>
-                </a:solidFill>
-                <a:latin typeface="Noto Sans KR" pitchFamily="34" charset="0"/>
-                <a:ea typeface="Noto Sans KR" pitchFamily="34" charset="-122"/>
-                <a:cs typeface="Noto Sans KR" pitchFamily="34" charset="-120"/>
-              </a:rPr>
-              <a:t>64 physical cores</a:t>
-            </a:r>
-            <a:endParaRPr lang="en-US" sz="890" dirty="0"/>
+              <a:rPr lang="en-US" sz="900" dirty="0">
+                <a:solidFill>
+                  <a:srgbClr val="CAD5E3"/>
+                </a:solidFill>
+                <a:latin typeface="Noto Sans KR" pitchFamily="34" charset="0"/>
+                <a:ea typeface="Noto Sans KR" pitchFamily="34" charset="-122"/>
+                <a:cs typeface="Noto Sans KR" pitchFamily="34" charset="-120"/>
+              </a:rPr>
+              <a:t>64 physical cores¹</a:t>
+            </a:r>
+            <a:endParaRPr lang="en-US" sz="900" dirty="0"/>
           </a:p>
         </p:txBody>
       </p:sp>
@@ -7087,7 +7087,7 @@
           </a:solidFill>
           <a:ln w="8255">
             <a:solidFill>
-              <a:srgbClr val="33445B"/>
+              <a:srgbClr val="3D5169"/>
             </a:solidFill>
             <a:prstDash val="solid"/>
           </a:ln>
@@ -7120,9 +7120,9 @@
               <a:buNone/>
             </a:pPr>
             <a:r>
-              <a:rPr lang="en-US" sz="890" dirty="0">
-                <a:solidFill>
-                  <a:srgbClr val="D9E1EC"/>
+              <a:rPr lang="en-US" sz="900" dirty="0">
+                <a:solidFill>
+                  <a:srgbClr val="CAD5E3"/>
                 </a:solidFill>
                 <a:latin typeface="Noto Sans KR" pitchFamily="34" charset="0"/>
                 <a:ea typeface="Noto Sans KR" pitchFamily="34" charset="-122"/>
@@ -7130,24 +7130,24 @@
               </a:rPr>
               <a:t>60 usable cores</a:t>
             </a:r>
-            <a:endParaRPr lang="en-US" sz="890" dirty="0"/>
+            <a:endParaRPr lang="en-US" sz="900" dirty="0"/>
           </a:p>
           <a:p>
             <a:pPr algn="ctr" indent="0" marL="0">
               <a:buNone/>
             </a:pPr>
             <a:r>
-              <a:rPr lang="en-US" sz="890" dirty="0">
-                <a:solidFill>
-                  <a:srgbClr val="D9E1EC"/>
-                </a:solidFill>
-                <a:latin typeface="Noto Sans KR" pitchFamily="34" charset="0"/>
-                <a:ea typeface="Noto Sans KR" pitchFamily="34" charset="-122"/>
-                <a:cs typeface="Noto Sans KR" pitchFamily="34" charset="-120"/>
-              </a:rPr>
-              <a:t>240 ECPUs</a:t>
-            </a:r>
-            <a:endParaRPr lang="en-US" sz="890" dirty="0"/>
+              <a:rPr lang="en-US" sz="900" dirty="0">
+                <a:solidFill>
+                  <a:srgbClr val="CAD5E3"/>
+                </a:solidFill>
+                <a:latin typeface="Noto Sans KR" pitchFamily="34" charset="0"/>
+                <a:ea typeface="Noto Sans KR" pitchFamily="34" charset="-122"/>
+                <a:cs typeface="Noto Sans KR" pitchFamily="34" charset="-120"/>
+              </a:rPr>
+              <a:t>240 ECPUs¹</a:t>
+            </a:r>
+            <a:endParaRPr lang="en-US" sz="900" dirty="0"/>
           </a:p>
         </p:txBody>
       </p:sp>
@@ -7170,7 +7170,7 @@
           </a:solidFill>
           <a:ln w="8255">
             <a:solidFill>
-              <a:srgbClr val="33445B"/>
+              <a:srgbClr val="3D5169"/>
             </a:solidFill>
             <a:prstDash val="solid"/>
           </a:ln>
@@ -7203,7 +7203,7 @@
               <a:buNone/>
             </a:pPr>
             <a:r>
-              <a:rPr lang="en-US" sz="890" dirty="0">
+              <a:rPr lang="en-US" sz="900" dirty="0">
                 <a:solidFill>
                   <a:srgbClr val="2DD4BF"/>
                 </a:solidFill>
@@ -7213,14 +7213,14 @@
               </a:rPr>
               <a:t>380 usable cores</a:t>
             </a:r>
-            <a:endParaRPr lang="en-US" sz="890" dirty="0"/>
+            <a:endParaRPr lang="en-US" sz="900" dirty="0"/>
           </a:p>
           <a:p>
             <a:pPr algn="ctr" indent="0" marL="0">
               <a:buNone/>
             </a:pPr>
             <a:r>
-              <a:rPr lang="en-US" sz="890" dirty="0">
+              <a:rPr lang="en-US" sz="900" dirty="0">
                 <a:solidFill>
                   <a:srgbClr val="2DD4BF"/>
                 </a:solidFill>
@@ -7228,9 +7228,9 @@
                 <a:ea typeface="Noto Sans KR" pitchFamily="34" charset="-122"/>
                 <a:cs typeface="Noto Sans KR" pitchFamily="34" charset="-120"/>
               </a:rPr>
-              <a:t>1,520 ECPUs</a:t>
-            </a:r>
-            <a:endParaRPr lang="en-US" sz="890" dirty="0"/>
+              <a:t>1,520 ECPUs¹</a:t>
+            </a:r>
+            <a:endParaRPr lang="en-US" sz="900" dirty="0"/>
           </a:p>
         </p:txBody>
       </p:sp>
@@ -7253,7 +7253,7 @@
           </a:solidFill>
           <a:ln w="8255">
             <a:solidFill>
-              <a:srgbClr val="33445B"/>
+              <a:srgbClr val="3D5169"/>
             </a:solidFill>
             <a:prstDash val="solid"/>
           </a:ln>
@@ -7286,7 +7286,7 @@
               <a:buNone/>
             </a:pPr>
             <a:r>
-              <a:rPr lang="en-US" sz="900" b="1" dirty="0">
+              <a:rPr lang="en-US" sz="910" b="1" dirty="0">
                 <a:solidFill>
                   <a:srgbClr val="F7F9FC"/>
                 </a:solidFill>
@@ -7296,7 +7296,7 @@
               </a:rPr>
               <a:t>DB memory</a:t>
             </a:r>
-            <a:endParaRPr lang="en-US" sz="900" dirty="0"/>
+            <a:endParaRPr lang="en-US" sz="910" dirty="0"/>
           </a:p>
         </p:txBody>
       </p:sp>
@@ -7319,7 +7319,7 @@
           </a:solidFill>
           <a:ln w="8255">
             <a:solidFill>
-              <a:srgbClr val="33445B"/>
+              <a:srgbClr val="3D5169"/>
             </a:solidFill>
             <a:prstDash val="solid"/>
           </a:ln>
@@ -7352,9 +7352,9 @@
               <a:buNone/>
             </a:pPr>
             <a:r>
-              <a:rPr lang="en-US" sz="890" dirty="0">
-                <a:solidFill>
-                  <a:srgbClr val="D9E1EC"/>
+              <a:rPr lang="en-US" sz="900" dirty="0">
+                <a:solidFill>
+                  <a:srgbClr val="CAD5E3"/>
                 </a:solidFill>
                 <a:latin typeface="Noto Sans KR" pitchFamily="34" charset="0"/>
                 <a:ea typeface="Noto Sans KR" pitchFamily="34" charset="-122"/>
@@ -7362,16 +7362,16 @@
               </a:rPr>
               <a:t>768 GB default</a:t>
             </a:r>
-            <a:endParaRPr lang="en-US" sz="890" dirty="0"/>
+            <a:endParaRPr lang="en-US" sz="900" dirty="0"/>
           </a:p>
           <a:p>
             <a:pPr algn="ctr" indent="0" marL="0">
               <a:buNone/>
             </a:pPr>
             <a:r>
-              <a:rPr lang="en-US" sz="890" dirty="0">
-                <a:solidFill>
-                  <a:srgbClr val="D9E1EC"/>
+              <a:rPr lang="en-US" sz="900" dirty="0">
+                <a:solidFill>
+                  <a:srgbClr val="CAD5E3"/>
                 </a:solidFill>
                 <a:latin typeface="Noto Sans KR" pitchFamily="34" charset="0"/>
                 <a:ea typeface="Noto Sans KR" pitchFamily="34" charset="-122"/>
@@ -7379,7 +7379,7 @@
               </a:rPr>
               <a:t>최대 2,048 GB</a:t>
             </a:r>
-            <a:endParaRPr lang="en-US" sz="890" dirty="0"/>
+            <a:endParaRPr lang="en-US" sz="900" dirty="0"/>
           </a:p>
         </p:txBody>
       </p:sp>
@@ -7402,7 +7402,7 @@
           </a:solidFill>
           <a:ln w="8255">
             <a:solidFill>
-              <a:srgbClr val="33445B"/>
+              <a:srgbClr val="3D5169"/>
             </a:solidFill>
             <a:prstDash val="solid"/>
           </a:ln>
@@ -7435,9 +7435,9 @@
               <a:buNone/>
             </a:pPr>
             <a:r>
-              <a:rPr lang="en-US" sz="890" dirty="0">
-                <a:solidFill>
-                  <a:srgbClr val="D9E1EC"/>
+              <a:rPr lang="en-US" sz="900" dirty="0">
+                <a:solidFill>
+                  <a:srgbClr val="CAD5E3"/>
                 </a:solidFill>
                 <a:latin typeface="Noto Sans KR" pitchFamily="34" charset="0"/>
                 <a:ea typeface="Noto Sans KR" pitchFamily="34" charset="-122"/>
@@ -7445,16 +7445,16 @@
               </a:rPr>
               <a:t>1,320 GB</a:t>
             </a:r>
-            <a:endParaRPr lang="en-US" sz="890" dirty="0"/>
+            <a:endParaRPr lang="en-US" sz="900" dirty="0"/>
           </a:p>
           <a:p>
             <a:pPr algn="ctr" indent="0" marL="0">
               <a:buNone/>
             </a:pPr>
             <a:r>
-              <a:rPr lang="en-US" sz="890" dirty="0">
-                <a:solidFill>
-                  <a:srgbClr val="D9E1EC"/>
+              <a:rPr lang="en-US" sz="900" dirty="0">
+                <a:solidFill>
+                  <a:srgbClr val="CAD5E3"/>
                 </a:solidFill>
                 <a:latin typeface="Noto Sans KR" pitchFamily="34" charset="0"/>
                 <a:ea typeface="Noto Sans KR" pitchFamily="34" charset="-122"/>
@@ -7462,7 +7462,7 @@
               </a:rPr>
               <a:t>available to VMs</a:t>
             </a:r>
-            <a:endParaRPr lang="en-US" sz="890" dirty="0"/>
+            <a:endParaRPr lang="en-US" sz="900" dirty="0"/>
           </a:p>
         </p:txBody>
       </p:sp>
@@ -7485,7 +7485,7 @@
           </a:solidFill>
           <a:ln w="8255">
             <a:solidFill>
-              <a:srgbClr val="33445B"/>
+              <a:srgbClr val="3D5169"/>
             </a:solidFill>
             <a:prstDash val="solid"/>
           </a:ln>
@@ -7518,7 +7518,7 @@
               <a:buNone/>
             </a:pPr>
             <a:r>
-              <a:rPr lang="en-US" sz="890" dirty="0">
+              <a:rPr lang="en-US" sz="900" dirty="0">
                 <a:solidFill>
                   <a:srgbClr val="2DD4BF"/>
                 </a:solidFill>
@@ -7528,14 +7528,14 @@
               </a:rPr>
               <a:t>2,780 GB</a:t>
             </a:r>
-            <a:endParaRPr lang="en-US" sz="890" dirty="0"/>
+            <a:endParaRPr lang="en-US" sz="900" dirty="0"/>
           </a:p>
           <a:p>
             <a:pPr algn="ctr" indent="0" marL="0">
               <a:buNone/>
             </a:pPr>
             <a:r>
-              <a:rPr lang="en-US" sz="890" dirty="0">
+              <a:rPr lang="en-US" sz="900" dirty="0">
                 <a:solidFill>
                   <a:srgbClr val="2DD4BF"/>
                 </a:solidFill>
@@ -7545,7 +7545,7 @@
               </a:rPr>
               <a:t>available to VMs</a:t>
             </a:r>
-            <a:endParaRPr lang="en-US" sz="890" dirty="0"/>
+            <a:endParaRPr lang="en-US" sz="900" dirty="0"/>
           </a:p>
         </p:txBody>
       </p:sp>
@@ -7568,7 +7568,7 @@
           </a:solidFill>
           <a:ln w="8255">
             <a:solidFill>
-              <a:srgbClr val="33445B"/>
+              <a:srgbClr val="3D5169"/>
             </a:solidFill>
             <a:prstDash val="solid"/>
           </a:ln>
@@ -7601,7 +7601,7 @@
               <a:buNone/>
             </a:pPr>
             <a:r>
-              <a:rPr lang="en-US" sz="900" b="1" dirty="0">
+              <a:rPr lang="en-US" sz="910" b="1" dirty="0">
                 <a:solidFill>
                   <a:srgbClr val="F7F9FC"/>
                 </a:solidFill>
@@ -7611,7 +7611,7 @@
               </a:rPr>
               <a:t>Storage compute</a:t>
             </a:r>
-            <a:endParaRPr lang="en-US" sz="900" dirty="0"/>
+            <a:endParaRPr lang="en-US" sz="910" dirty="0"/>
           </a:p>
         </p:txBody>
       </p:sp>
@@ -7634,7 +7634,7 @@
           </a:solidFill>
           <a:ln w="8255">
             <a:solidFill>
-              <a:srgbClr val="33445B"/>
+              <a:srgbClr val="3D5169"/>
             </a:solidFill>
             <a:prstDash val="solid"/>
           </a:ln>
@@ -7667,9 +7667,9 @@
               <a:buNone/>
             </a:pPr>
             <a:r>
-              <a:rPr lang="en-US" sz="890" dirty="0">
-                <a:solidFill>
-                  <a:srgbClr val="D9E1EC"/>
+              <a:rPr lang="en-US" sz="900" dirty="0">
+                <a:solidFill>
+                  <a:srgbClr val="CAD5E3"/>
                 </a:solidFill>
                 <a:latin typeface="Noto Sans KR" pitchFamily="34" charset="0"/>
                 <a:ea typeface="Noto Sans KR" pitchFamily="34" charset="-122"/>
@@ -7677,7 +7677,7 @@
               </a:rPr>
               <a:t>48 storage cores</a:t>
             </a:r>
-            <a:endParaRPr lang="en-US" sz="890" dirty="0"/>
+            <a:endParaRPr lang="en-US" sz="900" dirty="0"/>
           </a:p>
         </p:txBody>
       </p:sp>
@@ -7700,7 +7700,7 @@
           </a:solidFill>
           <a:ln w="8255">
             <a:solidFill>
-              <a:srgbClr val="33445B"/>
+              <a:srgbClr val="3D5169"/>
             </a:solidFill>
             <a:prstDash val="solid"/>
           </a:ln>
@@ -7733,9 +7733,9 @@
               <a:buNone/>
             </a:pPr>
             <a:r>
-              <a:rPr lang="en-US" sz="890" dirty="0">
-                <a:solidFill>
-                  <a:srgbClr val="D9E1EC"/>
+              <a:rPr lang="en-US" sz="900" dirty="0">
+                <a:solidFill>
+                  <a:srgbClr val="CAD5E3"/>
                 </a:solidFill>
                 <a:latin typeface="Noto Sans KR" pitchFamily="34" charset="0"/>
                 <a:ea typeface="Noto Sans KR" pitchFamily="34" charset="-122"/>
@@ -7743,7 +7743,7 @@
               </a:rPr>
               <a:t>96 storage cores</a:t>
             </a:r>
-            <a:endParaRPr lang="en-US" sz="890" dirty="0"/>
+            <a:endParaRPr lang="en-US" sz="900" dirty="0"/>
           </a:p>
         </p:txBody>
       </p:sp>
@@ -7766,7 +7766,7 @@
           </a:solidFill>
           <a:ln w="8255">
             <a:solidFill>
-              <a:srgbClr val="33445B"/>
+              <a:srgbClr val="3D5169"/>
             </a:solidFill>
             <a:prstDash val="solid"/>
           </a:ln>
@@ -7799,7 +7799,7 @@
               <a:buNone/>
             </a:pPr>
             <a:r>
-              <a:rPr lang="en-US" sz="890" dirty="0">
+              <a:rPr lang="en-US" sz="900" dirty="0">
                 <a:solidFill>
                   <a:srgbClr val="2DD4BF"/>
                 </a:solidFill>
@@ -7809,7 +7809,7 @@
               </a:rPr>
               <a:t>192 storage cores</a:t>
             </a:r>
-            <a:endParaRPr lang="en-US" sz="890" dirty="0"/>
+            <a:endParaRPr lang="en-US" sz="900" dirty="0"/>
           </a:p>
         </p:txBody>
       </p:sp>
@@ -7832,7 +7832,7 @@
           </a:solidFill>
           <a:ln w="8255">
             <a:solidFill>
-              <a:srgbClr val="33445B"/>
+              <a:srgbClr val="3D5169"/>
             </a:solidFill>
             <a:prstDash val="solid"/>
           </a:ln>
@@ -7865,7 +7865,7 @@
               <a:buNone/>
             </a:pPr>
             <a:r>
-              <a:rPr lang="en-US" sz="900" b="1" dirty="0">
+              <a:rPr lang="en-US" sz="910" b="1" dirty="0">
                 <a:solidFill>
                   <a:srgbClr val="F7F9FC"/>
                 </a:solidFill>
@@ -7875,7 +7875,7 @@
               </a:rPr>
               <a:t>HC usable (ASM HR)¹</a:t>
             </a:r>
-            <a:endParaRPr lang="en-US" sz="900" dirty="0"/>
+            <a:endParaRPr lang="en-US" sz="910" dirty="0"/>
           </a:p>
         </p:txBody>
       </p:sp>
@@ -7898,7 +7898,7 @@
           </a:solidFill>
           <a:ln w="8255">
             <a:solidFill>
-              <a:srgbClr val="33445B"/>
+              <a:srgbClr val="3D5169"/>
             </a:solidFill>
             <a:prstDash val="solid"/>
           </a:ln>
@@ -7931,9 +7931,9 @@
               <a:buNone/>
             </a:pPr>
             <a:r>
-              <a:rPr lang="en-US" sz="890" dirty="0">
-                <a:solidFill>
-                  <a:srgbClr val="D9E1EC"/>
+              <a:rPr lang="en-US" sz="900" dirty="0">
+                <a:solidFill>
+                  <a:srgbClr val="CAD5E3"/>
                 </a:solidFill>
                 <a:latin typeface="Noto Sans KR" pitchFamily="34" charset="0"/>
                 <a:ea typeface="Noto Sans KR" pitchFamily="34" charset="-122"/>
@@ -7941,7 +7941,7 @@
               </a:rPr>
               <a:t>96.2 TB</a:t>
             </a:r>
-            <a:endParaRPr lang="en-US" sz="890" dirty="0"/>
+            <a:endParaRPr lang="en-US" sz="900" dirty="0"/>
           </a:p>
         </p:txBody>
       </p:sp>
@@ -7964,7 +7964,7 @@
           </a:solidFill>
           <a:ln w="8255">
             <a:solidFill>
-              <a:srgbClr val="33445B"/>
+              <a:srgbClr val="3D5169"/>
             </a:solidFill>
             <a:prstDash val="solid"/>
           </a:ln>
@@ -7997,9 +7997,9 @@
               <a:buNone/>
             </a:pPr>
             <a:r>
-              <a:rPr lang="en-US" sz="890" dirty="0">
-                <a:solidFill>
-                  <a:srgbClr val="D9E1EC"/>
+              <a:rPr lang="en-US" sz="900" dirty="0">
+                <a:solidFill>
+                  <a:srgbClr val="CAD5E3"/>
                 </a:solidFill>
                 <a:latin typeface="Noto Sans KR" pitchFamily="34" charset="0"/>
                 <a:ea typeface="Noto Sans KR" pitchFamily="34" charset="-122"/>
@@ -8007,7 +8007,7 @@
               </a:rPr>
               <a:t>106 TB</a:t>
             </a:r>
-            <a:endParaRPr lang="en-US" sz="890" dirty="0"/>
+            <a:endParaRPr lang="en-US" sz="900" dirty="0"/>
           </a:p>
         </p:txBody>
       </p:sp>
@@ -8030,7 +8030,7 @@
           </a:solidFill>
           <a:ln w="8255">
             <a:solidFill>
-              <a:srgbClr val="33445B"/>
+              <a:srgbClr val="3D5169"/>
             </a:solidFill>
             <a:prstDash val="solid"/>
           </a:ln>
@@ -8063,7 +8063,7 @@
               <a:buNone/>
             </a:pPr>
             <a:r>
-              <a:rPr lang="en-US" sz="890" dirty="0">
+              <a:rPr lang="en-US" sz="900" dirty="0">
                 <a:solidFill>
                   <a:srgbClr val="2DD4BF"/>
                 </a:solidFill>
@@ -8073,7 +8073,7 @@
               </a:rPr>
               <a:t>240 TB</a:t>
             </a:r>
-            <a:endParaRPr lang="en-US" sz="890" dirty="0"/>
+            <a:endParaRPr lang="en-US" sz="900" dirty="0"/>
           </a:p>
         </p:txBody>
       </p:sp>
@@ -8096,7 +8096,7 @@
           </a:solidFill>
           <a:ln w="8255">
             <a:solidFill>
-              <a:srgbClr val="33445B"/>
+              <a:srgbClr val="3D5169"/>
             </a:solidFill>
             <a:prstDash val="solid"/>
           </a:ln>
@@ -8129,7 +8129,7 @@
               <a:buNone/>
             </a:pPr>
             <a:r>
-              <a:rPr lang="en-US" sz="900" b="1" dirty="0">
+              <a:rPr lang="en-US" sz="910" b="1" dirty="0">
                 <a:solidFill>
                   <a:srgbClr val="F7F9FC"/>
                 </a:solidFill>
@@ -8139,7 +8139,7 @@
               </a:rPr>
               <a:t>Flash · PMEM/XRMEM</a:t>
             </a:r>
-            <a:endParaRPr lang="en-US" sz="900" dirty="0"/>
+            <a:endParaRPr lang="en-US" sz="910" dirty="0"/>
           </a:p>
         </p:txBody>
       </p:sp>
@@ -8162,7 +8162,7 @@
           </a:solidFill>
           <a:ln w="8255">
             <a:solidFill>
-              <a:srgbClr val="33445B"/>
+              <a:srgbClr val="3D5169"/>
             </a:solidFill>
             <a:prstDash val="solid"/>
           </a:ln>
@@ -8195,9 +8195,9 @@
               <a:buNone/>
             </a:pPr>
             <a:r>
-              <a:rPr lang="en-US" sz="890" dirty="0">
-                <a:solidFill>
-                  <a:srgbClr val="D9E1EC"/>
+              <a:rPr lang="en-US" sz="900" dirty="0">
+                <a:solidFill>
+                  <a:srgbClr val="CAD5E3"/>
                 </a:solidFill>
                 <a:latin typeface="Noto Sans KR" pitchFamily="34" charset="0"/>
                 <a:ea typeface="Noto Sans KR" pitchFamily="34" charset="-122"/>
@@ -8205,7 +8205,7 @@
               </a:rPr>
               <a:t>38.4 TB · 2.3 TB PMEM</a:t>
             </a:r>
-            <a:endParaRPr lang="en-US" sz="890" dirty="0"/>
+            <a:endParaRPr lang="en-US" sz="900" dirty="0"/>
           </a:p>
         </p:txBody>
       </p:sp>
@@ -8228,7 +8228,7 @@
           </a:solidFill>
           <a:ln w="8255">
             <a:solidFill>
-              <a:srgbClr val="33445B"/>
+              <a:srgbClr val="3D5169"/>
             </a:solidFill>
             <a:prstDash val="solid"/>
           </a:ln>
@@ -8261,9 +8261,9 @@
               <a:buNone/>
             </a:pPr>
             <a:r>
-              <a:rPr lang="en-US" sz="890" dirty="0">
-                <a:solidFill>
-                  <a:srgbClr val="D9E1EC"/>
+              <a:rPr lang="en-US" sz="900" dirty="0">
+                <a:solidFill>
+                  <a:srgbClr val="CAD5E3"/>
                 </a:solidFill>
                 <a:latin typeface="Noto Sans KR" pitchFamily="34" charset="0"/>
                 <a:ea typeface="Noto Sans KR" pitchFamily="34" charset="-122"/>
@@ -8271,7 +8271,7 @@
               </a:rPr>
               <a:t>38.4 TB · XRMEM 없음</a:t>
             </a:r>
-            <a:endParaRPr lang="en-US" sz="890" dirty="0"/>
+            <a:endParaRPr lang="en-US" sz="900" dirty="0"/>
           </a:p>
         </p:txBody>
       </p:sp>
@@ -8294,7 +8294,7 @@
           </a:solidFill>
           <a:ln w="8255">
             <a:solidFill>
-              <a:srgbClr val="33445B"/>
+              <a:srgbClr val="3D5169"/>
             </a:solidFill>
             <a:prstDash val="solid"/>
           </a:ln>
@@ -8327,7 +8327,7 @@
               <a:buNone/>
             </a:pPr>
             <a:r>
-              <a:rPr lang="en-US" sz="890" dirty="0">
+              <a:rPr lang="en-US" sz="900" dirty="0">
                 <a:solidFill>
                   <a:srgbClr val="2DD4BF"/>
                 </a:solidFill>
@@ -8337,7 +8337,7 @@
               </a:rPr>
               <a:t>81.6 TB · 3.75 TB XRMEM</a:t>
             </a:r>
-            <a:endParaRPr lang="en-US" sz="890" dirty="0"/>
+            <a:endParaRPr lang="en-US" sz="900" dirty="0"/>
           </a:p>
         </p:txBody>
       </p:sp>
@@ -8360,7 +8360,7 @@
           </a:solidFill>
           <a:ln w="8255">
             <a:solidFill>
-              <a:srgbClr val="33445B"/>
+              <a:srgbClr val="3D5169"/>
             </a:solidFill>
             <a:prstDash val="solid"/>
           </a:ln>
@@ -8393,7 +8393,7 @@
               <a:buNone/>
             </a:pPr>
             <a:r>
-              <a:rPr lang="en-US" sz="900" b="1" dirty="0">
+              <a:rPr lang="en-US" sz="910" b="1" dirty="0">
                 <a:solidFill>
                   <a:srgbClr val="F7F9FC"/>
                 </a:solidFill>
@@ -8403,7 +8403,7 @@
               </a:rPr>
               <a:t>Max SQL flash BW</a:t>
             </a:r>
-            <a:endParaRPr lang="en-US" sz="900" dirty="0"/>
+            <a:endParaRPr lang="en-US" sz="910" dirty="0"/>
           </a:p>
         </p:txBody>
       </p:sp>
@@ -8426,7 +8426,7 @@
           </a:solidFill>
           <a:ln w="8255">
             <a:solidFill>
-              <a:srgbClr val="33445B"/>
+              <a:srgbClr val="3D5169"/>
             </a:solidFill>
             <a:prstDash val="solid"/>
           </a:ln>
@@ -8459,9 +8459,9 @@
               <a:buNone/>
             </a:pPr>
             <a:r>
-              <a:rPr lang="en-US" sz="890" dirty="0">
-                <a:solidFill>
-                  <a:srgbClr val="D9E1EC"/>
+              <a:rPr lang="en-US" sz="900" dirty="0">
+                <a:solidFill>
+                  <a:srgbClr val="CAD5E3"/>
                 </a:solidFill>
                 <a:latin typeface="Noto Sans KR" pitchFamily="34" charset="0"/>
                 <a:ea typeface="Noto Sans KR" pitchFamily="34" charset="-122"/>
@@ -8469,7 +8469,7 @@
               </a:rPr>
               <a:t>67.5 GB/s</a:t>
             </a:r>
-            <a:endParaRPr lang="en-US" sz="890" dirty="0"/>
+            <a:endParaRPr lang="en-US" sz="900" dirty="0"/>
           </a:p>
         </p:txBody>
       </p:sp>
@@ -8492,7 +8492,7 @@
           </a:solidFill>
           <a:ln w="8255">
             <a:solidFill>
-              <a:srgbClr val="33445B"/>
+              <a:srgbClr val="3D5169"/>
             </a:solidFill>
             <a:prstDash val="solid"/>
           </a:ln>
@@ -8525,9 +8525,9 @@
               <a:buNone/>
             </a:pPr>
             <a:r>
-              <a:rPr lang="en-US" sz="890" dirty="0">
-                <a:solidFill>
-                  <a:srgbClr val="D9E1EC"/>
+              <a:rPr lang="en-US" sz="900" dirty="0">
+                <a:solidFill>
+                  <a:srgbClr val="CAD5E3"/>
                 </a:solidFill>
                 <a:latin typeface="Noto Sans KR" pitchFamily="34" charset="0"/>
                 <a:ea typeface="Noto Sans KR" pitchFamily="34" charset="-122"/>
@@ -8535,7 +8535,7 @@
               </a:rPr>
               <a:t>37.5 GB/s</a:t>
             </a:r>
-            <a:endParaRPr lang="en-US" sz="890" dirty="0"/>
+            <a:endParaRPr lang="en-US" sz="900" dirty="0"/>
           </a:p>
         </p:txBody>
       </p:sp>
@@ -8558,7 +8558,7 @@
           </a:solidFill>
           <a:ln w="8255">
             <a:solidFill>
-              <a:srgbClr val="33445B"/>
+              <a:srgbClr val="3D5169"/>
             </a:solidFill>
             <a:prstDash val="solid"/>
           </a:ln>
@@ -8591,7 +8591,7 @@
               <a:buNone/>
             </a:pPr>
             <a:r>
-              <a:rPr lang="en-US" sz="890" dirty="0">
+              <a:rPr lang="en-US" sz="900" dirty="0">
                 <a:solidFill>
                   <a:srgbClr val="2DD4BF"/>
                 </a:solidFill>
@@ -8601,7 +8601,7 @@
               </a:rPr>
               <a:t>300 GB/s</a:t>
             </a:r>
-            <a:endParaRPr lang="en-US" sz="890" dirty="0"/>
+            <a:endParaRPr lang="en-US" sz="900" dirty="0"/>
           </a:p>
         </p:txBody>
       </p:sp>
@@ -8624,7 +8624,7 @@
           </a:solidFill>
           <a:ln w="8255">
             <a:solidFill>
-              <a:srgbClr val="33445B"/>
+              <a:srgbClr val="3D5169"/>
             </a:solidFill>
             <a:prstDash val="solid"/>
           </a:ln>
@@ -8657,7 +8657,7 @@
               <a:buNone/>
             </a:pPr>
             <a:r>
-              <a:rPr lang="en-US" sz="900" b="1" dirty="0">
+              <a:rPr lang="en-US" sz="910" b="1" dirty="0">
                 <a:solidFill>
                   <a:srgbClr val="F7F9FC"/>
                 </a:solidFill>
@@ -8667,7 +8667,7 @@
               </a:rPr>
               <a:t>SQL Read / Write IOPS</a:t>
             </a:r>
-            <a:endParaRPr lang="en-US" sz="900" dirty="0"/>
+            <a:endParaRPr lang="en-US" sz="910" dirty="0"/>
           </a:p>
         </p:txBody>
       </p:sp>
@@ -8690,7 +8690,7 @@
           </a:solidFill>
           <a:ln w="8255">
             <a:solidFill>
-              <a:srgbClr val="33445B"/>
+              <a:srgbClr val="3D5169"/>
             </a:solidFill>
             <a:prstDash val="solid"/>
           </a:ln>
@@ -8723,9 +8723,9 @@
               <a:buNone/>
             </a:pPr>
             <a:r>
-              <a:rPr lang="en-US" sz="890" dirty="0">
-                <a:solidFill>
-                  <a:srgbClr val="D9E1EC"/>
+              <a:rPr lang="en-US" sz="900" dirty="0">
+                <a:solidFill>
+                  <a:srgbClr val="CAD5E3"/>
                 </a:solidFill>
                 <a:latin typeface="Noto Sans KR" pitchFamily="34" charset="0"/>
                 <a:ea typeface="Noto Sans KR" pitchFamily="34" charset="-122"/>
@@ -8733,7 +8733,7 @@
               </a:rPr>
               <a:t>2.8M / 921K</a:t>
             </a:r>
-            <a:endParaRPr lang="en-US" sz="890" dirty="0"/>
+            <a:endParaRPr lang="en-US" sz="900" dirty="0"/>
           </a:p>
         </p:txBody>
       </p:sp>
@@ -8756,7 +8756,7 @@
           </a:solidFill>
           <a:ln w="8255">
             <a:solidFill>
-              <a:srgbClr val="33445B"/>
+              <a:srgbClr val="3D5169"/>
             </a:solidFill>
             <a:prstDash val="solid"/>
           </a:ln>
@@ -8789,9 +8789,9 @@
               <a:buNone/>
             </a:pPr>
             <a:r>
-              <a:rPr lang="en-US" sz="890" dirty="0">
-                <a:solidFill>
-                  <a:srgbClr val="D9E1EC"/>
+              <a:rPr lang="en-US" sz="900" dirty="0">
+                <a:solidFill>
+                  <a:srgbClr val="CAD5E3"/>
                 </a:solidFill>
                 <a:latin typeface="Noto Sans KR" pitchFamily="34" charset="0"/>
                 <a:ea typeface="Noto Sans KR" pitchFamily="34" charset="-122"/>
@@ -8799,7 +8799,7 @@
               </a:rPr>
               <a:t>597K / 544K</a:t>
             </a:r>
-            <a:endParaRPr lang="en-US" sz="890" dirty="0"/>
+            <a:endParaRPr lang="en-US" sz="900" dirty="0"/>
           </a:p>
         </p:txBody>
       </p:sp>
@@ -8822,7 +8822,7 @@
           </a:solidFill>
           <a:ln w="8255">
             <a:solidFill>
-              <a:srgbClr val="33445B"/>
+              <a:srgbClr val="3D5169"/>
             </a:solidFill>
             <a:prstDash val="solid"/>
           </a:ln>
@@ -8855,7 +8855,7 @@
               <a:buNone/>
             </a:pPr>
             <a:r>
-              <a:rPr lang="en-US" sz="890" dirty="0">
+              <a:rPr lang="en-US" sz="900" dirty="0">
                 <a:solidFill>
                   <a:srgbClr val="2DD4BF"/>
                 </a:solidFill>
@@ -8865,7 +8865,7 @@
               </a:rPr>
               <a:t>5.6M / 3.0M</a:t>
             </a:r>
-            <a:endParaRPr lang="en-US" sz="890" dirty="0"/>
+            <a:endParaRPr lang="en-US" sz="900" dirty="0"/>
           </a:p>
         </p:txBody>
       </p:sp>
@@ -8888,7 +8888,7 @@
           </a:solidFill>
           <a:ln w="8255">
             <a:solidFill>
-              <a:srgbClr val="33445B"/>
+              <a:srgbClr val="3D5169"/>
             </a:solidFill>
             <a:prstDash val="solid"/>
           </a:ln>
@@ -8921,7 +8921,7 @@
               <a:buNone/>
             </a:pPr>
             <a:r>
-              <a:rPr lang="en-US" sz="900" b="1" dirty="0">
+              <a:rPr lang="en-US" sz="910" b="1" dirty="0">
                 <a:solidFill>
                   <a:srgbClr val="F7F9FC"/>
                 </a:solidFill>
@@ -8931,7 +8931,7 @@
               </a:rPr>
               <a:t>Disk BW · IOPS · Load</a:t>
             </a:r>
-            <a:endParaRPr lang="en-US" sz="900" dirty="0"/>
+            <a:endParaRPr lang="en-US" sz="910" dirty="0"/>
           </a:p>
         </p:txBody>
       </p:sp>
@@ -8954,7 +8954,7 @@
           </a:solidFill>
           <a:ln w="8255">
             <a:solidFill>
-              <a:srgbClr val="33445B"/>
+              <a:srgbClr val="3D5169"/>
             </a:solidFill>
             <a:prstDash val="solid"/>
           </a:ln>
@@ -8987,9 +8987,9 @@
               <a:buNone/>
             </a:pPr>
             <a:r>
-              <a:rPr lang="en-US" sz="890" dirty="0">
-                <a:solidFill>
-                  <a:srgbClr val="D9E1EC"/>
+              <a:rPr lang="en-US" sz="900" dirty="0">
+                <a:solidFill>
+                  <a:srgbClr val="CAD5E3"/>
                 </a:solidFill>
                 <a:latin typeface="Noto Sans KR" pitchFamily="34" charset="0"/>
                 <a:ea typeface="Noto Sans KR" pitchFamily="34" charset="-122"/>
@@ -8997,16 +8997,16 @@
               </a:rPr>
               <a:t>2.7 GB/s · 3,900</a:t>
             </a:r>
-            <a:endParaRPr lang="en-US" sz="890" dirty="0"/>
+            <a:endParaRPr lang="en-US" sz="900" dirty="0"/>
           </a:p>
           <a:p>
             <a:pPr algn="ctr" indent="0" marL="0">
               <a:buNone/>
             </a:pPr>
             <a:r>
-              <a:rPr lang="en-US" sz="890" dirty="0">
-                <a:solidFill>
-                  <a:srgbClr val="D9E1EC"/>
+              <a:rPr lang="en-US" sz="900" dirty="0">
+                <a:solidFill>
+                  <a:srgbClr val="CAD5E3"/>
                 </a:solidFill>
                 <a:latin typeface="Noto Sans KR" pitchFamily="34" charset="0"/>
                 <a:ea typeface="Noto Sans KR" pitchFamily="34" charset="-122"/>
@@ -9014,7 +9014,7 @@
               </a:rPr>
               <a:t>3.8 TB/hr</a:t>
             </a:r>
-            <a:endParaRPr lang="en-US" sz="890" dirty="0"/>
+            <a:endParaRPr lang="en-US" sz="900" dirty="0"/>
           </a:p>
         </p:txBody>
       </p:sp>
@@ -9037,7 +9037,7 @@
           </a:solidFill>
           <a:ln w="8255">
             <a:solidFill>
-              <a:srgbClr val="33445B"/>
+              <a:srgbClr val="3D5169"/>
             </a:solidFill>
             <a:prstDash val="solid"/>
           </a:ln>
@@ -9070,9 +9070,9 @@
               <a:buNone/>
             </a:pPr>
             <a:r>
-              <a:rPr lang="en-US" sz="890" dirty="0">
-                <a:solidFill>
-                  <a:srgbClr val="D9E1EC"/>
+              <a:rPr lang="en-US" sz="900" dirty="0">
+                <a:solidFill>
+                  <a:srgbClr val="CAD5E3"/>
                 </a:solidFill>
                 <a:latin typeface="Noto Sans KR" pitchFamily="34" charset="0"/>
                 <a:ea typeface="Noto Sans KR" pitchFamily="34" charset="-122"/>
@@ -9080,16 +9080,16 @@
               </a:rPr>
               <a:t>2.7 GB/s · 3,900</a:t>
             </a:r>
-            <a:endParaRPr lang="en-US" sz="890" dirty="0"/>
+            <a:endParaRPr lang="en-US" sz="900" dirty="0"/>
           </a:p>
           <a:p>
             <a:pPr algn="ctr" indent="0" marL="0">
               <a:buNone/>
             </a:pPr>
             <a:r>
-              <a:rPr lang="en-US" sz="890" dirty="0">
-                <a:solidFill>
-                  <a:srgbClr val="D9E1EC"/>
+              <a:rPr lang="en-US" sz="900" dirty="0">
+                <a:solidFill>
+                  <a:srgbClr val="CAD5E3"/>
                 </a:solidFill>
                 <a:latin typeface="Noto Sans KR" pitchFamily="34" charset="0"/>
                 <a:ea typeface="Noto Sans KR" pitchFamily="34" charset="-122"/>
@@ -9097,7 +9097,7 @@
               </a:rPr>
               <a:t>3.8 TB/hr</a:t>
             </a:r>
-            <a:endParaRPr lang="en-US" sz="890" dirty="0"/>
+            <a:endParaRPr lang="en-US" sz="900" dirty="0"/>
           </a:p>
         </p:txBody>
       </p:sp>
@@ -9120,7 +9120,7 @@
           </a:solidFill>
           <a:ln w="8255">
             <a:solidFill>
-              <a:srgbClr val="33445B"/>
+              <a:srgbClr val="3D5169"/>
             </a:solidFill>
             <a:prstDash val="solid"/>
           </a:ln>
@@ -9153,7 +9153,7 @@
               <a:buNone/>
             </a:pPr>
             <a:r>
-              <a:rPr lang="en-US" sz="890" dirty="0">
+              <a:rPr lang="en-US" sz="900" dirty="0">
                 <a:solidFill>
                   <a:srgbClr val="2DD4BF"/>
                 </a:solidFill>
@@ -9163,14 +9163,14 @@
               </a:rPr>
               <a:t>5.4 GB/s · 7,800</a:t>
             </a:r>
-            <a:endParaRPr lang="en-US" sz="890" dirty="0"/>
+            <a:endParaRPr lang="en-US" sz="900" dirty="0"/>
           </a:p>
           <a:p>
             <a:pPr algn="ctr" indent="0" marL="0">
               <a:buNone/>
             </a:pPr>
             <a:r>
-              <a:rPr lang="en-US" sz="890" dirty="0">
+              <a:rPr lang="en-US" sz="900" dirty="0">
                 <a:solidFill>
                   <a:srgbClr val="2DD4BF"/>
                 </a:solidFill>
@@ -9180,7 +9180,7 @@
               </a:rPr>
               <a:t>7.5 TB/hr</a:t>
             </a:r>
-            <a:endParaRPr lang="en-US" sz="890" dirty="0"/>
+            <a:endParaRPr lang="en-US" sz="900" dirty="0"/>
           </a:p>
         </p:txBody>
       </p:sp>
@@ -9193,19 +9193,19 @@
         <p:spPr>
           <a:xfrm>
             <a:off x="512064" y="6108192"/>
-            <a:ext cx="11009376" cy="246888"/>
+            <a:ext cx="11009376" cy="310896"/>
           </a:xfrm>
           <a:prstGeom prst="roundRect">
             <a:avLst>
-              <a:gd name="adj" fmla="val 7407"/>
+              <a:gd name="adj" fmla="val 5882"/>
             </a:avLst>
           </a:prstGeom>
           <a:solidFill>
-            <a:srgbClr val="161E2A"/>
+            <a:srgbClr val="202A36"/>
           </a:solidFill>
           <a:ln w="12700">
             <a:solidFill>
-              <a:srgbClr val="161E2A"/>
+              <a:srgbClr val="4D6075"/>
             </a:solidFill>
             <a:prstDash val="solid"/>
           </a:ln>
@@ -9226,8 +9226,8 @@
         </p:nvSpPr>
         <p:spPr>
           <a:xfrm>
-            <a:off x="621792" y="6144768"/>
-            <a:ext cx="10789920" cy="164592"/>
+            <a:off x="621792" y="6140196"/>
+            <a:ext cx="10789920" cy="237744"/>
           </a:xfrm>
           <a:prstGeom prst="rect">
             <a:avLst/>
@@ -9245,17 +9245,34 @@
               <a:buNone/>
             </a:pPr>
             <a:r>
-              <a:rPr lang="en-US" sz="810" b="1" dirty="0">
-                <a:solidFill>
-                  <a:srgbClr val="D9E1EC"/>
-                </a:solidFill>
-                <a:latin typeface="Noto Sans KR" pitchFamily="34" charset="0"/>
-                <a:ea typeface="Noto Sans KR" pitchFamily="34" charset="-122"/>
-                <a:cs typeface="Noto Sans KR" pitchFamily="34" charset="-120"/>
-              </a:rPr>
-              <a:t>¹ ASM High Redundancy usable · X9M physical core와 ExaC@C usable core/ECPU는 직접 등가 비교 불가 · X11M에는 공식 Quarter Rack shape가 없음</a:t>
-            </a:r>
-            <a:endParaRPr lang="en-US" sz="810" dirty="0"/>
+              <a:rPr lang="en-US" sz="820" b="1" dirty="0">
+                <a:solidFill>
+                  <a:srgbClr val="F6B44B"/>
+                </a:solidFill>
+                <a:latin typeface="Noto Sans KR" pitchFamily="34" charset="0"/>
+                <a:ea typeface="Noto Sans KR" pitchFamily="34" charset="-122"/>
+                <a:cs typeface="Noto Sans KR" pitchFamily="34" charset="-120"/>
+              </a:rPr>
+              <a:t>¹ CPU 단위 주의: X9M physical core와 ExaC@C usable core/ECPU는 직접 비교 불가</a:t>
+            </a:r>
+            <a:endParaRPr lang="en-US" sz="820" dirty="0"/>
+          </a:p>
+          <a:p>
+            <a:pPr algn="l" indent="0" marL="0">
+              <a:buNone/>
+            </a:pPr>
+            <a:r>
+              <a:rPr lang="en-US" sz="820" b="1" dirty="0">
+                <a:solidFill>
+                  <a:srgbClr val="F6B44B"/>
+                </a:solidFill>
+                <a:latin typeface="Noto Sans KR" pitchFamily="34" charset="0"/>
+                <a:ea typeface="Noto Sans KR" pitchFamily="34" charset="-122"/>
+                <a:cs typeface="Noto Sans KR" pitchFamily="34" charset="-120"/>
+              </a:rPr>
+              <a:t>용량은 ASM High Redundancy usable · X11M에는 공식 Quarter Rack shape 없음(Elastic 2 DB + 3 Storage는 비공식 비교 기준)</a:t>
+            </a:r>
+            <a:endParaRPr lang="en-US" sz="820" dirty="0"/>
           </a:p>
         </p:txBody>
       </p:sp>
@@ -9358,7 +9375,7 @@
                 <a:ea typeface="Noto Sans KR" pitchFamily="34" charset="-122"/>
                 <a:cs typeface="Noto Sans KR" pitchFamily="34" charset="-120"/>
               </a:rPr>
-              <a:t>Sources: Oracle Exadata Database Machine X9M-2 DS (2023) pp.20–23 · ExaC@C X11M DS v1.5 Table 1</a:t>
+              <a:t>Sources: Oracle Exadata Database Machine X9M-2 DS (Copyright © 2021) pp.20–23 · ExaC@C X11M DS v1.5 Table 1</a:t>
             </a:r>
             <a:endParaRPr lang="en-US" sz="680" dirty="0"/>
           </a:p>
